--- a/complet/report/Presentation_Projet_Gestion_Formations.pptx
+++ b/complet/report/Presentation_Projet_Gestion_Formations.pptx
@@ -5,21 +5,21 @@
     <p:sldMasterId id="2147483648" r:id="rId1"/>
   </p:sldMasterIdLst>
   <p:sldIdLst>
-    <p:sldId id="256" r:id="rId7"/>
-    <p:sldId id="257" r:id="rId8"/>
-    <p:sldId id="258" r:id="rId9"/>
-    <p:sldId id="259" r:id="rId10"/>
-    <p:sldId id="260" r:id="rId11"/>
-    <p:sldId id="261" r:id="rId12"/>
-    <p:sldId id="262" r:id="rId13"/>
-    <p:sldId id="263" r:id="rId14"/>
-    <p:sldId id="264" r:id="rId15"/>
-    <p:sldId id="265" r:id="rId16"/>
-    <p:sldId id="266" r:id="rId17"/>
-    <p:sldId id="267" r:id="rId18"/>
-    <p:sldId id="268" r:id="rId19"/>
+    <p:sldId id="256" r:id="rId2"/>
+    <p:sldId id="257" r:id="rId3"/>
+    <p:sldId id="258" r:id="rId4"/>
+    <p:sldId id="259" r:id="rId5"/>
+    <p:sldId id="260" r:id="rId6"/>
+    <p:sldId id="261" r:id="rId7"/>
+    <p:sldId id="262" r:id="rId8"/>
+    <p:sldId id="263" r:id="rId9"/>
+    <p:sldId id="264" r:id="rId10"/>
+    <p:sldId id="265" r:id="rId11"/>
+    <p:sldId id="266" r:id="rId12"/>
+    <p:sldId id="267" r:id="rId13"/>
+    <p:sldId id="268" r:id="rId14"/>
   </p:sldIdLst>
-  <p:sldSz cx="12191695" cy="6858000" type="screen4x3"/>
+  <p:sldSz cx="12192000" cy="6858000"/>
   <p:notesSz cx="6858000" cy="9144000"/>
   <p:defaultTextStyle>
     <a:defPPr>
@@ -116,6 +116,22 @@
       </a:defRPr>
     </a:lvl9pPr>
   </p:defaultTextStyle>
+  <p:extLst>
+    <p:ext uri="{EFAFB233-063F-42B5-8137-9DF3F51BA10A}">
+      <p15:sldGuideLst xmlns:p15="http://schemas.microsoft.com/office/powerpoint/2012/main">
+        <p15:guide id="1" orient="horz" pos="2160">
+          <p15:clr>
+            <a:srgbClr val="A4A3A4"/>
+          </p15:clr>
+        </p15:guide>
+        <p15:guide id="2" pos="2880">
+          <p15:clr>
+            <a:srgbClr val="A4A3A4"/>
+          </p15:clr>
+        </p15:guide>
+      </p15:sldGuideLst>
+    </p:ext>
+  </p:extLst>
 </p:presentation>
 </file>
 
@@ -157,10 +173,9 @@
           <a:lstStyle/>
           <a:p>
             <a:r>
-              <a:rPr lang="en-US" smtClean="0"/>
+              <a:rPr lang="en-US"/>
               <a:t>Click to edit Master title style</a:t>
             </a:r>
-            <a:endParaRPr lang="en-US"/>
           </a:p>
         </p:txBody>
       </p:sp>
@@ -276,10 +291,9 @@
           </a:lstStyle>
           <a:p>
             <a:r>
-              <a:rPr lang="en-US" smtClean="0"/>
+              <a:rPr lang="en-US"/>
               <a:t>Click to edit Master subtitle style</a:t>
             </a:r>
-            <a:endParaRPr lang="en-US"/>
           </a:p>
         </p:txBody>
       </p:sp>
@@ -300,7 +314,7 @@
           <a:p>
             <a:fld id="{5BCAD085-E8A6-8845-BD4E-CB4CCA059FC4}" type="datetimeFigureOut">
               <a:rPr lang="en-US" smtClean="0"/>
-              <a:t>1/27/13</a:t>
+              <a:t>7/22/26</a:t>
             </a:fld>
             <a:endParaRPr lang="en-US"/>
           </a:p>
@@ -342,7 +356,7 @@
           <a:p>
             <a:fld id="{C1FF6DA9-008F-8B48-92A6-B652298478BF}" type="slidenum">
               <a:rPr lang="en-US" smtClean="0"/>
-              <a:t>‹#›</a:t>
+              <a:t>‹N°›</a:t>
             </a:fld>
             <a:endParaRPr lang="en-US"/>
           </a:p>
@@ -394,10 +408,9 @@
           <a:lstStyle/>
           <a:p>
             <a:r>
-              <a:rPr lang="en-US" smtClean="0"/>
+              <a:rPr lang="en-US"/>
               <a:t>Click to edit Master title style</a:t>
             </a:r>
-            <a:endParaRPr lang="en-US"/>
           </a:p>
         </p:txBody>
       </p:sp>
@@ -418,38 +431,37 @@
           <a:p>
             <a:pPr lvl="0"/>
             <a:r>
-              <a:rPr lang="en-US" smtClean="0"/>
+              <a:rPr lang="en-US"/>
               <a:t>Click to edit Master text styles</a:t>
             </a:r>
           </a:p>
           <a:p>
             <a:pPr lvl="1"/>
             <a:r>
-              <a:rPr lang="en-US" smtClean="0"/>
+              <a:rPr lang="en-US"/>
               <a:t>Second level</a:t>
             </a:r>
           </a:p>
           <a:p>
             <a:pPr lvl="2"/>
             <a:r>
-              <a:rPr lang="en-US" smtClean="0"/>
+              <a:rPr lang="en-US"/>
               <a:t>Third level</a:t>
             </a:r>
           </a:p>
           <a:p>
             <a:pPr lvl="3"/>
             <a:r>
-              <a:rPr lang="en-US" smtClean="0"/>
+              <a:rPr lang="en-US"/>
               <a:t>Fourth level</a:t>
             </a:r>
           </a:p>
           <a:p>
             <a:pPr lvl="4"/>
             <a:r>
-              <a:rPr lang="en-US" smtClean="0"/>
+              <a:rPr lang="en-US"/>
               <a:t>Fifth level</a:t>
             </a:r>
-            <a:endParaRPr lang="en-US"/>
           </a:p>
         </p:txBody>
       </p:sp>
@@ -470,7 +482,7 @@
           <a:p>
             <a:fld id="{5BCAD085-E8A6-8845-BD4E-CB4CCA059FC4}" type="datetimeFigureOut">
               <a:rPr lang="en-US" smtClean="0"/>
-              <a:t>1/27/13</a:t>
+              <a:t>7/22/26</a:t>
             </a:fld>
             <a:endParaRPr lang="en-US"/>
           </a:p>
@@ -512,7 +524,7 @@
           <a:p>
             <a:fld id="{C1FF6DA9-008F-8B48-92A6-B652298478BF}" type="slidenum">
               <a:rPr lang="en-US" smtClean="0"/>
-              <a:t>‹#›</a:t>
+              <a:t>‹N°›</a:t>
             </a:fld>
             <a:endParaRPr lang="en-US"/>
           </a:p>
@@ -569,10 +581,9 @@
           <a:lstStyle/>
           <a:p>
             <a:r>
-              <a:rPr lang="en-US" smtClean="0"/>
+              <a:rPr lang="en-US"/>
               <a:t>Click to edit Master title style</a:t>
             </a:r>
-            <a:endParaRPr lang="en-US"/>
           </a:p>
         </p:txBody>
       </p:sp>
@@ -598,38 +609,37 @@
           <a:p>
             <a:pPr lvl="0"/>
             <a:r>
-              <a:rPr lang="en-US" smtClean="0"/>
+              <a:rPr lang="en-US"/>
               <a:t>Click to edit Master text styles</a:t>
             </a:r>
           </a:p>
           <a:p>
             <a:pPr lvl="1"/>
             <a:r>
-              <a:rPr lang="en-US" smtClean="0"/>
+              <a:rPr lang="en-US"/>
               <a:t>Second level</a:t>
             </a:r>
           </a:p>
           <a:p>
             <a:pPr lvl="2"/>
             <a:r>
-              <a:rPr lang="en-US" smtClean="0"/>
+              <a:rPr lang="en-US"/>
               <a:t>Third level</a:t>
             </a:r>
           </a:p>
           <a:p>
             <a:pPr lvl="3"/>
             <a:r>
-              <a:rPr lang="en-US" smtClean="0"/>
+              <a:rPr lang="en-US"/>
               <a:t>Fourth level</a:t>
             </a:r>
           </a:p>
           <a:p>
             <a:pPr lvl="4"/>
             <a:r>
-              <a:rPr lang="en-US" smtClean="0"/>
+              <a:rPr lang="en-US"/>
               <a:t>Fifth level</a:t>
             </a:r>
-            <a:endParaRPr lang="en-US"/>
           </a:p>
         </p:txBody>
       </p:sp>
@@ -650,7 +660,7 @@
           <a:p>
             <a:fld id="{5BCAD085-E8A6-8845-BD4E-CB4CCA059FC4}" type="datetimeFigureOut">
               <a:rPr lang="en-US" smtClean="0"/>
-              <a:t>1/27/13</a:t>
+              <a:t>7/22/26</a:t>
             </a:fld>
             <a:endParaRPr lang="en-US"/>
           </a:p>
@@ -692,7 +702,7 @@
           <a:p>
             <a:fld id="{C1FF6DA9-008F-8B48-92A6-B652298478BF}" type="slidenum">
               <a:rPr lang="en-US" smtClean="0"/>
-              <a:t>‹#›</a:t>
+              <a:t>‹N°›</a:t>
             </a:fld>
             <a:endParaRPr lang="en-US"/>
           </a:p>
@@ -744,10 +754,9 @@
           <a:lstStyle/>
           <a:p>
             <a:r>
-              <a:rPr lang="en-US" smtClean="0"/>
+              <a:rPr lang="en-US"/>
               <a:t>Click to edit Master title style</a:t>
             </a:r>
-            <a:endParaRPr lang="en-US"/>
           </a:p>
         </p:txBody>
       </p:sp>
@@ -768,38 +777,37 @@
           <a:p>
             <a:pPr lvl="0"/>
             <a:r>
-              <a:rPr lang="en-US" smtClean="0"/>
+              <a:rPr lang="en-US"/>
               <a:t>Click to edit Master text styles</a:t>
             </a:r>
           </a:p>
           <a:p>
             <a:pPr lvl="1"/>
             <a:r>
-              <a:rPr lang="en-US" smtClean="0"/>
+              <a:rPr lang="en-US"/>
               <a:t>Second level</a:t>
             </a:r>
           </a:p>
           <a:p>
             <a:pPr lvl="2"/>
             <a:r>
-              <a:rPr lang="en-US" smtClean="0"/>
+              <a:rPr lang="en-US"/>
               <a:t>Third level</a:t>
             </a:r>
           </a:p>
           <a:p>
             <a:pPr lvl="3"/>
             <a:r>
-              <a:rPr lang="en-US" smtClean="0"/>
+              <a:rPr lang="en-US"/>
               <a:t>Fourth level</a:t>
             </a:r>
           </a:p>
           <a:p>
             <a:pPr lvl="4"/>
             <a:r>
-              <a:rPr lang="en-US" smtClean="0"/>
+              <a:rPr lang="en-US"/>
               <a:t>Fifth level</a:t>
             </a:r>
-            <a:endParaRPr lang="en-US"/>
           </a:p>
         </p:txBody>
       </p:sp>
@@ -820,7 +828,7 @@
           <a:p>
             <a:fld id="{5BCAD085-E8A6-8845-BD4E-CB4CCA059FC4}" type="datetimeFigureOut">
               <a:rPr lang="en-US" smtClean="0"/>
-              <a:t>1/27/13</a:t>
+              <a:t>7/22/26</a:t>
             </a:fld>
             <a:endParaRPr lang="en-US"/>
           </a:p>
@@ -862,7 +870,7 @@
           <a:p>
             <a:fld id="{C1FF6DA9-008F-8B48-92A6-B652298478BF}" type="slidenum">
               <a:rPr lang="en-US" smtClean="0"/>
-              <a:t>‹#›</a:t>
+              <a:t>‹N°›</a:t>
             </a:fld>
             <a:endParaRPr lang="en-US"/>
           </a:p>
@@ -923,10 +931,9 @@
           </a:lstStyle>
           <a:p>
             <a:r>
-              <a:rPr lang="en-US" smtClean="0"/>
+              <a:rPr lang="en-US"/>
               <a:t>Click to edit Master title style</a:t>
             </a:r>
-            <a:endParaRPr lang="en-US"/>
           </a:p>
         </p:txBody>
       </p:sp>
@@ -1043,7 +1050,7 @@
           <a:p>
             <a:pPr lvl="0"/>
             <a:r>
-              <a:rPr lang="en-US" smtClean="0"/>
+              <a:rPr lang="en-US"/>
               <a:t>Click to edit Master text styles</a:t>
             </a:r>
           </a:p>
@@ -1066,7 +1073,7 @@
           <a:p>
             <a:fld id="{5BCAD085-E8A6-8845-BD4E-CB4CCA059FC4}" type="datetimeFigureOut">
               <a:rPr lang="en-US" smtClean="0"/>
-              <a:t>1/27/13</a:t>
+              <a:t>7/22/26</a:t>
             </a:fld>
             <a:endParaRPr lang="en-US"/>
           </a:p>
@@ -1108,7 +1115,7 @@
           <a:p>
             <a:fld id="{C1FF6DA9-008F-8B48-92A6-B652298478BF}" type="slidenum">
               <a:rPr lang="en-US" smtClean="0"/>
-              <a:t>‹#›</a:t>
+              <a:t>‹N°›</a:t>
             </a:fld>
             <a:endParaRPr lang="en-US"/>
           </a:p>
@@ -1160,10 +1167,9 @@
           <a:lstStyle/>
           <a:p>
             <a:r>
-              <a:rPr lang="en-US" smtClean="0"/>
+              <a:rPr lang="en-US"/>
               <a:t>Click to edit Master title style</a:t>
             </a:r>
-            <a:endParaRPr lang="en-US"/>
           </a:p>
         </p:txBody>
       </p:sp>
@@ -1217,38 +1223,37 @@
           <a:p>
             <a:pPr lvl="0"/>
             <a:r>
-              <a:rPr lang="en-US" smtClean="0"/>
+              <a:rPr lang="en-US"/>
               <a:t>Click to edit Master text styles</a:t>
             </a:r>
           </a:p>
           <a:p>
             <a:pPr lvl="1"/>
             <a:r>
-              <a:rPr lang="en-US" smtClean="0"/>
+              <a:rPr lang="en-US"/>
               <a:t>Second level</a:t>
             </a:r>
           </a:p>
           <a:p>
             <a:pPr lvl="2"/>
             <a:r>
-              <a:rPr lang="en-US" smtClean="0"/>
+              <a:rPr lang="en-US"/>
               <a:t>Third level</a:t>
             </a:r>
           </a:p>
           <a:p>
             <a:pPr lvl="3"/>
             <a:r>
-              <a:rPr lang="en-US" smtClean="0"/>
+              <a:rPr lang="en-US"/>
               <a:t>Fourth level</a:t>
             </a:r>
           </a:p>
           <a:p>
             <a:pPr lvl="4"/>
             <a:r>
-              <a:rPr lang="en-US" smtClean="0"/>
+              <a:rPr lang="en-US"/>
               <a:t>Fifth level</a:t>
             </a:r>
-            <a:endParaRPr lang="en-US"/>
           </a:p>
         </p:txBody>
       </p:sp>
@@ -1302,38 +1307,37 @@
           <a:p>
             <a:pPr lvl="0"/>
             <a:r>
-              <a:rPr lang="en-US" smtClean="0"/>
+              <a:rPr lang="en-US"/>
               <a:t>Click to edit Master text styles</a:t>
             </a:r>
           </a:p>
           <a:p>
             <a:pPr lvl="1"/>
             <a:r>
-              <a:rPr lang="en-US" smtClean="0"/>
+              <a:rPr lang="en-US"/>
               <a:t>Second level</a:t>
             </a:r>
           </a:p>
           <a:p>
             <a:pPr lvl="2"/>
             <a:r>
-              <a:rPr lang="en-US" smtClean="0"/>
+              <a:rPr lang="en-US"/>
               <a:t>Third level</a:t>
             </a:r>
           </a:p>
           <a:p>
             <a:pPr lvl="3"/>
             <a:r>
-              <a:rPr lang="en-US" smtClean="0"/>
+              <a:rPr lang="en-US"/>
               <a:t>Fourth level</a:t>
             </a:r>
           </a:p>
           <a:p>
             <a:pPr lvl="4"/>
             <a:r>
-              <a:rPr lang="en-US" smtClean="0"/>
+              <a:rPr lang="en-US"/>
               <a:t>Fifth level</a:t>
             </a:r>
-            <a:endParaRPr lang="en-US"/>
           </a:p>
         </p:txBody>
       </p:sp>
@@ -1354,7 +1358,7 @@
           <a:p>
             <a:fld id="{5BCAD085-E8A6-8845-BD4E-CB4CCA059FC4}" type="datetimeFigureOut">
               <a:rPr lang="en-US" smtClean="0"/>
-              <a:t>1/27/13</a:t>
+              <a:t>7/22/26</a:t>
             </a:fld>
             <a:endParaRPr lang="en-US"/>
           </a:p>
@@ -1396,7 +1400,7 @@
           <a:p>
             <a:fld id="{C1FF6DA9-008F-8B48-92A6-B652298478BF}" type="slidenum">
               <a:rPr lang="en-US" smtClean="0"/>
-              <a:t>‹#›</a:t>
+              <a:t>‹N°›</a:t>
             </a:fld>
             <a:endParaRPr lang="en-US"/>
           </a:p>
@@ -1452,10 +1456,9 @@
           </a:lstStyle>
           <a:p>
             <a:r>
-              <a:rPr lang="en-US" smtClean="0"/>
+              <a:rPr lang="en-US"/>
               <a:t>Click to edit Master title style</a:t>
             </a:r>
-            <a:endParaRPr lang="en-US"/>
           </a:p>
         </p:txBody>
       </p:sp>
@@ -1518,7 +1521,7 @@
           <a:p>
             <a:pPr lvl="0"/>
             <a:r>
-              <a:rPr lang="en-US" smtClean="0"/>
+              <a:rPr lang="en-US"/>
               <a:t>Click to edit Master text styles</a:t>
             </a:r>
           </a:p>
@@ -1574,38 +1577,37 @@
           <a:p>
             <a:pPr lvl="0"/>
             <a:r>
-              <a:rPr lang="en-US" smtClean="0"/>
+              <a:rPr lang="en-US"/>
               <a:t>Click to edit Master text styles</a:t>
             </a:r>
           </a:p>
           <a:p>
             <a:pPr lvl="1"/>
             <a:r>
-              <a:rPr lang="en-US" smtClean="0"/>
+              <a:rPr lang="en-US"/>
               <a:t>Second level</a:t>
             </a:r>
           </a:p>
           <a:p>
             <a:pPr lvl="2"/>
             <a:r>
-              <a:rPr lang="en-US" smtClean="0"/>
+              <a:rPr lang="en-US"/>
               <a:t>Third level</a:t>
             </a:r>
           </a:p>
           <a:p>
             <a:pPr lvl="3"/>
             <a:r>
-              <a:rPr lang="en-US" smtClean="0"/>
+              <a:rPr lang="en-US"/>
               <a:t>Fourth level</a:t>
             </a:r>
           </a:p>
           <a:p>
             <a:pPr lvl="4"/>
             <a:r>
-              <a:rPr lang="en-US" smtClean="0"/>
+              <a:rPr lang="en-US"/>
               <a:t>Fifth level</a:t>
             </a:r>
-            <a:endParaRPr lang="en-US"/>
           </a:p>
         </p:txBody>
       </p:sp>
@@ -1668,7 +1670,7 @@
           <a:p>
             <a:pPr lvl="0"/>
             <a:r>
-              <a:rPr lang="en-US" smtClean="0"/>
+              <a:rPr lang="en-US"/>
               <a:t>Click to edit Master text styles</a:t>
             </a:r>
           </a:p>
@@ -1724,38 +1726,37 @@
           <a:p>
             <a:pPr lvl="0"/>
             <a:r>
-              <a:rPr lang="en-US" smtClean="0"/>
+              <a:rPr lang="en-US"/>
               <a:t>Click to edit Master text styles</a:t>
             </a:r>
           </a:p>
           <a:p>
             <a:pPr lvl="1"/>
             <a:r>
-              <a:rPr lang="en-US" smtClean="0"/>
+              <a:rPr lang="en-US"/>
               <a:t>Second level</a:t>
             </a:r>
           </a:p>
           <a:p>
             <a:pPr lvl="2"/>
             <a:r>
-              <a:rPr lang="en-US" smtClean="0"/>
+              <a:rPr lang="en-US"/>
               <a:t>Third level</a:t>
             </a:r>
           </a:p>
           <a:p>
             <a:pPr lvl="3"/>
             <a:r>
-              <a:rPr lang="en-US" smtClean="0"/>
+              <a:rPr lang="en-US"/>
               <a:t>Fourth level</a:t>
             </a:r>
           </a:p>
           <a:p>
             <a:pPr lvl="4"/>
             <a:r>
-              <a:rPr lang="en-US" smtClean="0"/>
+              <a:rPr lang="en-US"/>
               <a:t>Fifth level</a:t>
             </a:r>
-            <a:endParaRPr lang="en-US"/>
           </a:p>
         </p:txBody>
       </p:sp>
@@ -1776,7 +1777,7 @@
           <a:p>
             <a:fld id="{5BCAD085-E8A6-8845-BD4E-CB4CCA059FC4}" type="datetimeFigureOut">
               <a:rPr lang="en-US" smtClean="0"/>
-              <a:t>1/27/13</a:t>
+              <a:t>7/22/26</a:t>
             </a:fld>
             <a:endParaRPr lang="en-US"/>
           </a:p>
@@ -1818,7 +1819,7 @@
           <a:p>
             <a:fld id="{C1FF6DA9-008F-8B48-92A6-B652298478BF}" type="slidenum">
               <a:rPr lang="en-US" smtClean="0"/>
-              <a:t>‹#›</a:t>
+              <a:t>‹N°›</a:t>
             </a:fld>
             <a:endParaRPr lang="en-US"/>
           </a:p>
@@ -1870,10 +1871,9 @@
           <a:lstStyle/>
           <a:p>
             <a:r>
-              <a:rPr lang="en-US" smtClean="0"/>
+              <a:rPr lang="en-US"/>
               <a:t>Click to edit Master title style</a:t>
             </a:r>
-            <a:endParaRPr lang="en-US"/>
           </a:p>
         </p:txBody>
       </p:sp>
@@ -1894,7 +1894,7 @@
           <a:p>
             <a:fld id="{5BCAD085-E8A6-8845-BD4E-CB4CCA059FC4}" type="datetimeFigureOut">
               <a:rPr lang="en-US" smtClean="0"/>
-              <a:t>1/27/13</a:t>
+              <a:t>7/22/26</a:t>
             </a:fld>
             <a:endParaRPr lang="en-US"/>
           </a:p>
@@ -1936,7 +1936,7 @@
           <a:p>
             <a:fld id="{C1FF6DA9-008F-8B48-92A6-B652298478BF}" type="slidenum">
               <a:rPr lang="en-US" smtClean="0"/>
-              <a:t>‹#›</a:t>
+              <a:t>‹N°›</a:t>
             </a:fld>
             <a:endParaRPr lang="en-US"/>
           </a:p>
@@ -1989,7 +1989,7 @@
           <a:p>
             <a:fld id="{5BCAD085-E8A6-8845-BD4E-CB4CCA059FC4}" type="datetimeFigureOut">
               <a:rPr lang="en-US" smtClean="0"/>
-              <a:t>1/27/13</a:t>
+              <a:t>7/22/26</a:t>
             </a:fld>
             <a:endParaRPr lang="en-US"/>
           </a:p>
@@ -2031,7 +2031,7 @@
           <a:p>
             <a:fld id="{C1FF6DA9-008F-8B48-92A6-B652298478BF}" type="slidenum">
               <a:rPr lang="en-US" smtClean="0"/>
-              <a:t>‹#›</a:t>
+              <a:t>‹N°›</a:t>
             </a:fld>
             <a:endParaRPr lang="en-US"/>
           </a:p>
@@ -2092,10 +2092,9 @@
           </a:lstStyle>
           <a:p>
             <a:r>
-              <a:rPr lang="en-US" smtClean="0"/>
+              <a:rPr lang="en-US"/>
               <a:t>Click to edit Master title style</a:t>
             </a:r>
-            <a:endParaRPr lang="en-US"/>
           </a:p>
         </p:txBody>
       </p:sp>
@@ -2149,38 +2148,37 @@
           <a:p>
             <a:pPr lvl="0"/>
             <a:r>
-              <a:rPr lang="en-US" smtClean="0"/>
+              <a:rPr lang="en-US"/>
               <a:t>Click to edit Master text styles</a:t>
             </a:r>
           </a:p>
           <a:p>
             <a:pPr lvl="1"/>
             <a:r>
-              <a:rPr lang="en-US" smtClean="0"/>
+              <a:rPr lang="en-US"/>
               <a:t>Second level</a:t>
             </a:r>
           </a:p>
           <a:p>
             <a:pPr lvl="2"/>
             <a:r>
-              <a:rPr lang="en-US" smtClean="0"/>
+              <a:rPr lang="en-US"/>
               <a:t>Third level</a:t>
             </a:r>
           </a:p>
           <a:p>
             <a:pPr lvl="3"/>
             <a:r>
-              <a:rPr lang="en-US" smtClean="0"/>
+              <a:rPr lang="en-US"/>
               <a:t>Fourth level</a:t>
             </a:r>
           </a:p>
           <a:p>
             <a:pPr lvl="4"/>
             <a:r>
-              <a:rPr lang="en-US" smtClean="0"/>
+              <a:rPr lang="en-US"/>
               <a:t>Fifth level</a:t>
             </a:r>
-            <a:endParaRPr lang="en-US"/>
           </a:p>
         </p:txBody>
       </p:sp>
@@ -2243,7 +2241,7 @@
           <a:p>
             <a:pPr lvl="0"/>
             <a:r>
-              <a:rPr lang="en-US" smtClean="0"/>
+              <a:rPr lang="en-US"/>
               <a:t>Click to edit Master text styles</a:t>
             </a:r>
           </a:p>
@@ -2266,7 +2264,7 @@
           <a:p>
             <a:fld id="{5BCAD085-E8A6-8845-BD4E-CB4CCA059FC4}" type="datetimeFigureOut">
               <a:rPr lang="en-US" smtClean="0"/>
-              <a:t>1/27/13</a:t>
+              <a:t>7/22/26</a:t>
             </a:fld>
             <a:endParaRPr lang="en-US"/>
           </a:p>
@@ -2308,7 +2306,7 @@
           <a:p>
             <a:fld id="{C1FF6DA9-008F-8B48-92A6-B652298478BF}" type="slidenum">
               <a:rPr lang="en-US" smtClean="0"/>
-              <a:t>‹#›</a:t>
+              <a:t>‹N°›</a:t>
             </a:fld>
             <a:endParaRPr lang="en-US"/>
           </a:p>
@@ -2369,10 +2367,9 @@
           </a:lstStyle>
           <a:p>
             <a:r>
-              <a:rPr lang="en-US" smtClean="0"/>
+              <a:rPr lang="en-US"/>
               <a:t>Click to edit Master title style</a:t>
             </a:r>
-            <a:endParaRPr lang="en-US"/>
           </a:p>
         </p:txBody>
       </p:sp>
@@ -2496,7 +2493,7 @@
           <a:p>
             <a:pPr lvl="0"/>
             <a:r>
-              <a:rPr lang="en-US" smtClean="0"/>
+              <a:rPr lang="en-US"/>
               <a:t>Click to edit Master text styles</a:t>
             </a:r>
           </a:p>
@@ -2519,7 +2516,7 @@
           <a:p>
             <a:fld id="{5BCAD085-E8A6-8845-BD4E-CB4CCA059FC4}" type="datetimeFigureOut">
               <a:rPr lang="en-US" smtClean="0"/>
-              <a:t>1/27/13</a:t>
+              <a:t>7/22/26</a:t>
             </a:fld>
             <a:endParaRPr lang="en-US"/>
           </a:p>
@@ -2561,7 +2558,7 @@
           <a:p>
             <a:fld id="{C1FF6DA9-008F-8B48-92A6-B652298478BF}" type="slidenum">
               <a:rPr lang="en-US" smtClean="0"/>
-              <a:t>‹#›</a:t>
+              <a:t>‹N°›</a:t>
             </a:fld>
             <a:endParaRPr lang="en-US"/>
           </a:p>
@@ -2628,10 +2625,9 @@
           <a:lstStyle/>
           <a:p>
             <a:r>
-              <a:rPr lang="en-US" smtClean="0"/>
+              <a:rPr lang="en-US"/>
               <a:t>Click to edit Master title style</a:t>
             </a:r>
-            <a:endParaRPr lang="en-US"/>
           </a:p>
         </p:txBody>
       </p:sp>
@@ -2662,38 +2658,37 @@
           <a:p>
             <a:pPr lvl="0"/>
             <a:r>
-              <a:rPr lang="en-US" smtClean="0"/>
+              <a:rPr lang="en-US"/>
               <a:t>Click to edit Master text styles</a:t>
             </a:r>
           </a:p>
           <a:p>
             <a:pPr lvl="1"/>
             <a:r>
-              <a:rPr lang="en-US" smtClean="0"/>
+              <a:rPr lang="en-US"/>
               <a:t>Second level</a:t>
             </a:r>
           </a:p>
           <a:p>
             <a:pPr lvl="2"/>
             <a:r>
-              <a:rPr lang="en-US" smtClean="0"/>
+              <a:rPr lang="en-US"/>
               <a:t>Third level</a:t>
             </a:r>
           </a:p>
           <a:p>
             <a:pPr lvl="3"/>
             <a:r>
-              <a:rPr lang="en-US" smtClean="0"/>
+              <a:rPr lang="en-US"/>
               <a:t>Fourth level</a:t>
             </a:r>
           </a:p>
           <a:p>
             <a:pPr lvl="4"/>
             <a:r>
-              <a:rPr lang="en-US" smtClean="0"/>
+              <a:rPr lang="en-US"/>
               <a:t>Fifth level</a:t>
             </a:r>
-            <a:endParaRPr lang="en-US"/>
           </a:p>
         </p:txBody>
       </p:sp>
@@ -2732,7 +2727,7 @@
           <a:p>
             <a:fld id="{5BCAD085-E8A6-8845-BD4E-CB4CCA059FC4}" type="datetimeFigureOut">
               <a:rPr lang="en-US" smtClean="0"/>
-              <a:t>1/27/13</a:t>
+              <a:t>7/22/26</a:t>
             </a:fld>
             <a:endParaRPr lang="en-US"/>
           </a:p>
@@ -2810,7 +2805,7 @@
           <a:p>
             <a:fld id="{C1FF6DA9-008F-8B48-92A6-B652298478BF}" type="slidenum">
               <a:rPr lang="en-US" smtClean="0"/>
-              <a:t>‹#›</a:t>
+              <a:t>‹N°›</a:t>
             </a:fld>
             <a:endParaRPr lang="en-US"/>
           </a:p>
@@ -3091,7 +3086,7 @@
 </file>
 
 <file path=ppt/slides/slide1.xml><?xml version="1.0" encoding="utf-8"?>
-<p:sld xmlns:a="http://schemas.openxmlformats.org/drawingml/2006/main" xmlns:p="http://schemas.openxmlformats.org/presentationml/2006/main" xmlns:r="http://schemas.openxmlformats.org/officeDocument/2006/relationships">
+<p:sld xmlns:a="http://schemas.openxmlformats.org/drawingml/2006/main" xmlns:r="http://schemas.openxmlformats.org/officeDocument/2006/relationships" xmlns:p="http://schemas.openxmlformats.org/presentationml/2006/main">
   <p:cSld>
     <p:bg>
       <p:bgPr>
@@ -3107,7 +3102,14 @@
         <p:cNvGrpSpPr/>
         <p:nvPr/>
       </p:nvGrpSpPr>
-      <p:grpSpPr/>
+      <p:grpSpPr>
+        <a:xfrm>
+          <a:off x="0" y="0"/>
+          <a:ext cx="0" cy="0"/>
+          <a:chOff x="0" y="0"/>
+          <a:chExt cx="0" cy="0"/>
+        </a:xfrm>
+      </p:grpSpPr>
       <p:sp>
         <p:nvSpPr>
           <p:cNvPr id="2" name="Rectangle 1"/>
@@ -3149,6 +3151,7 @@
           <a:lstStyle/>
           <a:p>
             <a:pPr algn="ctr"/>
+            <a:endParaRPr/>
           </a:p>
         </p:txBody>
       </p:sp>
@@ -3193,6 +3196,7 @@
           <a:lstStyle/>
           <a:p>
             <a:pPr algn="ctr"/>
+            <a:endParaRPr/>
           </a:p>
         </p:txBody>
       </p:sp>
@@ -3342,6 +3346,7 @@
           <a:lstStyle/>
           <a:p>
             <a:pPr algn="ctr"/>
+            <a:endParaRPr/>
           </a:p>
         </p:txBody>
       </p:sp>
@@ -3354,7 +3359,7 @@
         <p:spPr>
           <a:xfrm>
             <a:off x="914400" y="4480560"/>
-            <a:ext cx="10332720" cy="731520"/>
+            <a:ext cx="10332720" cy="700576"/>
           </a:xfrm>
           <a:prstGeom prst="rect">
             <a:avLst/>
@@ -3373,14 +3378,47 @@
               </a:lnSpc>
             </a:pPr>
             <a:r>
-              <a:rPr sz="1600" b="0" i="0">
+              <a:rPr sz="1600" b="0" i="0" dirty="0" err="1">
                 <a:solidFill>
                   <a:srgbClr val="000000"/>
                 </a:solidFill>
                 <a:latin typeface="Times New Roman"/>
               </a:rPr>
-              <a:t>Développeur 1 : [Nom Prénom]</a:t>
-            </a:r>
+              <a:t>Développeur</a:t>
+            </a:r>
+            <a:r>
+              <a:rPr sz="1600" b="0" i="0" dirty="0">
+                <a:solidFill>
+                  <a:srgbClr val="000000"/>
+                </a:solidFill>
+                <a:latin typeface="Times New Roman"/>
+              </a:rPr>
+              <a:t> 1 : </a:t>
+            </a:r>
+            <a:r>
+              <a:rPr lang="fr-FR" sz="1600" b="0" i="0" dirty="0" err="1">
+                <a:solidFill>
+                  <a:srgbClr val="000000"/>
+                </a:solidFill>
+                <a:latin typeface="Times New Roman"/>
+              </a:rPr>
+              <a:t>Adodoh</a:t>
+            </a:r>
+            <a:r>
+              <a:rPr lang="fr-FR" sz="1600" b="0" i="0" dirty="0">
+                <a:solidFill>
+                  <a:srgbClr val="000000"/>
+                </a:solidFill>
+                <a:latin typeface="Times New Roman"/>
+              </a:rPr>
+              <a:t> Abraham</a:t>
+            </a:r>
+            <a:endParaRPr sz="1600" b="0" i="0" dirty="0">
+              <a:solidFill>
+                <a:srgbClr val="000000"/>
+              </a:solidFill>
+              <a:latin typeface="Times New Roman"/>
+            </a:endParaRPr>
           </a:p>
           <a:p>
             <a:pPr algn="ctr">
@@ -3389,13 +3427,40 @@
               </a:lnSpc>
             </a:pPr>
             <a:r>
-              <a:rPr sz="1600" b="0" i="0">
+              <a:rPr sz="1600" b="0" i="0" dirty="0" err="1">
                 <a:solidFill>
                   <a:srgbClr val="000000"/>
                 </a:solidFill>
                 <a:latin typeface="Times New Roman"/>
               </a:rPr>
-              <a:t>Développeur 2 : [Nom Prénom]</a:t>
+              <a:t>Développeur</a:t>
+            </a:r>
+            <a:r>
+              <a:rPr sz="1600" b="0" i="0" dirty="0">
+                <a:solidFill>
+                  <a:srgbClr val="000000"/>
+                </a:solidFill>
+                <a:latin typeface="Times New Roman"/>
+              </a:rPr>
+              <a:t> 2 : [Nom </a:t>
+            </a:r>
+            <a:r>
+              <a:rPr sz="1600" b="0" i="0" dirty="0" err="1">
+                <a:solidFill>
+                  <a:srgbClr val="000000"/>
+                </a:solidFill>
+                <a:latin typeface="Times New Roman"/>
+              </a:rPr>
+              <a:t>Prénom</a:t>
+            </a:r>
+            <a:r>
+              <a:rPr sz="1600" b="0" i="0" dirty="0">
+                <a:solidFill>
+                  <a:srgbClr val="000000"/>
+                </a:solidFill>
+                <a:latin typeface="Times New Roman"/>
+              </a:rPr>
+              <a:t>]</a:t>
             </a:r>
           </a:p>
         </p:txBody>
@@ -3444,7 +3509,7 @@
 </file>
 
 <file path=ppt/slides/slide10.xml><?xml version="1.0" encoding="utf-8"?>
-<p:sld xmlns:a="http://schemas.openxmlformats.org/drawingml/2006/main" xmlns:p="http://schemas.openxmlformats.org/presentationml/2006/main" xmlns:r="http://schemas.openxmlformats.org/officeDocument/2006/relationships">
+<p:sld xmlns:a="http://schemas.openxmlformats.org/drawingml/2006/main" xmlns:r="http://schemas.openxmlformats.org/officeDocument/2006/relationships" xmlns:p="http://schemas.openxmlformats.org/presentationml/2006/main">
   <p:cSld>
     <p:bg>
       <p:bgPr>
@@ -3460,7 +3525,14 @@
         <p:cNvGrpSpPr/>
         <p:nvPr/>
       </p:nvGrpSpPr>
-      <p:grpSpPr/>
+      <p:grpSpPr>
+        <a:xfrm>
+          <a:off x="0" y="0"/>
+          <a:ext cx="0" cy="0"/>
+          <a:chOff x="0" y="0"/>
+          <a:chExt cx="0" cy="0"/>
+        </a:xfrm>
+      </p:grpSpPr>
       <p:sp>
         <p:nvSpPr>
           <p:cNvPr id="2" name="TextBox 1"/>
@@ -3572,6 +3644,7 @@
           <a:lstStyle/>
           <a:p>
             <a:pPr algn="ctr"/>
+            <a:endParaRPr/>
           </a:p>
         </p:txBody>
       </p:sp>
@@ -3722,7 +3795,7 @@
 </file>
 
 <file path=ppt/slides/slide11.xml><?xml version="1.0" encoding="utf-8"?>
-<p:sld xmlns:a="http://schemas.openxmlformats.org/drawingml/2006/main" xmlns:p="http://schemas.openxmlformats.org/presentationml/2006/main" xmlns:r="http://schemas.openxmlformats.org/officeDocument/2006/relationships">
+<p:sld xmlns:a="http://schemas.openxmlformats.org/drawingml/2006/main" xmlns:r="http://schemas.openxmlformats.org/officeDocument/2006/relationships" xmlns:p="http://schemas.openxmlformats.org/presentationml/2006/main">
   <p:cSld>
     <p:bg>
       <p:bgPr>
@@ -3738,7 +3811,14 @@
         <p:cNvGrpSpPr/>
         <p:nvPr/>
       </p:nvGrpSpPr>
-      <p:grpSpPr/>
+      <p:grpSpPr>
+        <a:xfrm>
+          <a:off x="0" y="0"/>
+          <a:ext cx="0" cy="0"/>
+          <a:chOff x="0" y="0"/>
+          <a:chExt cx="0" cy="0"/>
+        </a:xfrm>
+      </p:grpSpPr>
       <p:sp>
         <p:nvSpPr>
           <p:cNvPr id="2" name="TextBox 1"/>
@@ -3850,6 +3930,7 @@
           <a:lstStyle/>
           <a:p>
             <a:pPr algn="ctr"/>
+            <a:endParaRPr/>
           </a:p>
         </p:txBody>
       </p:sp>
@@ -3929,6 +4010,7 @@
           <a:lstStyle/>
           <a:p>
             <a:pPr algn="ctr"/>
+            <a:endParaRPr/>
           </a:p>
         </p:txBody>
       </p:sp>
@@ -4000,7 +4082,7 @@
 </file>
 
 <file path=ppt/slides/slide12.xml><?xml version="1.0" encoding="utf-8"?>
-<p:sld xmlns:a="http://schemas.openxmlformats.org/drawingml/2006/main" xmlns:p="http://schemas.openxmlformats.org/presentationml/2006/main" xmlns:r="http://schemas.openxmlformats.org/officeDocument/2006/relationships">
+<p:sld xmlns:a="http://schemas.openxmlformats.org/drawingml/2006/main" xmlns:r="http://schemas.openxmlformats.org/officeDocument/2006/relationships" xmlns:p="http://schemas.openxmlformats.org/presentationml/2006/main">
   <p:cSld>
     <p:bg>
       <p:bgPr>
@@ -4016,7 +4098,14 @@
         <p:cNvGrpSpPr/>
         <p:nvPr/>
       </p:nvGrpSpPr>
-      <p:grpSpPr/>
+      <p:grpSpPr>
+        <a:xfrm>
+          <a:off x="0" y="0"/>
+          <a:ext cx="0" cy="0"/>
+          <a:chOff x="0" y="0"/>
+          <a:chExt cx="0" cy="0"/>
+        </a:xfrm>
+      </p:grpSpPr>
       <p:sp>
         <p:nvSpPr>
           <p:cNvPr id="2" name="TextBox 1"/>
@@ -4128,6 +4217,7 @@
           <a:lstStyle/>
           <a:p>
             <a:pPr algn="ctr"/>
+            <a:endParaRPr/>
           </a:p>
         </p:txBody>
       </p:sp>
@@ -4185,13 +4275,25 @@
                 <a:tableStyleId>{5C22544A-7EE6-4342-B048-85BDC9FD1C3A}</a:tableStyleId>
               </a:tblPr>
               <a:tblGrid>
-                <a:gridCol w="2560320"/>
-                <a:gridCol w="7772400"/>
+                <a:gridCol w="2560320">
+                  <a:extLst>
+                    <a:ext uri="{9D8B030D-6E8A-4147-A177-3AD203B41FA5}">
+                      <a16:colId xmlns:a16="http://schemas.microsoft.com/office/drawing/2014/main" val="20000"/>
+                    </a:ext>
+                  </a:extLst>
+                </a:gridCol>
+                <a:gridCol w="7772400">
+                  <a:extLst>
+                    <a:ext uri="{9D8B030D-6E8A-4147-A177-3AD203B41FA5}">
+                      <a16:colId xmlns:a16="http://schemas.microsoft.com/office/drawing/2014/main" val="20001"/>
+                    </a:ext>
+                  </a:extLst>
+                </a:gridCol>
               </a:tblGrid>
               <a:tr h="1280160">
                 <a:tc>
                   <a:txBody>
-                    <a:bodyPr wrap="square"/>
+                    <a:bodyPr/>
                     <a:lstStyle/>
                     <a:p>
                       <a:r>
@@ -4213,7 +4315,7 @@
                 </a:tc>
                 <a:tc>
                   <a:txBody>
-                    <a:bodyPr wrap="square"/>
+                    <a:bodyPr/>
                     <a:lstStyle/>
                     <a:p>
                       <a:r>
@@ -4233,11 +4335,16 @@
                     </a:solidFill>
                   </a:tcPr>
                 </a:tc>
+                <a:extLst>
+                  <a:ext uri="{0D108BD9-81ED-4DB2-BD59-A6C34878D82A}">
+                    <a16:rowId xmlns:a16="http://schemas.microsoft.com/office/drawing/2014/main" val="10000"/>
+                  </a:ext>
+                </a:extLst>
               </a:tr>
               <a:tr h="1280160">
                 <a:tc>
                   <a:txBody>
-                    <a:bodyPr wrap="square"/>
+                    <a:bodyPr/>
                     <a:lstStyle/>
                     <a:p>
                       <a:r>
@@ -4259,7 +4366,7 @@
                 </a:tc>
                 <a:tc>
                   <a:txBody>
-                    <a:bodyPr wrap="square"/>
+                    <a:bodyPr/>
                     <a:lstStyle/>
                     <a:p>
                       <a:r>
@@ -4279,6 +4386,11 @@
                     </a:solidFill>
                   </a:tcPr>
                 </a:tc>
+                <a:extLst>
+                  <a:ext uri="{0D108BD9-81ED-4DB2-BD59-A6C34878D82A}">
+                    <a16:rowId xmlns:a16="http://schemas.microsoft.com/office/drawing/2014/main" val="10001"/>
+                  </a:ext>
+                </a:extLst>
               </a:tr>
             </a:tbl>
           </a:graphicData>
@@ -4293,7 +4405,7 @@
 </file>
 
 <file path=ppt/slides/slide13.xml><?xml version="1.0" encoding="utf-8"?>
-<p:sld xmlns:a="http://schemas.openxmlformats.org/drawingml/2006/main" xmlns:p="http://schemas.openxmlformats.org/presentationml/2006/main" xmlns:r="http://schemas.openxmlformats.org/officeDocument/2006/relationships">
+<p:sld xmlns:a="http://schemas.openxmlformats.org/drawingml/2006/main" xmlns:r="http://schemas.openxmlformats.org/officeDocument/2006/relationships" xmlns:p="http://schemas.openxmlformats.org/presentationml/2006/main">
   <p:cSld>
     <p:bg>
       <p:bgPr>
@@ -4309,7 +4421,14 @@
         <p:cNvGrpSpPr/>
         <p:nvPr/>
       </p:nvGrpSpPr>
-      <p:grpSpPr/>
+      <p:grpSpPr>
+        <a:xfrm>
+          <a:off x="0" y="0"/>
+          <a:ext cx="0" cy="0"/>
+          <a:chOff x="0" y="0"/>
+          <a:chExt cx="0" cy="0"/>
+        </a:xfrm>
+      </p:grpSpPr>
       <p:sp>
         <p:nvSpPr>
           <p:cNvPr id="2" name="TextBox 1"/>
@@ -4421,6 +4540,7 @@
           <a:lstStyle/>
           <a:p>
             <a:pPr algn="ctr"/>
+            <a:endParaRPr/>
           </a:p>
         </p:txBody>
       </p:sp>
@@ -4645,6 +4765,7 @@
           <a:lstStyle/>
           <a:p>
             <a:pPr algn="ctr"/>
+            <a:endParaRPr/>
           </a:p>
         </p:txBody>
       </p:sp>
@@ -4692,7 +4813,7 @@
 </file>
 
 <file path=ppt/slides/slide2.xml><?xml version="1.0" encoding="utf-8"?>
-<p:sld xmlns:a="http://schemas.openxmlformats.org/drawingml/2006/main" xmlns:p="http://schemas.openxmlformats.org/presentationml/2006/main" xmlns:r="http://schemas.openxmlformats.org/officeDocument/2006/relationships">
+<p:sld xmlns:a="http://schemas.openxmlformats.org/drawingml/2006/main" xmlns:r="http://schemas.openxmlformats.org/officeDocument/2006/relationships" xmlns:p="http://schemas.openxmlformats.org/presentationml/2006/main">
   <p:cSld>
     <p:bg>
       <p:bgPr>
@@ -4708,7 +4829,14 @@
         <p:cNvGrpSpPr/>
         <p:nvPr/>
       </p:nvGrpSpPr>
-      <p:grpSpPr/>
+      <p:grpSpPr>
+        <a:xfrm>
+          <a:off x="0" y="0"/>
+          <a:ext cx="0" cy="0"/>
+          <a:chOff x="0" y="0"/>
+          <a:chExt cx="0" cy="0"/>
+        </a:xfrm>
+      </p:grpSpPr>
       <p:sp>
         <p:nvSpPr>
           <p:cNvPr id="2" name="TextBox 1"/>
@@ -4820,6 +4948,7 @@
           <a:lstStyle/>
           <a:p>
             <a:pPr algn="ctr"/>
+            <a:endParaRPr/>
           </a:p>
         </p:txBody>
       </p:sp>
@@ -5028,7 +5157,7 @@
 </file>
 
 <file path=ppt/slides/slide3.xml><?xml version="1.0" encoding="utf-8"?>
-<p:sld xmlns:a="http://schemas.openxmlformats.org/drawingml/2006/main" xmlns:p="http://schemas.openxmlformats.org/presentationml/2006/main" xmlns:r="http://schemas.openxmlformats.org/officeDocument/2006/relationships">
+<p:sld xmlns:a="http://schemas.openxmlformats.org/drawingml/2006/main" xmlns:r="http://schemas.openxmlformats.org/officeDocument/2006/relationships" xmlns:p="http://schemas.openxmlformats.org/presentationml/2006/main">
   <p:cSld>
     <p:bg>
       <p:bgPr>
@@ -5044,7 +5173,14 @@
         <p:cNvGrpSpPr/>
         <p:nvPr/>
       </p:nvGrpSpPr>
-      <p:grpSpPr/>
+      <p:grpSpPr>
+        <a:xfrm>
+          <a:off x="0" y="0"/>
+          <a:ext cx="0" cy="0"/>
+          <a:chOff x="0" y="0"/>
+          <a:chExt cx="0" cy="0"/>
+        </a:xfrm>
+      </p:grpSpPr>
       <p:sp>
         <p:nvSpPr>
           <p:cNvPr id="2" name="TextBox 1"/>
@@ -5156,6 +5292,7 @@
           <a:lstStyle/>
           <a:p>
             <a:pPr algn="ctr"/>
+            <a:endParaRPr/>
           </a:p>
         </p:txBody>
       </p:sp>
@@ -5213,13 +5350,25 @@
                 <a:tableStyleId>{5C22544A-7EE6-4342-B048-85BDC9FD1C3A}</a:tableStyleId>
               </a:tblPr>
               <a:tblGrid>
-                <a:gridCol w="2560320"/>
-                <a:gridCol w="7955279"/>
+                <a:gridCol w="2560320">
+                  <a:extLst>
+                    <a:ext uri="{9D8B030D-6E8A-4147-A177-3AD203B41FA5}">
+                      <a16:colId xmlns:a16="http://schemas.microsoft.com/office/drawing/2014/main" val="20000"/>
+                    </a:ext>
+                  </a:extLst>
+                </a:gridCol>
+                <a:gridCol w="7955279">
+                  <a:extLst>
+                    <a:ext uri="{9D8B030D-6E8A-4147-A177-3AD203B41FA5}">
+                      <a16:colId xmlns:a16="http://schemas.microsoft.com/office/drawing/2014/main" val="20001"/>
+                    </a:ext>
+                  </a:extLst>
+                </a:gridCol>
               </a:tblGrid>
               <a:tr h="960120">
                 <a:tc>
                   <a:txBody>
-                    <a:bodyPr wrap="square"/>
+                    <a:bodyPr/>
                     <a:lstStyle/>
                     <a:p>
                       <a:r>
@@ -5241,7 +5390,7 @@
                 </a:tc>
                 <a:tc>
                   <a:txBody>
-                    <a:bodyPr wrap="square"/>
+                    <a:bodyPr/>
                     <a:lstStyle/>
                     <a:p>
                       <a:r>
@@ -5261,11 +5410,16 @@
                     </a:solidFill>
                   </a:tcPr>
                 </a:tc>
+                <a:extLst>
+                  <a:ext uri="{0D108BD9-81ED-4DB2-BD59-A6C34878D82A}">
+                    <a16:rowId xmlns:a16="http://schemas.microsoft.com/office/drawing/2014/main" val="10000"/>
+                  </a:ext>
+                </a:extLst>
               </a:tr>
               <a:tr h="960120">
                 <a:tc>
                   <a:txBody>
-                    <a:bodyPr wrap="square"/>
+                    <a:bodyPr/>
                     <a:lstStyle/>
                     <a:p>
                       <a:r>
@@ -5287,7 +5441,7 @@
                 </a:tc>
                 <a:tc>
                   <a:txBody>
-                    <a:bodyPr wrap="square"/>
+                    <a:bodyPr/>
                     <a:lstStyle/>
                     <a:p>
                       <a:r>
@@ -5307,11 +5461,16 @@
                     </a:solidFill>
                   </a:tcPr>
                 </a:tc>
+                <a:extLst>
+                  <a:ext uri="{0D108BD9-81ED-4DB2-BD59-A6C34878D82A}">
+                    <a16:rowId xmlns:a16="http://schemas.microsoft.com/office/drawing/2014/main" val="10001"/>
+                  </a:ext>
+                </a:extLst>
               </a:tr>
               <a:tr h="960120">
                 <a:tc>
                   <a:txBody>
-                    <a:bodyPr wrap="square"/>
+                    <a:bodyPr/>
                     <a:lstStyle/>
                     <a:p>
                       <a:r>
@@ -5333,7 +5492,7 @@
                 </a:tc>
                 <a:tc>
                   <a:txBody>
-                    <a:bodyPr wrap="square"/>
+                    <a:bodyPr/>
                     <a:lstStyle/>
                     <a:p>
                       <a:r>
@@ -5353,11 +5512,16 @@
                     </a:solidFill>
                   </a:tcPr>
                 </a:tc>
+                <a:extLst>
+                  <a:ext uri="{0D108BD9-81ED-4DB2-BD59-A6C34878D82A}">
+                    <a16:rowId xmlns:a16="http://schemas.microsoft.com/office/drawing/2014/main" val="10002"/>
+                  </a:ext>
+                </a:extLst>
               </a:tr>
               <a:tr h="960120">
                 <a:tc>
                   <a:txBody>
-                    <a:bodyPr wrap="square"/>
+                    <a:bodyPr/>
                     <a:lstStyle/>
                     <a:p>
                       <a:r>
@@ -5379,7 +5543,7 @@
                 </a:tc>
                 <a:tc>
                   <a:txBody>
-                    <a:bodyPr wrap="square"/>
+                    <a:bodyPr/>
                     <a:lstStyle/>
                     <a:p>
                       <a:r>
@@ -5399,6 +5563,11 @@
                     </a:solidFill>
                   </a:tcPr>
                 </a:tc>
+                <a:extLst>
+                  <a:ext uri="{0D108BD9-81ED-4DB2-BD59-A6C34878D82A}">
+                    <a16:rowId xmlns:a16="http://schemas.microsoft.com/office/drawing/2014/main" val="10003"/>
+                  </a:ext>
+                </a:extLst>
               </a:tr>
             </a:tbl>
           </a:graphicData>
@@ -5413,7 +5582,7 @@
 </file>
 
 <file path=ppt/slides/slide4.xml><?xml version="1.0" encoding="utf-8"?>
-<p:sld xmlns:a="http://schemas.openxmlformats.org/drawingml/2006/main" xmlns:p="http://schemas.openxmlformats.org/presentationml/2006/main" xmlns:r="http://schemas.openxmlformats.org/officeDocument/2006/relationships">
+<p:sld xmlns:a="http://schemas.openxmlformats.org/drawingml/2006/main" xmlns:r="http://schemas.openxmlformats.org/officeDocument/2006/relationships" xmlns:p="http://schemas.openxmlformats.org/presentationml/2006/main">
   <p:cSld>
     <p:bg>
       <p:bgPr>
@@ -5429,7 +5598,14 @@
         <p:cNvGrpSpPr/>
         <p:nvPr/>
       </p:nvGrpSpPr>
-      <p:grpSpPr/>
+      <p:grpSpPr>
+        <a:xfrm>
+          <a:off x="0" y="0"/>
+          <a:ext cx="0" cy="0"/>
+          <a:chOff x="0" y="0"/>
+          <a:chExt cx="0" cy="0"/>
+        </a:xfrm>
+      </p:grpSpPr>
       <p:sp>
         <p:nvSpPr>
           <p:cNvPr id="2" name="TextBox 1"/>
@@ -5541,6 +5717,7 @@
           <a:lstStyle/>
           <a:p>
             <a:pPr algn="ctr"/>
+            <a:endParaRPr/>
           </a:p>
         </p:txBody>
       </p:sp>
@@ -5598,13 +5775,25 @@
                 <a:tableStyleId>{5C22544A-7EE6-4342-B048-85BDC9FD1C3A}</a:tableStyleId>
               </a:tblPr>
               <a:tblGrid>
-                <a:gridCol w="4114800"/>
-                <a:gridCol w="6400800"/>
+                <a:gridCol w="4114800">
+                  <a:extLst>
+                    <a:ext uri="{9D8B030D-6E8A-4147-A177-3AD203B41FA5}">
+                      <a16:colId xmlns:a16="http://schemas.microsoft.com/office/drawing/2014/main" val="20000"/>
+                    </a:ext>
+                  </a:extLst>
+                </a:gridCol>
+                <a:gridCol w="6400800">
+                  <a:extLst>
+                    <a:ext uri="{9D8B030D-6E8A-4147-A177-3AD203B41FA5}">
+                      <a16:colId xmlns:a16="http://schemas.microsoft.com/office/drawing/2014/main" val="20001"/>
+                    </a:ext>
+                  </a:extLst>
+                </a:gridCol>
               </a:tblGrid>
               <a:tr h="576072">
                 <a:tc>
                   <a:txBody>
-                    <a:bodyPr wrap="square"/>
+                    <a:bodyPr/>
                     <a:lstStyle/>
                     <a:p>
                       <a:r>
@@ -5626,7 +5815,7 @@
                 </a:tc>
                 <a:tc>
                   <a:txBody>
-                    <a:bodyPr wrap="square"/>
+                    <a:bodyPr/>
                     <a:lstStyle/>
                     <a:p>
                       <a:r>
@@ -5646,11 +5835,16 @@
                     </a:solidFill>
                   </a:tcPr>
                 </a:tc>
+                <a:extLst>
+                  <a:ext uri="{0D108BD9-81ED-4DB2-BD59-A6C34878D82A}">
+                    <a16:rowId xmlns:a16="http://schemas.microsoft.com/office/drawing/2014/main" val="10000"/>
+                  </a:ext>
+                </a:extLst>
               </a:tr>
               <a:tr h="576072">
                 <a:tc>
                   <a:txBody>
-                    <a:bodyPr wrap="square"/>
+                    <a:bodyPr/>
                     <a:lstStyle/>
                     <a:p>
                       <a:r>
@@ -5672,7 +5866,7 @@
                 </a:tc>
                 <a:tc>
                   <a:txBody>
-                    <a:bodyPr wrap="square"/>
+                    <a:bodyPr/>
                     <a:lstStyle/>
                     <a:p>
                       <a:r>
@@ -5692,11 +5886,16 @@
                     </a:solidFill>
                   </a:tcPr>
                 </a:tc>
+                <a:extLst>
+                  <a:ext uri="{0D108BD9-81ED-4DB2-BD59-A6C34878D82A}">
+                    <a16:rowId xmlns:a16="http://schemas.microsoft.com/office/drawing/2014/main" val="10001"/>
+                  </a:ext>
+                </a:extLst>
               </a:tr>
               <a:tr h="576072">
                 <a:tc>
                   <a:txBody>
-                    <a:bodyPr wrap="square"/>
+                    <a:bodyPr/>
                     <a:lstStyle/>
                     <a:p>
                       <a:r>
@@ -5718,7 +5917,7 @@
                 </a:tc>
                 <a:tc>
                   <a:txBody>
-                    <a:bodyPr wrap="square"/>
+                    <a:bodyPr/>
                     <a:lstStyle/>
                     <a:p>
                       <a:r>
@@ -5738,11 +5937,16 @@
                     </a:solidFill>
                   </a:tcPr>
                 </a:tc>
+                <a:extLst>
+                  <a:ext uri="{0D108BD9-81ED-4DB2-BD59-A6C34878D82A}">
+                    <a16:rowId xmlns:a16="http://schemas.microsoft.com/office/drawing/2014/main" val="10002"/>
+                  </a:ext>
+                </a:extLst>
               </a:tr>
               <a:tr h="576072">
                 <a:tc>
                   <a:txBody>
-                    <a:bodyPr wrap="square"/>
+                    <a:bodyPr/>
                     <a:lstStyle/>
                     <a:p>
                       <a:r>
@@ -5764,7 +5968,7 @@
                 </a:tc>
                 <a:tc>
                   <a:txBody>
-                    <a:bodyPr wrap="square"/>
+                    <a:bodyPr/>
                     <a:lstStyle/>
                     <a:p>
                       <a:r>
@@ -5784,11 +5988,16 @@
                     </a:solidFill>
                   </a:tcPr>
                 </a:tc>
+                <a:extLst>
+                  <a:ext uri="{0D108BD9-81ED-4DB2-BD59-A6C34878D82A}">
+                    <a16:rowId xmlns:a16="http://schemas.microsoft.com/office/drawing/2014/main" val="10003"/>
+                  </a:ext>
+                </a:extLst>
               </a:tr>
               <a:tr h="576072">
                 <a:tc>
                   <a:txBody>
-                    <a:bodyPr wrap="square"/>
+                    <a:bodyPr/>
                     <a:lstStyle/>
                     <a:p>
                       <a:r>
@@ -5810,7 +6019,7 @@
                 </a:tc>
                 <a:tc>
                   <a:txBody>
-                    <a:bodyPr wrap="square"/>
+                    <a:bodyPr/>
                     <a:lstStyle/>
                     <a:p>
                       <a:r>
@@ -5830,11 +6039,16 @@
                     </a:solidFill>
                   </a:tcPr>
                 </a:tc>
+                <a:extLst>
+                  <a:ext uri="{0D108BD9-81ED-4DB2-BD59-A6C34878D82A}">
+                    <a16:rowId xmlns:a16="http://schemas.microsoft.com/office/drawing/2014/main" val="10004"/>
+                  </a:ext>
+                </a:extLst>
               </a:tr>
               <a:tr h="576072">
                 <a:tc>
                   <a:txBody>
-                    <a:bodyPr wrap="square"/>
+                    <a:bodyPr/>
                     <a:lstStyle/>
                     <a:p>
                       <a:r>
@@ -5856,7 +6070,7 @@
                 </a:tc>
                 <a:tc>
                   <a:txBody>
-                    <a:bodyPr wrap="square"/>
+                    <a:bodyPr/>
                     <a:lstStyle/>
                     <a:p>
                       <a:r>
@@ -5876,11 +6090,16 @@
                     </a:solidFill>
                   </a:tcPr>
                 </a:tc>
+                <a:extLst>
+                  <a:ext uri="{0D108BD9-81ED-4DB2-BD59-A6C34878D82A}">
+                    <a16:rowId xmlns:a16="http://schemas.microsoft.com/office/drawing/2014/main" val="10005"/>
+                  </a:ext>
+                </a:extLst>
               </a:tr>
               <a:tr h="576072">
                 <a:tc>
                   <a:txBody>
-                    <a:bodyPr wrap="square"/>
+                    <a:bodyPr/>
                     <a:lstStyle/>
                     <a:p>
                       <a:r>
@@ -5902,7 +6121,7 @@
                 </a:tc>
                 <a:tc>
                   <a:txBody>
-                    <a:bodyPr wrap="square"/>
+                    <a:bodyPr/>
                     <a:lstStyle/>
                     <a:p>
                       <a:r>
@@ -5922,6 +6141,11 @@
                     </a:solidFill>
                   </a:tcPr>
                 </a:tc>
+                <a:extLst>
+                  <a:ext uri="{0D108BD9-81ED-4DB2-BD59-A6C34878D82A}">
+                    <a16:rowId xmlns:a16="http://schemas.microsoft.com/office/drawing/2014/main" val="10006"/>
+                  </a:ext>
+                </a:extLst>
               </a:tr>
             </a:tbl>
           </a:graphicData>
@@ -5936,7 +6160,7 @@
 </file>
 
 <file path=ppt/slides/slide5.xml><?xml version="1.0" encoding="utf-8"?>
-<p:sld xmlns:a="http://schemas.openxmlformats.org/drawingml/2006/main" xmlns:p="http://schemas.openxmlformats.org/presentationml/2006/main" xmlns:r="http://schemas.openxmlformats.org/officeDocument/2006/relationships">
+<p:sld xmlns:a="http://schemas.openxmlformats.org/drawingml/2006/main" xmlns:r="http://schemas.openxmlformats.org/officeDocument/2006/relationships" xmlns:p="http://schemas.openxmlformats.org/presentationml/2006/main">
   <p:cSld>
     <p:bg>
       <p:bgPr>
@@ -5952,7 +6176,14 @@
         <p:cNvGrpSpPr/>
         <p:nvPr/>
       </p:nvGrpSpPr>
-      <p:grpSpPr/>
+      <p:grpSpPr>
+        <a:xfrm>
+          <a:off x="0" y="0"/>
+          <a:ext cx="0" cy="0"/>
+          <a:chOff x="0" y="0"/>
+          <a:chExt cx="0" cy="0"/>
+        </a:xfrm>
+      </p:grpSpPr>
       <p:sp>
         <p:nvSpPr>
           <p:cNvPr id="2" name="TextBox 1"/>
@@ -6064,6 +6295,7 @@
           <a:lstStyle/>
           <a:p>
             <a:pPr algn="ctr"/>
+            <a:endParaRPr/>
           </a:p>
         </p:txBody>
       </p:sp>
@@ -6121,14 +6353,32 @@
                 <a:tableStyleId>{5C22544A-7EE6-4342-B048-85BDC9FD1C3A}</a:tableStyleId>
               </a:tblPr>
               <a:tblGrid>
-                <a:gridCol w="2103120"/>
-                <a:gridCol w="3108960"/>
-                <a:gridCol w="6035040"/>
+                <a:gridCol w="2103120">
+                  <a:extLst>
+                    <a:ext uri="{9D8B030D-6E8A-4147-A177-3AD203B41FA5}">
+                      <a16:colId xmlns:a16="http://schemas.microsoft.com/office/drawing/2014/main" val="20000"/>
+                    </a:ext>
+                  </a:extLst>
+                </a:gridCol>
+                <a:gridCol w="3108960">
+                  <a:extLst>
+                    <a:ext uri="{9D8B030D-6E8A-4147-A177-3AD203B41FA5}">
+                      <a16:colId xmlns:a16="http://schemas.microsoft.com/office/drawing/2014/main" val="20001"/>
+                    </a:ext>
+                  </a:extLst>
+                </a:gridCol>
+                <a:gridCol w="6035040">
+                  <a:extLst>
+                    <a:ext uri="{9D8B030D-6E8A-4147-A177-3AD203B41FA5}">
+                      <a16:colId xmlns:a16="http://schemas.microsoft.com/office/drawing/2014/main" val="20002"/>
+                    </a:ext>
+                  </a:extLst>
+                </a:gridCol>
               </a:tblGrid>
               <a:tr h="640080">
                 <a:tc>
                   <a:txBody>
-                    <a:bodyPr wrap="square"/>
+                    <a:bodyPr/>
                     <a:lstStyle/>
                     <a:p>
                       <a:r>
@@ -6150,7 +6400,7 @@
                 </a:tc>
                 <a:tc>
                   <a:txBody>
-                    <a:bodyPr wrap="square"/>
+                    <a:bodyPr/>
                     <a:lstStyle/>
                     <a:p>
                       <a:r>
@@ -6172,7 +6422,7 @@
                 </a:tc>
                 <a:tc>
                   <a:txBody>
-                    <a:bodyPr wrap="square"/>
+                    <a:bodyPr/>
                     <a:lstStyle/>
                     <a:p>
                       <a:r>
@@ -6192,11 +6442,16 @@
                     </a:solidFill>
                   </a:tcPr>
                 </a:tc>
+                <a:extLst>
+                  <a:ext uri="{0D108BD9-81ED-4DB2-BD59-A6C34878D82A}">
+                    <a16:rowId xmlns:a16="http://schemas.microsoft.com/office/drawing/2014/main" val="10000"/>
+                  </a:ext>
+                </a:extLst>
               </a:tr>
               <a:tr h="640080">
                 <a:tc>
                   <a:txBody>
-                    <a:bodyPr wrap="square"/>
+                    <a:bodyPr/>
                     <a:lstStyle/>
                     <a:p>
                       <a:r>
@@ -6218,7 +6473,7 @@
                 </a:tc>
                 <a:tc>
                   <a:txBody>
-                    <a:bodyPr wrap="square"/>
+                    <a:bodyPr/>
                     <a:lstStyle/>
                     <a:p>
                       <a:r>
@@ -6240,7 +6495,7 @@
                 </a:tc>
                 <a:tc>
                   <a:txBody>
-                    <a:bodyPr wrap="square"/>
+                    <a:bodyPr/>
                     <a:lstStyle/>
                     <a:p>
                       <a:r>
@@ -6260,11 +6515,16 @@
                     </a:solidFill>
                   </a:tcPr>
                 </a:tc>
+                <a:extLst>
+                  <a:ext uri="{0D108BD9-81ED-4DB2-BD59-A6C34878D82A}">
+                    <a16:rowId xmlns:a16="http://schemas.microsoft.com/office/drawing/2014/main" val="10001"/>
+                  </a:ext>
+                </a:extLst>
               </a:tr>
               <a:tr h="640080">
                 <a:tc>
                   <a:txBody>
-                    <a:bodyPr wrap="square"/>
+                    <a:bodyPr/>
                     <a:lstStyle/>
                     <a:p>
                       <a:r>
@@ -6286,7 +6546,7 @@
                 </a:tc>
                 <a:tc>
                   <a:txBody>
-                    <a:bodyPr wrap="square"/>
+                    <a:bodyPr/>
                     <a:lstStyle/>
                     <a:p>
                       <a:r>
@@ -6308,7 +6568,7 @@
                 </a:tc>
                 <a:tc>
                   <a:txBody>
-                    <a:bodyPr wrap="square"/>
+                    <a:bodyPr/>
                     <a:lstStyle/>
                     <a:p>
                       <a:r>
@@ -6328,11 +6588,16 @@
                     </a:solidFill>
                   </a:tcPr>
                 </a:tc>
+                <a:extLst>
+                  <a:ext uri="{0D108BD9-81ED-4DB2-BD59-A6C34878D82A}">
+                    <a16:rowId xmlns:a16="http://schemas.microsoft.com/office/drawing/2014/main" val="10002"/>
+                  </a:ext>
+                </a:extLst>
               </a:tr>
               <a:tr h="640080">
                 <a:tc>
                   <a:txBody>
-                    <a:bodyPr wrap="square"/>
+                    <a:bodyPr/>
                     <a:lstStyle/>
                     <a:p>
                       <a:r>
@@ -6354,7 +6619,7 @@
                 </a:tc>
                 <a:tc>
                   <a:txBody>
-                    <a:bodyPr wrap="square"/>
+                    <a:bodyPr/>
                     <a:lstStyle/>
                     <a:p>
                       <a:r>
@@ -6376,7 +6641,7 @@
                 </a:tc>
                 <a:tc>
                   <a:txBody>
-                    <a:bodyPr wrap="square"/>
+                    <a:bodyPr/>
                     <a:lstStyle/>
                     <a:p>
                       <a:r>
@@ -6396,11 +6661,16 @@
                     </a:solidFill>
                   </a:tcPr>
                 </a:tc>
+                <a:extLst>
+                  <a:ext uri="{0D108BD9-81ED-4DB2-BD59-A6C34878D82A}">
+                    <a16:rowId xmlns:a16="http://schemas.microsoft.com/office/drawing/2014/main" val="10003"/>
+                  </a:ext>
+                </a:extLst>
               </a:tr>
               <a:tr h="640080">
                 <a:tc>
                   <a:txBody>
-                    <a:bodyPr wrap="square"/>
+                    <a:bodyPr/>
                     <a:lstStyle/>
                     <a:p>
                       <a:r>
@@ -6422,7 +6692,7 @@
                 </a:tc>
                 <a:tc>
                   <a:txBody>
-                    <a:bodyPr wrap="square"/>
+                    <a:bodyPr/>
                     <a:lstStyle/>
                     <a:p>
                       <a:r>
@@ -6444,7 +6714,7 @@
                 </a:tc>
                 <a:tc>
                   <a:txBody>
-                    <a:bodyPr wrap="square"/>
+                    <a:bodyPr/>
                     <a:lstStyle/>
                     <a:p>
                       <a:r>
@@ -6464,11 +6734,16 @@
                     </a:solidFill>
                   </a:tcPr>
                 </a:tc>
+                <a:extLst>
+                  <a:ext uri="{0D108BD9-81ED-4DB2-BD59-A6C34878D82A}">
+                    <a16:rowId xmlns:a16="http://schemas.microsoft.com/office/drawing/2014/main" val="10004"/>
+                  </a:ext>
+                </a:extLst>
               </a:tr>
               <a:tr h="640080">
                 <a:tc>
                   <a:txBody>
-                    <a:bodyPr wrap="square"/>
+                    <a:bodyPr/>
                     <a:lstStyle/>
                     <a:p>
                       <a:r>
@@ -6490,7 +6765,7 @@
                 </a:tc>
                 <a:tc>
                   <a:txBody>
-                    <a:bodyPr wrap="square"/>
+                    <a:bodyPr/>
                     <a:lstStyle/>
                     <a:p>
                       <a:r>
@@ -6512,7 +6787,7 @@
                 </a:tc>
                 <a:tc>
                   <a:txBody>
-                    <a:bodyPr wrap="square"/>
+                    <a:bodyPr/>
                     <a:lstStyle/>
                     <a:p>
                       <a:r>
@@ -6532,6 +6807,11 @@
                     </a:solidFill>
                   </a:tcPr>
                 </a:tc>
+                <a:extLst>
+                  <a:ext uri="{0D108BD9-81ED-4DB2-BD59-A6C34878D82A}">
+                    <a16:rowId xmlns:a16="http://schemas.microsoft.com/office/drawing/2014/main" val="10005"/>
+                  </a:ext>
+                </a:extLst>
               </a:tr>
             </a:tbl>
           </a:graphicData>
@@ -6581,7 +6861,7 @@
 </file>
 
 <file path=ppt/slides/slide6.xml><?xml version="1.0" encoding="utf-8"?>
-<p:sld xmlns:a="http://schemas.openxmlformats.org/drawingml/2006/main" xmlns:p="http://schemas.openxmlformats.org/presentationml/2006/main" xmlns:r="http://schemas.openxmlformats.org/officeDocument/2006/relationships">
+<p:sld xmlns:a="http://schemas.openxmlformats.org/drawingml/2006/main" xmlns:r="http://schemas.openxmlformats.org/officeDocument/2006/relationships" xmlns:p="http://schemas.openxmlformats.org/presentationml/2006/main">
   <p:cSld>
     <p:bg>
       <p:bgPr>
@@ -6597,7 +6877,14 @@
         <p:cNvGrpSpPr/>
         <p:nvPr/>
       </p:nvGrpSpPr>
-      <p:grpSpPr/>
+      <p:grpSpPr>
+        <a:xfrm>
+          <a:off x="0" y="0"/>
+          <a:ext cx="0" cy="0"/>
+          <a:chOff x="0" y="0"/>
+          <a:chExt cx="0" cy="0"/>
+        </a:xfrm>
+      </p:grpSpPr>
       <p:sp>
         <p:nvSpPr>
           <p:cNvPr id="2" name="TextBox 1"/>
@@ -6709,6 +6996,7 @@
           <a:lstStyle/>
           <a:p>
             <a:pPr algn="ctr"/>
+            <a:endParaRPr/>
           </a:p>
         </p:txBody>
       </p:sp>
@@ -6878,7 +7166,7 @@
 </file>
 
 <file path=ppt/slides/slide7.xml><?xml version="1.0" encoding="utf-8"?>
-<p:sld xmlns:a="http://schemas.openxmlformats.org/drawingml/2006/main" xmlns:p="http://schemas.openxmlformats.org/presentationml/2006/main" xmlns:r="http://schemas.openxmlformats.org/officeDocument/2006/relationships">
+<p:sld xmlns:a="http://schemas.openxmlformats.org/drawingml/2006/main" xmlns:r="http://schemas.openxmlformats.org/officeDocument/2006/relationships" xmlns:p="http://schemas.openxmlformats.org/presentationml/2006/main">
   <p:cSld>
     <p:bg>
       <p:bgPr>
@@ -6894,7 +7182,14 @@
         <p:cNvGrpSpPr/>
         <p:nvPr/>
       </p:nvGrpSpPr>
-      <p:grpSpPr/>
+      <p:grpSpPr>
+        <a:xfrm>
+          <a:off x="0" y="0"/>
+          <a:ext cx="0" cy="0"/>
+          <a:chOff x="0" y="0"/>
+          <a:chExt cx="0" cy="0"/>
+        </a:xfrm>
+      </p:grpSpPr>
       <p:sp>
         <p:nvSpPr>
           <p:cNvPr id="2" name="TextBox 1"/>
@@ -7006,6 +7301,7 @@
           <a:lstStyle/>
           <a:p>
             <a:pPr algn="ctr"/>
+            <a:endParaRPr/>
           </a:p>
         </p:txBody>
       </p:sp>
@@ -7063,13 +7359,25 @@
                 <a:tableStyleId>{5C22544A-7EE6-4342-B048-85BDC9FD1C3A}</a:tableStyleId>
               </a:tblPr>
               <a:tblGrid>
-                <a:gridCol w="2560320"/>
-                <a:gridCol w="7772400"/>
+                <a:gridCol w="2560320">
+                  <a:extLst>
+                    <a:ext uri="{9D8B030D-6E8A-4147-A177-3AD203B41FA5}">
+                      <a16:colId xmlns:a16="http://schemas.microsoft.com/office/drawing/2014/main" val="20000"/>
+                    </a:ext>
+                  </a:extLst>
+                </a:gridCol>
+                <a:gridCol w="7772400">
+                  <a:extLst>
+                    <a:ext uri="{9D8B030D-6E8A-4147-A177-3AD203B41FA5}">
+                      <a16:colId xmlns:a16="http://schemas.microsoft.com/office/drawing/2014/main" val="20001"/>
+                    </a:ext>
+                  </a:extLst>
+                </a:gridCol>
               </a:tblGrid>
               <a:tr h="658368">
                 <a:tc>
                   <a:txBody>
-                    <a:bodyPr wrap="square"/>
+                    <a:bodyPr/>
                     <a:lstStyle/>
                     <a:p>
                       <a:r>
@@ -7091,7 +7399,7 @@
                 </a:tc>
                 <a:tc>
                   <a:txBody>
-                    <a:bodyPr wrap="square"/>
+                    <a:bodyPr/>
                     <a:lstStyle/>
                     <a:p>
                       <a:r>
@@ -7111,11 +7419,16 @@
                     </a:solidFill>
                   </a:tcPr>
                 </a:tc>
+                <a:extLst>
+                  <a:ext uri="{0D108BD9-81ED-4DB2-BD59-A6C34878D82A}">
+                    <a16:rowId xmlns:a16="http://schemas.microsoft.com/office/drawing/2014/main" val="10000"/>
+                  </a:ext>
+                </a:extLst>
               </a:tr>
               <a:tr h="658368">
                 <a:tc>
                   <a:txBody>
-                    <a:bodyPr wrap="square"/>
+                    <a:bodyPr/>
                     <a:lstStyle/>
                     <a:p>
                       <a:r>
@@ -7137,7 +7450,7 @@
                 </a:tc>
                 <a:tc>
                   <a:txBody>
-                    <a:bodyPr wrap="square"/>
+                    <a:bodyPr/>
                     <a:lstStyle/>
                     <a:p>
                       <a:r>
@@ -7157,11 +7470,16 @@
                     </a:solidFill>
                   </a:tcPr>
                 </a:tc>
+                <a:extLst>
+                  <a:ext uri="{0D108BD9-81ED-4DB2-BD59-A6C34878D82A}">
+                    <a16:rowId xmlns:a16="http://schemas.microsoft.com/office/drawing/2014/main" val="10001"/>
+                  </a:ext>
+                </a:extLst>
               </a:tr>
               <a:tr h="658368">
                 <a:tc>
                   <a:txBody>
-                    <a:bodyPr wrap="square"/>
+                    <a:bodyPr/>
                     <a:lstStyle/>
                     <a:p>
                       <a:r>
@@ -7183,7 +7501,7 @@
                 </a:tc>
                 <a:tc>
                   <a:txBody>
-                    <a:bodyPr wrap="square"/>
+                    <a:bodyPr/>
                     <a:lstStyle/>
                     <a:p>
                       <a:r>
@@ -7203,11 +7521,16 @@
                     </a:solidFill>
                   </a:tcPr>
                 </a:tc>
+                <a:extLst>
+                  <a:ext uri="{0D108BD9-81ED-4DB2-BD59-A6C34878D82A}">
+                    <a16:rowId xmlns:a16="http://schemas.microsoft.com/office/drawing/2014/main" val="10002"/>
+                  </a:ext>
+                </a:extLst>
               </a:tr>
               <a:tr h="658368">
                 <a:tc>
                   <a:txBody>
-                    <a:bodyPr wrap="square"/>
+                    <a:bodyPr/>
                     <a:lstStyle/>
                     <a:p>
                       <a:r>
@@ -7229,7 +7552,7 @@
                 </a:tc>
                 <a:tc>
                   <a:txBody>
-                    <a:bodyPr wrap="square"/>
+                    <a:bodyPr/>
                     <a:lstStyle/>
                     <a:p>
                       <a:r>
@@ -7249,11 +7572,16 @@
                     </a:solidFill>
                   </a:tcPr>
                 </a:tc>
+                <a:extLst>
+                  <a:ext uri="{0D108BD9-81ED-4DB2-BD59-A6C34878D82A}">
+                    <a16:rowId xmlns:a16="http://schemas.microsoft.com/office/drawing/2014/main" val="10003"/>
+                  </a:ext>
+                </a:extLst>
               </a:tr>
               <a:tr h="658368">
                 <a:tc>
                   <a:txBody>
-                    <a:bodyPr wrap="square"/>
+                    <a:bodyPr/>
                     <a:lstStyle/>
                     <a:p>
                       <a:r>
@@ -7275,7 +7603,7 @@
                 </a:tc>
                 <a:tc>
                   <a:txBody>
-                    <a:bodyPr wrap="square"/>
+                    <a:bodyPr/>
                     <a:lstStyle/>
                     <a:p>
                       <a:r>
@@ -7295,11 +7623,16 @@
                     </a:solidFill>
                   </a:tcPr>
                 </a:tc>
+                <a:extLst>
+                  <a:ext uri="{0D108BD9-81ED-4DB2-BD59-A6C34878D82A}">
+                    <a16:rowId xmlns:a16="http://schemas.microsoft.com/office/drawing/2014/main" val="10004"/>
+                  </a:ext>
+                </a:extLst>
               </a:tr>
               <a:tr h="658368">
                 <a:tc>
                   <a:txBody>
-                    <a:bodyPr wrap="square"/>
+                    <a:bodyPr/>
                     <a:lstStyle/>
                     <a:p>
                       <a:r>
@@ -7321,7 +7654,7 @@
                 </a:tc>
                 <a:tc>
                   <a:txBody>
-                    <a:bodyPr wrap="square"/>
+                    <a:bodyPr/>
                     <a:lstStyle/>
                     <a:p>
                       <a:r>
@@ -7341,6 +7674,11 @@
                     </a:solidFill>
                   </a:tcPr>
                 </a:tc>
+                <a:extLst>
+                  <a:ext uri="{0D108BD9-81ED-4DB2-BD59-A6C34878D82A}">
+                    <a16:rowId xmlns:a16="http://schemas.microsoft.com/office/drawing/2014/main" val="10005"/>
+                  </a:ext>
+                </a:extLst>
               </a:tr>
             </a:tbl>
           </a:graphicData>
@@ -7390,7 +7728,7 @@
 </file>
 
 <file path=ppt/slides/slide8.xml><?xml version="1.0" encoding="utf-8"?>
-<p:sld xmlns:a="http://schemas.openxmlformats.org/drawingml/2006/main" xmlns:p="http://schemas.openxmlformats.org/presentationml/2006/main" xmlns:r="http://schemas.openxmlformats.org/officeDocument/2006/relationships">
+<p:sld xmlns:a="http://schemas.openxmlformats.org/drawingml/2006/main" xmlns:r="http://schemas.openxmlformats.org/officeDocument/2006/relationships" xmlns:p="http://schemas.openxmlformats.org/presentationml/2006/main">
   <p:cSld>
     <p:bg>
       <p:bgPr>
@@ -7406,7 +7744,14 @@
         <p:cNvGrpSpPr/>
         <p:nvPr/>
       </p:nvGrpSpPr>
-      <p:grpSpPr/>
+      <p:grpSpPr>
+        <a:xfrm>
+          <a:off x="0" y="0"/>
+          <a:ext cx="0" cy="0"/>
+          <a:chOff x="0" y="0"/>
+          <a:chExt cx="0" cy="0"/>
+        </a:xfrm>
+      </p:grpSpPr>
       <p:sp>
         <p:nvSpPr>
           <p:cNvPr id="2" name="TextBox 1"/>
@@ -7518,6 +7863,7 @@
           <a:lstStyle/>
           <a:p>
             <a:pPr algn="ctr"/>
+            <a:endParaRPr/>
           </a:p>
         </p:txBody>
       </p:sp>
@@ -7630,7 +7976,7 @@
           </a:fontRef>
         </p:style>
         <p:txBody>
-          <a:bodyPr rtlCol="0" anchor="ctr" wrap="square" lIns="152400" tIns="127000"/>
+          <a:bodyPr wrap="square" lIns="152400" tIns="127000" rtlCol="0" anchor="ctr"/>
           <a:lstStyle/>
           <a:p>
             <a:pPr algn="ctr"/>
@@ -7740,7 +8086,7 @@
           </a:fontRef>
         </p:style>
         <p:txBody>
-          <a:bodyPr rtlCol="0" anchor="ctr" wrap="square" lIns="152400" tIns="127000"/>
+          <a:bodyPr wrap="square" lIns="152400" tIns="127000" rtlCol="0" anchor="ctr"/>
           <a:lstStyle/>
           <a:p>
             <a:pPr algn="ctr"/>
@@ -7820,7 +8166,7 @@
 </file>
 
 <file path=ppt/slides/slide9.xml><?xml version="1.0" encoding="utf-8"?>
-<p:sld xmlns:a="http://schemas.openxmlformats.org/drawingml/2006/main" xmlns:p="http://schemas.openxmlformats.org/presentationml/2006/main" xmlns:r="http://schemas.openxmlformats.org/officeDocument/2006/relationships">
+<p:sld xmlns:a="http://schemas.openxmlformats.org/drawingml/2006/main" xmlns:r="http://schemas.openxmlformats.org/officeDocument/2006/relationships" xmlns:p="http://schemas.openxmlformats.org/presentationml/2006/main">
   <p:cSld>
     <p:bg>
       <p:bgPr>
@@ -7836,7 +8182,14 @@
         <p:cNvGrpSpPr/>
         <p:nvPr/>
       </p:nvGrpSpPr>
-      <p:grpSpPr/>
+      <p:grpSpPr>
+        <a:xfrm>
+          <a:off x="0" y="0"/>
+          <a:ext cx="0" cy="0"/>
+          <a:chOff x="0" y="0"/>
+          <a:chExt cx="0" cy="0"/>
+        </a:xfrm>
+      </p:grpSpPr>
       <p:sp>
         <p:nvSpPr>
           <p:cNvPr id="2" name="TextBox 1"/>
@@ -7948,6 +8301,7 @@
           <a:lstStyle/>
           <a:p>
             <a:pPr algn="ctr"/>
+            <a:endParaRPr/>
           </a:p>
         </p:txBody>
       </p:sp>
@@ -8025,7 +8379,7 @@
           </a:fontRef>
         </p:style>
         <p:txBody>
-          <a:bodyPr rtlCol="0" anchor="ctr" wrap="square" lIns="152400" tIns="127000"/>
+          <a:bodyPr wrap="square" lIns="152400" tIns="127000" rtlCol="0" anchor="ctr"/>
           <a:lstStyle/>
           <a:p>
             <a:pPr algn="ctr"/>

--- a/complet/report/Presentation_Projet_Gestion_Formations.pptx
+++ b/complet/report/Presentation_Projet_Gestion_Formations.pptx
@@ -5,21 +5,22 @@
     <p:sldMasterId id="2147483648" r:id="rId1"/>
   </p:sldMasterIdLst>
   <p:sldIdLst>
-    <p:sldId id="256" r:id="rId2"/>
-    <p:sldId id="257" r:id="rId3"/>
-    <p:sldId id="258" r:id="rId4"/>
-    <p:sldId id="259" r:id="rId5"/>
-    <p:sldId id="260" r:id="rId6"/>
-    <p:sldId id="261" r:id="rId7"/>
-    <p:sldId id="262" r:id="rId8"/>
-    <p:sldId id="263" r:id="rId9"/>
-    <p:sldId id="264" r:id="rId10"/>
-    <p:sldId id="265" r:id="rId11"/>
-    <p:sldId id="266" r:id="rId12"/>
-    <p:sldId id="267" r:id="rId13"/>
-    <p:sldId id="268" r:id="rId14"/>
+    <p:sldId id="256" r:id="rId7"/>
+    <p:sldId id="257" r:id="rId8"/>
+    <p:sldId id="258" r:id="rId9"/>
+    <p:sldId id="259" r:id="rId10"/>
+    <p:sldId id="260" r:id="rId11"/>
+    <p:sldId id="261" r:id="rId12"/>
+    <p:sldId id="262" r:id="rId13"/>
+    <p:sldId id="263" r:id="rId14"/>
+    <p:sldId id="264" r:id="rId15"/>
+    <p:sldId id="265" r:id="rId16"/>
+    <p:sldId id="266" r:id="rId17"/>
+    <p:sldId id="267" r:id="rId18"/>
+    <p:sldId id="268" r:id="rId19"/>
+    <p:sldId id="269" r:id="rId20"/>
   </p:sldIdLst>
-  <p:sldSz cx="12192000" cy="6858000"/>
+  <p:sldSz cx="12191695" cy="6858000" type="screen4x3"/>
   <p:notesSz cx="6858000" cy="9144000"/>
   <p:defaultTextStyle>
     <a:defPPr>
@@ -116,22 +117,6 @@
       </a:defRPr>
     </a:lvl9pPr>
   </p:defaultTextStyle>
-  <p:extLst>
-    <p:ext uri="{EFAFB233-063F-42B5-8137-9DF3F51BA10A}">
-      <p15:sldGuideLst xmlns:p15="http://schemas.microsoft.com/office/powerpoint/2012/main">
-        <p15:guide id="1" orient="horz" pos="2160">
-          <p15:clr>
-            <a:srgbClr val="A4A3A4"/>
-          </p15:clr>
-        </p15:guide>
-        <p15:guide id="2" pos="2880">
-          <p15:clr>
-            <a:srgbClr val="A4A3A4"/>
-          </p15:clr>
-        </p15:guide>
-      </p15:sldGuideLst>
-    </p:ext>
-  </p:extLst>
 </p:presentation>
 </file>
 
@@ -173,9 +158,10 @@
           <a:lstStyle/>
           <a:p>
             <a:r>
-              <a:rPr lang="en-US"/>
+              <a:rPr lang="en-US" smtClean="0"/>
               <a:t>Click to edit Master title style</a:t>
             </a:r>
+            <a:endParaRPr lang="en-US"/>
           </a:p>
         </p:txBody>
       </p:sp>
@@ -291,9 +277,10 @@
           </a:lstStyle>
           <a:p>
             <a:r>
-              <a:rPr lang="en-US"/>
+              <a:rPr lang="en-US" smtClean="0"/>
               <a:t>Click to edit Master subtitle style</a:t>
             </a:r>
+            <a:endParaRPr lang="en-US"/>
           </a:p>
         </p:txBody>
       </p:sp>
@@ -314,7 +301,7 @@
           <a:p>
             <a:fld id="{5BCAD085-E8A6-8845-BD4E-CB4CCA059FC4}" type="datetimeFigureOut">
               <a:rPr lang="en-US" smtClean="0"/>
-              <a:t>7/22/26</a:t>
+              <a:t>1/27/13</a:t>
             </a:fld>
             <a:endParaRPr lang="en-US"/>
           </a:p>
@@ -356,7 +343,7 @@
           <a:p>
             <a:fld id="{C1FF6DA9-008F-8B48-92A6-B652298478BF}" type="slidenum">
               <a:rPr lang="en-US" smtClean="0"/>
-              <a:t>‹N°›</a:t>
+              <a:t>‹#›</a:t>
             </a:fld>
             <a:endParaRPr lang="en-US"/>
           </a:p>
@@ -408,9 +395,10 @@
           <a:lstStyle/>
           <a:p>
             <a:r>
-              <a:rPr lang="en-US"/>
+              <a:rPr lang="en-US" smtClean="0"/>
               <a:t>Click to edit Master title style</a:t>
             </a:r>
+            <a:endParaRPr lang="en-US"/>
           </a:p>
         </p:txBody>
       </p:sp>
@@ -431,37 +419,38 @@
           <a:p>
             <a:pPr lvl="0"/>
             <a:r>
-              <a:rPr lang="en-US"/>
+              <a:rPr lang="en-US" smtClean="0"/>
               <a:t>Click to edit Master text styles</a:t>
             </a:r>
           </a:p>
           <a:p>
             <a:pPr lvl="1"/>
             <a:r>
-              <a:rPr lang="en-US"/>
+              <a:rPr lang="en-US" smtClean="0"/>
               <a:t>Second level</a:t>
             </a:r>
           </a:p>
           <a:p>
             <a:pPr lvl="2"/>
             <a:r>
-              <a:rPr lang="en-US"/>
+              <a:rPr lang="en-US" smtClean="0"/>
               <a:t>Third level</a:t>
             </a:r>
           </a:p>
           <a:p>
             <a:pPr lvl="3"/>
             <a:r>
-              <a:rPr lang="en-US"/>
+              <a:rPr lang="en-US" smtClean="0"/>
               <a:t>Fourth level</a:t>
             </a:r>
           </a:p>
           <a:p>
             <a:pPr lvl="4"/>
             <a:r>
-              <a:rPr lang="en-US"/>
+              <a:rPr lang="en-US" smtClean="0"/>
               <a:t>Fifth level</a:t>
             </a:r>
+            <a:endParaRPr lang="en-US"/>
           </a:p>
         </p:txBody>
       </p:sp>
@@ -482,7 +471,7 @@
           <a:p>
             <a:fld id="{5BCAD085-E8A6-8845-BD4E-CB4CCA059FC4}" type="datetimeFigureOut">
               <a:rPr lang="en-US" smtClean="0"/>
-              <a:t>7/22/26</a:t>
+              <a:t>1/27/13</a:t>
             </a:fld>
             <a:endParaRPr lang="en-US"/>
           </a:p>
@@ -524,7 +513,7 @@
           <a:p>
             <a:fld id="{C1FF6DA9-008F-8B48-92A6-B652298478BF}" type="slidenum">
               <a:rPr lang="en-US" smtClean="0"/>
-              <a:t>‹N°›</a:t>
+              <a:t>‹#›</a:t>
             </a:fld>
             <a:endParaRPr lang="en-US"/>
           </a:p>
@@ -581,9 +570,10 @@
           <a:lstStyle/>
           <a:p>
             <a:r>
-              <a:rPr lang="en-US"/>
+              <a:rPr lang="en-US" smtClean="0"/>
               <a:t>Click to edit Master title style</a:t>
             </a:r>
+            <a:endParaRPr lang="en-US"/>
           </a:p>
         </p:txBody>
       </p:sp>
@@ -609,37 +599,38 @@
           <a:p>
             <a:pPr lvl="0"/>
             <a:r>
-              <a:rPr lang="en-US"/>
+              <a:rPr lang="en-US" smtClean="0"/>
               <a:t>Click to edit Master text styles</a:t>
             </a:r>
           </a:p>
           <a:p>
             <a:pPr lvl="1"/>
             <a:r>
-              <a:rPr lang="en-US"/>
+              <a:rPr lang="en-US" smtClean="0"/>
               <a:t>Second level</a:t>
             </a:r>
           </a:p>
           <a:p>
             <a:pPr lvl="2"/>
             <a:r>
-              <a:rPr lang="en-US"/>
+              <a:rPr lang="en-US" smtClean="0"/>
               <a:t>Third level</a:t>
             </a:r>
           </a:p>
           <a:p>
             <a:pPr lvl="3"/>
             <a:r>
-              <a:rPr lang="en-US"/>
+              <a:rPr lang="en-US" smtClean="0"/>
               <a:t>Fourth level</a:t>
             </a:r>
           </a:p>
           <a:p>
             <a:pPr lvl="4"/>
             <a:r>
-              <a:rPr lang="en-US"/>
+              <a:rPr lang="en-US" smtClean="0"/>
               <a:t>Fifth level</a:t>
             </a:r>
+            <a:endParaRPr lang="en-US"/>
           </a:p>
         </p:txBody>
       </p:sp>
@@ -660,7 +651,7 @@
           <a:p>
             <a:fld id="{5BCAD085-E8A6-8845-BD4E-CB4CCA059FC4}" type="datetimeFigureOut">
               <a:rPr lang="en-US" smtClean="0"/>
-              <a:t>7/22/26</a:t>
+              <a:t>1/27/13</a:t>
             </a:fld>
             <a:endParaRPr lang="en-US"/>
           </a:p>
@@ -702,7 +693,7 @@
           <a:p>
             <a:fld id="{C1FF6DA9-008F-8B48-92A6-B652298478BF}" type="slidenum">
               <a:rPr lang="en-US" smtClean="0"/>
-              <a:t>‹N°›</a:t>
+              <a:t>‹#›</a:t>
             </a:fld>
             <a:endParaRPr lang="en-US"/>
           </a:p>
@@ -754,9 +745,10 @@
           <a:lstStyle/>
           <a:p>
             <a:r>
-              <a:rPr lang="en-US"/>
+              <a:rPr lang="en-US" smtClean="0"/>
               <a:t>Click to edit Master title style</a:t>
             </a:r>
+            <a:endParaRPr lang="en-US"/>
           </a:p>
         </p:txBody>
       </p:sp>
@@ -777,37 +769,38 @@
           <a:p>
             <a:pPr lvl="0"/>
             <a:r>
-              <a:rPr lang="en-US"/>
+              <a:rPr lang="en-US" smtClean="0"/>
               <a:t>Click to edit Master text styles</a:t>
             </a:r>
           </a:p>
           <a:p>
             <a:pPr lvl="1"/>
             <a:r>
-              <a:rPr lang="en-US"/>
+              <a:rPr lang="en-US" smtClean="0"/>
               <a:t>Second level</a:t>
             </a:r>
           </a:p>
           <a:p>
             <a:pPr lvl="2"/>
             <a:r>
-              <a:rPr lang="en-US"/>
+              <a:rPr lang="en-US" smtClean="0"/>
               <a:t>Third level</a:t>
             </a:r>
           </a:p>
           <a:p>
             <a:pPr lvl="3"/>
             <a:r>
-              <a:rPr lang="en-US"/>
+              <a:rPr lang="en-US" smtClean="0"/>
               <a:t>Fourth level</a:t>
             </a:r>
           </a:p>
           <a:p>
             <a:pPr lvl="4"/>
             <a:r>
-              <a:rPr lang="en-US"/>
+              <a:rPr lang="en-US" smtClean="0"/>
               <a:t>Fifth level</a:t>
             </a:r>
+            <a:endParaRPr lang="en-US"/>
           </a:p>
         </p:txBody>
       </p:sp>
@@ -828,7 +821,7 @@
           <a:p>
             <a:fld id="{5BCAD085-E8A6-8845-BD4E-CB4CCA059FC4}" type="datetimeFigureOut">
               <a:rPr lang="en-US" smtClean="0"/>
-              <a:t>7/22/26</a:t>
+              <a:t>1/27/13</a:t>
             </a:fld>
             <a:endParaRPr lang="en-US"/>
           </a:p>
@@ -870,7 +863,7 @@
           <a:p>
             <a:fld id="{C1FF6DA9-008F-8B48-92A6-B652298478BF}" type="slidenum">
               <a:rPr lang="en-US" smtClean="0"/>
-              <a:t>‹N°›</a:t>
+              <a:t>‹#›</a:t>
             </a:fld>
             <a:endParaRPr lang="en-US"/>
           </a:p>
@@ -931,9 +924,10 @@
           </a:lstStyle>
           <a:p>
             <a:r>
-              <a:rPr lang="en-US"/>
+              <a:rPr lang="en-US" smtClean="0"/>
               <a:t>Click to edit Master title style</a:t>
             </a:r>
+            <a:endParaRPr lang="en-US"/>
           </a:p>
         </p:txBody>
       </p:sp>
@@ -1050,7 +1044,7 @@
           <a:p>
             <a:pPr lvl="0"/>
             <a:r>
-              <a:rPr lang="en-US"/>
+              <a:rPr lang="en-US" smtClean="0"/>
               <a:t>Click to edit Master text styles</a:t>
             </a:r>
           </a:p>
@@ -1073,7 +1067,7 @@
           <a:p>
             <a:fld id="{5BCAD085-E8A6-8845-BD4E-CB4CCA059FC4}" type="datetimeFigureOut">
               <a:rPr lang="en-US" smtClean="0"/>
-              <a:t>7/22/26</a:t>
+              <a:t>1/27/13</a:t>
             </a:fld>
             <a:endParaRPr lang="en-US"/>
           </a:p>
@@ -1115,7 +1109,7 @@
           <a:p>
             <a:fld id="{C1FF6DA9-008F-8B48-92A6-B652298478BF}" type="slidenum">
               <a:rPr lang="en-US" smtClean="0"/>
-              <a:t>‹N°›</a:t>
+              <a:t>‹#›</a:t>
             </a:fld>
             <a:endParaRPr lang="en-US"/>
           </a:p>
@@ -1167,9 +1161,10 @@
           <a:lstStyle/>
           <a:p>
             <a:r>
-              <a:rPr lang="en-US"/>
+              <a:rPr lang="en-US" smtClean="0"/>
               <a:t>Click to edit Master title style</a:t>
             </a:r>
+            <a:endParaRPr lang="en-US"/>
           </a:p>
         </p:txBody>
       </p:sp>
@@ -1223,37 +1218,38 @@
           <a:p>
             <a:pPr lvl="0"/>
             <a:r>
-              <a:rPr lang="en-US"/>
+              <a:rPr lang="en-US" smtClean="0"/>
               <a:t>Click to edit Master text styles</a:t>
             </a:r>
           </a:p>
           <a:p>
             <a:pPr lvl="1"/>
             <a:r>
-              <a:rPr lang="en-US"/>
+              <a:rPr lang="en-US" smtClean="0"/>
               <a:t>Second level</a:t>
             </a:r>
           </a:p>
           <a:p>
             <a:pPr lvl="2"/>
             <a:r>
-              <a:rPr lang="en-US"/>
+              <a:rPr lang="en-US" smtClean="0"/>
               <a:t>Third level</a:t>
             </a:r>
           </a:p>
           <a:p>
             <a:pPr lvl="3"/>
             <a:r>
-              <a:rPr lang="en-US"/>
+              <a:rPr lang="en-US" smtClean="0"/>
               <a:t>Fourth level</a:t>
             </a:r>
           </a:p>
           <a:p>
             <a:pPr lvl="4"/>
             <a:r>
-              <a:rPr lang="en-US"/>
+              <a:rPr lang="en-US" smtClean="0"/>
               <a:t>Fifth level</a:t>
             </a:r>
+            <a:endParaRPr lang="en-US"/>
           </a:p>
         </p:txBody>
       </p:sp>
@@ -1307,37 +1303,38 @@
           <a:p>
             <a:pPr lvl="0"/>
             <a:r>
-              <a:rPr lang="en-US"/>
+              <a:rPr lang="en-US" smtClean="0"/>
               <a:t>Click to edit Master text styles</a:t>
             </a:r>
           </a:p>
           <a:p>
             <a:pPr lvl="1"/>
             <a:r>
-              <a:rPr lang="en-US"/>
+              <a:rPr lang="en-US" smtClean="0"/>
               <a:t>Second level</a:t>
             </a:r>
           </a:p>
           <a:p>
             <a:pPr lvl="2"/>
             <a:r>
-              <a:rPr lang="en-US"/>
+              <a:rPr lang="en-US" smtClean="0"/>
               <a:t>Third level</a:t>
             </a:r>
           </a:p>
           <a:p>
             <a:pPr lvl="3"/>
             <a:r>
-              <a:rPr lang="en-US"/>
+              <a:rPr lang="en-US" smtClean="0"/>
               <a:t>Fourth level</a:t>
             </a:r>
           </a:p>
           <a:p>
             <a:pPr lvl="4"/>
             <a:r>
-              <a:rPr lang="en-US"/>
+              <a:rPr lang="en-US" smtClean="0"/>
               <a:t>Fifth level</a:t>
             </a:r>
+            <a:endParaRPr lang="en-US"/>
           </a:p>
         </p:txBody>
       </p:sp>
@@ -1358,7 +1355,7 @@
           <a:p>
             <a:fld id="{5BCAD085-E8A6-8845-BD4E-CB4CCA059FC4}" type="datetimeFigureOut">
               <a:rPr lang="en-US" smtClean="0"/>
-              <a:t>7/22/26</a:t>
+              <a:t>1/27/13</a:t>
             </a:fld>
             <a:endParaRPr lang="en-US"/>
           </a:p>
@@ -1400,7 +1397,7 @@
           <a:p>
             <a:fld id="{C1FF6DA9-008F-8B48-92A6-B652298478BF}" type="slidenum">
               <a:rPr lang="en-US" smtClean="0"/>
-              <a:t>‹N°›</a:t>
+              <a:t>‹#›</a:t>
             </a:fld>
             <a:endParaRPr lang="en-US"/>
           </a:p>
@@ -1456,9 +1453,10 @@
           </a:lstStyle>
           <a:p>
             <a:r>
-              <a:rPr lang="en-US"/>
+              <a:rPr lang="en-US" smtClean="0"/>
               <a:t>Click to edit Master title style</a:t>
             </a:r>
+            <a:endParaRPr lang="en-US"/>
           </a:p>
         </p:txBody>
       </p:sp>
@@ -1521,7 +1519,7 @@
           <a:p>
             <a:pPr lvl="0"/>
             <a:r>
-              <a:rPr lang="en-US"/>
+              <a:rPr lang="en-US" smtClean="0"/>
               <a:t>Click to edit Master text styles</a:t>
             </a:r>
           </a:p>
@@ -1577,37 +1575,38 @@
           <a:p>
             <a:pPr lvl="0"/>
             <a:r>
-              <a:rPr lang="en-US"/>
+              <a:rPr lang="en-US" smtClean="0"/>
               <a:t>Click to edit Master text styles</a:t>
             </a:r>
           </a:p>
           <a:p>
             <a:pPr lvl="1"/>
             <a:r>
-              <a:rPr lang="en-US"/>
+              <a:rPr lang="en-US" smtClean="0"/>
               <a:t>Second level</a:t>
             </a:r>
           </a:p>
           <a:p>
             <a:pPr lvl="2"/>
             <a:r>
-              <a:rPr lang="en-US"/>
+              <a:rPr lang="en-US" smtClean="0"/>
               <a:t>Third level</a:t>
             </a:r>
           </a:p>
           <a:p>
             <a:pPr lvl="3"/>
             <a:r>
-              <a:rPr lang="en-US"/>
+              <a:rPr lang="en-US" smtClean="0"/>
               <a:t>Fourth level</a:t>
             </a:r>
           </a:p>
           <a:p>
             <a:pPr lvl="4"/>
             <a:r>
-              <a:rPr lang="en-US"/>
+              <a:rPr lang="en-US" smtClean="0"/>
               <a:t>Fifth level</a:t>
             </a:r>
+            <a:endParaRPr lang="en-US"/>
           </a:p>
         </p:txBody>
       </p:sp>
@@ -1670,7 +1669,7 @@
           <a:p>
             <a:pPr lvl="0"/>
             <a:r>
-              <a:rPr lang="en-US"/>
+              <a:rPr lang="en-US" smtClean="0"/>
               <a:t>Click to edit Master text styles</a:t>
             </a:r>
           </a:p>
@@ -1726,37 +1725,38 @@
           <a:p>
             <a:pPr lvl="0"/>
             <a:r>
-              <a:rPr lang="en-US"/>
+              <a:rPr lang="en-US" smtClean="0"/>
               <a:t>Click to edit Master text styles</a:t>
             </a:r>
           </a:p>
           <a:p>
             <a:pPr lvl="1"/>
             <a:r>
-              <a:rPr lang="en-US"/>
+              <a:rPr lang="en-US" smtClean="0"/>
               <a:t>Second level</a:t>
             </a:r>
           </a:p>
           <a:p>
             <a:pPr lvl="2"/>
             <a:r>
-              <a:rPr lang="en-US"/>
+              <a:rPr lang="en-US" smtClean="0"/>
               <a:t>Third level</a:t>
             </a:r>
           </a:p>
           <a:p>
             <a:pPr lvl="3"/>
             <a:r>
-              <a:rPr lang="en-US"/>
+              <a:rPr lang="en-US" smtClean="0"/>
               <a:t>Fourth level</a:t>
             </a:r>
           </a:p>
           <a:p>
             <a:pPr lvl="4"/>
             <a:r>
-              <a:rPr lang="en-US"/>
+              <a:rPr lang="en-US" smtClean="0"/>
               <a:t>Fifth level</a:t>
             </a:r>
+            <a:endParaRPr lang="en-US"/>
           </a:p>
         </p:txBody>
       </p:sp>
@@ -1777,7 +1777,7 @@
           <a:p>
             <a:fld id="{5BCAD085-E8A6-8845-BD4E-CB4CCA059FC4}" type="datetimeFigureOut">
               <a:rPr lang="en-US" smtClean="0"/>
-              <a:t>7/22/26</a:t>
+              <a:t>1/27/13</a:t>
             </a:fld>
             <a:endParaRPr lang="en-US"/>
           </a:p>
@@ -1819,7 +1819,7 @@
           <a:p>
             <a:fld id="{C1FF6DA9-008F-8B48-92A6-B652298478BF}" type="slidenum">
               <a:rPr lang="en-US" smtClean="0"/>
-              <a:t>‹N°›</a:t>
+              <a:t>‹#›</a:t>
             </a:fld>
             <a:endParaRPr lang="en-US"/>
           </a:p>
@@ -1871,9 +1871,10 @@
           <a:lstStyle/>
           <a:p>
             <a:r>
-              <a:rPr lang="en-US"/>
+              <a:rPr lang="en-US" smtClean="0"/>
               <a:t>Click to edit Master title style</a:t>
             </a:r>
+            <a:endParaRPr lang="en-US"/>
           </a:p>
         </p:txBody>
       </p:sp>
@@ -1894,7 +1895,7 @@
           <a:p>
             <a:fld id="{5BCAD085-E8A6-8845-BD4E-CB4CCA059FC4}" type="datetimeFigureOut">
               <a:rPr lang="en-US" smtClean="0"/>
-              <a:t>7/22/26</a:t>
+              <a:t>1/27/13</a:t>
             </a:fld>
             <a:endParaRPr lang="en-US"/>
           </a:p>
@@ -1936,7 +1937,7 @@
           <a:p>
             <a:fld id="{C1FF6DA9-008F-8B48-92A6-B652298478BF}" type="slidenum">
               <a:rPr lang="en-US" smtClean="0"/>
-              <a:t>‹N°›</a:t>
+              <a:t>‹#›</a:t>
             </a:fld>
             <a:endParaRPr lang="en-US"/>
           </a:p>
@@ -1989,7 +1990,7 @@
           <a:p>
             <a:fld id="{5BCAD085-E8A6-8845-BD4E-CB4CCA059FC4}" type="datetimeFigureOut">
               <a:rPr lang="en-US" smtClean="0"/>
-              <a:t>7/22/26</a:t>
+              <a:t>1/27/13</a:t>
             </a:fld>
             <a:endParaRPr lang="en-US"/>
           </a:p>
@@ -2031,7 +2032,7 @@
           <a:p>
             <a:fld id="{C1FF6DA9-008F-8B48-92A6-B652298478BF}" type="slidenum">
               <a:rPr lang="en-US" smtClean="0"/>
-              <a:t>‹N°›</a:t>
+              <a:t>‹#›</a:t>
             </a:fld>
             <a:endParaRPr lang="en-US"/>
           </a:p>
@@ -2092,9 +2093,10 @@
           </a:lstStyle>
           <a:p>
             <a:r>
-              <a:rPr lang="en-US"/>
+              <a:rPr lang="en-US" smtClean="0"/>
               <a:t>Click to edit Master title style</a:t>
             </a:r>
+            <a:endParaRPr lang="en-US"/>
           </a:p>
         </p:txBody>
       </p:sp>
@@ -2148,37 +2150,38 @@
           <a:p>
             <a:pPr lvl="0"/>
             <a:r>
-              <a:rPr lang="en-US"/>
+              <a:rPr lang="en-US" smtClean="0"/>
               <a:t>Click to edit Master text styles</a:t>
             </a:r>
           </a:p>
           <a:p>
             <a:pPr lvl="1"/>
             <a:r>
-              <a:rPr lang="en-US"/>
+              <a:rPr lang="en-US" smtClean="0"/>
               <a:t>Second level</a:t>
             </a:r>
           </a:p>
           <a:p>
             <a:pPr lvl="2"/>
             <a:r>
-              <a:rPr lang="en-US"/>
+              <a:rPr lang="en-US" smtClean="0"/>
               <a:t>Third level</a:t>
             </a:r>
           </a:p>
           <a:p>
             <a:pPr lvl="3"/>
             <a:r>
-              <a:rPr lang="en-US"/>
+              <a:rPr lang="en-US" smtClean="0"/>
               <a:t>Fourth level</a:t>
             </a:r>
           </a:p>
           <a:p>
             <a:pPr lvl="4"/>
             <a:r>
-              <a:rPr lang="en-US"/>
+              <a:rPr lang="en-US" smtClean="0"/>
               <a:t>Fifth level</a:t>
             </a:r>
+            <a:endParaRPr lang="en-US"/>
           </a:p>
         </p:txBody>
       </p:sp>
@@ -2241,7 +2244,7 @@
           <a:p>
             <a:pPr lvl="0"/>
             <a:r>
-              <a:rPr lang="en-US"/>
+              <a:rPr lang="en-US" smtClean="0"/>
               <a:t>Click to edit Master text styles</a:t>
             </a:r>
           </a:p>
@@ -2264,7 +2267,7 @@
           <a:p>
             <a:fld id="{5BCAD085-E8A6-8845-BD4E-CB4CCA059FC4}" type="datetimeFigureOut">
               <a:rPr lang="en-US" smtClean="0"/>
-              <a:t>7/22/26</a:t>
+              <a:t>1/27/13</a:t>
             </a:fld>
             <a:endParaRPr lang="en-US"/>
           </a:p>
@@ -2306,7 +2309,7 @@
           <a:p>
             <a:fld id="{C1FF6DA9-008F-8B48-92A6-B652298478BF}" type="slidenum">
               <a:rPr lang="en-US" smtClean="0"/>
-              <a:t>‹N°›</a:t>
+              <a:t>‹#›</a:t>
             </a:fld>
             <a:endParaRPr lang="en-US"/>
           </a:p>
@@ -2367,9 +2370,10 @@
           </a:lstStyle>
           <a:p>
             <a:r>
-              <a:rPr lang="en-US"/>
+              <a:rPr lang="en-US" smtClean="0"/>
               <a:t>Click to edit Master title style</a:t>
             </a:r>
+            <a:endParaRPr lang="en-US"/>
           </a:p>
         </p:txBody>
       </p:sp>
@@ -2493,7 +2497,7 @@
           <a:p>
             <a:pPr lvl="0"/>
             <a:r>
-              <a:rPr lang="en-US"/>
+              <a:rPr lang="en-US" smtClean="0"/>
               <a:t>Click to edit Master text styles</a:t>
             </a:r>
           </a:p>
@@ -2516,7 +2520,7 @@
           <a:p>
             <a:fld id="{5BCAD085-E8A6-8845-BD4E-CB4CCA059FC4}" type="datetimeFigureOut">
               <a:rPr lang="en-US" smtClean="0"/>
-              <a:t>7/22/26</a:t>
+              <a:t>1/27/13</a:t>
             </a:fld>
             <a:endParaRPr lang="en-US"/>
           </a:p>
@@ -2558,7 +2562,7 @@
           <a:p>
             <a:fld id="{C1FF6DA9-008F-8B48-92A6-B652298478BF}" type="slidenum">
               <a:rPr lang="en-US" smtClean="0"/>
-              <a:t>‹N°›</a:t>
+              <a:t>‹#›</a:t>
             </a:fld>
             <a:endParaRPr lang="en-US"/>
           </a:p>
@@ -2625,9 +2629,10 @@
           <a:lstStyle/>
           <a:p>
             <a:r>
-              <a:rPr lang="en-US"/>
+              <a:rPr lang="en-US" smtClean="0"/>
               <a:t>Click to edit Master title style</a:t>
             </a:r>
+            <a:endParaRPr lang="en-US"/>
           </a:p>
         </p:txBody>
       </p:sp>
@@ -2658,37 +2663,38 @@
           <a:p>
             <a:pPr lvl="0"/>
             <a:r>
-              <a:rPr lang="en-US"/>
+              <a:rPr lang="en-US" smtClean="0"/>
               <a:t>Click to edit Master text styles</a:t>
             </a:r>
           </a:p>
           <a:p>
             <a:pPr lvl="1"/>
             <a:r>
-              <a:rPr lang="en-US"/>
+              <a:rPr lang="en-US" smtClean="0"/>
               <a:t>Second level</a:t>
             </a:r>
           </a:p>
           <a:p>
             <a:pPr lvl="2"/>
             <a:r>
-              <a:rPr lang="en-US"/>
+              <a:rPr lang="en-US" smtClean="0"/>
               <a:t>Third level</a:t>
             </a:r>
           </a:p>
           <a:p>
             <a:pPr lvl="3"/>
             <a:r>
-              <a:rPr lang="en-US"/>
+              <a:rPr lang="en-US" smtClean="0"/>
               <a:t>Fourth level</a:t>
             </a:r>
           </a:p>
           <a:p>
             <a:pPr lvl="4"/>
             <a:r>
-              <a:rPr lang="en-US"/>
+              <a:rPr lang="en-US" smtClean="0"/>
               <a:t>Fifth level</a:t>
             </a:r>
+            <a:endParaRPr lang="en-US"/>
           </a:p>
         </p:txBody>
       </p:sp>
@@ -2727,7 +2733,7 @@
           <a:p>
             <a:fld id="{5BCAD085-E8A6-8845-BD4E-CB4CCA059FC4}" type="datetimeFigureOut">
               <a:rPr lang="en-US" smtClean="0"/>
-              <a:t>7/22/26</a:t>
+              <a:t>1/27/13</a:t>
             </a:fld>
             <a:endParaRPr lang="en-US"/>
           </a:p>
@@ -2805,7 +2811,7 @@
           <a:p>
             <a:fld id="{C1FF6DA9-008F-8B48-92A6-B652298478BF}" type="slidenum">
               <a:rPr lang="en-US" smtClean="0"/>
-              <a:t>‹N°›</a:t>
+              <a:t>‹#›</a:t>
             </a:fld>
             <a:endParaRPr lang="en-US"/>
           </a:p>
@@ -3086,7 +3092,7 @@
 </file>
 
 <file path=ppt/slides/slide1.xml><?xml version="1.0" encoding="utf-8"?>
-<p:sld xmlns:a="http://schemas.openxmlformats.org/drawingml/2006/main" xmlns:r="http://schemas.openxmlformats.org/officeDocument/2006/relationships" xmlns:p="http://schemas.openxmlformats.org/presentationml/2006/main">
+<p:sld xmlns:a="http://schemas.openxmlformats.org/drawingml/2006/main" xmlns:p="http://schemas.openxmlformats.org/presentationml/2006/main" xmlns:r="http://schemas.openxmlformats.org/officeDocument/2006/relationships">
   <p:cSld>
     <p:bg>
       <p:bgPr>
@@ -3102,14 +3108,7 @@
         <p:cNvGrpSpPr/>
         <p:nvPr/>
       </p:nvGrpSpPr>
-      <p:grpSpPr>
-        <a:xfrm>
-          <a:off x="0" y="0"/>
-          <a:ext cx="0" cy="0"/>
-          <a:chOff x="0" y="0"/>
-          <a:chExt cx="0" cy="0"/>
-        </a:xfrm>
-      </p:grpSpPr>
+      <p:grpSpPr/>
       <p:sp>
         <p:nvSpPr>
           <p:cNvPr id="2" name="Rectangle 1"/>
@@ -3151,7 +3150,6 @@
           <a:lstStyle/>
           <a:p>
             <a:pPr algn="ctr"/>
-            <a:endParaRPr/>
           </a:p>
         </p:txBody>
       </p:sp>
@@ -3196,7 +3194,6 @@
           <a:lstStyle/>
           <a:p>
             <a:pPr algn="ctr"/>
-            <a:endParaRPr/>
           </a:p>
         </p:txBody>
       </p:sp>
@@ -3346,7 +3343,6 @@
           <a:lstStyle/>
           <a:p>
             <a:pPr algn="ctr"/>
-            <a:endParaRPr/>
           </a:p>
         </p:txBody>
       </p:sp>
@@ -3359,7 +3355,7 @@
         <p:spPr>
           <a:xfrm>
             <a:off x="914400" y="4480560"/>
-            <a:ext cx="10332720" cy="700576"/>
+            <a:ext cx="10332720" cy="1005840"/>
           </a:xfrm>
           <a:prstGeom prst="rect">
             <a:avLst/>
@@ -3378,47 +3374,14 @@
               </a:lnSpc>
             </a:pPr>
             <a:r>
-              <a:rPr sz="1600" b="0" i="0" dirty="0" err="1">
+              <a:rPr sz="1600" b="0" i="0">
                 <a:solidFill>
                   <a:srgbClr val="000000"/>
                 </a:solidFill>
                 <a:latin typeface="Times New Roman"/>
               </a:rPr>
-              <a:t>Développeur</a:t>
-            </a:r>
-            <a:r>
-              <a:rPr sz="1600" b="0" i="0" dirty="0">
-                <a:solidFill>
-                  <a:srgbClr val="000000"/>
-                </a:solidFill>
-                <a:latin typeface="Times New Roman"/>
-              </a:rPr>
-              <a:t> 1 : </a:t>
-            </a:r>
-            <a:r>
-              <a:rPr lang="fr-FR" sz="1600" b="0" i="0" dirty="0" err="1">
-                <a:solidFill>
-                  <a:srgbClr val="000000"/>
-                </a:solidFill>
-                <a:latin typeface="Times New Roman"/>
-              </a:rPr>
-              <a:t>Adodoh</a:t>
-            </a:r>
-            <a:r>
-              <a:rPr lang="fr-FR" sz="1600" b="0" i="0" dirty="0">
-                <a:solidFill>
-                  <a:srgbClr val="000000"/>
-                </a:solidFill>
-                <a:latin typeface="Times New Roman"/>
-              </a:rPr>
-              <a:t> Abraham</a:t>
-            </a:r>
-            <a:endParaRPr sz="1600" b="0" i="0" dirty="0">
-              <a:solidFill>
-                <a:srgbClr val="000000"/>
-              </a:solidFill>
-              <a:latin typeface="Times New Roman"/>
-            </a:endParaRPr>
+              <a:t>Développeur 1 : [Nom Prénom]</a:t>
+            </a:r>
           </a:p>
           <a:p>
             <a:pPr algn="ctr">
@@ -3427,40 +3390,29 @@
               </a:lnSpc>
             </a:pPr>
             <a:r>
-              <a:rPr sz="1600" b="0" i="0" dirty="0" err="1">
+              <a:rPr sz="1600" b="0" i="0">
                 <a:solidFill>
                   <a:srgbClr val="000000"/>
                 </a:solidFill>
                 <a:latin typeface="Times New Roman"/>
               </a:rPr>
-              <a:t>Développeur</a:t>
-            </a:r>
-            <a:r>
-              <a:rPr sz="1600" b="0" i="0" dirty="0">
+              <a:t>Développeur 2 : [Nom Prénom]</a:t>
+            </a:r>
+          </a:p>
+          <a:p>
+            <a:pPr algn="ctr">
+              <a:lnSpc>
+                <a:spcPct val="130000"/>
+              </a:lnSpc>
+            </a:pPr>
+            <a:r>
+              <a:rPr sz="1600" b="0" i="0">
                 <a:solidFill>
                   <a:srgbClr val="000000"/>
                 </a:solidFill>
                 <a:latin typeface="Times New Roman"/>
               </a:rPr>
-              <a:t> 2 : [Nom </a:t>
-            </a:r>
-            <a:r>
-              <a:rPr sz="1600" b="0" i="0" dirty="0" err="1">
-                <a:solidFill>
-                  <a:srgbClr val="000000"/>
-                </a:solidFill>
-                <a:latin typeface="Times New Roman"/>
-              </a:rPr>
-              <a:t>Prénom</a:t>
-            </a:r>
-            <a:r>
-              <a:rPr sz="1600" b="0" i="0" dirty="0">
-                <a:solidFill>
-                  <a:srgbClr val="000000"/>
-                </a:solidFill>
-                <a:latin typeface="Times New Roman"/>
-              </a:rPr>
-              <a:t>]</a:t>
+              <a:t>Développeur 3 : [Nom Prénom]</a:t>
             </a:r>
           </a:p>
         </p:txBody>
@@ -3509,7 +3461,7 @@
 </file>
 
 <file path=ppt/slides/slide10.xml><?xml version="1.0" encoding="utf-8"?>
-<p:sld xmlns:a="http://schemas.openxmlformats.org/drawingml/2006/main" xmlns:r="http://schemas.openxmlformats.org/officeDocument/2006/relationships" xmlns:p="http://schemas.openxmlformats.org/presentationml/2006/main">
+<p:sld xmlns:a="http://schemas.openxmlformats.org/drawingml/2006/main" xmlns:p="http://schemas.openxmlformats.org/presentationml/2006/main" xmlns:r="http://schemas.openxmlformats.org/officeDocument/2006/relationships">
   <p:cSld>
     <p:bg>
       <p:bgPr>
@@ -3525,14 +3477,7 @@
         <p:cNvGrpSpPr/>
         <p:nvPr/>
       </p:nvGrpSpPr>
-      <p:grpSpPr>
-        <a:xfrm>
-          <a:off x="0" y="0"/>
-          <a:ext cx="0" cy="0"/>
-          <a:chOff x="0" y="0"/>
-          <a:chExt cx="0" cy="0"/>
-        </a:xfrm>
-      </p:grpSpPr>
+      <p:grpSpPr/>
       <p:sp>
         <p:nvSpPr>
           <p:cNvPr id="2" name="TextBox 1"/>
@@ -3563,7 +3508,7 @@
                 </a:solidFill>
                 <a:latin typeface="Times New Roman"/>
               </a:rPr>
-              <a:t>APPLICATION</a:t>
+              <a:t>BASE DE DONNÉES</a:t>
             </a:r>
           </a:p>
         </p:txBody>
@@ -3598,7 +3543,7 @@
                 </a:solidFill>
                 <a:latin typeface="Times New Roman"/>
               </a:rPr>
-              <a:t>Sécurité</a:t>
+              <a:t>Aperçu réel de la base de données</a:t>
             </a:r>
           </a:p>
         </p:txBody>
@@ -3644,7 +3589,6 @@
           <a:lstStyle/>
           <a:p>
             <a:pPr algn="ctr"/>
-            <a:endParaRPr/>
           </a:p>
         </p:txBody>
       </p:sp>
@@ -3685,14 +3629,203 @@
       </p:sp>
       <p:sp>
         <p:nvSpPr>
-          <p:cNvPr id="6" name="TextBox 5"/>
+          <p:cNvPr id="6" name="Rectangle 5"/>
+          <p:cNvSpPr/>
+          <p:nvPr/>
+        </p:nvSpPr>
+        <p:spPr>
+          <a:xfrm>
+            <a:off x="731520" y="1691640"/>
+            <a:ext cx="6583680" cy="4206240"/>
+          </a:xfrm>
+          <a:prstGeom prst="rect">
+            <a:avLst/>
+          </a:prstGeom>
+          <a:solidFill>
+            <a:srgbClr val="FFFFFF"/>
+          </a:solidFill>
+          <a:ln w="12700">
+            <a:solidFill>
+              <a:srgbClr val="9A9A9A"/>
+            </a:solidFill>
+          </a:ln>
+          <a:effectLst/>
+        </p:spPr>
+        <p:style>
+          <a:lnRef idx="1">
+            <a:schemeClr val="accent1"/>
+          </a:lnRef>
+          <a:fillRef idx="3">
+            <a:schemeClr val="accent1"/>
+          </a:fillRef>
+          <a:effectRef idx="2">
+            <a:schemeClr val="accent1"/>
+          </a:effectRef>
+          <a:fontRef idx="minor">
+            <a:schemeClr val="lt1"/>
+          </a:fontRef>
+        </p:style>
+        <p:txBody>
+          <a:bodyPr rtlCol="0" anchor="ctr" wrap="square" lIns="152400" tIns="127000"/>
+          <a:lstStyle/>
+          <a:p>
+            <a:pPr algn="ctr"/>
+            <a:r>
+              <a:rPr sz="1400">
+                <a:solidFill>
+                  <a:srgbClr val="000000"/>
+                </a:solidFill>
+                <a:latin typeface="Courier New"/>
+              </a:rPr>
+              <a:t>$ mongosh ecole_formation</a:t>
+            </a:r>
+          </a:p>
+          <a:p>
+            <a:r>
+              <a:rPr sz="1400">
+                <a:solidFill>
+                  <a:srgbClr val="000000"/>
+                </a:solidFill>
+                <a:latin typeface="Courier New"/>
+              </a:rPr>
+              <a:t> </a:t>
+            </a:r>
+          </a:p>
+          <a:p>
+            <a:r>
+              <a:rPr sz="1400">
+                <a:solidFill>
+                  <a:srgbClr val="000000"/>
+                </a:solidFill>
+                <a:latin typeface="Courier New"/>
+              </a:rPr>
+              <a:t>test&gt; db.getCollectionNames()</a:t>
+            </a:r>
+          </a:p>
+          <a:p>
+            <a:r>
+              <a:rPr sz="1400">
+                <a:solidFill>
+                  <a:srgbClr val="000000"/>
+                </a:solidFill>
+                <a:latin typeface="Courier New"/>
+              </a:rPr>
+              <a:t>[ 'utilisateurs', 'etudiants', 'formateurs',</a:t>
+            </a:r>
+          </a:p>
+          <a:p>
+            <a:r>
+              <a:rPr sz="1400">
+                <a:solidFill>
+                  <a:srgbClr val="000000"/>
+                </a:solidFill>
+                <a:latin typeface="Courier New"/>
+              </a:rPr>
+              <a:t>  'formations', 'inscriptions' ]</a:t>
+            </a:r>
+          </a:p>
+          <a:p>
+            <a:r>
+              <a:rPr sz="1400">
+                <a:solidFill>
+                  <a:srgbClr val="000000"/>
+                </a:solidFill>
+                <a:latin typeface="Courier New"/>
+              </a:rPr>
+              <a:t> </a:t>
+            </a:r>
+          </a:p>
+          <a:p>
+            <a:r>
+              <a:rPr sz="1400">
+                <a:solidFill>
+                  <a:srgbClr val="000000"/>
+                </a:solidFill>
+                <a:latin typeface="Courier New"/>
+              </a:rPr>
+              <a:t>test&gt; db.etudiants.countDocuments()      100</a:t>
+            </a:r>
+          </a:p>
+          <a:p>
+            <a:r>
+              <a:rPr sz="1400">
+                <a:solidFill>
+                  <a:srgbClr val="000000"/>
+                </a:solidFill>
+                <a:latin typeface="Courier New"/>
+              </a:rPr>
+              <a:t>test&gt; db.formateurs.countDocuments()      20</a:t>
+            </a:r>
+          </a:p>
+          <a:p>
+            <a:r>
+              <a:rPr sz="1400">
+                <a:solidFill>
+                  <a:srgbClr val="000000"/>
+                </a:solidFill>
+                <a:latin typeface="Courier New"/>
+              </a:rPr>
+              <a:t>test&gt; db.formations.countDocuments()      30</a:t>
+            </a:r>
+          </a:p>
+          <a:p>
+            <a:r>
+              <a:rPr sz="1400">
+                <a:solidFill>
+                  <a:srgbClr val="000000"/>
+                </a:solidFill>
+                <a:latin typeface="Courier New"/>
+              </a:rPr>
+              <a:t>test&gt; db.inscriptions.countDocuments()   200</a:t>
+            </a:r>
+          </a:p>
+        </p:txBody>
+      </p:sp>
+      <p:sp>
+        <p:nvSpPr>
+          <p:cNvPr id="7" name="TextBox 6"/>
           <p:cNvSpPr txBox="1"/>
           <p:nvPr/>
         </p:nvSpPr>
         <p:spPr>
           <a:xfrm>
-            <a:off x="731520" y="1691640"/>
-            <a:ext cx="10332720" cy="4114800"/>
+            <a:off x="7589520" y="1828800"/>
+            <a:ext cx="3840480" cy="365760"/>
+          </a:xfrm>
+          <a:prstGeom prst="rect">
+            <a:avLst/>
+          </a:prstGeom>
+          <a:noFill/>
+        </p:spPr>
+        <p:txBody>
+          <a:bodyPr wrap="square" anchor="t">
+            <a:spAutoFit/>
+          </a:bodyPr>
+          <a:lstStyle/>
+          <a:p>
+            <a:pPr algn="l"/>
+            <a:r>
+              <a:rPr sz="1500" b="1" i="0">
+                <a:solidFill>
+                  <a:srgbClr val="1F3C63"/>
+                </a:solidFill>
+                <a:latin typeface="Times New Roman"/>
+              </a:rPr>
+              <a:t>Index et performances</a:t>
+            </a:r>
+          </a:p>
+        </p:txBody>
+      </p:sp>
+      <p:sp>
+        <p:nvSpPr>
+          <p:cNvPr id="8" name="TextBox 7"/>
+          <p:cNvSpPr txBox="1"/>
+          <p:nvPr/>
+        </p:nvSpPr>
+        <p:spPr>
+          <a:xfrm>
+            <a:off x="7589520" y="2286000"/>
+            <a:ext cx="3840480" cy="3474720"/>
           </a:xfrm>
           <a:prstGeom prst="rect">
             <a:avLst/>
@@ -3707,81 +3840,65 @@
           <a:p>
             <a:pPr>
               <a:spcAft>
-                <a:spcPts val="1600"/>
+                <a:spcPts val="1000"/>
               </a:spcAft>
             </a:pPr>
             <a:r>
-              <a:rPr sz="1700">
+              <a:rPr sz="1350">
                 <a:solidFill>
                   <a:srgbClr val="000000"/>
                 </a:solidFill>
                 <a:latin typeface="Times New Roman"/>
               </a:rPr>
-              <a:t>•  Mots de passe hachés (PBKDF2-SHA256, Werkzeug), jamais stockés en clair</a:t>
+              <a:t>•  Email unique (étudiants, formateurs)</a:t>
             </a:r>
           </a:p>
           <a:p>
             <a:pPr>
               <a:spcAft>
-                <a:spcPts val="1600"/>
+                <a:spcPts val="1000"/>
               </a:spcAft>
             </a:pPr>
             <a:r>
-              <a:rPr sz="1700">
+              <a:rPr sz="1350">
                 <a:solidFill>
                   <a:srgbClr val="000000"/>
                 </a:solidFill>
                 <a:latin typeface="Times New Roman"/>
               </a:rPr>
-              <a:t>•  Protection CSRF sur tous les formulaires (Flask-WTF)</a:t>
+              <a:t>•  Index composé (statut, date_debut) sur formations</a:t>
             </a:r>
           </a:p>
           <a:p>
             <a:pPr>
               <a:spcAft>
-                <a:spcPts val="1600"/>
+                <a:spcPts val="1000"/>
               </a:spcAft>
             </a:pPr>
             <a:r>
-              <a:rPr sz="1700">
+              <a:rPr sz="1350">
                 <a:solidFill>
                   <a:srgbClr val="000000"/>
                 </a:solidFill>
                 <a:latin typeface="Times New Roman"/>
               </a:rPr>
-              <a:t>•  Requêtes PyMongo paramétrées : pas d'injection NoSQL possible</a:t>
+              <a:t>•  Index unique partiel sur inscriptions actives</a:t>
             </a:r>
           </a:p>
           <a:p>
             <a:pPr>
               <a:spcAft>
-                <a:spcPts val="1600"/>
+                <a:spcPts val="1000"/>
               </a:spcAft>
             </a:pPr>
             <a:r>
-              <a:rPr sz="1700">
+              <a:rPr sz="1350">
                 <a:solidFill>
                   <a:srgbClr val="000000"/>
                 </a:solidFill>
                 <a:latin typeface="Times New Roman"/>
               </a:rPr>
-              <a:t>•  Auto-échappement Jinja2 : protection XSS systématique</a:t>
-            </a:r>
-          </a:p>
-          <a:p>
-            <a:pPr>
-              <a:spcAft>
-                <a:spcPts val="1600"/>
-              </a:spcAft>
-            </a:pPr>
-            <a:r>
-              <a:rPr sz="1700">
-                <a:solidFill>
-                  <a:srgbClr val="000000"/>
-                </a:solidFill>
-                <a:latin typeface="Times New Roman"/>
-              </a:rPr>
-              <a:t>•  Autorisations par rôle (@roles_required) + vérification de propriété (formateur / étudiant)</a:t>
+              <a:t>•  explain() : COLLSCAN → IXSCAN après index</a:t>
             </a:r>
           </a:p>
         </p:txBody>
@@ -3795,7 +3912,7 @@
 </file>
 
 <file path=ppt/slides/slide11.xml><?xml version="1.0" encoding="utf-8"?>
-<p:sld xmlns:a="http://schemas.openxmlformats.org/drawingml/2006/main" xmlns:r="http://schemas.openxmlformats.org/officeDocument/2006/relationships" xmlns:p="http://schemas.openxmlformats.org/presentationml/2006/main">
+<p:sld xmlns:a="http://schemas.openxmlformats.org/drawingml/2006/main" xmlns:p="http://schemas.openxmlformats.org/presentationml/2006/main" xmlns:r="http://schemas.openxmlformats.org/officeDocument/2006/relationships">
   <p:cSld>
     <p:bg>
       <p:bgPr>
@@ -3811,14 +3928,7 @@
         <p:cNvGrpSpPr/>
         <p:nvPr/>
       </p:nvGrpSpPr>
-      <p:grpSpPr>
-        <a:xfrm>
-          <a:off x="0" y="0"/>
-          <a:ext cx="0" cy="0"/>
-          <a:chOff x="0" y="0"/>
-          <a:chExt cx="0" cy="0"/>
-        </a:xfrm>
-      </p:grpSpPr>
+      <p:grpSpPr/>
       <p:sp>
         <p:nvSpPr>
           <p:cNvPr id="2" name="TextBox 1"/>
@@ -3849,7 +3959,7 @@
                 </a:solidFill>
                 <a:latin typeface="Times New Roman"/>
               </a:rPr>
-              <a:t>DÉMONSTRATION</a:t>
+              <a:t>APPLICATION</a:t>
             </a:r>
           </a:p>
         </p:txBody>
@@ -3884,7 +3994,7 @@
                 </a:solidFill>
                 <a:latin typeface="Times New Roman"/>
               </a:rPr>
-              <a:t>Aperçu de l'application</a:t>
+              <a:t>Sécurité</a:t>
             </a:r>
           </a:p>
         </p:txBody>
@@ -3930,7 +4040,6 @@
           <a:lstStyle/>
           <a:p>
             <a:pPr algn="ctr"/>
-            <a:endParaRPr/>
           </a:p>
         </p:txBody>
       </p:sp>
@@ -3971,104 +4080,103 @@
       </p:sp>
       <p:sp>
         <p:nvSpPr>
-          <p:cNvPr id="6" name="Rectangle 5"/>
-          <p:cNvSpPr/>
-          <p:nvPr/>
-        </p:nvSpPr>
-        <p:spPr>
-          <a:xfrm>
-            <a:off x="2169160" y="1574800"/>
-            <a:ext cx="6897827" cy="4805680"/>
+          <p:cNvPr id="6" name="TextBox 5"/>
+          <p:cNvSpPr txBox="1"/>
+          <p:nvPr/>
+        </p:nvSpPr>
+        <p:spPr>
+          <a:xfrm>
+            <a:off x="731520" y="1691640"/>
+            <a:ext cx="10332720" cy="4114800"/>
           </a:xfrm>
           <a:prstGeom prst="rect">
             <a:avLst/>
           </a:prstGeom>
           <a:noFill/>
-          <a:ln w="12700">
-            <a:solidFill>
-              <a:srgbClr val="9A9A9A"/>
-            </a:solidFill>
-          </a:ln>
-          <a:effectLst/>
-        </p:spPr>
-        <p:style>
-          <a:lnRef idx="1">
-            <a:schemeClr val="accent1"/>
-          </a:lnRef>
-          <a:fillRef idx="3">
-            <a:schemeClr val="accent1"/>
-          </a:fillRef>
-          <a:effectRef idx="2">
-            <a:schemeClr val="accent1"/>
-          </a:effectRef>
-          <a:fontRef idx="minor">
-            <a:schemeClr val="lt1"/>
-          </a:fontRef>
-        </p:style>
-        <p:txBody>
-          <a:bodyPr rtlCol="0" anchor="ctr"/>
-          <a:lstStyle/>
-          <a:p>
-            <a:pPr algn="ctr"/>
-            <a:endParaRPr/>
-          </a:p>
-        </p:txBody>
-      </p:sp>
-      <p:pic>
-        <p:nvPicPr>
-          <p:cNvPr id="7" name="Picture 6" descr="admin_dashboard_crop.png"/>
-          <p:cNvPicPr>
-            <a:picLocks noChangeAspect="1"/>
-          </p:cNvPicPr>
-          <p:nvPr/>
-        </p:nvPicPr>
-        <p:blipFill>
-          <a:blip r:embed="rId2"/>
-          <a:stretch>
-            <a:fillRect/>
-          </a:stretch>
-        </p:blipFill>
-        <p:spPr>
-          <a:xfrm>
-            <a:off x="2194560" y="1600200"/>
-            <a:ext cx="6847027" cy="4754880"/>
-          </a:xfrm>
-          <a:prstGeom prst="rect">
-            <a:avLst/>
-          </a:prstGeom>
-        </p:spPr>
-      </p:pic>
-      <p:sp>
-        <p:nvSpPr>
-          <p:cNvPr id="8" name="TextBox 7"/>
-          <p:cNvSpPr txBox="1"/>
-          <p:nvPr/>
-        </p:nvSpPr>
-        <p:spPr>
-          <a:xfrm>
-            <a:off x="2194560" y="6431280"/>
-            <a:ext cx="6847027" cy="320040"/>
-          </a:xfrm>
-          <a:prstGeom prst="rect">
-            <a:avLst/>
-          </a:prstGeom>
-          <a:noFill/>
-        </p:spPr>
-        <p:txBody>
-          <a:bodyPr wrap="square" anchor="t">
+        </p:spPr>
+        <p:txBody>
+          <a:bodyPr wrap="square">
             <a:spAutoFit/>
           </a:bodyPr>
           <a:lstStyle/>
           <a:p>
-            <a:pPr algn="ctr"/>
-            <a:r>
-              <a:rPr sz="1200" b="0" i="1">
-                <a:solidFill>
-                  <a:srgbClr val="404040"/>
+            <a:pPr>
+              <a:spcAft>
+                <a:spcPts val="1600"/>
+              </a:spcAft>
+            </a:pPr>
+            <a:r>
+              <a:rPr sz="1700">
+                <a:solidFill>
+                  <a:srgbClr val="000000"/>
                 </a:solidFill>
                 <a:latin typeface="Times New Roman"/>
               </a:rPr>
-              <a:t>Tableau de bord administrateur — statistiques calculées par agrégation MongoDB</a:t>
+              <a:t>•  Mots de passe hachés (PBKDF2-SHA256, Werkzeug), jamais stockés en clair</a:t>
+            </a:r>
+          </a:p>
+          <a:p>
+            <a:pPr>
+              <a:spcAft>
+                <a:spcPts val="1600"/>
+              </a:spcAft>
+            </a:pPr>
+            <a:r>
+              <a:rPr sz="1700">
+                <a:solidFill>
+                  <a:srgbClr val="000000"/>
+                </a:solidFill>
+                <a:latin typeface="Times New Roman"/>
+              </a:rPr>
+              <a:t>•  Protection CSRF sur tous les formulaires (Flask-WTF)</a:t>
+            </a:r>
+          </a:p>
+          <a:p>
+            <a:pPr>
+              <a:spcAft>
+                <a:spcPts val="1600"/>
+              </a:spcAft>
+            </a:pPr>
+            <a:r>
+              <a:rPr sz="1700">
+                <a:solidFill>
+                  <a:srgbClr val="000000"/>
+                </a:solidFill>
+                <a:latin typeface="Times New Roman"/>
+              </a:rPr>
+              <a:t>•  Requêtes PyMongo paramétrées : pas d'injection NoSQL possible</a:t>
+            </a:r>
+          </a:p>
+          <a:p>
+            <a:pPr>
+              <a:spcAft>
+                <a:spcPts val="1600"/>
+              </a:spcAft>
+            </a:pPr>
+            <a:r>
+              <a:rPr sz="1700">
+                <a:solidFill>
+                  <a:srgbClr val="000000"/>
+                </a:solidFill>
+                <a:latin typeface="Times New Roman"/>
+              </a:rPr>
+              <a:t>•  Auto-échappement Jinja2 : protection XSS systématique</a:t>
+            </a:r>
+          </a:p>
+          <a:p>
+            <a:pPr>
+              <a:spcAft>
+                <a:spcPts val="1600"/>
+              </a:spcAft>
+            </a:pPr>
+            <a:r>
+              <a:rPr sz="1700">
+                <a:solidFill>
+                  <a:srgbClr val="000000"/>
+                </a:solidFill>
+                <a:latin typeface="Times New Roman"/>
+              </a:rPr>
+              <a:t>•  Autorisations par rôle (@roles_required) + vérification de propriété (formateur / étudiant)</a:t>
             </a:r>
           </a:p>
         </p:txBody>
@@ -4082,7 +4190,7 @@
 </file>
 
 <file path=ppt/slides/slide12.xml><?xml version="1.0" encoding="utf-8"?>
-<p:sld xmlns:a="http://schemas.openxmlformats.org/drawingml/2006/main" xmlns:r="http://schemas.openxmlformats.org/officeDocument/2006/relationships" xmlns:p="http://schemas.openxmlformats.org/presentationml/2006/main">
+<p:sld xmlns:a="http://schemas.openxmlformats.org/drawingml/2006/main" xmlns:p="http://schemas.openxmlformats.org/presentationml/2006/main" xmlns:r="http://schemas.openxmlformats.org/officeDocument/2006/relationships">
   <p:cSld>
     <p:bg>
       <p:bgPr>
@@ -4098,14 +4206,7 @@
         <p:cNvGrpSpPr/>
         <p:nvPr/>
       </p:nvGrpSpPr>
-      <p:grpSpPr>
-        <a:xfrm>
-          <a:off x="0" y="0"/>
-          <a:ext cx="0" cy="0"/>
-          <a:chOff x="0" y="0"/>
-          <a:chExt cx="0" cy="0"/>
-        </a:xfrm>
-      </p:grpSpPr>
+      <p:grpSpPr/>
       <p:sp>
         <p:nvSpPr>
           <p:cNvPr id="2" name="TextBox 1"/>
@@ -4136,7 +4237,7 @@
                 </a:solidFill>
                 <a:latin typeface="Times New Roman"/>
               </a:rPr>
-              <a:t>ORGANISATION</a:t>
+              <a:t>DÉMONSTRATION</a:t>
             </a:r>
           </a:p>
         </p:txBody>
@@ -4171,7 +4272,7 @@
                 </a:solidFill>
                 <a:latin typeface="Times New Roman"/>
               </a:rPr>
-              <a:t>Répartition du travail — 2 développeurs</a:t>
+              <a:t>Aperçu de l'application</a:t>
             </a:r>
           </a:p>
         </p:txBody>
@@ -4217,7 +4318,6 @@
           <a:lstStyle/>
           <a:p>
             <a:pPr algn="ctr"/>
-            <a:endParaRPr/>
           </a:p>
         </p:txBody>
       </p:sp>
@@ -4252,6 +4352,284 @@
                 <a:latin typeface="Times New Roman"/>
               </a:rPr>
               <a:t>11</a:t>
+            </a:r>
+          </a:p>
+        </p:txBody>
+      </p:sp>
+      <p:sp>
+        <p:nvSpPr>
+          <p:cNvPr id="6" name="Rectangle 5"/>
+          <p:cNvSpPr/>
+          <p:nvPr/>
+        </p:nvSpPr>
+        <p:spPr>
+          <a:xfrm>
+            <a:off x="2169160" y="1574800"/>
+            <a:ext cx="6897827" cy="4805680"/>
+          </a:xfrm>
+          <a:prstGeom prst="rect">
+            <a:avLst/>
+          </a:prstGeom>
+          <a:noFill/>
+          <a:ln w="12700">
+            <a:solidFill>
+              <a:srgbClr val="9A9A9A"/>
+            </a:solidFill>
+          </a:ln>
+          <a:effectLst/>
+        </p:spPr>
+        <p:style>
+          <a:lnRef idx="1">
+            <a:schemeClr val="accent1"/>
+          </a:lnRef>
+          <a:fillRef idx="3">
+            <a:schemeClr val="accent1"/>
+          </a:fillRef>
+          <a:effectRef idx="2">
+            <a:schemeClr val="accent1"/>
+          </a:effectRef>
+          <a:fontRef idx="minor">
+            <a:schemeClr val="lt1"/>
+          </a:fontRef>
+        </p:style>
+        <p:txBody>
+          <a:bodyPr rtlCol="0" anchor="ctr"/>
+          <a:lstStyle/>
+          <a:p>
+            <a:pPr algn="ctr"/>
+          </a:p>
+        </p:txBody>
+      </p:sp>
+      <p:pic>
+        <p:nvPicPr>
+          <p:cNvPr id="7" name="Picture 6" descr="admin_dashboard_crop.png"/>
+          <p:cNvPicPr>
+            <a:picLocks noChangeAspect="1"/>
+          </p:cNvPicPr>
+          <p:nvPr/>
+        </p:nvPicPr>
+        <p:blipFill>
+          <a:blip r:embed="rId2"/>
+          <a:stretch>
+            <a:fillRect/>
+          </a:stretch>
+        </p:blipFill>
+        <p:spPr>
+          <a:xfrm>
+            <a:off x="2194560" y="1600200"/>
+            <a:ext cx="6847027" cy="4754880"/>
+          </a:xfrm>
+          <a:prstGeom prst="rect">
+            <a:avLst/>
+          </a:prstGeom>
+        </p:spPr>
+      </p:pic>
+      <p:sp>
+        <p:nvSpPr>
+          <p:cNvPr id="8" name="TextBox 7"/>
+          <p:cNvSpPr txBox="1"/>
+          <p:nvPr/>
+        </p:nvSpPr>
+        <p:spPr>
+          <a:xfrm>
+            <a:off x="2194560" y="6431280"/>
+            <a:ext cx="6847027" cy="320040"/>
+          </a:xfrm>
+          <a:prstGeom prst="rect">
+            <a:avLst/>
+          </a:prstGeom>
+          <a:noFill/>
+        </p:spPr>
+        <p:txBody>
+          <a:bodyPr wrap="square" anchor="t">
+            <a:spAutoFit/>
+          </a:bodyPr>
+          <a:lstStyle/>
+          <a:p>
+            <a:pPr algn="ctr"/>
+            <a:r>
+              <a:rPr sz="1200" b="0" i="1">
+                <a:solidFill>
+                  <a:srgbClr val="404040"/>
+                </a:solidFill>
+                <a:latin typeface="Times New Roman"/>
+              </a:rPr>
+              <a:t>Tableau de bord administrateur — statistiques calculées par agrégation MongoDB</a:t>
+            </a:r>
+          </a:p>
+        </p:txBody>
+      </p:sp>
+    </p:spTree>
+  </p:cSld>
+  <p:clrMapOvr>
+    <a:masterClrMapping/>
+  </p:clrMapOvr>
+</p:sld>
+</file>
+
+<file path=ppt/slides/slide13.xml><?xml version="1.0" encoding="utf-8"?>
+<p:sld xmlns:a="http://schemas.openxmlformats.org/drawingml/2006/main" xmlns:p="http://schemas.openxmlformats.org/presentationml/2006/main" xmlns:r="http://schemas.openxmlformats.org/officeDocument/2006/relationships">
+  <p:cSld>
+    <p:bg>
+      <p:bgPr>
+        <a:solidFill>
+          <a:srgbClr val="FFFFFF"/>
+        </a:solidFill>
+        <a:effectLst/>
+      </p:bgPr>
+    </p:bg>
+    <p:spTree>
+      <p:nvGrpSpPr>
+        <p:cNvPr id="1" name=""/>
+        <p:cNvGrpSpPr/>
+        <p:nvPr/>
+      </p:nvGrpSpPr>
+      <p:grpSpPr/>
+      <p:sp>
+        <p:nvSpPr>
+          <p:cNvPr id="2" name="TextBox 1"/>
+          <p:cNvSpPr txBox="1"/>
+          <p:nvPr/>
+        </p:nvSpPr>
+        <p:spPr>
+          <a:xfrm>
+            <a:off x="731520" y="365760"/>
+            <a:ext cx="10515600" cy="320040"/>
+          </a:xfrm>
+          <a:prstGeom prst="rect">
+            <a:avLst/>
+          </a:prstGeom>
+          <a:noFill/>
+        </p:spPr>
+        <p:txBody>
+          <a:bodyPr wrap="square" anchor="t">
+            <a:spAutoFit/>
+          </a:bodyPr>
+          <a:lstStyle/>
+          <a:p>
+            <a:pPr algn="l"/>
+            <a:r>
+              <a:rPr sz="1300" b="1" i="0">
+                <a:solidFill>
+                  <a:srgbClr val="1F3C63"/>
+                </a:solidFill>
+                <a:latin typeface="Times New Roman"/>
+              </a:rPr>
+              <a:t>ORGANISATION</a:t>
+            </a:r>
+          </a:p>
+        </p:txBody>
+      </p:sp>
+      <p:sp>
+        <p:nvSpPr>
+          <p:cNvPr id="3" name="TextBox 2"/>
+          <p:cNvSpPr txBox="1"/>
+          <p:nvPr/>
+        </p:nvSpPr>
+        <p:spPr>
+          <a:xfrm>
+            <a:off x="731520" y="658368"/>
+            <a:ext cx="10698480" cy="731520"/>
+          </a:xfrm>
+          <a:prstGeom prst="rect">
+            <a:avLst/>
+          </a:prstGeom>
+          <a:noFill/>
+        </p:spPr>
+        <p:txBody>
+          <a:bodyPr wrap="square" anchor="t">
+            <a:spAutoFit/>
+          </a:bodyPr>
+          <a:lstStyle/>
+          <a:p>
+            <a:pPr algn="l"/>
+            <a:r>
+              <a:rPr sz="2800" b="1" i="0">
+                <a:solidFill>
+                  <a:srgbClr val="000000"/>
+                </a:solidFill>
+                <a:latin typeface="Times New Roman"/>
+              </a:rPr>
+              <a:t>Répartition du travail — 3 développeurs</a:t>
+            </a:r>
+          </a:p>
+        </p:txBody>
+      </p:sp>
+      <p:sp>
+        <p:nvSpPr>
+          <p:cNvPr id="4" name="Rectangle 3"/>
+          <p:cNvSpPr/>
+          <p:nvPr/>
+        </p:nvSpPr>
+        <p:spPr>
+          <a:xfrm>
+            <a:off x="731520" y="1344168"/>
+            <a:ext cx="10698480" cy="15875"/>
+          </a:xfrm>
+          <a:prstGeom prst="rect">
+            <a:avLst/>
+          </a:prstGeom>
+          <a:solidFill>
+            <a:srgbClr val="1F3C63"/>
+          </a:solidFill>
+          <a:ln>
+            <a:noFill/>
+          </a:ln>
+          <a:effectLst/>
+        </p:spPr>
+        <p:style>
+          <a:lnRef idx="1">
+            <a:schemeClr val="accent1"/>
+          </a:lnRef>
+          <a:fillRef idx="3">
+            <a:schemeClr val="accent1"/>
+          </a:fillRef>
+          <a:effectRef idx="2">
+            <a:schemeClr val="accent1"/>
+          </a:effectRef>
+          <a:fontRef idx="minor">
+            <a:schemeClr val="lt1"/>
+          </a:fontRef>
+        </p:style>
+        <p:txBody>
+          <a:bodyPr rtlCol="0" anchor="ctr"/>
+          <a:lstStyle/>
+          <a:p>
+            <a:pPr algn="ctr"/>
+          </a:p>
+        </p:txBody>
+      </p:sp>
+      <p:sp>
+        <p:nvSpPr>
+          <p:cNvPr id="5" name="TextBox 4"/>
+          <p:cNvSpPr txBox="1"/>
+          <p:nvPr/>
+        </p:nvSpPr>
+        <p:spPr>
+          <a:xfrm>
+            <a:off x="11185855" y="6400800"/>
+            <a:ext cx="640080" cy="320040"/>
+          </a:xfrm>
+          <a:prstGeom prst="rect">
+            <a:avLst/>
+          </a:prstGeom>
+          <a:noFill/>
+        </p:spPr>
+        <p:txBody>
+          <a:bodyPr wrap="square" anchor="t">
+            <a:spAutoFit/>
+          </a:bodyPr>
+          <a:lstStyle/>
+          <a:p>
+            <a:pPr algn="r"/>
+            <a:r>
+              <a:rPr sz="1100" b="0" i="0">
+                <a:solidFill>
+                  <a:srgbClr val="404040"/>
+                </a:solidFill>
+                <a:latin typeface="Times New Roman"/>
+              </a:rPr>
+              <a:t>12</a:t>
             </a:r>
           </a:p>
         </p:txBody>
@@ -4265,8 +4643,8 @@
           <p:nvPr/>
         </p:nvGraphicFramePr>
         <p:xfrm>
-          <a:off x="731520" y="1828800"/>
-          <a:ext cx="10332720" cy="2560320"/>
+          <a:off x="731520" y="1737360"/>
+          <a:ext cx="10332720" cy="3703320"/>
         </p:xfrm>
         <a:graphic>
           <a:graphicData uri="http://schemas.openxmlformats.org/drawingml/2006/table">
@@ -4275,29 +4653,17 @@
                 <a:tableStyleId>{5C22544A-7EE6-4342-B048-85BDC9FD1C3A}</a:tableStyleId>
               </a:tblPr>
               <a:tblGrid>
-                <a:gridCol w="2560320">
-                  <a:extLst>
-                    <a:ext uri="{9D8B030D-6E8A-4147-A177-3AD203B41FA5}">
-                      <a16:colId xmlns:a16="http://schemas.microsoft.com/office/drawing/2014/main" val="20000"/>
-                    </a:ext>
-                  </a:extLst>
-                </a:gridCol>
-                <a:gridCol w="7772400">
-                  <a:extLst>
-                    <a:ext uri="{9D8B030D-6E8A-4147-A177-3AD203B41FA5}">
-                      <a16:colId xmlns:a16="http://schemas.microsoft.com/office/drawing/2014/main" val="20001"/>
-                    </a:ext>
-                  </a:extLst>
-                </a:gridCol>
+                <a:gridCol w="2560320"/>
+                <a:gridCol w="7772400"/>
               </a:tblGrid>
-              <a:tr h="1280160">
+              <a:tr h="1234440">
                 <a:tc>
                   <a:txBody>
-                    <a:bodyPr/>
+                    <a:bodyPr wrap="square"/>
                     <a:lstStyle/>
                     <a:p>
                       <a:r>
-                        <a:rPr sz="1450" b="0">
+                        <a:rPr sz="1400" b="0">
                           <a:solidFill>
                             <a:srgbClr val="000000"/>
                           </a:solidFill>
@@ -4315,17 +4681,17 @@
                 </a:tc>
                 <a:tc>
                   <a:txBody>
-                    <a:bodyPr/>
+                    <a:bodyPr wrap="square"/>
                     <a:lstStyle/>
                     <a:p>
                       <a:r>
-                        <a:rPr sz="1450" b="0">
+                        <a:rPr sz="1400" b="0">
                           <a:solidFill>
                             <a:srgbClr val="000000"/>
                           </a:solidFill>
                           <a:latin typeface="Times New Roman"/>
                         </a:rPr>
-                        <a:t>Backend &amp; base de données : modélisation MongoDB, app/models/, peuplement (Faker), index, agrégations</a:t>
+                        <a:t>Base de données &amp; backend : modélisation MongoDB, app/models/, peuplement (Faker), index, agrégations et performances</a:t>
                       </a:r>
                     </a:p>
                   </a:txBody>
@@ -4335,20 +4701,15 @@
                     </a:solidFill>
                   </a:tcPr>
                 </a:tc>
-                <a:extLst>
-                  <a:ext uri="{0D108BD9-81ED-4DB2-BD59-A6C34878D82A}">
-                    <a16:rowId xmlns:a16="http://schemas.microsoft.com/office/drawing/2014/main" val="10000"/>
-                  </a:ext>
-                </a:extLst>
               </a:tr>
-              <a:tr h="1280160">
+              <a:tr h="1234440">
                 <a:tc>
                   <a:txBody>
-                    <a:bodyPr/>
+                    <a:bodyPr wrap="square"/>
                     <a:lstStyle/>
                     <a:p>
                       <a:r>
-                        <a:rPr sz="1450" b="0">
+                        <a:rPr sz="1400" b="0">
                           <a:solidFill>
                             <a:srgbClr val="000000"/>
                           </a:solidFill>
@@ -4366,17 +4727,17 @@
                 </a:tc>
                 <a:tc>
                   <a:txBody>
-                    <a:bodyPr/>
+                    <a:bodyPr wrap="square"/>
                     <a:lstStyle/>
                     <a:p>
                       <a:r>
-                        <a:rPr sz="1450" b="0">
+                        <a:rPr sz="1400" b="0">
                           <a:solidFill>
                             <a:srgbClr val="000000"/>
                           </a:solidFill>
                           <a:latin typeface="Times New Roman"/>
                         </a:rPr>
-                        <a:t>Routes, sécurité &amp; interface : app/routes/, app/forms/, authentification, rôles, gabarits Jinja2</a:t>
+                        <a:t>Architecture applicative : app/routes/, app/forms/, authentification, rôles, règles de gestion, sécurité</a:t>
                       </a:r>
                     </a:p>
                   </a:txBody>
@@ -4386,11 +4747,52 @@
                     </a:solidFill>
                   </a:tcPr>
                 </a:tc>
-                <a:extLst>
-                  <a:ext uri="{0D108BD9-81ED-4DB2-BD59-A6C34878D82A}">
-                    <a16:rowId xmlns:a16="http://schemas.microsoft.com/office/drawing/2014/main" val="10001"/>
-                  </a:ext>
-                </a:extLst>
+              </a:tr>
+              <a:tr h="1234440">
+                <a:tc>
+                  <a:txBody>
+                    <a:bodyPr wrap="square"/>
+                    <a:lstStyle/>
+                    <a:p>
+                      <a:r>
+                        <a:rPr sz="1400" b="0">
+                          <a:solidFill>
+                            <a:srgbClr val="000000"/>
+                          </a:solidFill>
+                          <a:latin typeface="Times New Roman"/>
+                        </a:rPr>
+                        <a:t>Développeur 3</a:t>
+                      </a:r>
+                    </a:p>
+                  </a:txBody>
+                  <a:tcPr marL="101600" marR="101600" marT="50800" marB="50800" anchor="ctr">
+                    <a:solidFill>
+                      <a:srgbClr val="EAEAEA"/>
+                    </a:solidFill>
+                  </a:tcPr>
+                </a:tc>
+                <a:tc>
+                  <a:txBody>
+                    <a:bodyPr wrap="square"/>
+                    <a:lstStyle/>
+                    <a:p>
+                      <a:r>
+                        <a:rPr sz="1400" b="0">
+                          <a:solidFill>
+                            <a:srgbClr val="000000"/>
+                          </a:solidFill>
+                          <a:latin typeface="Times New Roman"/>
+                        </a:rPr>
+                        <a:t>Interface &amp; statistiques : gabarits Jinja2/Bootstrap, tableau de bord et graphiques, tests fonctionnels, documentation</a:t>
+                      </a:r>
+                    </a:p>
+                  </a:txBody>
+                  <a:tcPr marL="101600" marR="101600" marT="50800" marB="50800" anchor="ctr">
+                    <a:solidFill>
+                      <a:srgbClr val="EAEAEA"/>
+                    </a:solidFill>
+                  </a:tcPr>
+                </a:tc>
               </a:tr>
             </a:tbl>
           </a:graphicData>
@@ -4404,8 +4806,8 @@
 </p:sld>
 </file>
 
-<file path=ppt/slides/slide13.xml><?xml version="1.0" encoding="utf-8"?>
-<p:sld xmlns:a="http://schemas.openxmlformats.org/drawingml/2006/main" xmlns:r="http://schemas.openxmlformats.org/officeDocument/2006/relationships" xmlns:p="http://schemas.openxmlformats.org/presentationml/2006/main">
+<file path=ppt/slides/slide14.xml><?xml version="1.0" encoding="utf-8"?>
+<p:sld xmlns:a="http://schemas.openxmlformats.org/drawingml/2006/main" xmlns:p="http://schemas.openxmlformats.org/presentationml/2006/main" xmlns:r="http://schemas.openxmlformats.org/officeDocument/2006/relationships">
   <p:cSld>
     <p:bg>
       <p:bgPr>
@@ -4421,14 +4823,7 @@
         <p:cNvGrpSpPr/>
         <p:nvPr/>
       </p:nvGrpSpPr>
-      <p:grpSpPr>
-        <a:xfrm>
-          <a:off x="0" y="0"/>
-          <a:ext cx="0" cy="0"/>
-          <a:chOff x="0" y="0"/>
-          <a:chExt cx="0" cy="0"/>
-        </a:xfrm>
-      </p:grpSpPr>
+      <p:grpSpPr/>
       <p:sp>
         <p:nvSpPr>
           <p:cNvPr id="2" name="TextBox 1"/>
@@ -4540,7 +4935,6 @@
           <a:lstStyle/>
           <a:p>
             <a:pPr algn="ctr"/>
-            <a:endParaRPr/>
           </a:p>
         </p:txBody>
       </p:sp>
@@ -4574,7 +4968,7 @@
                 </a:solidFill>
                 <a:latin typeface="Times New Roman"/>
               </a:rPr>
-              <a:t>12</a:t>
+              <a:t>13</a:t>
             </a:r>
           </a:p>
         </p:txBody>
@@ -4765,7 +5159,6 @@
           <a:lstStyle/>
           <a:p>
             <a:pPr algn="ctr"/>
-            <a:endParaRPr/>
           </a:p>
         </p:txBody>
       </p:sp>
@@ -4813,7 +5206,7 @@
 </file>
 
 <file path=ppt/slides/slide2.xml><?xml version="1.0" encoding="utf-8"?>
-<p:sld xmlns:a="http://schemas.openxmlformats.org/drawingml/2006/main" xmlns:r="http://schemas.openxmlformats.org/officeDocument/2006/relationships" xmlns:p="http://schemas.openxmlformats.org/presentationml/2006/main">
+<p:sld xmlns:a="http://schemas.openxmlformats.org/drawingml/2006/main" xmlns:p="http://schemas.openxmlformats.org/presentationml/2006/main" xmlns:r="http://schemas.openxmlformats.org/officeDocument/2006/relationships">
   <p:cSld>
     <p:bg>
       <p:bgPr>
@@ -4829,14 +5222,7 @@
         <p:cNvGrpSpPr/>
         <p:nvPr/>
       </p:nvGrpSpPr>
-      <p:grpSpPr>
-        <a:xfrm>
-          <a:off x="0" y="0"/>
-          <a:ext cx="0" cy="0"/>
-          <a:chOff x="0" y="0"/>
-          <a:chExt cx="0" cy="0"/>
-        </a:xfrm>
-      </p:grpSpPr>
+      <p:grpSpPr/>
       <p:sp>
         <p:nvSpPr>
           <p:cNvPr id="2" name="TextBox 1"/>
@@ -4948,7 +5334,6 @@
           <a:lstStyle/>
           <a:p>
             <a:pPr algn="ctr"/>
-            <a:endParaRPr/>
           </a:p>
         </p:txBody>
       </p:sp>
@@ -5157,7 +5542,7 @@
 </file>
 
 <file path=ppt/slides/slide3.xml><?xml version="1.0" encoding="utf-8"?>
-<p:sld xmlns:a="http://schemas.openxmlformats.org/drawingml/2006/main" xmlns:r="http://schemas.openxmlformats.org/officeDocument/2006/relationships" xmlns:p="http://schemas.openxmlformats.org/presentationml/2006/main">
+<p:sld xmlns:a="http://schemas.openxmlformats.org/drawingml/2006/main" xmlns:p="http://schemas.openxmlformats.org/presentationml/2006/main" xmlns:r="http://schemas.openxmlformats.org/officeDocument/2006/relationships">
   <p:cSld>
     <p:bg>
       <p:bgPr>
@@ -5173,14 +5558,7 @@
         <p:cNvGrpSpPr/>
         <p:nvPr/>
       </p:nvGrpSpPr>
-      <p:grpSpPr>
-        <a:xfrm>
-          <a:off x="0" y="0"/>
-          <a:ext cx="0" cy="0"/>
-          <a:chOff x="0" y="0"/>
-          <a:chExt cx="0" cy="0"/>
-        </a:xfrm>
-      </p:grpSpPr>
+      <p:grpSpPr/>
       <p:sp>
         <p:nvSpPr>
           <p:cNvPr id="2" name="TextBox 1"/>
@@ -5292,7 +5670,6 @@
           <a:lstStyle/>
           <a:p>
             <a:pPr algn="ctr"/>
-            <a:endParaRPr/>
           </a:p>
         </p:txBody>
       </p:sp>
@@ -5350,25 +5727,13 @@
                 <a:tableStyleId>{5C22544A-7EE6-4342-B048-85BDC9FD1C3A}</a:tableStyleId>
               </a:tblPr>
               <a:tblGrid>
-                <a:gridCol w="2560320">
-                  <a:extLst>
-                    <a:ext uri="{9D8B030D-6E8A-4147-A177-3AD203B41FA5}">
-                      <a16:colId xmlns:a16="http://schemas.microsoft.com/office/drawing/2014/main" val="20000"/>
-                    </a:ext>
-                  </a:extLst>
-                </a:gridCol>
-                <a:gridCol w="7955279">
-                  <a:extLst>
-                    <a:ext uri="{9D8B030D-6E8A-4147-A177-3AD203B41FA5}">
-                      <a16:colId xmlns:a16="http://schemas.microsoft.com/office/drawing/2014/main" val="20001"/>
-                    </a:ext>
-                  </a:extLst>
-                </a:gridCol>
+                <a:gridCol w="2560320"/>
+                <a:gridCol w="7955279"/>
               </a:tblGrid>
               <a:tr h="960120">
                 <a:tc>
                   <a:txBody>
-                    <a:bodyPr/>
+                    <a:bodyPr wrap="square"/>
                     <a:lstStyle/>
                     <a:p>
                       <a:r>
@@ -5390,7 +5755,7 @@
                 </a:tc>
                 <a:tc>
                   <a:txBody>
-                    <a:bodyPr/>
+                    <a:bodyPr wrap="square"/>
                     <a:lstStyle/>
                     <a:p>
                       <a:r>
@@ -5410,16 +5775,11 @@
                     </a:solidFill>
                   </a:tcPr>
                 </a:tc>
-                <a:extLst>
-                  <a:ext uri="{0D108BD9-81ED-4DB2-BD59-A6C34878D82A}">
-                    <a16:rowId xmlns:a16="http://schemas.microsoft.com/office/drawing/2014/main" val="10000"/>
-                  </a:ext>
-                </a:extLst>
               </a:tr>
               <a:tr h="960120">
                 <a:tc>
                   <a:txBody>
-                    <a:bodyPr/>
+                    <a:bodyPr wrap="square"/>
                     <a:lstStyle/>
                     <a:p>
                       <a:r>
@@ -5441,7 +5801,7 @@
                 </a:tc>
                 <a:tc>
                   <a:txBody>
-                    <a:bodyPr/>
+                    <a:bodyPr wrap="square"/>
                     <a:lstStyle/>
                     <a:p>
                       <a:r>
@@ -5461,16 +5821,11 @@
                     </a:solidFill>
                   </a:tcPr>
                 </a:tc>
-                <a:extLst>
-                  <a:ext uri="{0D108BD9-81ED-4DB2-BD59-A6C34878D82A}">
-                    <a16:rowId xmlns:a16="http://schemas.microsoft.com/office/drawing/2014/main" val="10001"/>
-                  </a:ext>
-                </a:extLst>
               </a:tr>
               <a:tr h="960120">
                 <a:tc>
                   <a:txBody>
-                    <a:bodyPr/>
+                    <a:bodyPr wrap="square"/>
                     <a:lstStyle/>
                     <a:p>
                       <a:r>
@@ -5492,7 +5847,7 @@
                 </a:tc>
                 <a:tc>
                   <a:txBody>
-                    <a:bodyPr/>
+                    <a:bodyPr wrap="square"/>
                     <a:lstStyle/>
                     <a:p>
                       <a:r>
@@ -5512,16 +5867,11 @@
                     </a:solidFill>
                   </a:tcPr>
                 </a:tc>
-                <a:extLst>
-                  <a:ext uri="{0D108BD9-81ED-4DB2-BD59-A6C34878D82A}">
-                    <a16:rowId xmlns:a16="http://schemas.microsoft.com/office/drawing/2014/main" val="10002"/>
-                  </a:ext>
-                </a:extLst>
               </a:tr>
               <a:tr h="960120">
                 <a:tc>
                   <a:txBody>
-                    <a:bodyPr/>
+                    <a:bodyPr wrap="square"/>
                     <a:lstStyle/>
                     <a:p>
                       <a:r>
@@ -5543,7 +5893,7 @@
                 </a:tc>
                 <a:tc>
                   <a:txBody>
-                    <a:bodyPr/>
+                    <a:bodyPr wrap="square"/>
                     <a:lstStyle/>
                     <a:p>
                       <a:r>
@@ -5563,11 +5913,6 @@
                     </a:solidFill>
                   </a:tcPr>
                 </a:tc>
-                <a:extLst>
-                  <a:ext uri="{0D108BD9-81ED-4DB2-BD59-A6C34878D82A}">
-                    <a16:rowId xmlns:a16="http://schemas.microsoft.com/office/drawing/2014/main" val="10003"/>
-                  </a:ext>
-                </a:extLst>
               </a:tr>
             </a:tbl>
           </a:graphicData>
@@ -5582,7 +5927,7 @@
 </file>
 
 <file path=ppt/slides/slide4.xml><?xml version="1.0" encoding="utf-8"?>
-<p:sld xmlns:a="http://schemas.openxmlformats.org/drawingml/2006/main" xmlns:r="http://schemas.openxmlformats.org/officeDocument/2006/relationships" xmlns:p="http://schemas.openxmlformats.org/presentationml/2006/main">
+<p:sld xmlns:a="http://schemas.openxmlformats.org/drawingml/2006/main" xmlns:p="http://schemas.openxmlformats.org/presentationml/2006/main" xmlns:r="http://schemas.openxmlformats.org/officeDocument/2006/relationships">
   <p:cSld>
     <p:bg>
       <p:bgPr>
@@ -5598,14 +5943,7 @@
         <p:cNvGrpSpPr/>
         <p:nvPr/>
       </p:nvGrpSpPr>
-      <p:grpSpPr>
-        <a:xfrm>
-          <a:off x="0" y="0"/>
-          <a:ext cx="0" cy="0"/>
-          <a:chOff x="0" y="0"/>
-          <a:chExt cx="0" cy="0"/>
-        </a:xfrm>
-      </p:grpSpPr>
+      <p:grpSpPr/>
       <p:sp>
         <p:nvSpPr>
           <p:cNvPr id="2" name="TextBox 1"/>
@@ -5636,7 +5974,7 @@
                 </a:solidFill>
                 <a:latin typeface="Times New Roman"/>
               </a:rPr>
-              <a:t>CHOIX TECHNOLOGIQUES</a:t>
+              <a:t>PÉRIMÈTRE FONCTIONNEL</a:t>
             </a:r>
           </a:p>
         </p:txBody>
@@ -5671,7 +6009,7 @@
                 </a:solidFill>
                 <a:latin typeface="Times New Roman"/>
               </a:rPr>
-              <a:t>Stack technique</a:t>
+              <a:t>Diagramme de cas d'utilisation</a:t>
             </a:r>
           </a:p>
         </p:txBody>
@@ -5717,7 +6055,6 @@
           <a:lstStyle/>
           <a:p>
             <a:pPr algn="ctr"/>
-            <a:endParaRPr/>
           </a:p>
         </p:txBody>
       </p:sp>
@@ -5752,6 +6089,1693 @@
                 <a:latin typeface="Times New Roman"/>
               </a:rPr>
               <a:t>3</a:t>
+            </a:r>
+          </a:p>
+        </p:txBody>
+      </p:sp>
+      <p:sp>
+        <p:nvSpPr>
+          <p:cNvPr id="6" name="Oval 5"/>
+          <p:cNvSpPr/>
+          <p:nvPr/>
+        </p:nvSpPr>
+        <p:spPr>
+          <a:xfrm>
+            <a:off x="731520" y="1463040"/>
+            <a:ext cx="329184" cy="329184"/>
+          </a:xfrm>
+          <a:prstGeom prst="ellipse">
+            <a:avLst/>
+          </a:prstGeom>
+          <a:noFill/>
+          <a:ln w="22225">
+            <a:solidFill>
+              <a:srgbClr val="000000"/>
+            </a:solidFill>
+          </a:ln>
+          <a:effectLst/>
+        </p:spPr>
+        <p:style>
+          <a:lnRef idx="1">
+            <a:schemeClr val="accent1"/>
+          </a:lnRef>
+          <a:fillRef idx="3">
+            <a:schemeClr val="accent1"/>
+          </a:fillRef>
+          <a:effectRef idx="2">
+            <a:schemeClr val="accent1"/>
+          </a:effectRef>
+          <a:fontRef idx="minor">
+            <a:schemeClr val="lt1"/>
+          </a:fontRef>
+        </p:style>
+        <p:txBody>
+          <a:bodyPr rtlCol="0" anchor="ctr"/>
+          <a:lstStyle/>
+          <a:p>
+            <a:pPr algn="ctr"/>
+          </a:p>
+        </p:txBody>
+      </p:sp>
+      <p:cxnSp>
+        <p:nvCxnSpPr>
+          <p:cNvPr id="7" name="Connector 6"/>
+          <p:cNvCxnSpPr/>
+          <p:nvPr/>
+        </p:nvCxnSpPr>
+        <p:spPr>
+          <a:xfrm>
+            <a:off x="896112" y="1792224"/>
+            <a:ext cx="0" cy="438912"/>
+          </a:xfrm>
+          <a:prstGeom prst="line">
+            <a:avLst/>
+          </a:prstGeom>
+          <a:ln w="22225">
+            <a:solidFill>
+              <a:srgbClr val="000000"/>
+            </a:solidFill>
+          </a:ln>
+        </p:spPr>
+        <p:style>
+          <a:lnRef idx="2">
+            <a:schemeClr val="accent1"/>
+          </a:lnRef>
+          <a:fillRef idx="0">
+            <a:schemeClr val="accent1"/>
+          </a:fillRef>
+          <a:effectRef idx="1">
+            <a:schemeClr val="accent1"/>
+          </a:effectRef>
+          <a:fontRef idx="minor">
+            <a:schemeClr val="tx1"/>
+          </a:fontRef>
+        </p:style>
+      </p:cxnSp>
+      <p:cxnSp>
+        <p:nvCxnSpPr>
+          <p:cNvPr id="8" name="Connector 7"/>
+          <p:cNvCxnSpPr/>
+          <p:nvPr/>
+        </p:nvCxnSpPr>
+        <p:spPr>
+          <a:xfrm>
+            <a:off x="676656" y="1915119"/>
+            <a:ext cx="438912" cy="0"/>
+          </a:xfrm>
+          <a:prstGeom prst="line">
+            <a:avLst/>
+          </a:prstGeom>
+          <a:ln w="22225">
+            <a:solidFill>
+              <a:srgbClr val="000000"/>
+            </a:solidFill>
+          </a:ln>
+        </p:spPr>
+        <p:style>
+          <a:lnRef idx="2">
+            <a:schemeClr val="accent1"/>
+          </a:lnRef>
+          <a:fillRef idx="0">
+            <a:schemeClr val="accent1"/>
+          </a:fillRef>
+          <a:effectRef idx="1">
+            <a:schemeClr val="accent1"/>
+          </a:effectRef>
+          <a:fontRef idx="minor">
+            <a:schemeClr val="tx1"/>
+          </a:fontRef>
+        </p:style>
+      </p:cxnSp>
+      <p:cxnSp>
+        <p:nvCxnSpPr>
+          <p:cNvPr id="9" name="Connector 8"/>
+          <p:cNvCxnSpPr/>
+          <p:nvPr/>
+        </p:nvCxnSpPr>
+        <p:spPr>
+          <a:xfrm flipH="1">
+            <a:off x="676656" y="2231136"/>
+            <a:ext cx="219456" cy="285292"/>
+          </a:xfrm>
+          <a:prstGeom prst="line">
+            <a:avLst/>
+          </a:prstGeom>
+          <a:ln w="22225">
+            <a:solidFill>
+              <a:srgbClr val="000000"/>
+            </a:solidFill>
+          </a:ln>
+        </p:spPr>
+        <p:style>
+          <a:lnRef idx="2">
+            <a:schemeClr val="accent1"/>
+          </a:lnRef>
+          <a:fillRef idx="0">
+            <a:schemeClr val="accent1"/>
+          </a:fillRef>
+          <a:effectRef idx="1">
+            <a:schemeClr val="accent1"/>
+          </a:effectRef>
+          <a:fontRef idx="minor">
+            <a:schemeClr val="tx1"/>
+          </a:fontRef>
+        </p:style>
+      </p:cxnSp>
+      <p:cxnSp>
+        <p:nvCxnSpPr>
+          <p:cNvPr id="10" name="Connector 9"/>
+          <p:cNvCxnSpPr/>
+          <p:nvPr/>
+        </p:nvCxnSpPr>
+        <p:spPr>
+          <a:xfrm>
+            <a:off x="896112" y="2231136"/>
+            <a:ext cx="219456" cy="285292"/>
+          </a:xfrm>
+          <a:prstGeom prst="line">
+            <a:avLst/>
+          </a:prstGeom>
+          <a:ln w="22225">
+            <a:solidFill>
+              <a:srgbClr val="000000"/>
+            </a:solidFill>
+          </a:ln>
+        </p:spPr>
+        <p:style>
+          <a:lnRef idx="2">
+            <a:schemeClr val="accent1"/>
+          </a:lnRef>
+          <a:fillRef idx="0">
+            <a:schemeClr val="accent1"/>
+          </a:fillRef>
+          <a:effectRef idx="1">
+            <a:schemeClr val="accent1"/>
+          </a:effectRef>
+          <a:fontRef idx="minor">
+            <a:schemeClr val="tx1"/>
+          </a:fontRef>
+        </p:style>
+      </p:cxnSp>
+      <p:sp>
+        <p:nvSpPr>
+          <p:cNvPr id="11" name="TextBox 10"/>
+          <p:cNvSpPr txBox="1"/>
+          <p:nvPr/>
+        </p:nvSpPr>
+        <p:spPr>
+          <a:xfrm>
+            <a:off x="228600" y="2571292"/>
+            <a:ext cx="1335024" cy="274320"/>
+          </a:xfrm>
+          <a:prstGeom prst="rect">
+            <a:avLst/>
+          </a:prstGeom>
+          <a:noFill/>
+        </p:spPr>
+        <p:txBody>
+          <a:bodyPr wrap="square" anchor="t">
+            <a:spAutoFit/>
+          </a:bodyPr>
+          <a:lstStyle/>
+          <a:p>
+            <a:pPr algn="ctr"/>
+            <a:r>
+              <a:rPr sz="1250" b="1" i="0">
+                <a:solidFill>
+                  <a:srgbClr val="000000"/>
+                </a:solidFill>
+                <a:latin typeface="Times New Roman"/>
+              </a:rPr>
+              <a:t>Administrateur</a:t>
+            </a:r>
+          </a:p>
+        </p:txBody>
+      </p:sp>
+      <p:sp>
+        <p:nvSpPr>
+          <p:cNvPr id="12" name="Oval 11"/>
+          <p:cNvSpPr/>
+          <p:nvPr/>
+        </p:nvSpPr>
+        <p:spPr>
+          <a:xfrm>
+            <a:off x="731520" y="2788920"/>
+            <a:ext cx="329184" cy="329184"/>
+          </a:xfrm>
+          <a:prstGeom prst="ellipse">
+            <a:avLst/>
+          </a:prstGeom>
+          <a:noFill/>
+          <a:ln w="22225">
+            <a:solidFill>
+              <a:srgbClr val="000000"/>
+            </a:solidFill>
+          </a:ln>
+          <a:effectLst/>
+        </p:spPr>
+        <p:style>
+          <a:lnRef idx="1">
+            <a:schemeClr val="accent1"/>
+          </a:lnRef>
+          <a:fillRef idx="3">
+            <a:schemeClr val="accent1"/>
+          </a:fillRef>
+          <a:effectRef idx="2">
+            <a:schemeClr val="accent1"/>
+          </a:effectRef>
+          <a:fontRef idx="minor">
+            <a:schemeClr val="lt1"/>
+          </a:fontRef>
+        </p:style>
+        <p:txBody>
+          <a:bodyPr rtlCol="0" anchor="ctr"/>
+          <a:lstStyle/>
+          <a:p>
+            <a:pPr algn="ctr"/>
+          </a:p>
+        </p:txBody>
+      </p:sp>
+      <p:cxnSp>
+        <p:nvCxnSpPr>
+          <p:cNvPr id="13" name="Connector 12"/>
+          <p:cNvCxnSpPr/>
+          <p:nvPr/>
+        </p:nvCxnSpPr>
+        <p:spPr>
+          <a:xfrm>
+            <a:off x="896112" y="3118104"/>
+            <a:ext cx="0" cy="438912"/>
+          </a:xfrm>
+          <a:prstGeom prst="line">
+            <a:avLst/>
+          </a:prstGeom>
+          <a:ln w="22225">
+            <a:solidFill>
+              <a:srgbClr val="000000"/>
+            </a:solidFill>
+          </a:ln>
+        </p:spPr>
+        <p:style>
+          <a:lnRef idx="2">
+            <a:schemeClr val="accent1"/>
+          </a:lnRef>
+          <a:fillRef idx="0">
+            <a:schemeClr val="accent1"/>
+          </a:fillRef>
+          <a:effectRef idx="1">
+            <a:schemeClr val="accent1"/>
+          </a:effectRef>
+          <a:fontRef idx="minor">
+            <a:schemeClr val="tx1"/>
+          </a:fontRef>
+        </p:style>
+      </p:cxnSp>
+      <p:cxnSp>
+        <p:nvCxnSpPr>
+          <p:cNvPr id="14" name="Connector 13"/>
+          <p:cNvCxnSpPr/>
+          <p:nvPr/>
+        </p:nvCxnSpPr>
+        <p:spPr>
+          <a:xfrm>
+            <a:off x="676656" y="3240999"/>
+            <a:ext cx="438912" cy="0"/>
+          </a:xfrm>
+          <a:prstGeom prst="line">
+            <a:avLst/>
+          </a:prstGeom>
+          <a:ln w="22225">
+            <a:solidFill>
+              <a:srgbClr val="000000"/>
+            </a:solidFill>
+          </a:ln>
+        </p:spPr>
+        <p:style>
+          <a:lnRef idx="2">
+            <a:schemeClr val="accent1"/>
+          </a:lnRef>
+          <a:fillRef idx="0">
+            <a:schemeClr val="accent1"/>
+          </a:fillRef>
+          <a:effectRef idx="1">
+            <a:schemeClr val="accent1"/>
+          </a:effectRef>
+          <a:fontRef idx="minor">
+            <a:schemeClr val="tx1"/>
+          </a:fontRef>
+        </p:style>
+      </p:cxnSp>
+      <p:cxnSp>
+        <p:nvCxnSpPr>
+          <p:cNvPr id="15" name="Connector 14"/>
+          <p:cNvCxnSpPr/>
+          <p:nvPr/>
+        </p:nvCxnSpPr>
+        <p:spPr>
+          <a:xfrm flipH="1">
+            <a:off x="676656" y="3557016"/>
+            <a:ext cx="219456" cy="285292"/>
+          </a:xfrm>
+          <a:prstGeom prst="line">
+            <a:avLst/>
+          </a:prstGeom>
+          <a:ln w="22225">
+            <a:solidFill>
+              <a:srgbClr val="000000"/>
+            </a:solidFill>
+          </a:ln>
+        </p:spPr>
+        <p:style>
+          <a:lnRef idx="2">
+            <a:schemeClr val="accent1"/>
+          </a:lnRef>
+          <a:fillRef idx="0">
+            <a:schemeClr val="accent1"/>
+          </a:fillRef>
+          <a:effectRef idx="1">
+            <a:schemeClr val="accent1"/>
+          </a:effectRef>
+          <a:fontRef idx="minor">
+            <a:schemeClr val="tx1"/>
+          </a:fontRef>
+        </p:style>
+      </p:cxnSp>
+      <p:cxnSp>
+        <p:nvCxnSpPr>
+          <p:cNvPr id="16" name="Connector 15"/>
+          <p:cNvCxnSpPr/>
+          <p:nvPr/>
+        </p:nvCxnSpPr>
+        <p:spPr>
+          <a:xfrm>
+            <a:off x="896112" y="3557016"/>
+            <a:ext cx="219456" cy="285292"/>
+          </a:xfrm>
+          <a:prstGeom prst="line">
+            <a:avLst/>
+          </a:prstGeom>
+          <a:ln w="22225">
+            <a:solidFill>
+              <a:srgbClr val="000000"/>
+            </a:solidFill>
+          </a:ln>
+        </p:spPr>
+        <p:style>
+          <a:lnRef idx="2">
+            <a:schemeClr val="accent1"/>
+          </a:lnRef>
+          <a:fillRef idx="0">
+            <a:schemeClr val="accent1"/>
+          </a:fillRef>
+          <a:effectRef idx="1">
+            <a:schemeClr val="accent1"/>
+          </a:effectRef>
+          <a:fontRef idx="minor">
+            <a:schemeClr val="tx1"/>
+          </a:fontRef>
+        </p:style>
+      </p:cxnSp>
+      <p:sp>
+        <p:nvSpPr>
+          <p:cNvPr id="17" name="TextBox 16"/>
+          <p:cNvSpPr txBox="1"/>
+          <p:nvPr/>
+        </p:nvSpPr>
+        <p:spPr>
+          <a:xfrm>
+            <a:off x="228600" y="3897172"/>
+            <a:ext cx="1335024" cy="274320"/>
+          </a:xfrm>
+          <a:prstGeom prst="rect">
+            <a:avLst/>
+          </a:prstGeom>
+          <a:noFill/>
+        </p:spPr>
+        <p:txBody>
+          <a:bodyPr wrap="square" anchor="t">
+            <a:spAutoFit/>
+          </a:bodyPr>
+          <a:lstStyle/>
+          <a:p>
+            <a:pPr algn="ctr"/>
+            <a:r>
+              <a:rPr sz="1250" b="1" i="0">
+                <a:solidFill>
+                  <a:srgbClr val="000000"/>
+                </a:solidFill>
+                <a:latin typeface="Times New Roman"/>
+              </a:rPr>
+              <a:t>Formateur</a:t>
+            </a:r>
+          </a:p>
+        </p:txBody>
+      </p:sp>
+      <p:sp>
+        <p:nvSpPr>
+          <p:cNvPr id="18" name="Oval 17"/>
+          <p:cNvSpPr/>
+          <p:nvPr/>
+        </p:nvSpPr>
+        <p:spPr>
+          <a:xfrm>
+            <a:off x="731520" y="4114800"/>
+            <a:ext cx="329184" cy="329184"/>
+          </a:xfrm>
+          <a:prstGeom prst="ellipse">
+            <a:avLst/>
+          </a:prstGeom>
+          <a:noFill/>
+          <a:ln w="22225">
+            <a:solidFill>
+              <a:srgbClr val="000000"/>
+            </a:solidFill>
+          </a:ln>
+          <a:effectLst/>
+        </p:spPr>
+        <p:style>
+          <a:lnRef idx="1">
+            <a:schemeClr val="accent1"/>
+          </a:lnRef>
+          <a:fillRef idx="3">
+            <a:schemeClr val="accent1"/>
+          </a:fillRef>
+          <a:effectRef idx="2">
+            <a:schemeClr val="accent1"/>
+          </a:effectRef>
+          <a:fontRef idx="minor">
+            <a:schemeClr val="lt1"/>
+          </a:fontRef>
+        </p:style>
+        <p:txBody>
+          <a:bodyPr rtlCol="0" anchor="ctr"/>
+          <a:lstStyle/>
+          <a:p>
+            <a:pPr algn="ctr"/>
+          </a:p>
+        </p:txBody>
+      </p:sp>
+      <p:cxnSp>
+        <p:nvCxnSpPr>
+          <p:cNvPr id="19" name="Connector 18"/>
+          <p:cNvCxnSpPr/>
+          <p:nvPr/>
+        </p:nvCxnSpPr>
+        <p:spPr>
+          <a:xfrm>
+            <a:off x="896112" y="4443984"/>
+            <a:ext cx="0" cy="438912"/>
+          </a:xfrm>
+          <a:prstGeom prst="line">
+            <a:avLst/>
+          </a:prstGeom>
+          <a:ln w="22225">
+            <a:solidFill>
+              <a:srgbClr val="000000"/>
+            </a:solidFill>
+          </a:ln>
+        </p:spPr>
+        <p:style>
+          <a:lnRef idx="2">
+            <a:schemeClr val="accent1"/>
+          </a:lnRef>
+          <a:fillRef idx="0">
+            <a:schemeClr val="accent1"/>
+          </a:fillRef>
+          <a:effectRef idx="1">
+            <a:schemeClr val="accent1"/>
+          </a:effectRef>
+          <a:fontRef idx="minor">
+            <a:schemeClr val="tx1"/>
+          </a:fontRef>
+        </p:style>
+      </p:cxnSp>
+      <p:cxnSp>
+        <p:nvCxnSpPr>
+          <p:cNvPr id="20" name="Connector 19"/>
+          <p:cNvCxnSpPr/>
+          <p:nvPr/>
+        </p:nvCxnSpPr>
+        <p:spPr>
+          <a:xfrm>
+            <a:off x="676656" y="4566879"/>
+            <a:ext cx="438912" cy="0"/>
+          </a:xfrm>
+          <a:prstGeom prst="line">
+            <a:avLst/>
+          </a:prstGeom>
+          <a:ln w="22225">
+            <a:solidFill>
+              <a:srgbClr val="000000"/>
+            </a:solidFill>
+          </a:ln>
+        </p:spPr>
+        <p:style>
+          <a:lnRef idx="2">
+            <a:schemeClr val="accent1"/>
+          </a:lnRef>
+          <a:fillRef idx="0">
+            <a:schemeClr val="accent1"/>
+          </a:fillRef>
+          <a:effectRef idx="1">
+            <a:schemeClr val="accent1"/>
+          </a:effectRef>
+          <a:fontRef idx="minor">
+            <a:schemeClr val="tx1"/>
+          </a:fontRef>
+        </p:style>
+      </p:cxnSp>
+      <p:cxnSp>
+        <p:nvCxnSpPr>
+          <p:cNvPr id="21" name="Connector 20"/>
+          <p:cNvCxnSpPr/>
+          <p:nvPr/>
+        </p:nvCxnSpPr>
+        <p:spPr>
+          <a:xfrm flipH="1">
+            <a:off x="676656" y="4882896"/>
+            <a:ext cx="219456" cy="285292"/>
+          </a:xfrm>
+          <a:prstGeom prst="line">
+            <a:avLst/>
+          </a:prstGeom>
+          <a:ln w="22225">
+            <a:solidFill>
+              <a:srgbClr val="000000"/>
+            </a:solidFill>
+          </a:ln>
+        </p:spPr>
+        <p:style>
+          <a:lnRef idx="2">
+            <a:schemeClr val="accent1"/>
+          </a:lnRef>
+          <a:fillRef idx="0">
+            <a:schemeClr val="accent1"/>
+          </a:fillRef>
+          <a:effectRef idx="1">
+            <a:schemeClr val="accent1"/>
+          </a:effectRef>
+          <a:fontRef idx="minor">
+            <a:schemeClr val="tx1"/>
+          </a:fontRef>
+        </p:style>
+      </p:cxnSp>
+      <p:cxnSp>
+        <p:nvCxnSpPr>
+          <p:cNvPr id="22" name="Connector 21"/>
+          <p:cNvCxnSpPr/>
+          <p:nvPr/>
+        </p:nvCxnSpPr>
+        <p:spPr>
+          <a:xfrm>
+            <a:off x="896112" y="4882896"/>
+            <a:ext cx="219456" cy="285292"/>
+          </a:xfrm>
+          <a:prstGeom prst="line">
+            <a:avLst/>
+          </a:prstGeom>
+          <a:ln w="22225">
+            <a:solidFill>
+              <a:srgbClr val="000000"/>
+            </a:solidFill>
+          </a:ln>
+        </p:spPr>
+        <p:style>
+          <a:lnRef idx="2">
+            <a:schemeClr val="accent1"/>
+          </a:lnRef>
+          <a:fillRef idx="0">
+            <a:schemeClr val="accent1"/>
+          </a:fillRef>
+          <a:effectRef idx="1">
+            <a:schemeClr val="accent1"/>
+          </a:effectRef>
+          <a:fontRef idx="minor">
+            <a:schemeClr val="tx1"/>
+          </a:fontRef>
+        </p:style>
+      </p:cxnSp>
+      <p:sp>
+        <p:nvSpPr>
+          <p:cNvPr id="23" name="TextBox 22"/>
+          <p:cNvSpPr txBox="1"/>
+          <p:nvPr/>
+        </p:nvSpPr>
+        <p:spPr>
+          <a:xfrm>
+            <a:off x="228600" y="5223052"/>
+            <a:ext cx="1335024" cy="274320"/>
+          </a:xfrm>
+          <a:prstGeom prst="rect">
+            <a:avLst/>
+          </a:prstGeom>
+          <a:noFill/>
+        </p:spPr>
+        <p:txBody>
+          <a:bodyPr wrap="square" anchor="t">
+            <a:spAutoFit/>
+          </a:bodyPr>
+          <a:lstStyle/>
+          <a:p>
+            <a:pPr algn="ctr"/>
+            <a:r>
+              <a:rPr sz="1250" b="1" i="0">
+                <a:solidFill>
+                  <a:srgbClr val="000000"/>
+                </a:solidFill>
+                <a:latin typeface="Times New Roman"/>
+              </a:rPr>
+              <a:t>Étudiant</a:t>
+            </a:r>
+          </a:p>
+        </p:txBody>
+      </p:sp>
+      <p:sp>
+        <p:nvSpPr>
+          <p:cNvPr id="24" name="Oval 23"/>
+          <p:cNvSpPr/>
+          <p:nvPr/>
+        </p:nvSpPr>
+        <p:spPr>
+          <a:xfrm>
+            <a:off x="3200400" y="1417320"/>
+            <a:ext cx="3566160" cy="777240"/>
+          </a:xfrm>
+          <a:prstGeom prst="ellipse">
+            <a:avLst/>
+          </a:prstGeom>
+          <a:solidFill>
+            <a:srgbClr val="FFFFFF"/>
+          </a:solidFill>
+          <a:ln w="15875">
+            <a:solidFill>
+              <a:srgbClr val="1F3C63"/>
+            </a:solidFill>
+          </a:ln>
+          <a:effectLst/>
+        </p:spPr>
+        <p:style>
+          <a:lnRef idx="1">
+            <a:schemeClr val="accent1"/>
+          </a:lnRef>
+          <a:fillRef idx="3">
+            <a:schemeClr val="accent1"/>
+          </a:fillRef>
+          <a:effectRef idx="2">
+            <a:schemeClr val="accent1"/>
+          </a:effectRef>
+          <a:fontRef idx="minor">
+            <a:schemeClr val="lt1"/>
+          </a:fontRef>
+        </p:style>
+        <p:txBody>
+          <a:bodyPr rtlCol="0" anchor="ctr" wrap="square"/>
+          <a:lstStyle/>
+          <a:p>
+            <a:pPr algn="ctr"/>
+            <a:r>
+              <a:rPr sz="1300" b="1">
+                <a:solidFill>
+                  <a:srgbClr val="000000"/>
+                </a:solidFill>
+                <a:latin typeface="Times New Roman"/>
+              </a:rPr>
+              <a:t>Authentification</a:t>
+            </a:r>
+          </a:p>
+        </p:txBody>
+      </p:sp>
+      <p:sp>
+        <p:nvSpPr>
+          <p:cNvPr id="25" name="Oval 24"/>
+          <p:cNvSpPr/>
+          <p:nvPr/>
+        </p:nvSpPr>
+        <p:spPr>
+          <a:xfrm>
+            <a:off x="7315200" y="1417320"/>
+            <a:ext cx="3566160" cy="777240"/>
+          </a:xfrm>
+          <a:prstGeom prst="ellipse">
+            <a:avLst/>
+          </a:prstGeom>
+          <a:solidFill>
+            <a:srgbClr val="FFFFFF"/>
+          </a:solidFill>
+          <a:ln w="15875">
+            <a:solidFill>
+              <a:srgbClr val="1F3C63"/>
+            </a:solidFill>
+          </a:ln>
+          <a:effectLst/>
+        </p:spPr>
+        <p:style>
+          <a:lnRef idx="1">
+            <a:schemeClr val="accent1"/>
+          </a:lnRef>
+          <a:fillRef idx="3">
+            <a:schemeClr val="accent1"/>
+          </a:fillRef>
+          <a:effectRef idx="2">
+            <a:schemeClr val="accent1"/>
+          </a:effectRef>
+          <a:fontRef idx="minor">
+            <a:schemeClr val="lt1"/>
+          </a:fontRef>
+        </p:style>
+        <p:txBody>
+          <a:bodyPr rtlCol="0" anchor="ctr" wrap="square"/>
+          <a:lstStyle/>
+          <a:p>
+            <a:pPr algn="ctr"/>
+            <a:r>
+              <a:rPr sz="1300" b="1">
+                <a:solidFill>
+                  <a:srgbClr val="000000"/>
+                </a:solidFill>
+                <a:latin typeface="Times New Roman"/>
+              </a:rPr>
+              <a:t>Gestion étudiants</a:t>
+            </a:r>
+          </a:p>
+        </p:txBody>
+      </p:sp>
+      <p:sp>
+        <p:nvSpPr>
+          <p:cNvPr id="26" name="Oval 25"/>
+          <p:cNvSpPr/>
+          <p:nvPr/>
+        </p:nvSpPr>
+        <p:spPr>
+          <a:xfrm>
+            <a:off x="3200400" y="2468880"/>
+            <a:ext cx="3566160" cy="777240"/>
+          </a:xfrm>
+          <a:prstGeom prst="ellipse">
+            <a:avLst/>
+          </a:prstGeom>
+          <a:solidFill>
+            <a:srgbClr val="FFFFFF"/>
+          </a:solidFill>
+          <a:ln w="15875">
+            <a:solidFill>
+              <a:srgbClr val="1F3C63"/>
+            </a:solidFill>
+          </a:ln>
+          <a:effectLst/>
+        </p:spPr>
+        <p:style>
+          <a:lnRef idx="1">
+            <a:schemeClr val="accent1"/>
+          </a:lnRef>
+          <a:fillRef idx="3">
+            <a:schemeClr val="accent1"/>
+          </a:fillRef>
+          <a:effectRef idx="2">
+            <a:schemeClr val="accent1"/>
+          </a:effectRef>
+          <a:fontRef idx="minor">
+            <a:schemeClr val="lt1"/>
+          </a:fontRef>
+        </p:style>
+        <p:txBody>
+          <a:bodyPr rtlCol="0" anchor="ctr" wrap="square"/>
+          <a:lstStyle/>
+          <a:p>
+            <a:pPr algn="ctr"/>
+            <a:r>
+              <a:rPr sz="1300" b="1">
+                <a:solidFill>
+                  <a:srgbClr val="000000"/>
+                </a:solidFill>
+                <a:latin typeface="Times New Roman"/>
+              </a:rPr>
+              <a:t>Gestion formateurs</a:t>
+            </a:r>
+          </a:p>
+        </p:txBody>
+      </p:sp>
+      <p:sp>
+        <p:nvSpPr>
+          <p:cNvPr id="27" name="Oval 26"/>
+          <p:cNvSpPr/>
+          <p:nvPr/>
+        </p:nvSpPr>
+        <p:spPr>
+          <a:xfrm>
+            <a:off x="7315200" y="2468880"/>
+            <a:ext cx="3566160" cy="777240"/>
+          </a:xfrm>
+          <a:prstGeom prst="ellipse">
+            <a:avLst/>
+          </a:prstGeom>
+          <a:solidFill>
+            <a:srgbClr val="FFFFFF"/>
+          </a:solidFill>
+          <a:ln w="15875">
+            <a:solidFill>
+              <a:srgbClr val="1F3C63"/>
+            </a:solidFill>
+          </a:ln>
+          <a:effectLst/>
+        </p:spPr>
+        <p:style>
+          <a:lnRef idx="1">
+            <a:schemeClr val="accent1"/>
+          </a:lnRef>
+          <a:fillRef idx="3">
+            <a:schemeClr val="accent1"/>
+          </a:fillRef>
+          <a:effectRef idx="2">
+            <a:schemeClr val="accent1"/>
+          </a:effectRef>
+          <a:fontRef idx="minor">
+            <a:schemeClr val="lt1"/>
+          </a:fontRef>
+        </p:style>
+        <p:txBody>
+          <a:bodyPr rtlCol="0" anchor="ctr" wrap="square"/>
+          <a:lstStyle/>
+          <a:p>
+            <a:pPr algn="ctr"/>
+            <a:r>
+              <a:rPr sz="1300" b="1">
+                <a:solidFill>
+                  <a:srgbClr val="000000"/>
+                </a:solidFill>
+                <a:latin typeface="Times New Roman"/>
+              </a:rPr>
+              <a:t>Gestion formations</a:t>
+            </a:r>
+          </a:p>
+        </p:txBody>
+      </p:sp>
+      <p:sp>
+        <p:nvSpPr>
+          <p:cNvPr id="28" name="Oval 27"/>
+          <p:cNvSpPr/>
+          <p:nvPr/>
+        </p:nvSpPr>
+        <p:spPr>
+          <a:xfrm>
+            <a:off x="3200400" y="3520440"/>
+            <a:ext cx="3566160" cy="777240"/>
+          </a:xfrm>
+          <a:prstGeom prst="ellipse">
+            <a:avLst/>
+          </a:prstGeom>
+          <a:solidFill>
+            <a:srgbClr val="FFFFFF"/>
+          </a:solidFill>
+          <a:ln w="15875">
+            <a:solidFill>
+              <a:srgbClr val="1F3C63"/>
+            </a:solidFill>
+          </a:ln>
+          <a:effectLst/>
+        </p:spPr>
+        <p:style>
+          <a:lnRef idx="1">
+            <a:schemeClr val="accent1"/>
+          </a:lnRef>
+          <a:fillRef idx="3">
+            <a:schemeClr val="accent1"/>
+          </a:fillRef>
+          <a:effectRef idx="2">
+            <a:schemeClr val="accent1"/>
+          </a:effectRef>
+          <a:fontRef idx="minor">
+            <a:schemeClr val="lt1"/>
+          </a:fontRef>
+        </p:style>
+        <p:txBody>
+          <a:bodyPr rtlCol="0" anchor="ctr" wrap="square"/>
+          <a:lstStyle/>
+          <a:p>
+            <a:pPr algn="ctr"/>
+            <a:r>
+              <a:rPr sz="1300" b="1">
+                <a:solidFill>
+                  <a:srgbClr val="000000"/>
+                </a:solidFill>
+                <a:latin typeface="Times New Roman"/>
+              </a:rPr>
+              <a:t>Inscriptions &amp; notation</a:t>
+            </a:r>
+          </a:p>
+        </p:txBody>
+      </p:sp>
+      <p:sp>
+        <p:nvSpPr>
+          <p:cNvPr id="29" name="Oval 28"/>
+          <p:cNvSpPr/>
+          <p:nvPr/>
+        </p:nvSpPr>
+        <p:spPr>
+          <a:xfrm>
+            <a:off x="7315200" y="3520440"/>
+            <a:ext cx="3566160" cy="777240"/>
+          </a:xfrm>
+          <a:prstGeom prst="ellipse">
+            <a:avLst/>
+          </a:prstGeom>
+          <a:solidFill>
+            <a:srgbClr val="FFFFFF"/>
+          </a:solidFill>
+          <a:ln w="15875">
+            <a:solidFill>
+              <a:srgbClr val="1F3C63"/>
+            </a:solidFill>
+          </a:ln>
+          <a:effectLst/>
+        </p:spPr>
+        <p:style>
+          <a:lnRef idx="1">
+            <a:schemeClr val="accent1"/>
+          </a:lnRef>
+          <a:fillRef idx="3">
+            <a:schemeClr val="accent1"/>
+          </a:fillRef>
+          <a:effectRef idx="2">
+            <a:schemeClr val="accent1"/>
+          </a:effectRef>
+          <a:fontRef idx="minor">
+            <a:schemeClr val="lt1"/>
+          </a:fontRef>
+        </p:style>
+        <p:txBody>
+          <a:bodyPr rtlCol="0" anchor="ctr" wrap="square"/>
+          <a:lstStyle/>
+          <a:p>
+            <a:pPr algn="ctr"/>
+            <a:r>
+              <a:rPr sz="1300" b="1">
+                <a:solidFill>
+                  <a:srgbClr val="000000"/>
+                </a:solidFill>
+                <a:latin typeface="Times New Roman"/>
+              </a:rPr>
+              <a:t>Tableau de bord</a:t>
+            </a:r>
+          </a:p>
+        </p:txBody>
+      </p:sp>
+      <p:cxnSp>
+        <p:nvCxnSpPr>
+          <p:cNvPr id="30" name="Connector 29"/>
+          <p:cNvCxnSpPr/>
+          <p:nvPr/>
+        </p:nvCxnSpPr>
+        <p:spPr>
+          <a:xfrm flipV="1">
+            <a:off x="896112" y="1805940"/>
+            <a:ext cx="2304288" cy="205740"/>
+          </a:xfrm>
+          <a:prstGeom prst="line">
+            <a:avLst/>
+          </a:prstGeom>
+          <a:ln w="12700">
+            <a:solidFill>
+              <a:srgbClr val="B0B0B0"/>
+            </a:solidFill>
+          </a:ln>
+        </p:spPr>
+        <p:style>
+          <a:lnRef idx="2">
+            <a:schemeClr val="accent1"/>
+          </a:lnRef>
+          <a:fillRef idx="0">
+            <a:schemeClr val="accent1"/>
+          </a:fillRef>
+          <a:effectRef idx="1">
+            <a:schemeClr val="accent1"/>
+          </a:effectRef>
+          <a:fontRef idx="minor">
+            <a:schemeClr val="tx1"/>
+          </a:fontRef>
+        </p:style>
+      </p:cxnSp>
+      <p:cxnSp>
+        <p:nvCxnSpPr>
+          <p:cNvPr id="31" name="Connector 30"/>
+          <p:cNvCxnSpPr/>
+          <p:nvPr/>
+        </p:nvCxnSpPr>
+        <p:spPr>
+          <a:xfrm flipV="1">
+            <a:off x="896112" y="1805940"/>
+            <a:ext cx="6419088" cy="205740"/>
+          </a:xfrm>
+          <a:prstGeom prst="line">
+            <a:avLst/>
+          </a:prstGeom>
+          <a:ln w="12700">
+            <a:solidFill>
+              <a:srgbClr val="B0B0B0"/>
+            </a:solidFill>
+          </a:ln>
+        </p:spPr>
+        <p:style>
+          <a:lnRef idx="2">
+            <a:schemeClr val="accent1"/>
+          </a:lnRef>
+          <a:fillRef idx="0">
+            <a:schemeClr val="accent1"/>
+          </a:fillRef>
+          <a:effectRef idx="1">
+            <a:schemeClr val="accent1"/>
+          </a:effectRef>
+          <a:fontRef idx="minor">
+            <a:schemeClr val="tx1"/>
+          </a:fontRef>
+        </p:style>
+      </p:cxnSp>
+      <p:cxnSp>
+        <p:nvCxnSpPr>
+          <p:cNvPr id="32" name="Connector 31"/>
+          <p:cNvCxnSpPr/>
+          <p:nvPr/>
+        </p:nvCxnSpPr>
+        <p:spPr>
+          <a:xfrm>
+            <a:off x="896112" y="2011680"/>
+            <a:ext cx="2304288" cy="845820"/>
+          </a:xfrm>
+          <a:prstGeom prst="line">
+            <a:avLst/>
+          </a:prstGeom>
+          <a:ln w="12700">
+            <a:solidFill>
+              <a:srgbClr val="B0B0B0"/>
+            </a:solidFill>
+          </a:ln>
+        </p:spPr>
+        <p:style>
+          <a:lnRef idx="2">
+            <a:schemeClr val="accent1"/>
+          </a:lnRef>
+          <a:fillRef idx="0">
+            <a:schemeClr val="accent1"/>
+          </a:fillRef>
+          <a:effectRef idx="1">
+            <a:schemeClr val="accent1"/>
+          </a:effectRef>
+          <a:fontRef idx="minor">
+            <a:schemeClr val="tx1"/>
+          </a:fontRef>
+        </p:style>
+      </p:cxnSp>
+      <p:cxnSp>
+        <p:nvCxnSpPr>
+          <p:cNvPr id="33" name="Connector 32"/>
+          <p:cNvCxnSpPr/>
+          <p:nvPr/>
+        </p:nvCxnSpPr>
+        <p:spPr>
+          <a:xfrm>
+            <a:off x="896112" y="2011680"/>
+            <a:ext cx="6419088" cy="845820"/>
+          </a:xfrm>
+          <a:prstGeom prst="line">
+            <a:avLst/>
+          </a:prstGeom>
+          <a:ln w="12700">
+            <a:solidFill>
+              <a:srgbClr val="B0B0B0"/>
+            </a:solidFill>
+          </a:ln>
+        </p:spPr>
+        <p:style>
+          <a:lnRef idx="2">
+            <a:schemeClr val="accent1"/>
+          </a:lnRef>
+          <a:fillRef idx="0">
+            <a:schemeClr val="accent1"/>
+          </a:fillRef>
+          <a:effectRef idx="1">
+            <a:schemeClr val="accent1"/>
+          </a:effectRef>
+          <a:fontRef idx="minor">
+            <a:schemeClr val="tx1"/>
+          </a:fontRef>
+        </p:style>
+      </p:cxnSp>
+      <p:cxnSp>
+        <p:nvCxnSpPr>
+          <p:cNvPr id="34" name="Connector 33"/>
+          <p:cNvCxnSpPr/>
+          <p:nvPr/>
+        </p:nvCxnSpPr>
+        <p:spPr>
+          <a:xfrm>
+            <a:off x="896112" y="2011680"/>
+            <a:ext cx="2304288" cy="1897380"/>
+          </a:xfrm>
+          <a:prstGeom prst="line">
+            <a:avLst/>
+          </a:prstGeom>
+          <a:ln w="12700">
+            <a:solidFill>
+              <a:srgbClr val="B0B0B0"/>
+            </a:solidFill>
+          </a:ln>
+        </p:spPr>
+        <p:style>
+          <a:lnRef idx="2">
+            <a:schemeClr val="accent1"/>
+          </a:lnRef>
+          <a:fillRef idx="0">
+            <a:schemeClr val="accent1"/>
+          </a:fillRef>
+          <a:effectRef idx="1">
+            <a:schemeClr val="accent1"/>
+          </a:effectRef>
+          <a:fontRef idx="minor">
+            <a:schemeClr val="tx1"/>
+          </a:fontRef>
+        </p:style>
+      </p:cxnSp>
+      <p:cxnSp>
+        <p:nvCxnSpPr>
+          <p:cNvPr id="35" name="Connector 34"/>
+          <p:cNvCxnSpPr/>
+          <p:nvPr/>
+        </p:nvCxnSpPr>
+        <p:spPr>
+          <a:xfrm>
+            <a:off x="896112" y="2011680"/>
+            <a:ext cx="6419088" cy="1897380"/>
+          </a:xfrm>
+          <a:prstGeom prst="line">
+            <a:avLst/>
+          </a:prstGeom>
+          <a:ln w="12700">
+            <a:solidFill>
+              <a:srgbClr val="B0B0B0"/>
+            </a:solidFill>
+          </a:ln>
+        </p:spPr>
+        <p:style>
+          <a:lnRef idx="2">
+            <a:schemeClr val="accent1"/>
+          </a:lnRef>
+          <a:fillRef idx="0">
+            <a:schemeClr val="accent1"/>
+          </a:fillRef>
+          <a:effectRef idx="1">
+            <a:schemeClr val="accent1"/>
+          </a:effectRef>
+          <a:fontRef idx="minor">
+            <a:schemeClr val="tx1"/>
+          </a:fontRef>
+        </p:style>
+      </p:cxnSp>
+      <p:cxnSp>
+        <p:nvCxnSpPr>
+          <p:cNvPr id="36" name="Connector 35"/>
+          <p:cNvCxnSpPr/>
+          <p:nvPr/>
+        </p:nvCxnSpPr>
+        <p:spPr>
+          <a:xfrm flipV="1">
+            <a:off x="896112" y="1805940"/>
+            <a:ext cx="2304288" cy="1531620"/>
+          </a:xfrm>
+          <a:prstGeom prst="line">
+            <a:avLst/>
+          </a:prstGeom>
+          <a:ln w="12700">
+            <a:solidFill>
+              <a:srgbClr val="B0B0B0"/>
+            </a:solidFill>
+          </a:ln>
+        </p:spPr>
+        <p:style>
+          <a:lnRef idx="2">
+            <a:schemeClr val="accent1"/>
+          </a:lnRef>
+          <a:fillRef idx="0">
+            <a:schemeClr val="accent1"/>
+          </a:fillRef>
+          <a:effectRef idx="1">
+            <a:schemeClr val="accent1"/>
+          </a:effectRef>
+          <a:fontRef idx="minor">
+            <a:schemeClr val="tx1"/>
+          </a:fontRef>
+        </p:style>
+      </p:cxnSp>
+      <p:cxnSp>
+        <p:nvCxnSpPr>
+          <p:cNvPr id="37" name="Connector 36"/>
+          <p:cNvCxnSpPr/>
+          <p:nvPr/>
+        </p:nvCxnSpPr>
+        <p:spPr>
+          <a:xfrm flipV="1">
+            <a:off x="896112" y="2857500"/>
+            <a:ext cx="6419088" cy="480060"/>
+          </a:xfrm>
+          <a:prstGeom prst="line">
+            <a:avLst/>
+          </a:prstGeom>
+          <a:ln w="12700">
+            <a:solidFill>
+              <a:srgbClr val="B0B0B0"/>
+            </a:solidFill>
+          </a:ln>
+        </p:spPr>
+        <p:style>
+          <a:lnRef idx="2">
+            <a:schemeClr val="accent1"/>
+          </a:lnRef>
+          <a:fillRef idx="0">
+            <a:schemeClr val="accent1"/>
+          </a:fillRef>
+          <a:effectRef idx="1">
+            <a:schemeClr val="accent1"/>
+          </a:effectRef>
+          <a:fontRef idx="minor">
+            <a:schemeClr val="tx1"/>
+          </a:fontRef>
+        </p:style>
+      </p:cxnSp>
+      <p:cxnSp>
+        <p:nvCxnSpPr>
+          <p:cNvPr id="38" name="Connector 37"/>
+          <p:cNvCxnSpPr/>
+          <p:nvPr/>
+        </p:nvCxnSpPr>
+        <p:spPr>
+          <a:xfrm>
+            <a:off x="896112" y="3337560"/>
+            <a:ext cx="2304288" cy="571500"/>
+          </a:xfrm>
+          <a:prstGeom prst="line">
+            <a:avLst/>
+          </a:prstGeom>
+          <a:ln w="12700">
+            <a:solidFill>
+              <a:srgbClr val="B0B0B0"/>
+            </a:solidFill>
+          </a:ln>
+        </p:spPr>
+        <p:style>
+          <a:lnRef idx="2">
+            <a:schemeClr val="accent1"/>
+          </a:lnRef>
+          <a:fillRef idx="0">
+            <a:schemeClr val="accent1"/>
+          </a:fillRef>
+          <a:effectRef idx="1">
+            <a:schemeClr val="accent1"/>
+          </a:effectRef>
+          <a:fontRef idx="minor">
+            <a:schemeClr val="tx1"/>
+          </a:fontRef>
+        </p:style>
+      </p:cxnSp>
+      <p:cxnSp>
+        <p:nvCxnSpPr>
+          <p:cNvPr id="39" name="Connector 38"/>
+          <p:cNvCxnSpPr/>
+          <p:nvPr/>
+        </p:nvCxnSpPr>
+        <p:spPr>
+          <a:xfrm>
+            <a:off x="896112" y="3337560"/>
+            <a:ext cx="6419088" cy="571500"/>
+          </a:xfrm>
+          <a:prstGeom prst="line">
+            <a:avLst/>
+          </a:prstGeom>
+          <a:ln w="12700">
+            <a:solidFill>
+              <a:srgbClr val="B0B0B0"/>
+            </a:solidFill>
+          </a:ln>
+        </p:spPr>
+        <p:style>
+          <a:lnRef idx="2">
+            <a:schemeClr val="accent1"/>
+          </a:lnRef>
+          <a:fillRef idx="0">
+            <a:schemeClr val="accent1"/>
+          </a:fillRef>
+          <a:effectRef idx="1">
+            <a:schemeClr val="accent1"/>
+          </a:effectRef>
+          <a:fontRef idx="minor">
+            <a:schemeClr val="tx1"/>
+          </a:fontRef>
+        </p:style>
+      </p:cxnSp>
+      <p:cxnSp>
+        <p:nvCxnSpPr>
+          <p:cNvPr id="40" name="Connector 39"/>
+          <p:cNvCxnSpPr/>
+          <p:nvPr/>
+        </p:nvCxnSpPr>
+        <p:spPr>
+          <a:xfrm flipV="1">
+            <a:off x="896112" y="1805940"/>
+            <a:ext cx="2304288" cy="2857500"/>
+          </a:xfrm>
+          <a:prstGeom prst="line">
+            <a:avLst/>
+          </a:prstGeom>
+          <a:ln w="12700">
+            <a:solidFill>
+              <a:srgbClr val="B0B0B0"/>
+            </a:solidFill>
+          </a:ln>
+        </p:spPr>
+        <p:style>
+          <a:lnRef idx="2">
+            <a:schemeClr val="accent1"/>
+          </a:lnRef>
+          <a:fillRef idx="0">
+            <a:schemeClr val="accent1"/>
+          </a:fillRef>
+          <a:effectRef idx="1">
+            <a:schemeClr val="accent1"/>
+          </a:effectRef>
+          <a:fontRef idx="minor">
+            <a:schemeClr val="tx1"/>
+          </a:fontRef>
+        </p:style>
+      </p:cxnSp>
+      <p:cxnSp>
+        <p:nvCxnSpPr>
+          <p:cNvPr id="41" name="Connector 40"/>
+          <p:cNvCxnSpPr/>
+          <p:nvPr/>
+        </p:nvCxnSpPr>
+        <p:spPr>
+          <a:xfrm flipV="1">
+            <a:off x="896112" y="2857500"/>
+            <a:ext cx="6419088" cy="1805940"/>
+          </a:xfrm>
+          <a:prstGeom prst="line">
+            <a:avLst/>
+          </a:prstGeom>
+          <a:ln w="12700">
+            <a:solidFill>
+              <a:srgbClr val="B0B0B0"/>
+            </a:solidFill>
+          </a:ln>
+        </p:spPr>
+        <p:style>
+          <a:lnRef idx="2">
+            <a:schemeClr val="accent1"/>
+          </a:lnRef>
+          <a:fillRef idx="0">
+            <a:schemeClr val="accent1"/>
+          </a:fillRef>
+          <a:effectRef idx="1">
+            <a:schemeClr val="accent1"/>
+          </a:effectRef>
+          <a:fontRef idx="minor">
+            <a:schemeClr val="tx1"/>
+          </a:fontRef>
+        </p:style>
+      </p:cxnSp>
+      <p:cxnSp>
+        <p:nvCxnSpPr>
+          <p:cNvPr id="42" name="Connector 41"/>
+          <p:cNvCxnSpPr/>
+          <p:nvPr/>
+        </p:nvCxnSpPr>
+        <p:spPr>
+          <a:xfrm flipV="1">
+            <a:off x="896112" y="3909060"/>
+            <a:ext cx="2304288" cy="754380"/>
+          </a:xfrm>
+          <a:prstGeom prst="line">
+            <a:avLst/>
+          </a:prstGeom>
+          <a:ln w="12700">
+            <a:solidFill>
+              <a:srgbClr val="B0B0B0"/>
+            </a:solidFill>
+          </a:ln>
+        </p:spPr>
+        <p:style>
+          <a:lnRef idx="2">
+            <a:schemeClr val="accent1"/>
+          </a:lnRef>
+          <a:fillRef idx="0">
+            <a:schemeClr val="accent1"/>
+          </a:fillRef>
+          <a:effectRef idx="1">
+            <a:schemeClr val="accent1"/>
+          </a:effectRef>
+          <a:fontRef idx="minor">
+            <a:schemeClr val="tx1"/>
+          </a:fontRef>
+        </p:style>
+      </p:cxnSp>
+      <p:cxnSp>
+        <p:nvCxnSpPr>
+          <p:cNvPr id="43" name="Connector 42"/>
+          <p:cNvCxnSpPr/>
+          <p:nvPr/>
+        </p:nvCxnSpPr>
+        <p:spPr>
+          <a:xfrm flipV="1">
+            <a:off x="896112" y="3909060"/>
+            <a:ext cx="6419088" cy="754380"/>
+          </a:xfrm>
+          <a:prstGeom prst="line">
+            <a:avLst/>
+          </a:prstGeom>
+          <a:ln w="12700">
+            <a:solidFill>
+              <a:srgbClr val="B0B0B0"/>
+            </a:solidFill>
+          </a:ln>
+        </p:spPr>
+        <p:style>
+          <a:lnRef idx="2">
+            <a:schemeClr val="accent1"/>
+          </a:lnRef>
+          <a:fillRef idx="0">
+            <a:schemeClr val="accent1"/>
+          </a:fillRef>
+          <a:effectRef idx="1">
+            <a:schemeClr val="accent1"/>
+          </a:effectRef>
+          <a:fontRef idx="minor">
+            <a:schemeClr val="tx1"/>
+          </a:fontRef>
+        </p:style>
+      </p:cxnSp>
+      <p:sp>
+        <p:nvSpPr>
+          <p:cNvPr id="44" name="TextBox 43"/>
+          <p:cNvSpPr txBox="1"/>
+          <p:nvPr/>
+        </p:nvSpPr>
+        <p:spPr>
+          <a:xfrm>
+            <a:off x="731520" y="5760720"/>
+            <a:ext cx="10332720" cy="365760"/>
+          </a:xfrm>
+          <a:prstGeom prst="rect">
+            <a:avLst/>
+          </a:prstGeom>
+          <a:noFill/>
+        </p:spPr>
+        <p:txBody>
+          <a:bodyPr wrap="square" anchor="t">
+            <a:spAutoFit/>
+          </a:bodyPr>
+          <a:lstStyle/>
+          <a:p>
+            <a:pPr algn="l"/>
+            <a:r>
+              <a:rPr sz="1250" b="0" i="1">
+                <a:solidFill>
+                  <a:srgbClr val="404040"/>
+                </a:solidFill>
+                <a:latin typeface="Times New Roman"/>
+              </a:rPr>
+              <a:t>22 cas d'utilisation détaillés : voir docs/cas_utilisation.md (diagramme Mermaid + tableau de synthèse)</a:t>
+            </a:r>
+          </a:p>
+        </p:txBody>
+      </p:sp>
+    </p:spTree>
+  </p:cSld>
+  <p:clrMapOvr>
+    <a:masterClrMapping/>
+  </p:clrMapOvr>
+</p:sld>
+</file>
+
+<file path=ppt/slides/slide5.xml><?xml version="1.0" encoding="utf-8"?>
+<p:sld xmlns:a="http://schemas.openxmlformats.org/drawingml/2006/main" xmlns:p="http://schemas.openxmlformats.org/presentationml/2006/main" xmlns:r="http://schemas.openxmlformats.org/officeDocument/2006/relationships">
+  <p:cSld>
+    <p:bg>
+      <p:bgPr>
+        <a:solidFill>
+          <a:srgbClr val="FFFFFF"/>
+        </a:solidFill>
+        <a:effectLst/>
+      </p:bgPr>
+    </p:bg>
+    <p:spTree>
+      <p:nvGrpSpPr>
+        <p:cNvPr id="1" name=""/>
+        <p:cNvGrpSpPr/>
+        <p:nvPr/>
+      </p:nvGrpSpPr>
+      <p:grpSpPr/>
+      <p:sp>
+        <p:nvSpPr>
+          <p:cNvPr id="2" name="TextBox 1"/>
+          <p:cNvSpPr txBox="1"/>
+          <p:nvPr/>
+        </p:nvSpPr>
+        <p:spPr>
+          <a:xfrm>
+            <a:off x="731520" y="365760"/>
+            <a:ext cx="10515600" cy="320040"/>
+          </a:xfrm>
+          <a:prstGeom prst="rect">
+            <a:avLst/>
+          </a:prstGeom>
+          <a:noFill/>
+        </p:spPr>
+        <p:txBody>
+          <a:bodyPr wrap="square" anchor="t">
+            <a:spAutoFit/>
+          </a:bodyPr>
+          <a:lstStyle/>
+          <a:p>
+            <a:pPr algn="l"/>
+            <a:r>
+              <a:rPr sz="1300" b="1" i="0">
+                <a:solidFill>
+                  <a:srgbClr val="1F3C63"/>
+                </a:solidFill>
+                <a:latin typeface="Times New Roman"/>
+              </a:rPr>
+              <a:t>CHOIX TECHNOLOGIQUES</a:t>
+            </a:r>
+          </a:p>
+        </p:txBody>
+      </p:sp>
+      <p:sp>
+        <p:nvSpPr>
+          <p:cNvPr id="3" name="TextBox 2"/>
+          <p:cNvSpPr txBox="1"/>
+          <p:nvPr/>
+        </p:nvSpPr>
+        <p:spPr>
+          <a:xfrm>
+            <a:off x="731520" y="658368"/>
+            <a:ext cx="10698480" cy="731520"/>
+          </a:xfrm>
+          <a:prstGeom prst="rect">
+            <a:avLst/>
+          </a:prstGeom>
+          <a:noFill/>
+        </p:spPr>
+        <p:txBody>
+          <a:bodyPr wrap="square" anchor="t">
+            <a:spAutoFit/>
+          </a:bodyPr>
+          <a:lstStyle/>
+          <a:p>
+            <a:pPr algn="l"/>
+            <a:r>
+              <a:rPr sz="2800" b="1" i="0">
+                <a:solidFill>
+                  <a:srgbClr val="000000"/>
+                </a:solidFill>
+                <a:latin typeface="Times New Roman"/>
+              </a:rPr>
+              <a:t>Stack technique</a:t>
+            </a:r>
+          </a:p>
+        </p:txBody>
+      </p:sp>
+      <p:sp>
+        <p:nvSpPr>
+          <p:cNvPr id="4" name="Rectangle 3"/>
+          <p:cNvSpPr/>
+          <p:nvPr/>
+        </p:nvSpPr>
+        <p:spPr>
+          <a:xfrm>
+            <a:off x="731520" y="1344168"/>
+            <a:ext cx="10698480" cy="15875"/>
+          </a:xfrm>
+          <a:prstGeom prst="rect">
+            <a:avLst/>
+          </a:prstGeom>
+          <a:solidFill>
+            <a:srgbClr val="1F3C63"/>
+          </a:solidFill>
+          <a:ln>
+            <a:noFill/>
+          </a:ln>
+          <a:effectLst/>
+        </p:spPr>
+        <p:style>
+          <a:lnRef idx="1">
+            <a:schemeClr val="accent1"/>
+          </a:lnRef>
+          <a:fillRef idx="3">
+            <a:schemeClr val="accent1"/>
+          </a:fillRef>
+          <a:effectRef idx="2">
+            <a:schemeClr val="accent1"/>
+          </a:effectRef>
+          <a:fontRef idx="minor">
+            <a:schemeClr val="lt1"/>
+          </a:fontRef>
+        </p:style>
+        <p:txBody>
+          <a:bodyPr rtlCol="0" anchor="ctr"/>
+          <a:lstStyle/>
+          <a:p>
+            <a:pPr algn="ctr"/>
+          </a:p>
+        </p:txBody>
+      </p:sp>
+      <p:sp>
+        <p:nvSpPr>
+          <p:cNvPr id="5" name="TextBox 4"/>
+          <p:cNvSpPr txBox="1"/>
+          <p:nvPr/>
+        </p:nvSpPr>
+        <p:spPr>
+          <a:xfrm>
+            <a:off x="11185855" y="6400800"/>
+            <a:ext cx="640080" cy="320040"/>
+          </a:xfrm>
+          <a:prstGeom prst="rect">
+            <a:avLst/>
+          </a:prstGeom>
+          <a:noFill/>
+        </p:spPr>
+        <p:txBody>
+          <a:bodyPr wrap="square" anchor="t">
+            <a:spAutoFit/>
+          </a:bodyPr>
+          <a:lstStyle/>
+          <a:p>
+            <a:pPr algn="r"/>
+            <a:r>
+              <a:rPr sz="1100" b="0" i="0">
+                <a:solidFill>
+                  <a:srgbClr val="404040"/>
+                </a:solidFill>
+                <a:latin typeface="Times New Roman"/>
+              </a:rPr>
+              <a:t>4</a:t>
             </a:r>
           </a:p>
         </p:txBody>
@@ -5775,25 +7799,13 @@
                 <a:tableStyleId>{5C22544A-7EE6-4342-B048-85BDC9FD1C3A}</a:tableStyleId>
               </a:tblPr>
               <a:tblGrid>
-                <a:gridCol w="4114800">
-                  <a:extLst>
-                    <a:ext uri="{9D8B030D-6E8A-4147-A177-3AD203B41FA5}">
-                      <a16:colId xmlns:a16="http://schemas.microsoft.com/office/drawing/2014/main" val="20000"/>
-                    </a:ext>
-                  </a:extLst>
-                </a:gridCol>
-                <a:gridCol w="6400800">
-                  <a:extLst>
-                    <a:ext uri="{9D8B030D-6E8A-4147-A177-3AD203B41FA5}">
-                      <a16:colId xmlns:a16="http://schemas.microsoft.com/office/drawing/2014/main" val="20001"/>
-                    </a:ext>
-                  </a:extLst>
-                </a:gridCol>
+                <a:gridCol w="4114800"/>
+                <a:gridCol w="6400800"/>
               </a:tblGrid>
               <a:tr h="576072">
                 <a:tc>
                   <a:txBody>
-                    <a:bodyPr/>
+                    <a:bodyPr wrap="square"/>
                     <a:lstStyle/>
                     <a:p>
                       <a:r>
@@ -5815,7 +7827,7 @@
                 </a:tc>
                 <a:tc>
                   <a:txBody>
-                    <a:bodyPr/>
+                    <a:bodyPr wrap="square"/>
                     <a:lstStyle/>
                     <a:p>
                       <a:r>
@@ -5835,16 +7847,11 @@
                     </a:solidFill>
                   </a:tcPr>
                 </a:tc>
-                <a:extLst>
-                  <a:ext uri="{0D108BD9-81ED-4DB2-BD59-A6C34878D82A}">
-                    <a16:rowId xmlns:a16="http://schemas.microsoft.com/office/drawing/2014/main" val="10000"/>
-                  </a:ext>
-                </a:extLst>
               </a:tr>
               <a:tr h="576072">
                 <a:tc>
                   <a:txBody>
-                    <a:bodyPr/>
+                    <a:bodyPr wrap="square"/>
                     <a:lstStyle/>
                     <a:p>
                       <a:r>
@@ -5866,7 +7873,7 @@
                 </a:tc>
                 <a:tc>
                   <a:txBody>
-                    <a:bodyPr/>
+                    <a:bodyPr wrap="square"/>
                     <a:lstStyle/>
                     <a:p>
                       <a:r>
@@ -5886,16 +7893,11 @@
                     </a:solidFill>
                   </a:tcPr>
                 </a:tc>
-                <a:extLst>
-                  <a:ext uri="{0D108BD9-81ED-4DB2-BD59-A6C34878D82A}">
-                    <a16:rowId xmlns:a16="http://schemas.microsoft.com/office/drawing/2014/main" val="10001"/>
-                  </a:ext>
-                </a:extLst>
               </a:tr>
               <a:tr h="576072">
                 <a:tc>
                   <a:txBody>
-                    <a:bodyPr/>
+                    <a:bodyPr wrap="square"/>
                     <a:lstStyle/>
                     <a:p>
                       <a:r>
@@ -5917,7 +7919,7 @@
                 </a:tc>
                 <a:tc>
                   <a:txBody>
-                    <a:bodyPr/>
+                    <a:bodyPr wrap="square"/>
                     <a:lstStyle/>
                     <a:p>
                       <a:r>
@@ -5937,16 +7939,11 @@
                     </a:solidFill>
                   </a:tcPr>
                 </a:tc>
-                <a:extLst>
-                  <a:ext uri="{0D108BD9-81ED-4DB2-BD59-A6C34878D82A}">
-                    <a16:rowId xmlns:a16="http://schemas.microsoft.com/office/drawing/2014/main" val="10002"/>
-                  </a:ext>
-                </a:extLst>
               </a:tr>
               <a:tr h="576072">
                 <a:tc>
                   <a:txBody>
-                    <a:bodyPr/>
+                    <a:bodyPr wrap="square"/>
                     <a:lstStyle/>
                     <a:p>
                       <a:r>
@@ -5968,7 +7965,7 @@
                 </a:tc>
                 <a:tc>
                   <a:txBody>
-                    <a:bodyPr/>
+                    <a:bodyPr wrap="square"/>
                     <a:lstStyle/>
                     <a:p>
                       <a:r>
@@ -5988,16 +7985,11 @@
                     </a:solidFill>
                   </a:tcPr>
                 </a:tc>
-                <a:extLst>
-                  <a:ext uri="{0D108BD9-81ED-4DB2-BD59-A6C34878D82A}">
-                    <a16:rowId xmlns:a16="http://schemas.microsoft.com/office/drawing/2014/main" val="10003"/>
-                  </a:ext>
-                </a:extLst>
               </a:tr>
               <a:tr h="576072">
                 <a:tc>
                   <a:txBody>
-                    <a:bodyPr/>
+                    <a:bodyPr wrap="square"/>
                     <a:lstStyle/>
                     <a:p>
                       <a:r>
@@ -6019,7 +8011,7 @@
                 </a:tc>
                 <a:tc>
                   <a:txBody>
-                    <a:bodyPr/>
+                    <a:bodyPr wrap="square"/>
                     <a:lstStyle/>
                     <a:p>
                       <a:r>
@@ -6039,16 +8031,11 @@
                     </a:solidFill>
                   </a:tcPr>
                 </a:tc>
-                <a:extLst>
-                  <a:ext uri="{0D108BD9-81ED-4DB2-BD59-A6C34878D82A}">
-                    <a16:rowId xmlns:a16="http://schemas.microsoft.com/office/drawing/2014/main" val="10004"/>
-                  </a:ext>
-                </a:extLst>
               </a:tr>
               <a:tr h="576072">
                 <a:tc>
                   <a:txBody>
-                    <a:bodyPr/>
+                    <a:bodyPr wrap="square"/>
                     <a:lstStyle/>
                     <a:p>
                       <a:r>
@@ -6070,7 +8057,7 @@
                 </a:tc>
                 <a:tc>
                   <a:txBody>
-                    <a:bodyPr/>
+                    <a:bodyPr wrap="square"/>
                     <a:lstStyle/>
                     <a:p>
                       <a:r>
@@ -6090,16 +8077,11 @@
                     </a:solidFill>
                   </a:tcPr>
                 </a:tc>
-                <a:extLst>
-                  <a:ext uri="{0D108BD9-81ED-4DB2-BD59-A6C34878D82A}">
-                    <a16:rowId xmlns:a16="http://schemas.microsoft.com/office/drawing/2014/main" val="10005"/>
-                  </a:ext>
-                </a:extLst>
               </a:tr>
               <a:tr h="576072">
                 <a:tc>
                   <a:txBody>
-                    <a:bodyPr/>
+                    <a:bodyPr wrap="square"/>
                     <a:lstStyle/>
                     <a:p>
                       <a:r>
@@ -6121,7 +8103,7 @@
                 </a:tc>
                 <a:tc>
                   <a:txBody>
-                    <a:bodyPr/>
+                    <a:bodyPr wrap="square"/>
                     <a:lstStyle/>
                     <a:p>
                       <a:r>
@@ -6141,11 +8123,6 @@
                     </a:solidFill>
                   </a:tcPr>
                 </a:tc>
-                <a:extLst>
-                  <a:ext uri="{0D108BD9-81ED-4DB2-BD59-A6C34878D82A}">
-                    <a16:rowId xmlns:a16="http://schemas.microsoft.com/office/drawing/2014/main" val="10006"/>
-                  </a:ext>
-                </a:extLst>
               </a:tr>
             </a:tbl>
           </a:graphicData>
@@ -6159,8 +8136,8 @@
 </p:sld>
 </file>
 
-<file path=ppt/slides/slide5.xml><?xml version="1.0" encoding="utf-8"?>
-<p:sld xmlns:a="http://schemas.openxmlformats.org/drawingml/2006/main" xmlns:r="http://schemas.openxmlformats.org/officeDocument/2006/relationships" xmlns:p="http://schemas.openxmlformats.org/presentationml/2006/main">
+<file path=ppt/slides/slide6.xml><?xml version="1.0" encoding="utf-8"?>
+<p:sld xmlns:a="http://schemas.openxmlformats.org/drawingml/2006/main" xmlns:p="http://schemas.openxmlformats.org/presentationml/2006/main" xmlns:r="http://schemas.openxmlformats.org/officeDocument/2006/relationships">
   <p:cSld>
     <p:bg>
       <p:bgPr>
@@ -6176,14 +8153,7 @@
         <p:cNvGrpSpPr/>
         <p:nvPr/>
       </p:nvGrpSpPr>
-      <p:grpSpPr>
-        <a:xfrm>
-          <a:off x="0" y="0"/>
-          <a:ext cx="0" cy="0"/>
-          <a:chOff x="0" y="0"/>
-          <a:chExt cx="0" cy="0"/>
-        </a:xfrm>
-      </p:grpSpPr>
+      <p:grpSpPr/>
       <p:sp>
         <p:nvSpPr>
           <p:cNvPr id="2" name="TextBox 1"/>
@@ -6295,7 +8265,6 @@
           <a:lstStyle/>
           <a:p>
             <a:pPr algn="ctr"/>
-            <a:endParaRPr/>
           </a:p>
         </p:txBody>
       </p:sp>
@@ -6329,7 +8298,7 @@
                 </a:solidFill>
                 <a:latin typeface="Times New Roman"/>
               </a:rPr>
-              <a:t>4</a:t>
+              <a:t>5</a:t>
             </a:r>
           </a:p>
         </p:txBody>
@@ -6353,32 +8322,14 @@
                 <a:tableStyleId>{5C22544A-7EE6-4342-B048-85BDC9FD1C3A}</a:tableStyleId>
               </a:tblPr>
               <a:tblGrid>
-                <a:gridCol w="2103120">
-                  <a:extLst>
-                    <a:ext uri="{9D8B030D-6E8A-4147-A177-3AD203B41FA5}">
-                      <a16:colId xmlns:a16="http://schemas.microsoft.com/office/drawing/2014/main" val="20000"/>
-                    </a:ext>
-                  </a:extLst>
-                </a:gridCol>
-                <a:gridCol w="3108960">
-                  <a:extLst>
-                    <a:ext uri="{9D8B030D-6E8A-4147-A177-3AD203B41FA5}">
-                      <a16:colId xmlns:a16="http://schemas.microsoft.com/office/drawing/2014/main" val="20001"/>
-                    </a:ext>
-                  </a:extLst>
-                </a:gridCol>
-                <a:gridCol w="6035040">
-                  <a:extLst>
-                    <a:ext uri="{9D8B030D-6E8A-4147-A177-3AD203B41FA5}">
-                      <a16:colId xmlns:a16="http://schemas.microsoft.com/office/drawing/2014/main" val="20002"/>
-                    </a:ext>
-                  </a:extLst>
-                </a:gridCol>
+                <a:gridCol w="2103120"/>
+                <a:gridCol w="3108960"/>
+                <a:gridCol w="6035040"/>
               </a:tblGrid>
               <a:tr h="640080">
                 <a:tc>
                   <a:txBody>
-                    <a:bodyPr/>
+                    <a:bodyPr wrap="square"/>
                     <a:lstStyle/>
                     <a:p>
                       <a:r>
@@ -6400,7 +8351,7 @@
                 </a:tc>
                 <a:tc>
                   <a:txBody>
-                    <a:bodyPr/>
+                    <a:bodyPr wrap="square"/>
                     <a:lstStyle/>
                     <a:p>
                       <a:r>
@@ -6422,7 +8373,7 @@
                 </a:tc>
                 <a:tc>
                   <a:txBody>
-                    <a:bodyPr/>
+                    <a:bodyPr wrap="square"/>
                     <a:lstStyle/>
                     <a:p>
                       <a:r>
@@ -6442,16 +8393,11 @@
                     </a:solidFill>
                   </a:tcPr>
                 </a:tc>
-                <a:extLst>
-                  <a:ext uri="{0D108BD9-81ED-4DB2-BD59-A6C34878D82A}">
-                    <a16:rowId xmlns:a16="http://schemas.microsoft.com/office/drawing/2014/main" val="10000"/>
-                  </a:ext>
-                </a:extLst>
               </a:tr>
               <a:tr h="640080">
                 <a:tc>
                   <a:txBody>
-                    <a:bodyPr/>
+                    <a:bodyPr wrap="square"/>
                     <a:lstStyle/>
                     <a:p>
                       <a:r>
@@ -6473,7 +8419,7 @@
                 </a:tc>
                 <a:tc>
                   <a:txBody>
-                    <a:bodyPr/>
+                    <a:bodyPr wrap="square"/>
                     <a:lstStyle/>
                     <a:p>
                       <a:r>
@@ -6495,7 +8441,7 @@
                 </a:tc>
                 <a:tc>
                   <a:txBody>
-                    <a:bodyPr/>
+                    <a:bodyPr wrap="square"/>
                     <a:lstStyle/>
                     <a:p>
                       <a:r>
@@ -6515,16 +8461,11 @@
                     </a:solidFill>
                   </a:tcPr>
                 </a:tc>
-                <a:extLst>
-                  <a:ext uri="{0D108BD9-81ED-4DB2-BD59-A6C34878D82A}">
-                    <a16:rowId xmlns:a16="http://schemas.microsoft.com/office/drawing/2014/main" val="10001"/>
-                  </a:ext>
-                </a:extLst>
               </a:tr>
               <a:tr h="640080">
                 <a:tc>
                   <a:txBody>
-                    <a:bodyPr/>
+                    <a:bodyPr wrap="square"/>
                     <a:lstStyle/>
                     <a:p>
                       <a:r>
@@ -6546,7 +8487,7 @@
                 </a:tc>
                 <a:tc>
                   <a:txBody>
-                    <a:bodyPr/>
+                    <a:bodyPr wrap="square"/>
                     <a:lstStyle/>
                     <a:p>
                       <a:r>
@@ -6568,7 +8509,7 @@
                 </a:tc>
                 <a:tc>
                   <a:txBody>
-                    <a:bodyPr/>
+                    <a:bodyPr wrap="square"/>
                     <a:lstStyle/>
                     <a:p>
                       <a:r>
@@ -6588,16 +8529,11 @@
                     </a:solidFill>
                   </a:tcPr>
                 </a:tc>
-                <a:extLst>
-                  <a:ext uri="{0D108BD9-81ED-4DB2-BD59-A6C34878D82A}">
-                    <a16:rowId xmlns:a16="http://schemas.microsoft.com/office/drawing/2014/main" val="10002"/>
-                  </a:ext>
-                </a:extLst>
               </a:tr>
               <a:tr h="640080">
                 <a:tc>
                   <a:txBody>
-                    <a:bodyPr/>
+                    <a:bodyPr wrap="square"/>
                     <a:lstStyle/>
                     <a:p>
                       <a:r>
@@ -6619,7 +8555,7 @@
                 </a:tc>
                 <a:tc>
                   <a:txBody>
-                    <a:bodyPr/>
+                    <a:bodyPr wrap="square"/>
                     <a:lstStyle/>
                     <a:p>
                       <a:r>
@@ -6641,7 +8577,7 @@
                 </a:tc>
                 <a:tc>
                   <a:txBody>
-                    <a:bodyPr/>
+                    <a:bodyPr wrap="square"/>
                     <a:lstStyle/>
                     <a:p>
                       <a:r>
@@ -6661,16 +8597,11 @@
                     </a:solidFill>
                   </a:tcPr>
                 </a:tc>
-                <a:extLst>
-                  <a:ext uri="{0D108BD9-81ED-4DB2-BD59-A6C34878D82A}">
-                    <a16:rowId xmlns:a16="http://schemas.microsoft.com/office/drawing/2014/main" val="10003"/>
-                  </a:ext>
-                </a:extLst>
               </a:tr>
               <a:tr h="640080">
                 <a:tc>
                   <a:txBody>
-                    <a:bodyPr/>
+                    <a:bodyPr wrap="square"/>
                     <a:lstStyle/>
                     <a:p>
                       <a:r>
@@ -6692,7 +8623,7 @@
                 </a:tc>
                 <a:tc>
                   <a:txBody>
-                    <a:bodyPr/>
+                    <a:bodyPr wrap="square"/>
                     <a:lstStyle/>
                     <a:p>
                       <a:r>
@@ -6714,7 +8645,7 @@
                 </a:tc>
                 <a:tc>
                   <a:txBody>
-                    <a:bodyPr/>
+                    <a:bodyPr wrap="square"/>
                     <a:lstStyle/>
                     <a:p>
                       <a:r>
@@ -6734,16 +8665,11 @@
                     </a:solidFill>
                   </a:tcPr>
                 </a:tc>
-                <a:extLst>
-                  <a:ext uri="{0D108BD9-81ED-4DB2-BD59-A6C34878D82A}">
-                    <a16:rowId xmlns:a16="http://schemas.microsoft.com/office/drawing/2014/main" val="10004"/>
-                  </a:ext>
-                </a:extLst>
               </a:tr>
               <a:tr h="640080">
                 <a:tc>
                   <a:txBody>
-                    <a:bodyPr/>
+                    <a:bodyPr wrap="square"/>
                     <a:lstStyle/>
                     <a:p>
                       <a:r>
@@ -6765,7 +8691,7 @@
                 </a:tc>
                 <a:tc>
                   <a:txBody>
-                    <a:bodyPr/>
+                    <a:bodyPr wrap="square"/>
                     <a:lstStyle/>
                     <a:p>
                       <a:r>
@@ -6787,7 +8713,7 @@
                 </a:tc>
                 <a:tc>
                   <a:txBody>
-                    <a:bodyPr/>
+                    <a:bodyPr wrap="square"/>
                     <a:lstStyle/>
                     <a:p>
                       <a:r>
@@ -6807,11 +8733,6 @@
                     </a:solidFill>
                   </a:tcPr>
                 </a:tc>
-                <a:extLst>
-                  <a:ext uri="{0D108BD9-81ED-4DB2-BD59-A6C34878D82A}">
-                    <a16:rowId xmlns:a16="http://schemas.microsoft.com/office/drawing/2014/main" val="10005"/>
-                  </a:ext>
-                </a:extLst>
               </a:tr>
             </a:tbl>
           </a:graphicData>
@@ -6860,8 +8781,8 @@
 </p:sld>
 </file>
 
-<file path=ppt/slides/slide6.xml><?xml version="1.0" encoding="utf-8"?>
-<p:sld xmlns:a="http://schemas.openxmlformats.org/drawingml/2006/main" xmlns:r="http://schemas.openxmlformats.org/officeDocument/2006/relationships" xmlns:p="http://schemas.openxmlformats.org/presentationml/2006/main">
+<file path=ppt/slides/slide7.xml><?xml version="1.0" encoding="utf-8"?>
+<p:sld xmlns:a="http://schemas.openxmlformats.org/drawingml/2006/main" xmlns:p="http://schemas.openxmlformats.org/presentationml/2006/main" xmlns:r="http://schemas.openxmlformats.org/officeDocument/2006/relationships">
   <p:cSld>
     <p:bg>
       <p:bgPr>
@@ -6877,14 +8798,7 @@
         <p:cNvGrpSpPr/>
         <p:nvPr/>
       </p:nvGrpSpPr>
-      <p:grpSpPr>
-        <a:xfrm>
-          <a:off x="0" y="0"/>
-          <a:ext cx="0" cy="0"/>
-          <a:chOff x="0" y="0"/>
-          <a:chExt cx="0" cy="0"/>
-        </a:xfrm>
-      </p:grpSpPr>
+      <p:grpSpPr/>
       <p:sp>
         <p:nvSpPr>
           <p:cNvPr id="2" name="TextBox 1"/>
@@ -6996,7 +8910,6 @@
           <a:lstStyle/>
           <a:p>
             <a:pPr algn="ctr"/>
-            <a:endParaRPr/>
           </a:p>
         </p:txBody>
       </p:sp>
@@ -7030,7 +8943,7 @@
                 </a:solidFill>
                 <a:latin typeface="Times New Roman"/>
               </a:rPr>
-              <a:t>5</a:t>
+              <a:t>6</a:t>
             </a:r>
           </a:p>
         </p:txBody>
@@ -7165,8 +9078,8 @@
 </p:sld>
 </file>
 
-<file path=ppt/slides/slide7.xml><?xml version="1.0" encoding="utf-8"?>
-<p:sld xmlns:a="http://schemas.openxmlformats.org/drawingml/2006/main" xmlns:r="http://schemas.openxmlformats.org/officeDocument/2006/relationships" xmlns:p="http://schemas.openxmlformats.org/presentationml/2006/main">
+<file path=ppt/slides/slide8.xml><?xml version="1.0" encoding="utf-8"?>
+<p:sld xmlns:a="http://schemas.openxmlformats.org/drawingml/2006/main" xmlns:p="http://schemas.openxmlformats.org/presentationml/2006/main" xmlns:r="http://schemas.openxmlformats.org/officeDocument/2006/relationships">
   <p:cSld>
     <p:bg>
       <p:bgPr>
@@ -7182,14 +9095,7 @@
         <p:cNvGrpSpPr/>
         <p:nvPr/>
       </p:nvGrpSpPr>
-      <p:grpSpPr>
-        <a:xfrm>
-          <a:off x="0" y="0"/>
-          <a:ext cx="0" cy="0"/>
-          <a:chOff x="0" y="0"/>
-          <a:chExt cx="0" cy="0"/>
-        </a:xfrm>
-      </p:grpSpPr>
+      <p:grpSpPr/>
       <p:sp>
         <p:nvSpPr>
           <p:cNvPr id="2" name="TextBox 1"/>
@@ -7301,7 +9207,6 @@
           <a:lstStyle/>
           <a:p>
             <a:pPr algn="ctr"/>
-            <a:endParaRPr/>
           </a:p>
         </p:txBody>
       </p:sp>
@@ -7335,7 +9240,7 @@
                 </a:solidFill>
                 <a:latin typeface="Times New Roman"/>
               </a:rPr>
-              <a:t>6</a:t>
+              <a:t>7</a:t>
             </a:r>
           </a:p>
         </p:txBody>
@@ -7359,25 +9264,13 @@
                 <a:tableStyleId>{5C22544A-7EE6-4342-B048-85BDC9FD1C3A}</a:tableStyleId>
               </a:tblPr>
               <a:tblGrid>
-                <a:gridCol w="2560320">
-                  <a:extLst>
-                    <a:ext uri="{9D8B030D-6E8A-4147-A177-3AD203B41FA5}">
-                      <a16:colId xmlns:a16="http://schemas.microsoft.com/office/drawing/2014/main" val="20000"/>
-                    </a:ext>
-                  </a:extLst>
-                </a:gridCol>
-                <a:gridCol w="7772400">
-                  <a:extLst>
-                    <a:ext uri="{9D8B030D-6E8A-4147-A177-3AD203B41FA5}">
-                      <a16:colId xmlns:a16="http://schemas.microsoft.com/office/drawing/2014/main" val="20001"/>
-                    </a:ext>
-                  </a:extLst>
-                </a:gridCol>
+                <a:gridCol w="2560320"/>
+                <a:gridCol w="7772400"/>
               </a:tblGrid>
               <a:tr h="658368">
                 <a:tc>
                   <a:txBody>
-                    <a:bodyPr/>
+                    <a:bodyPr wrap="square"/>
                     <a:lstStyle/>
                     <a:p>
                       <a:r>
@@ -7399,7 +9292,7 @@
                 </a:tc>
                 <a:tc>
                   <a:txBody>
-                    <a:bodyPr/>
+                    <a:bodyPr wrap="square"/>
                     <a:lstStyle/>
                     <a:p>
                       <a:r>
@@ -7419,16 +9312,11 @@
                     </a:solidFill>
                   </a:tcPr>
                 </a:tc>
-                <a:extLst>
-                  <a:ext uri="{0D108BD9-81ED-4DB2-BD59-A6C34878D82A}">
-                    <a16:rowId xmlns:a16="http://schemas.microsoft.com/office/drawing/2014/main" val="10000"/>
-                  </a:ext>
-                </a:extLst>
               </a:tr>
               <a:tr h="658368">
                 <a:tc>
                   <a:txBody>
-                    <a:bodyPr/>
+                    <a:bodyPr wrap="square"/>
                     <a:lstStyle/>
                     <a:p>
                       <a:r>
@@ -7450,7 +9338,7 @@
                 </a:tc>
                 <a:tc>
                   <a:txBody>
-                    <a:bodyPr/>
+                    <a:bodyPr wrap="square"/>
                     <a:lstStyle/>
                     <a:p>
                       <a:r>
@@ -7470,16 +9358,11 @@
                     </a:solidFill>
                   </a:tcPr>
                 </a:tc>
-                <a:extLst>
-                  <a:ext uri="{0D108BD9-81ED-4DB2-BD59-A6C34878D82A}">
-                    <a16:rowId xmlns:a16="http://schemas.microsoft.com/office/drawing/2014/main" val="10001"/>
-                  </a:ext>
-                </a:extLst>
               </a:tr>
               <a:tr h="658368">
                 <a:tc>
                   <a:txBody>
-                    <a:bodyPr/>
+                    <a:bodyPr wrap="square"/>
                     <a:lstStyle/>
                     <a:p>
                       <a:r>
@@ -7501,7 +9384,7 @@
                 </a:tc>
                 <a:tc>
                   <a:txBody>
-                    <a:bodyPr/>
+                    <a:bodyPr wrap="square"/>
                     <a:lstStyle/>
                     <a:p>
                       <a:r>
@@ -7521,16 +9404,11 @@
                     </a:solidFill>
                   </a:tcPr>
                 </a:tc>
-                <a:extLst>
-                  <a:ext uri="{0D108BD9-81ED-4DB2-BD59-A6C34878D82A}">
-                    <a16:rowId xmlns:a16="http://schemas.microsoft.com/office/drawing/2014/main" val="10002"/>
-                  </a:ext>
-                </a:extLst>
               </a:tr>
               <a:tr h="658368">
                 <a:tc>
                   <a:txBody>
-                    <a:bodyPr/>
+                    <a:bodyPr wrap="square"/>
                     <a:lstStyle/>
                     <a:p>
                       <a:r>
@@ -7552,7 +9430,7 @@
                 </a:tc>
                 <a:tc>
                   <a:txBody>
-                    <a:bodyPr/>
+                    <a:bodyPr wrap="square"/>
                     <a:lstStyle/>
                     <a:p>
                       <a:r>
@@ -7572,16 +9450,11 @@
                     </a:solidFill>
                   </a:tcPr>
                 </a:tc>
-                <a:extLst>
-                  <a:ext uri="{0D108BD9-81ED-4DB2-BD59-A6C34878D82A}">
-                    <a16:rowId xmlns:a16="http://schemas.microsoft.com/office/drawing/2014/main" val="10003"/>
-                  </a:ext>
-                </a:extLst>
               </a:tr>
               <a:tr h="658368">
                 <a:tc>
                   <a:txBody>
-                    <a:bodyPr/>
+                    <a:bodyPr wrap="square"/>
                     <a:lstStyle/>
                     <a:p>
                       <a:r>
@@ -7603,7 +9476,7 @@
                 </a:tc>
                 <a:tc>
                   <a:txBody>
-                    <a:bodyPr/>
+                    <a:bodyPr wrap="square"/>
                     <a:lstStyle/>
                     <a:p>
                       <a:r>
@@ -7623,16 +9496,11 @@
                     </a:solidFill>
                   </a:tcPr>
                 </a:tc>
-                <a:extLst>
-                  <a:ext uri="{0D108BD9-81ED-4DB2-BD59-A6C34878D82A}">
-                    <a16:rowId xmlns:a16="http://schemas.microsoft.com/office/drawing/2014/main" val="10004"/>
-                  </a:ext>
-                </a:extLst>
               </a:tr>
               <a:tr h="658368">
                 <a:tc>
                   <a:txBody>
-                    <a:bodyPr/>
+                    <a:bodyPr wrap="square"/>
                     <a:lstStyle/>
                     <a:p>
                       <a:r>
@@ -7654,7 +9522,7 @@
                 </a:tc>
                 <a:tc>
                   <a:txBody>
-                    <a:bodyPr/>
+                    <a:bodyPr wrap="square"/>
                     <a:lstStyle/>
                     <a:p>
                       <a:r>
@@ -7674,11 +9542,6 @@
                     </a:solidFill>
                   </a:tcPr>
                 </a:tc>
-                <a:extLst>
-                  <a:ext uri="{0D108BD9-81ED-4DB2-BD59-A6C34878D82A}">
-                    <a16:rowId xmlns:a16="http://schemas.microsoft.com/office/drawing/2014/main" val="10005"/>
-                  </a:ext>
-                </a:extLst>
               </a:tr>
             </a:tbl>
           </a:graphicData>
@@ -7727,8 +9590,8 @@
 </p:sld>
 </file>
 
-<file path=ppt/slides/slide8.xml><?xml version="1.0" encoding="utf-8"?>
-<p:sld xmlns:a="http://schemas.openxmlformats.org/drawingml/2006/main" xmlns:r="http://schemas.openxmlformats.org/officeDocument/2006/relationships" xmlns:p="http://schemas.openxmlformats.org/presentationml/2006/main">
+<file path=ppt/slides/slide9.xml><?xml version="1.0" encoding="utf-8"?>
+<p:sld xmlns:a="http://schemas.openxmlformats.org/drawingml/2006/main" xmlns:p="http://schemas.openxmlformats.org/presentationml/2006/main" xmlns:r="http://schemas.openxmlformats.org/officeDocument/2006/relationships">
   <p:cSld>
     <p:bg>
       <p:bgPr>
@@ -7744,14 +9607,7 @@
         <p:cNvGrpSpPr/>
         <p:nvPr/>
       </p:nvGrpSpPr>
-      <p:grpSpPr>
-        <a:xfrm>
-          <a:off x="0" y="0"/>
-          <a:ext cx="0" cy="0"/>
-          <a:chOff x="0" y="0"/>
-          <a:chExt cx="0" cy="0"/>
-        </a:xfrm>
-      </p:grpSpPr>
+      <p:grpSpPr/>
       <p:sp>
         <p:nvSpPr>
           <p:cNvPr id="2" name="TextBox 1"/>
@@ -7863,7 +9719,6 @@
           <a:lstStyle/>
           <a:p>
             <a:pPr algn="ctr"/>
-            <a:endParaRPr/>
           </a:p>
         </p:txBody>
       </p:sp>
@@ -7897,7 +9752,7 @@
                 </a:solidFill>
                 <a:latin typeface="Times New Roman"/>
               </a:rPr>
-              <a:t>7</a:t>
+              <a:t>8</a:t>
             </a:r>
           </a:p>
         </p:txBody>
@@ -7976,7 +9831,7 @@
           </a:fontRef>
         </p:style>
         <p:txBody>
-          <a:bodyPr wrap="square" lIns="152400" tIns="127000" rtlCol="0" anchor="ctr"/>
+          <a:bodyPr rtlCol="0" anchor="ctr" wrap="square" lIns="152400" tIns="127000"/>
           <a:lstStyle/>
           <a:p>
             <a:pPr algn="ctr"/>
@@ -8086,7 +9941,7 @@
           </a:fontRef>
         </p:style>
         <p:txBody>
-          <a:bodyPr wrap="square" lIns="152400" tIns="127000" rtlCol="0" anchor="ctr"/>
+          <a:bodyPr rtlCol="0" anchor="ctr" wrap="square" lIns="152400" tIns="127000"/>
           <a:lstStyle/>
           <a:p>
             <a:pPr algn="ctr"/>
@@ -8153,465 +10008,6 @@
                 <a:latin typeface="Courier New"/>
               </a:rPr>
               <a:t> {"$sort": {"moyenne": -1}}, {"$limit": 5}]</a:t>
-            </a:r>
-          </a:p>
-        </p:txBody>
-      </p:sp>
-    </p:spTree>
-  </p:cSld>
-  <p:clrMapOvr>
-    <a:masterClrMapping/>
-  </p:clrMapOvr>
-</p:sld>
-</file>
-
-<file path=ppt/slides/slide9.xml><?xml version="1.0" encoding="utf-8"?>
-<p:sld xmlns:a="http://schemas.openxmlformats.org/drawingml/2006/main" xmlns:r="http://schemas.openxmlformats.org/officeDocument/2006/relationships" xmlns:p="http://schemas.openxmlformats.org/presentationml/2006/main">
-  <p:cSld>
-    <p:bg>
-      <p:bgPr>
-        <a:solidFill>
-          <a:srgbClr val="FFFFFF"/>
-        </a:solidFill>
-        <a:effectLst/>
-      </p:bgPr>
-    </p:bg>
-    <p:spTree>
-      <p:nvGrpSpPr>
-        <p:cNvPr id="1" name=""/>
-        <p:cNvGrpSpPr/>
-        <p:nvPr/>
-      </p:nvGrpSpPr>
-      <p:grpSpPr>
-        <a:xfrm>
-          <a:off x="0" y="0"/>
-          <a:ext cx="0" cy="0"/>
-          <a:chOff x="0" y="0"/>
-          <a:chExt cx="0" cy="0"/>
-        </a:xfrm>
-      </p:grpSpPr>
-      <p:sp>
-        <p:nvSpPr>
-          <p:cNvPr id="2" name="TextBox 1"/>
-          <p:cNvSpPr txBox="1"/>
-          <p:nvPr/>
-        </p:nvSpPr>
-        <p:spPr>
-          <a:xfrm>
-            <a:off x="731520" y="365760"/>
-            <a:ext cx="10515600" cy="320040"/>
-          </a:xfrm>
-          <a:prstGeom prst="rect">
-            <a:avLst/>
-          </a:prstGeom>
-          <a:noFill/>
-        </p:spPr>
-        <p:txBody>
-          <a:bodyPr wrap="square" anchor="t">
-            <a:spAutoFit/>
-          </a:bodyPr>
-          <a:lstStyle/>
-          <a:p>
-            <a:pPr algn="l"/>
-            <a:r>
-              <a:rPr sz="1300" b="1" i="0">
-                <a:solidFill>
-                  <a:srgbClr val="1F3C63"/>
-                </a:solidFill>
-                <a:latin typeface="Times New Roman"/>
-              </a:rPr>
-              <a:t>BASE DE DONNÉES</a:t>
-            </a:r>
-          </a:p>
-        </p:txBody>
-      </p:sp>
-      <p:sp>
-        <p:nvSpPr>
-          <p:cNvPr id="3" name="TextBox 2"/>
-          <p:cNvSpPr txBox="1"/>
-          <p:nvPr/>
-        </p:nvSpPr>
-        <p:spPr>
-          <a:xfrm>
-            <a:off x="731520" y="658368"/>
-            <a:ext cx="10698480" cy="731520"/>
-          </a:xfrm>
-          <a:prstGeom prst="rect">
-            <a:avLst/>
-          </a:prstGeom>
-          <a:noFill/>
-        </p:spPr>
-        <p:txBody>
-          <a:bodyPr wrap="square" anchor="t">
-            <a:spAutoFit/>
-          </a:bodyPr>
-          <a:lstStyle/>
-          <a:p>
-            <a:pPr algn="l"/>
-            <a:r>
-              <a:rPr sz="2800" b="1" i="0">
-                <a:solidFill>
-                  <a:srgbClr val="000000"/>
-                </a:solidFill>
-                <a:latin typeface="Times New Roman"/>
-              </a:rPr>
-              <a:t>Aperçu réel de la base de données</a:t>
-            </a:r>
-          </a:p>
-        </p:txBody>
-      </p:sp>
-      <p:sp>
-        <p:nvSpPr>
-          <p:cNvPr id="4" name="Rectangle 3"/>
-          <p:cNvSpPr/>
-          <p:nvPr/>
-        </p:nvSpPr>
-        <p:spPr>
-          <a:xfrm>
-            <a:off x="731520" y="1344168"/>
-            <a:ext cx="10698480" cy="15875"/>
-          </a:xfrm>
-          <a:prstGeom prst="rect">
-            <a:avLst/>
-          </a:prstGeom>
-          <a:solidFill>
-            <a:srgbClr val="1F3C63"/>
-          </a:solidFill>
-          <a:ln>
-            <a:noFill/>
-          </a:ln>
-          <a:effectLst/>
-        </p:spPr>
-        <p:style>
-          <a:lnRef idx="1">
-            <a:schemeClr val="accent1"/>
-          </a:lnRef>
-          <a:fillRef idx="3">
-            <a:schemeClr val="accent1"/>
-          </a:fillRef>
-          <a:effectRef idx="2">
-            <a:schemeClr val="accent1"/>
-          </a:effectRef>
-          <a:fontRef idx="minor">
-            <a:schemeClr val="lt1"/>
-          </a:fontRef>
-        </p:style>
-        <p:txBody>
-          <a:bodyPr rtlCol="0" anchor="ctr"/>
-          <a:lstStyle/>
-          <a:p>
-            <a:pPr algn="ctr"/>
-            <a:endParaRPr/>
-          </a:p>
-        </p:txBody>
-      </p:sp>
-      <p:sp>
-        <p:nvSpPr>
-          <p:cNvPr id="5" name="TextBox 4"/>
-          <p:cNvSpPr txBox="1"/>
-          <p:nvPr/>
-        </p:nvSpPr>
-        <p:spPr>
-          <a:xfrm>
-            <a:off x="11185855" y="6400800"/>
-            <a:ext cx="640080" cy="320040"/>
-          </a:xfrm>
-          <a:prstGeom prst="rect">
-            <a:avLst/>
-          </a:prstGeom>
-          <a:noFill/>
-        </p:spPr>
-        <p:txBody>
-          <a:bodyPr wrap="square" anchor="t">
-            <a:spAutoFit/>
-          </a:bodyPr>
-          <a:lstStyle/>
-          <a:p>
-            <a:pPr algn="r"/>
-            <a:r>
-              <a:rPr sz="1100" b="0" i="0">
-                <a:solidFill>
-                  <a:srgbClr val="404040"/>
-                </a:solidFill>
-                <a:latin typeface="Times New Roman"/>
-              </a:rPr>
-              <a:t>8</a:t>
-            </a:r>
-          </a:p>
-        </p:txBody>
-      </p:sp>
-      <p:sp>
-        <p:nvSpPr>
-          <p:cNvPr id="6" name="Rectangle 5"/>
-          <p:cNvSpPr/>
-          <p:nvPr/>
-        </p:nvSpPr>
-        <p:spPr>
-          <a:xfrm>
-            <a:off x="731520" y="1691640"/>
-            <a:ext cx="6583680" cy="4206240"/>
-          </a:xfrm>
-          <a:prstGeom prst="rect">
-            <a:avLst/>
-          </a:prstGeom>
-          <a:solidFill>
-            <a:srgbClr val="FFFFFF"/>
-          </a:solidFill>
-          <a:ln w="12700">
-            <a:solidFill>
-              <a:srgbClr val="9A9A9A"/>
-            </a:solidFill>
-          </a:ln>
-          <a:effectLst/>
-        </p:spPr>
-        <p:style>
-          <a:lnRef idx="1">
-            <a:schemeClr val="accent1"/>
-          </a:lnRef>
-          <a:fillRef idx="3">
-            <a:schemeClr val="accent1"/>
-          </a:fillRef>
-          <a:effectRef idx="2">
-            <a:schemeClr val="accent1"/>
-          </a:effectRef>
-          <a:fontRef idx="minor">
-            <a:schemeClr val="lt1"/>
-          </a:fontRef>
-        </p:style>
-        <p:txBody>
-          <a:bodyPr wrap="square" lIns="152400" tIns="127000" rtlCol="0" anchor="ctr"/>
-          <a:lstStyle/>
-          <a:p>
-            <a:pPr algn="ctr"/>
-            <a:r>
-              <a:rPr sz="1400">
-                <a:solidFill>
-                  <a:srgbClr val="000000"/>
-                </a:solidFill>
-                <a:latin typeface="Courier New"/>
-              </a:rPr>
-              <a:t>$ mongosh ecole_formation</a:t>
-            </a:r>
-          </a:p>
-          <a:p>
-            <a:r>
-              <a:rPr sz="1400">
-                <a:solidFill>
-                  <a:srgbClr val="000000"/>
-                </a:solidFill>
-                <a:latin typeface="Courier New"/>
-              </a:rPr>
-              <a:t> </a:t>
-            </a:r>
-          </a:p>
-          <a:p>
-            <a:r>
-              <a:rPr sz="1400">
-                <a:solidFill>
-                  <a:srgbClr val="000000"/>
-                </a:solidFill>
-                <a:latin typeface="Courier New"/>
-              </a:rPr>
-              <a:t>test&gt; db.getCollectionNames()</a:t>
-            </a:r>
-          </a:p>
-          <a:p>
-            <a:r>
-              <a:rPr sz="1400">
-                <a:solidFill>
-                  <a:srgbClr val="000000"/>
-                </a:solidFill>
-                <a:latin typeface="Courier New"/>
-              </a:rPr>
-              <a:t>[ 'utilisateurs', 'etudiants', 'formateurs',</a:t>
-            </a:r>
-          </a:p>
-          <a:p>
-            <a:r>
-              <a:rPr sz="1400">
-                <a:solidFill>
-                  <a:srgbClr val="000000"/>
-                </a:solidFill>
-                <a:latin typeface="Courier New"/>
-              </a:rPr>
-              <a:t>  'formations', 'inscriptions' ]</a:t>
-            </a:r>
-          </a:p>
-          <a:p>
-            <a:r>
-              <a:rPr sz="1400">
-                <a:solidFill>
-                  <a:srgbClr val="000000"/>
-                </a:solidFill>
-                <a:latin typeface="Courier New"/>
-              </a:rPr>
-              <a:t> </a:t>
-            </a:r>
-          </a:p>
-          <a:p>
-            <a:r>
-              <a:rPr sz="1400">
-                <a:solidFill>
-                  <a:srgbClr val="000000"/>
-                </a:solidFill>
-                <a:latin typeface="Courier New"/>
-              </a:rPr>
-              <a:t>test&gt; db.etudiants.countDocuments()      100</a:t>
-            </a:r>
-          </a:p>
-          <a:p>
-            <a:r>
-              <a:rPr sz="1400">
-                <a:solidFill>
-                  <a:srgbClr val="000000"/>
-                </a:solidFill>
-                <a:latin typeface="Courier New"/>
-              </a:rPr>
-              <a:t>test&gt; db.formateurs.countDocuments()      20</a:t>
-            </a:r>
-          </a:p>
-          <a:p>
-            <a:r>
-              <a:rPr sz="1400">
-                <a:solidFill>
-                  <a:srgbClr val="000000"/>
-                </a:solidFill>
-                <a:latin typeface="Courier New"/>
-              </a:rPr>
-              <a:t>test&gt; db.formations.countDocuments()      30</a:t>
-            </a:r>
-          </a:p>
-          <a:p>
-            <a:r>
-              <a:rPr sz="1400">
-                <a:solidFill>
-                  <a:srgbClr val="000000"/>
-                </a:solidFill>
-                <a:latin typeface="Courier New"/>
-              </a:rPr>
-              <a:t>test&gt; db.inscriptions.countDocuments()   200</a:t>
-            </a:r>
-          </a:p>
-        </p:txBody>
-      </p:sp>
-      <p:sp>
-        <p:nvSpPr>
-          <p:cNvPr id="7" name="TextBox 6"/>
-          <p:cNvSpPr txBox="1"/>
-          <p:nvPr/>
-        </p:nvSpPr>
-        <p:spPr>
-          <a:xfrm>
-            <a:off x="7589520" y="1828800"/>
-            <a:ext cx="3840480" cy="365760"/>
-          </a:xfrm>
-          <a:prstGeom prst="rect">
-            <a:avLst/>
-          </a:prstGeom>
-          <a:noFill/>
-        </p:spPr>
-        <p:txBody>
-          <a:bodyPr wrap="square" anchor="t">
-            <a:spAutoFit/>
-          </a:bodyPr>
-          <a:lstStyle/>
-          <a:p>
-            <a:pPr algn="l"/>
-            <a:r>
-              <a:rPr sz="1500" b="1" i="0">
-                <a:solidFill>
-                  <a:srgbClr val="1F3C63"/>
-                </a:solidFill>
-                <a:latin typeface="Times New Roman"/>
-              </a:rPr>
-              <a:t>Index et performances</a:t>
-            </a:r>
-          </a:p>
-        </p:txBody>
-      </p:sp>
-      <p:sp>
-        <p:nvSpPr>
-          <p:cNvPr id="8" name="TextBox 7"/>
-          <p:cNvSpPr txBox="1"/>
-          <p:nvPr/>
-        </p:nvSpPr>
-        <p:spPr>
-          <a:xfrm>
-            <a:off x="7589520" y="2286000"/>
-            <a:ext cx="3840480" cy="3474720"/>
-          </a:xfrm>
-          <a:prstGeom prst="rect">
-            <a:avLst/>
-          </a:prstGeom>
-          <a:noFill/>
-        </p:spPr>
-        <p:txBody>
-          <a:bodyPr wrap="square">
-            <a:spAutoFit/>
-          </a:bodyPr>
-          <a:lstStyle/>
-          <a:p>
-            <a:pPr>
-              <a:spcAft>
-                <a:spcPts val="1000"/>
-              </a:spcAft>
-            </a:pPr>
-            <a:r>
-              <a:rPr sz="1350">
-                <a:solidFill>
-                  <a:srgbClr val="000000"/>
-                </a:solidFill>
-                <a:latin typeface="Times New Roman"/>
-              </a:rPr>
-              <a:t>•  Email unique (étudiants, formateurs)</a:t>
-            </a:r>
-          </a:p>
-          <a:p>
-            <a:pPr>
-              <a:spcAft>
-                <a:spcPts val="1000"/>
-              </a:spcAft>
-            </a:pPr>
-            <a:r>
-              <a:rPr sz="1350">
-                <a:solidFill>
-                  <a:srgbClr val="000000"/>
-                </a:solidFill>
-                <a:latin typeface="Times New Roman"/>
-              </a:rPr>
-              <a:t>•  Index composé (statut, date_debut) sur formations</a:t>
-            </a:r>
-          </a:p>
-          <a:p>
-            <a:pPr>
-              <a:spcAft>
-                <a:spcPts val="1000"/>
-              </a:spcAft>
-            </a:pPr>
-            <a:r>
-              <a:rPr sz="1350">
-                <a:solidFill>
-                  <a:srgbClr val="000000"/>
-                </a:solidFill>
-                <a:latin typeface="Times New Roman"/>
-              </a:rPr>
-              <a:t>•  Index unique partiel sur inscriptions actives</a:t>
-            </a:r>
-          </a:p>
-          <a:p>
-            <a:pPr>
-              <a:spcAft>
-                <a:spcPts val="1000"/>
-              </a:spcAft>
-            </a:pPr>
-            <a:r>
-              <a:rPr sz="1350">
-                <a:solidFill>
-                  <a:srgbClr val="000000"/>
-                </a:solidFill>
-                <a:latin typeface="Times New Roman"/>
-              </a:rPr>
-              <a:t>•  explain() : COLLSCAN → IXSCAN après index</a:t>
             </a:r>
           </a:p>
         </p:txBody>

--- a/complet/report/Presentation_Projet_Gestion_Formations.pptx
+++ b/complet/report/Presentation_Projet_Gestion_Formations.pptx
@@ -3380,7 +3380,7 @@
                 </a:solidFill>
                 <a:latin typeface="Times New Roman"/>
               </a:rPr>
-              <a:t>Développeur 1 : [Nom Prénom]</a:t>
+              <a:t>Développeur 1 : Adodoh Abraham</a:t>
             </a:r>
           </a:p>
           <a:p>

--- a/complet/report/Presentation_Projet_Gestion_Formations.pptx
+++ b/complet/report/Presentation_Projet_Gestion_Formations.pptx
@@ -19,6 +19,7 @@
     <p:sldId id="267" r:id="rId18"/>
     <p:sldId id="268" r:id="rId19"/>
     <p:sldId id="269" r:id="rId20"/>
+    <p:sldId id="270" r:id="rId21"/>
   </p:sldIdLst>
   <p:sldSz cx="12191695" cy="6858000" type="screen4x3"/>
   <p:notesSz cx="6858000" cy="9144000"/>
@@ -3543,7 +3544,7 @@
                 </a:solidFill>
                 <a:latin typeface="Times New Roman"/>
               </a:rPr>
-              <a:t>Aperçu réel de la base de données</a:t>
+              <a:t>Pipelines d'agrégation</a:t>
             </a:r>
           </a:p>
         </p:txBody>
@@ -3629,14 +3630,49 @@
       </p:sp>
       <p:sp>
         <p:nvSpPr>
-          <p:cNvPr id="6" name="Rectangle 5"/>
+          <p:cNvPr id="6" name="TextBox 5"/>
+          <p:cNvSpPr txBox="1"/>
+          <p:nvPr/>
+        </p:nvSpPr>
+        <p:spPr>
+          <a:xfrm>
+            <a:off x="731520" y="1554480"/>
+            <a:ext cx="10332720" cy="365760"/>
+          </a:xfrm>
+          <a:prstGeom prst="rect">
+            <a:avLst/>
+          </a:prstGeom>
+          <a:noFill/>
+        </p:spPr>
+        <p:txBody>
+          <a:bodyPr wrap="square" anchor="t">
+            <a:spAutoFit/>
+          </a:bodyPr>
+          <a:lstStyle/>
+          <a:p>
+            <a:pPr algn="l"/>
+            <a:r>
+              <a:rPr sz="1500" b="0" i="0">
+                <a:solidFill>
+                  <a:srgbClr val="404040"/>
+                </a:solidFill>
+                <a:latin typeface="Times New Roman"/>
+              </a:rPr>
+              <a:t>Les statistiques sont calculées par MongoDB, pas en Python</a:t>
+            </a:r>
+          </a:p>
+        </p:txBody>
+      </p:sp>
+      <p:sp>
+        <p:nvSpPr>
+          <p:cNvPr id="7" name="Rectangle 6"/>
           <p:cNvSpPr/>
           <p:nvPr/>
         </p:nvSpPr>
         <p:spPr>
           <a:xfrm>
-            <a:off x="731520" y="1691640"/>
-            <a:ext cx="6583680" cy="4206240"/>
+            <a:off x="731520" y="2057400"/>
+            <a:ext cx="5394960" cy="3749039"/>
           </a:xfrm>
           <a:prstGeom prst="rect">
             <a:avLst/>
@@ -3677,7 +3713,7 @@
                 </a:solidFill>
                 <a:latin typeface="Courier New"/>
               </a:rPr>
-              <a:t>$ mongosh ecole_formation</a:t>
+              <a:t># Enrollment.top_formations()</a:t>
             </a:r>
           </a:p>
           <a:p>
@@ -3688,7 +3724,7 @@
                 </a:solidFill>
                 <a:latin typeface="Courier New"/>
               </a:rPr>
-              <a:t> </a:t>
+              <a:t>[{"$match": {"statut": "active"}},</a:t>
             </a:r>
           </a:p>
           <a:p>
@@ -3699,7 +3735,7 @@
                 </a:solidFill>
                 <a:latin typeface="Courier New"/>
               </a:rPr>
-              <a:t>test&gt; db.getCollectionNames()</a:t>
+              <a:t> {"$group": {"_id": "$formation_id",</a:t>
             </a:r>
           </a:p>
           <a:p>
@@ -3710,7 +3746,7 @@
                 </a:solidFill>
                 <a:latin typeface="Courier New"/>
               </a:rPr>
-              <a:t>[ 'utilisateurs', 'etudiants', 'formateurs',</a:t>
+              <a:t>              "nb_inscrits": {"$sum": 1}}},</a:t>
             </a:r>
           </a:p>
           <a:p>
@@ -3721,7 +3757,7 @@
                 </a:solidFill>
                 <a:latin typeface="Courier New"/>
               </a:rPr>
-              <a:t>  'formations', 'inscriptions' ]</a:t>
+              <a:t> {"$sort": {"nb_inscrits": -1}},</a:t>
             </a:r>
           </a:p>
           <a:p>
@@ -3732,7 +3768,7 @@
                 </a:solidFill>
                 <a:latin typeface="Courier New"/>
               </a:rPr>
-              <a:t> </a:t>
+              <a:t> {"$limit": 5},</a:t>
             </a:r>
           </a:p>
           <a:p>
@@ -3743,54 +3779,21 @@
                 </a:solidFill>
                 <a:latin typeface="Courier New"/>
               </a:rPr>
-              <a:t>test&gt; db.etudiants.countDocuments()      100</a:t>
-            </a:r>
-          </a:p>
-          <a:p>
-            <a:r>
-              <a:rPr sz="1400">
-                <a:solidFill>
-                  <a:srgbClr val="000000"/>
-                </a:solidFill>
-                <a:latin typeface="Courier New"/>
-              </a:rPr>
-              <a:t>test&gt; db.formateurs.countDocuments()      20</a:t>
-            </a:r>
-          </a:p>
-          <a:p>
-            <a:r>
-              <a:rPr sz="1400">
-                <a:solidFill>
-                  <a:srgbClr val="000000"/>
-                </a:solidFill>
-                <a:latin typeface="Courier New"/>
-              </a:rPr>
-              <a:t>test&gt; db.formations.countDocuments()      30</a:t>
-            </a:r>
-          </a:p>
-          <a:p>
-            <a:r>
-              <a:rPr sz="1400">
-                <a:solidFill>
-                  <a:srgbClr val="000000"/>
-                </a:solidFill>
-                <a:latin typeface="Courier New"/>
-              </a:rPr>
-              <a:t>test&gt; db.inscriptions.countDocuments()   200</a:t>
-            </a:r>
-          </a:p>
-        </p:txBody>
-      </p:sp>
-      <p:sp>
-        <p:nvSpPr>
-          <p:cNvPr id="7" name="TextBox 6"/>
+              <a:t> {"$lookup": {...}}]</a:t>
+            </a:r>
+          </a:p>
+        </p:txBody>
+      </p:sp>
+      <p:sp>
+        <p:nvSpPr>
+          <p:cNvPr id="8" name="TextBox 7"/>
           <p:cNvSpPr txBox="1"/>
           <p:nvPr/>
         </p:nvSpPr>
         <p:spPr>
           <a:xfrm>
-            <a:off x="7589520" y="1828800"/>
-            <a:ext cx="3840480" cy="365760"/>
+            <a:off x="6400800" y="2103120"/>
+            <a:ext cx="4846320" cy="365760"/>
           </a:xfrm>
           <a:prstGeom prst="rect">
             <a:avLst/>
@@ -3811,21 +3814,21 @@
                 </a:solidFill>
                 <a:latin typeface="Times New Roman"/>
               </a:rPr>
-              <a:t>Index et performances</a:t>
-            </a:r>
-          </a:p>
-        </p:txBody>
-      </p:sp>
-      <p:sp>
-        <p:nvSpPr>
-          <p:cNvPr id="8" name="TextBox 7"/>
+              <a:t>Étape par étape</a:t>
+            </a:r>
+          </a:p>
+        </p:txBody>
+      </p:sp>
+      <p:sp>
+        <p:nvSpPr>
+          <p:cNvPr id="9" name="TextBox 8"/>
           <p:cNvSpPr txBox="1"/>
           <p:nvPr/>
         </p:nvSpPr>
         <p:spPr>
           <a:xfrm>
-            <a:off x="7589520" y="2286000"/>
-            <a:ext cx="3840480" cy="3474720"/>
+            <a:off x="6400800" y="2560320"/>
+            <a:ext cx="4846320" cy="2926080"/>
           </a:xfrm>
           <a:prstGeom prst="rect">
             <a:avLst/>
@@ -3840,65 +3843,100 @@
           <a:p>
             <a:pPr>
               <a:spcAft>
-                <a:spcPts val="1000"/>
+                <a:spcPts val="1200"/>
               </a:spcAft>
             </a:pPr>
             <a:r>
-              <a:rPr sz="1350">
+              <a:rPr sz="1450">
                 <a:solidFill>
                   <a:srgbClr val="000000"/>
                 </a:solidFill>
                 <a:latin typeface="Times New Roman"/>
               </a:rPr>
-              <a:t>•  Email unique (étudiants, formateurs)</a:t>
+              <a:t>•  $match : ne garder que les inscriptions actives</a:t>
             </a:r>
           </a:p>
           <a:p>
             <a:pPr>
               <a:spcAft>
-                <a:spcPts val="1000"/>
+                <a:spcPts val="1200"/>
               </a:spcAft>
             </a:pPr>
             <a:r>
-              <a:rPr sz="1350">
+              <a:rPr sz="1450">
                 <a:solidFill>
                   <a:srgbClr val="000000"/>
                 </a:solidFill>
                 <a:latin typeface="Times New Roman"/>
               </a:rPr>
-              <a:t>•  Index composé (statut, date_debut) sur formations</a:t>
+              <a:t>•  $group : compter les inscrits par formation</a:t>
             </a:r>
           </a:p>
           <a:p>
             <a:pPr>
               <a:spcAft>
-                <a:spcPts val="1000"/>
+                <a:spcPts val="1200"/>
               </a:spcAft>
             </a:pPr>
             <a:r>
-              <a:rPr sz="1350">
+              <a:rPr sz="1450">
                 <a:solidFill>
                   <a:srgbClr val="000000"/>
                 </a:solidFill>
                 <a:latin typeface="Times New Roman"/>
               </a:rPr>
-              <a:t>•  Index unique partiel sur inscriptions actives</a:t>
+              <a:t>•  $sort + $limit : garder le top 5</a:t>
             </a:r>
           </a:p>
           <a:p>
             <a:pPr>
               <a:spcAft>
-                <a:spcPts val="1000"/>
+                <a:spcPts val="1200"/>
               </a:spcAft>
             </a:pPr>
             <a:r>
-              <a:rPr sz="1350">
+              <a:rPr sz="1450">
                 <a:solidFill>
                   <a:srgbClr val="000000"/>
                 </a:solidFill>
                 <a:latin typeface="Times New Roman"/>
               </a:rPr>
-              <a:t>•  explain() : COLLSCAN → IXSCAN après index</a:t>
+              <a:t>•  $lookup : récupérer le titre de la formation</a:t>
+            </a:r>
+          </a:p>
+        </p:txBody>
+      </p:sp>
+      <p:sp>
+        <p:nvSpPr>
+          <p:cNvPr id="10" name="TextBox 9"/>
+          <p:cNvSpPr txBox="1"/>
+          <p:nvPr/>
+        </p:nvSpPr>
+        <p:spPr>
+          <a:xfrm>
+            <a:off x="731520" y="5989320"/>
+            <a:ext cx="10332720" cy="457200"/>
+          </a:xfrm>
+          <a:prstGeom prst="rect">
+            <a:avLst/>
+          </a:prstGeom>
+          <a:noFill/>
+        </p:spPr>
+        <p:txBody>
+          <a:bodyPr wrap="square" anchor="t">
+            <a:spAutoFit/>
+          </a:bodyPr>
+          <a:lstStyle/>
+          <a:p>
+            <a:pPr algn="l"/>
+            <a:r>
+              <a:rPr sz="1300" b="0" i="1">
+                <a:solidFill>
+                  <a:srgbClr val="404040"/>
+                </a:solidFill>
+                <a:latin typeface="Times New Roman"/>
+              </a:rPr>
+              <a:t>top_etudiants suit la même logique, avec une moyenne ($avg) à la place d'un comptage.</a:t>
             </a:r>
           </a:p>
         </p:txBody>
@@ -3959,7 +3997,7 @@
                 </a:solidFill>
                 <a:latin typeface="Times New Roman"/>
               </a:rPr>
-              <a:t>APPLICATION</a:t>
+              <a:t>BASE DE DONNÉES</a:t>
             </a:r>
           </a:p>
         </p:txBody>
@@ -3994,7 +4032,7 @@
                 </a:solidFill>
                 <a:latin typeface="Times New Roman"/>
               </a:rPr>
-              <a:t>Sécurité</a:t>
+              <a:t>Aperçu réel de la base de données</a:t>
             </a:r>
           </a:p>
         </p:txBody>
@@ -4080,14 +4118,203 @@
       </p:sp>
       <p:sp>
         <p:nvSpPr>
-          <p:cNvPr id="6" name="TextBox 5"/>
+          <p:cNvPr id="6" name="Rectangle 5"/>
+          <p:cNvSpPr/>
+          <p:nvPr/>
+        </p:nvSpPr>
+        <p:spPr>
+          <a:xfrm>
+            <a:off x="731520" y="1691640"/>
+            <a:ext cx="6583680" cy="4206240"/>
+          </a:xfrm>
+          <a:prstGeom prst="rect">
+            <a:avLst/>
+          </a:prstGeom>
+          <a:solidFill>
+            <a:srgbClr val="FFFFFF"/>
+          </a:solidFill>
+          <a:ln w="12700">
+            <a:solidFill>
+              <a:srgbClr val="9A9A9A"/>
+            </a:solidFill>
+          </a:ln>
+          <a:effectLst/>
+        </p:spPr>
+        <p:style>
+          <a:lnRef idx="1">
+            <a:schemeClr val="accent1"/>
+          </a:lnRef>
+          <a:fillRef idx="3">
+            <a:schemeClr val="accent1"/>
+          </a:fillRef>
+          <a:effectRef idx="2">
+            <a:schemeClr val="accent1"/>
+          </a:effectRef>
+          <a:fontRef idx="minor">
+            <a:schemeClr val="lt1"/>
+          </a:fontRef>
+        </p:style>
+        <p:txBody>
+          <a:bodyPr rtlCol="0" anchor="ctr" wrap="square" lIns="152400" tIns="127000"/>
+          <a:lstStyle/>
+          <a:p>
+            <a:pPr algn="ctr"/>
+            <a:r>
+              <a:rPr sz="1400">
+                <a:solidFill>
+                  <a:srgbClr val="000000"/>
+                </a:solidFill>
+                <a:latin typeface="Courier New"/>
+              </a:rPr>
+              <a:t>$ mongosh ecole_formation</a:t>
+            </a:r>
+          </a:p>
+          <a:p>
+            <a:r>
+              <a:rPr sz="1400">
+                <a:solidFill>
+                  <a:srgbClr val="000000"/>
+                </a:solidFill>
+                <a:latin typeface="Courier New"/>
+              </a:rPr>
+              <a:t> </a:t>
+            </a:r>
+          </a:p>
+          <a:p>
+            <a:r>
+              <a:rPr sz="1400">
+                <a:solidFill>
+                  <a:srgbClr val="000000"/>
+                </a:solidFill>
+                <a:latin typeface="Courier New"/>
+              </a:rPr>
+              <a:t>test&gt; db.getCollectionNames()</a:t>
+            </a:r>
+          </a:p>
+          <a:p>
+            <a:r>
+              <a:rPr sz="1400">
+                <a:solidFill>
+                  <a:srgbClr val="000000"/>
+                </a:solidFill>
+                <a:latin typeface="Courier New"/>
+              </a:rPr>
+              <a:t>[ 'utilisateurs', 'etudiants', 'formateurs',</a:t>
+            </a:r>
+          </a:p>
+          <a:p>
+            <a:r>
+              <a:rPr sz="1400">
+                <a:solidFill>
+                  <a:srgbClr val="000000"/>
+                </a:solidFill>
+                <a:latin typeface="Courier New"/>
+              </a:rPr>
+              <a:t>  'formations', 'inscriptions' ]</a:t>
+            </a:r>
+          </a:p>
+          <a:p>
+            <a:r>
+              <a:rPr sz="1400">
+                <a:solidFill>
+                  <a:srgbClr val="000000"/>
+                </a:solidFill>
+                <a:latin typeface="Courier New"/>
+              </a:rPr>
+              <a:t> </a:t>
+            </a:r>
+          </a:p>
+          <a:p>
+            <a:r>
+              <a:rPr sz="1400">
+                <a:solidFill>
+                  <a:srgbClr val="000000"/>
+                </a:solidFill>
+                <a:latin typeface="Courier New"/>
+              </a:rPr>
+              <a:t>test&gt; db.etudiants.countDocuments()      100</a:t>
+            </a:r>
+          </a:p>
+          <a:p>
+            <a:r>
+              <a:rPr sz="1400">
+                <a:solidFill>
+                  <a:srgbClr val="000000"/>
+                </a:solidFill>
+                <a:latin typeface="Courier New"/>
+              </a:rPr>
+              <a:t>test&gt; db.formateurs.countDocuments()      20</a:t>
+            </a:r>
+          </a:p>
+          <a:p>
+            <a:r>
+              <a:rPr sz="1400">
+                <a:solidFill>
+                  <a:srgbClr val="000000"/>
+                </a:solidFill>
+                <a:latin typeface="Courier New"/>
+              </a:rPr>
+              <a:t>test&gt; db.formations.countDocuments()      30</a:t>
+            </a:r>
+          </a:p>
+          <a:p>
+            <a:r>
+              <a:rPr sz="1400">
+                <a:solidFill>
+                  <a:srgbClr val="000000"/>
+                </a:solidFill>
+                <a:latin typeface="Courier New"/>
+              </a:rPr>
+              <a:t>test&gt; db.inscriptions.countDocuments()   200</a:t>
+            </a:r>
+          </a:p>
+        </p:txBody>
+      </p:sp>
+      <p:sp>
+        <p:nvSpPr>
+          <p:cNvPr id="7" name="TextBox 6"/>
           <p:cNvSpPr txBox="1"/>
           <p:nvPr/>
         </p:nvSpPr>
         <p:spPr>
           <a:xfrm>
-            <a:off x="731520" y="1691640"/>
-            <a:ext cx="10332720" cy="4114800"/>
+            <a:off x="7589520" y="1920240"/>
+            <a:ext cx="3840480" cy="365760"/>
+          </a:xfrm>
+          <a:prstGeom prst="rect">
+            <a:avLst/>
+          </a:prstGeom>
+          <a:noFill/>
+        </p:spPr>
+        <p:txBody>
+          <a:bodyPr wrap="square" anchor="t">
+            <a:spAutoFit/>
+          </a:bodyPr>
+          <a:lstStyle/>
+          <a:p>
+            <a:pPr algn="l"/>
+            <a:r>
+              <a:rPr sz="1500" b="1" i="0">
+                <a:solidFill>
+                  <a:srgbClr val="1F3C63"/>
+                </a:solidFill>
+                <a:latin typeface="Times New Roman"/>
+              </a:rPr>
+              <a:t>Index et performances</a:t>
+            </a:r>
+          </a:p>
+        </p:txBody>
+      </p:sp>
+      <p:sp>
+        <p:nvSpPr>
+          <p:cNvPr id="8" name="TextBox 7"/>
+          <p:cNvSpPr txBox="1"/>
+          <p:nvPr/>
+        </p:nvSpPr>
+        <p:spPr>
+          <a:xfrm>
+            <a:off x="7589520" y="2423160"/>
+            <a:ext cx="3840480" cy="3200400"/>
           </a:xfrm>
           <a:prstGeom prst="rect">
             <a:avLst/>
@@ -4102,81 +4329,49 @@
           <a:p>
             <a:pPr>
               <a:spcAft>
-                <a:spcPts val="1600"/>
+                <a:spcPts val="1400"/>
               </a:spcAft>
             </a:pPr>
             <a:r>
-              <a:rPr sz="1700">
+              <a:rPr sz="1400">
                 <a:solidFill>
                   <a:srgbClr val="000000"/>
                 </a:solidFill>
                 <a:latin typeface="Times New Roman"/>
               </a:rPr>
-              <a:t>•  Mots de passe hachés (PBKDF2-SHA256, Werkzeug), jamais stockés en clair</a:t>
+              <a:t>•  Email unique (login rapide)</a:t>
             </a:r>
           </a:p>
           <a:p>
             <a:pPr>
               <a:spcAft>
-                <a:spcPts val="1600"/>
+                <a:spcPts val="1400"/>
               </a:spcAft>
             </a:pPr>
             <a:r>
-              <a:rPr sz="1700">
+              <a:rPr sz="1400">
                 <a:solidFill>
                   <a:srgbClr val="000000"/>
                 </a:solidFill>
                 <a:latin typeface="Times New Roman"/>
               </a:rPr>
-              <a:t>•  Protection CSRF sur tous les formulaires (Flask-WTF)</a:t>
+              <a:t>•  Inscription active unique par étudiant/formation</a:t>
             </a:r>
           </a:p>
           <a:p>
             <a:pPr>
               <a:spcAft>
-                <a:spcPts val="1600"/>
+                <a:spcPts val="1400"/>
               </a:spcAft>
             </a:pPr>
             <a:r>
-              <a:rPr sz="1700">
+              <a:rPr sz="1400">
                 <a:solidFill>
                   <a:srgbClr val="000000"/>
                 </a:solidFill>
                 <a:latin typeface="Times New Roman"/>
               </a:rPr>
-              <a:t>•  Requêtes PyMongo paramétrées : pas d'injection NoSQL possible</a:t>
-            </a:r>
-          </a:p>
-          <a:p>
-            <a:pPr>
-              <a:spcAft>
-                <a:spcPts val="1600"/>
-              </a:spcAft>
-            </a:pPr>
-            <a:r>
-              <a:rPr sz="1700">
-                <a:solidFill>
-                  <a:srgbClr val="000000"/>
-                </a:solidFill>
-                <a:latin typeface="Times New Roman"/>
-              </a:rPr>
-              <a:t>•  Auto-échappement Jinja2 : protection XSS systématique</a:t>
-            </a:r>
-          </a:p>
-          <a:p>
-            <a:pPr>
-              <a:spcAft>
-                <a:spcPts val="1600"/>
-              </a:spcAft>
-            </a:pPr>
-            <a:r>
-              <a:rPr sz="1700">
-                <a:solidFill>
-                  <a:srgbClr val="000000"/>
-                </a:solidFill>
-                <a:latin typeface="Times New Roman"/>
-              </a:rPr>
-              <a:t>•  Autorisations par rôle (@roles_required) + vérification de propriété (formateur / étudiant)</a:t>
+              <a:t>•  COLLSCAN → IXSCAN après index</a:t>
             </a:r>
           </a:p>
         </p:txBody>
@@ -4237,7 +4432,7 @@
                 </a:solidFill>
                 <a:latin typeface="Times New Roman"/>
               </a:rPr>
-              <a:t>DÉMONSTRATION</a:t>
+              <a:t>APPLICATION</a:t>
             </a:r>
           </a:p>
         </p:txBody>
@@ -4272,7 +4467,7 @@
                 </a:solidFill>
                 <a:latin typeface="Times New Roman"/>
               </a:rPr>
-              <a:t>Aperçu de l'application</a:t>
+              <a:t>Sécurité</a:t>
             </a:r>
           </a:p>
         </p:txBody>
@@ -4358,103 +4553,103 @@
       </p:sp>
       <p:sp>
         <p:nvSpPr>
-          <p:cNvPr id="6" name="Rectangle 5"/>
-          <p:cNvSpPr/>
-          <p:nvPr/>
-        </p:nvSpPr>
-        <p:spPr>
-          <a:xfrm>
-            <a:off x="2169160" y="1574800"/>
-            <a:ext cx="6897827" cy="4805680"/>
+          <p:cNvPr id="6" name="TextBox 5"/>
+          <p:cNvSpPr txBox="1"/>
+          <p:nvPr/>
+        </p:nvSpPr>
+        <p:spPr>
+          <a:xfrm>
+            <a:off x="731520" y="1691640"/>
+            <a:ext cx="10332720" cy="4114800"/>
           </a:xfrm>
           <a:prstGeom prst="rect">
             <a:avLst/>
           </a:prstGeom>
           <a:noFill/>
-          <a:ln w="12700">
-            <a:solidFill>
-              <a:srgbClr val="9A9A9A"/>
-            </a:solidFill>
-          </a:ln>
-          <a:effectLst/>
-        </p:spPr>
-        <p:style>
-          <a:lnRef idx="1">
-            <a:schemeClr val="accent1"/>
-          </a:lnRef>
-          <a:fillRef idx="3">
-            <a:schemeClr val="accent1"/>
-          </a:fillRef>
-          <a:effectRef idx="2">
-            <a:schemeClr val="accent1"/>
-          </a:effectRef>
-          <a:fontRef idx="minor">
-            <a:schemeClr val="lt1"/>
-          </a:fontRef>
-        </p:style>
-        <p:txBody>
-          <a:bodyPr rtlCol="0" anchor="ctr"/>
-          <a:lstStyle/>
-          <a:p>
-            <a:pPr algn="ctr"/>
-          </a:p>
-        </p:txBody>
-      </p:sp>
-      <p:pic>
-        <p:nvPicPr>
-          <p:cNvPr id="7" name="Picture 6" descr="admin_dashboard_crop.png"/>
-          <p:cNvPicPr>
-            <a:picLocks noChangeAspect="1"/>
-          </p:cNvPicPr>
-          <p:nvPr/>
-        </p:nvPicPr>
-        <p:blipFill>
-          <a:blip r:embed="rId2"/>
-          <a:stretch>
-            <a:fillRect/>
-          </a:stretch>
-        </p:blipFill>
-        <p:spPr>
-          <a:xfrm>
-            <a:off x="2194560" y="1600200"/>
-            <a:ext cx="6847027" cy="4754880"/>
-          </a:xfrm>
-          <a:prstGeom prst="rect">
-            <a:avLst/>
-          </a:prstGeom>
-        </p:spPr>
-      </p:pic>
-      <p:sp>
-        <p:nvSpPr>
-          <p:cNvPr id="8" name="TextBox 7"/>
-          <p:cNvSpPr txBox="1"/>
-          <p:nvPr/>
-        </p:nvSpPr>
-        <p:spPr>
-          <a:xfrm>
-            <a:off x="2194560" y="6431280"/>
-            <a:ext cx="6847027" cy="320040"/>
-          </a:xfrm>
-          <a:prstGeom prst="rect">
-            <a:avLst/>
-          </a:prstGeom>
-          <a:noFill/>
-        </p:spPr>
-        <p:txBody>
-          <a:bodyPr wrap="square" anchor="t">
+        </p:spPr>
+        <p:txBody>
+          <a:bodyPr wrap="square">
             <a:spAutoFit/>
           </a:bodyPr>
           <a:lstStyle/>
           <a:p>
-            <a:pPr algn="ctr"/>
-            <a:r>
-              <a:rPr sz="1200" b="0" i="1">
-                <a:solidFill>
-                  <a:srgbClr val="404040"/>
+            <a:pPr>
+              <a:spcAft>
+                <a:spcPts val="1600"/>
+              </a:spcAft>
+            </a:pPr>
+            <a:r>
+              <a:rPr sz="1700">
+                <a:solidFill>
+                  <a:srgbClr val="000000"/>
                 </a:solidFill>
                 <a:latin typeface="Times New Roman"/>
               </a:rPr>
-              <a:t>Tableau de bord administrateur — statistiques calculées par agrégation MongoDB</a:t>
+              <a:t>•  Mots de passe hachés (PBKDF2-SHA256, Werkzeug), jamais stockés en clair</a:t>
+            </a:r>
+          </a:p>
+          <a:p>
+            <a:pPr>
+              <a:spcAft>
+                <a:spcPts val="1600"/>
+              </a:spcAft>
+            </a:pPr>
+            <a:r>
+              <a:rPr sz="1700">
+                <a:solidFill>
+                  <a:srgbClr val="000000"/>
+                </a:solidFill>
+                <a:latin typeface="Times New Roman"/>
+              </a:rPr>
+              <a:t>•  Protection CSRF sur tous les formulaires (Flask-WTF)</a:t>
+            </a:r>
+          </a:p>
+          <a:p>
+            <a:pPr>
+              <a:spcAft>
+                <a:spcPts val="1600"/>
+              </a:spcAft>
+            </a:pPr>
+            <a:r>
+              <a:rPr sz="1700">
+                <a:solidFill>
+                  <a:srgbClr val="000000"/>
+                </a:solidFill>
+                <a:latin typeface="Times New Roman"/>
+              </a:rPr>
+              <a:t>•  Requêtes PyMongo paramétrées : pas d'injection NoSQL possible</a:t>
+            </a:r>
+          </a:p>
+          <a:p>
+            <a:pPr>
+              <a:spcAft>
+                <a:spcPts val="1600"/>
+              </a:spcAft>
+            </a:pPr>
+            <a:r>
+              <a:rPr sz="1700">
+                <a:solidFill>
+                  <a:srgbClr val="000000"/>
+                </a:solidFill>
+                <a:latin typeface="Times New Roman"/>
+              </a:rPr>
+              <a:t>•  Auto-échappement Jinja2 : protection XSS systématique</a:t>
+            </a:r>
+          </a:p>
+          <a:p>
+            <a:pPr>
+              <a:spcAft>
+                <a:spcPts val="1600"/>
+              </a:spcAft>
+            </a:pPr>
+            <a:r>
+              <a:rPr sz="1700">
+                <a:solidFill>
+                  <a:srgbClr val="000000"/>
+                </a:solidFill>
+                <a:latin typeface="Times New Roman"/>
+              </a:rPr>
+              <a:t>•  Autorisations par rôle (@roles_required) + vérification de propriété (formateur / étudiant)</a:t>
             </a:r>
           </a:p>
         </p:txBody>
@@ -4515,7 +4710,7 @@
                 </a:solidFill>
                 <a:latin typeface="Times New Roman"/>
               </a:rPr>
-              <a:t>ORGANISATION</a:t>
+              <a:t>DÉMONSTRATION</a:t>
             </a:r>
           </a:p>
         </p:txBody>
@@ -4550,7 +4745,7 @@
                 </a:solidFill>
                 <a:latin typeface="Times New Roman"/>
               </a:rPr>
-              <a:t>Répartition du travail — 3 développeurs</a:t>
+              <a:t>Aperçu de l'application</a:t>
             </a:r>
           </a:p>
         </p:txBody>
@@ -4630,6 +4825,284 @@
                 <a:latin typeface="Times New Roman"/>
               </a:rPr>
               <a:t>12</a:t>
+            </a:r>
+          </a:p>
+        </p:txBody>
+      </p:sp>
+      <p:sp>
+        <p:nvSpPr>
+          <p:cNvPr id="6" name="Rectangle 5"/>
+          <p:cNvSpPr/>
+          <p:nvPr/>
+        </p:nvSpPr>
+        <p:spPr>
+          <a:xfrm>
+            <a:off x="2169160" y="1574800"/>
+            <a:ext cx="6897827" cy="4805680"/>
+          </a:xfrm>
+          <a:prstGeom prst="rect">
+            <a:avLst/>
+          </a:prstGeom>
+          <a:noFill/>
+          <a:ln w="12700">
+            <a:solidFill>
+              <a:srgbClr val="9A9A9A"/>
+            </a:solidFill>
+          </a:ln>
+          <a:effectLst/>
+        </p:spPr>
+        <p:style>
+          <a:lnRef idx="1">
+            <a:schemeClr val="accent1"/>
+          </a:lnRef>
+          <a:fillRef idx="3">
+            <a:schemeClr val="accent1"/>
+          </a:fillRef>
+          <a:effectRef idx="2">
+            <a:schemeClr val="accent1"/>
+          </a:effectRef>
+          <a:fontRef idx="minor">
+            <a:schemeClr val="lt1"/>
+          </a:fontRef>
+        </p:style>
+        <p:txBody>
+          <a:bodyPr rtlCol="0" anchor="ctr"/>
+          <a:lstStyle/>
+          <a:p>
+            <a:pPr algn="ctr"/>
+          </a:p>
+        </p:txBody>
+      </p:sp>
+      <p:pic>
+        <p:nvPicPr>
+          <p:cNvPr id="7" name="Picture 6" descr="admin_dashboard_crop.png"/>
+          <p:cNvPicPr>
+            <a:picLocks noChangeAspect="1"/>
+          </p:cNvPicPr>
+          <p:nvPr/>
+        </p:nvPicPr>
+        <p:blipFill>
+          <a:blip r:embed="rId2"/>
+          <a:stretch>
+            <a:fillRect/>
+          </a:stretch>
+        </p:blipFill>
+        <p:spPr>
+          <a:xfrm>
+            <a:off x="2194560" y="1600200"/>
+            <a:ext cx="6847027" cy="4754880"/>
+          </a:xfrm>
+          <a:prstGeom prst="rect">
+            <a:avLst/>
+          </a:prstGeom>
+        </p:spPr>
+      </p:pic>
+      <p:sp>
+        <p:nvSpPr>
+          <p:cNvPr id="8" name="TextBox 7"/>
+          <p:cNvSpPr txBox="1"/>
+          <p:nvPr/>
+        </p:nvSpPr>
+        <p:spPr>
+          <a:xfrm>
+            <a:off x="2194560" y="6431280"/>
+            <a:ext cx="6847027" cy="320040"/>
+          </a:xfrm>
+          <a:prstGeom prst="rect">
+            <a:avLst/>
+          </a:prstGeom>
+          <a:noFill/>
+        </p:spPr>
+        <p:txBody>
+          <a:bodyPr wrap="square" anchor="t">
+            <a:spAutoFit/>
+          </a:bodyPr>
+          <a:lstStyle/>
+          <a:p>
+            <a:pPr algn="ctr"/>
+            <a:r>
+              <a:rPr sz="1200" b="0" i="1">
+                <a:solidFill>
+                  <a:srgbClr val="404040"/>
+                </a:solidFill>
+                <a:latin typeface="Times New Roman"/>
+              </a:rPr>
+              <a:t>Tableau de bord administrateur — statistiques calculées par agrégation MongoDB</a:t>
+            </a:r>
+          </a:p>
+        </p:txBody>
+      </p:sp>
+    </p:spTree>
+  </p:cSld>
+  <p:clrMapOvr>
+    <a:masterClrMapping/>
+  </p:clrMapOvr>
+</p:sld>
+</file>
+
+<file path=ppt/slides/slide14.xml><?xml version="1.0" encoding="utf-8"?>
+<p:sld xmlns:a="http://schemas.openxmlformats.org/drawingml/2006/main" xmlns:p="http://schemas.openxmlformats.org/presentationml/2006/main" xmlns:r="http://schemas.openxmlformats.org/officeDocument/2006/relationships">
+  <p:cSld>
+    <p:bg>
+      <p:bgPr>
+        <a:solidFill>
+          <a:srgbClr val="FFFFFF"/>
+        </a:solidFill>
+        <a:effectLst/>
+      </p:bgPr>
+    </p:bg>
+    <p:spTree>
+      <p:nvGrpSpPr>
+        <p:cNvPr id="1" name=""/>
+        <p:cNvGrpSpPr/>
+        <p:nvPr/>
+      </p:nvGrpSpPr>
+      <p:grpSpPr/>
+      <p:sp>
+        <p:nvSpPr>
+          <p:cNvPr id="2" name="TextBox 1"/>
+          <p:cNvSpPr txBox="1"/>
+          <p:nvPr/>
+        </p:nvSpPr>
+        <p:spPr>
+          <a:xfrm>
+            <a:off x="731520" y="365760"/>
+            <a:ext cx="10515600" cy="320040"/>
+          </a:xfrm>
+          <a:prstGeom prst="rect">
+            <a:avLst/>
+          </a:prstGeom>
+          <a:noFill/>
+        </p:spPr>
+        <p:txBody>
+          <a:bodyPr wrap="square" anchor="t">
+            <a:spAutoFit/>
+          </a:bodyPr>
+          <a:lstStyle/>
+          <a:p>
+            <a:pPr algn="l"/>
+            <a:r>
+              <a:rPr sz="1300" b="1" i="0">
+                <a:solidFill>
+                  <a:srgbClr val="1F3C63"/>
+                </a:solidFill>
+                <a:latin typeface="Times New Roman"/>
+              </a:rPr>
+              <a:t>ORGANISATION</a:t>
+            </a:r>
+          </a:p>
+        </p:txBody>
+      </p:sp>
+      <p:sp>
+        <p:nvSpPr>
+          <p:cNvPr id="3" name="TextBox 2"/>
+          <p:cNvSpPr txBox="1"/>
+          <p:nvPr/>
+        </p:nvSpPr>
+        <p:spPr>
+          <a:xfrm>
+            <a:off x="731520" y="658368"/>
+            <a:ext cx="10698480" cy="731520"/>
+          </a:xfrm>
+          <a:prstGeom prst="rect">
+            <a:avLst/>
+          </a:prstGeom>
+          <a:noFill/>
+        </p:spPr>
+        <p:txBody>
+          <a:bodyPr wrap="square" anchor="t">
+            <a:spAutoFit/>
+          </a:bodyPr>
+          <a:lstStyle/>
+          <a:p>
+            <a:pPr algn="l"/>
+            <a:r>
+              <a:rPr sz="2800" b="1" i="0">
+                <a:solidFill>
+                  <a:srgbClr val="000000"/>
+                </a:solidFill>
+                <a:latin typeface="Times New Roman"/>
+              </a:rPr>
+              <a:t>Répartition du travail — 3 développeurs</a:t>
+            </a:r>
+          </a:p>
+        </p:txBody>
+      </p:sp>
+      <p:sp>
+        <p:nvSpPr>
+          <p:cNvPr id="4" name="Rectangle 3"/>
+          <p:cNvSpPr/>
+          <p:nvPr/>
+        </p:nvSpPr>
+        <p:spPr>
+          <a:xfrm>
+            <a:off x="731520" y="1344168"/>
+            <a:ext cx="10698480" cy="15875"/>
+          </a:xfrm>
+          <a:prstGeom prst="rect">
+            <a:avLst/>
+          </a:prstGeom>
+          <a:solidFill>
+            <a:srgbClr val="1F3C63"/>
+          </a:solidFill>
+          <a:ln>
+            <a:noFill/>
+          </a:ln>
+          <a:effectLst/>
+        </p:spPr>
+        <p:style>
+          <a:lnRef idx="1">
+            <a:schemeClr val="accent1"/>
+          </a:lnRef>
+          <a:fillRef idx="3">
+            <a:schemeClr val="accent1"/>
+          </a:fillRef>
+          <a:effectRef idx="2">
+            <a:schemeClr val="accent1"/>
+          </a:effectRef>
+          <a:fontRef idx="minor">
+            <a:schemeClr val="lt1"/>
+          </a:fontRef>
+        </p:style>
+        <p:txBody>
+          <a:bodyPr rtlCol="0" anchor="ctr"/>
+          <a:lstStyle/>
+          <a:p>
+            <a:pPr algn="ctr"/>
+          </a:p>
+        </p:txBody>
+      </p:sp>
+      <p:sp>
+        <p:nvSpPr>
+          <p:cNvPr id="5" name="TextBox 4"/>
+          <p:cNvSpPr txBox="1"/>
+          <p:nvPr/>
+        </p:nvSpPr>
+        <p:spPr>
+          <a:xfrm>
+            <a:off x="11185855" y="6400800"/>
+            <a:ext cx="640080" cy="320040"/>
+          </a:xfrm>
+          <a:prstGeom prst="rect">
+            <a:avLst/>
+          </a:prstGeom>
+          <a:noFill/>
+        </p:spPr>
+        <p:txBody>
+          <a:bodyPr wrap="square" anchor="t">
+            <a:spAutoFit/>
+          </a:bodyPr>
+          <a:lstStyle/>
+          <a:p>
+            <a:pPr algn="r"/>
+            <a:r>
+              <a:rPr sz="1100" b="0" i="0">
+                <a:solidFill>
+                  <a:srgbClr val="404040"/>
+                </a:solidFill>
+                <a:latin typeface="Times New Roman"/>
+              </a:rPr>
+              <a:t>13</a:t>
             </a:r>
           </a:p>
         </p:txBody>
@@ -4806,7 +5279,7 @@
 </p:sld>
 </file>
 
-<file path=ppt/slides/slide14.xml><?xml version="1.0" encoding="utf-8"?>
+<file path=ppt/slides/slide15.xml><?xml version="1.0" encoding="utf-8"?>
 <p:sld xmlns:a="http://schemas.openxmlformats.org/drawingml/2006/main" xmlns:p="http://schemas.openxmlformats.org/presentationml/2006/main" xmlns:r="http://schemas.openxmlformats.org/officeDocument/2006/relationships">
   <p:cSld>
     <p:bg>
@@ -4968,7 +5441,7 @@
                 </a:solidFill>
                 <a:latin typeface="Times New Roman"/>
               </a:rPr>
-              <a:t>13</a:t>
+              <a:t>14</a:t>
             </a:r>
           </a:p>
         </p:txBody>
@@ -5589,7 +6062,7 @@
                 </a:solidFill>
                 <a:latin typeface="Times New Roman"/>
               </a:rPr>
-              <a:t>PÉRIMÈTRE FONCTIONNEL</a:t>
+              <a:t>CAHIER DES CHARGES</a:t>
             </a:r>
           </a:p>
         </p:txBody>
@@ -5624,7 +6097,7 @@
                 </a:solidFill>
                 <a:latin typeface="Times New Roman"/>
               </a:rPr>
-              <a:t>Trois profils d'utilisateurs</a:t>
+              <a:t>Besoins fonctionnels et non fonctionnels</a:t>
             </a:r>
           </a:p>
         </p:txBody>
@@ -5704,6 +6177,441 @@
                 <a:latin typeface="Times New Roman"/>
               </a:rPr>
               <a:t>2</a:t>
+            </a:r>
+          </a:p>
+        </p:txBody>
+      </p:sp>
+      <p:sp>
+        <p:nvSpPr>
+          <p:cNvPr id="6" name="TextBox 5"/>
+          <p:cNvSpPr txBox="1"/>
+          <p:nvPr/>
+        </p:nvSpPr>
+        <p:spPr>
+          <a:xfrm>
+            <a:off x="731520" y="1554480"/>
+            <a:ext cx="5120640" cy="365760"/>
+          </a:xfrm>
+          <a:prstGeom prst="rect">
+            <a:avLst/>
+          </a:prstGeom>
+          <a:noFill/>
+        </p:spPr>
+        <p:txBody>
+          <a:bodyPr wrap="square" anchor="t">
+            <a:spAutoFit/>
+          </a:bodyPr>
+          <a:lstStyle/>
+          <a:p>
+            <a:pPr algn="l"/>
+            <a:r>
+              <a:rPr sz="1600" b="1" i="0">
+                <a:solidFill>
+                  <a:srgbClr val="1F3C63"/>
+                </a:solidFill>
+                <a:latin typeface="Times New Roman"/>
+              </a:rPr>
+              <a:t>Fonctionnels</a:t>
+            </a:r>
+          </a:p>
+        </p:txBody>
+      </p:sp>
+      <p:sp>
+        <p:nvSpPr>
+          <p:cNvPr id="7" name="TextBox 6"/>
+          <p:cNvSpPr txBox="1"/>
+          <p:nvPr/>
+        </p:nvSpPr>
+        <p:spPr>
+          <a:xfrm>
+            <a:off x="731520" y="2011680"/>
+            <a:ext cx="5120640" cy="4206240"/>
+          </a:xfrm>
+          <a:prstGeom prst="rect">
+            <a:avLst/>
+          </a:prstGeom>
+          <a:noFill/>
+        </p:spPr>
+        <p:txBody>
+          <a:bodyPr wrap="square">
+            <a:spAutoFit/>
+          </a:bodyPr>
+          <a:lstStyle/>
+          <a:p>
+            <a:pPr>
+              <a:spcAft>
+                <a:spcPts val="1400"/>
+              </a:spcAft>
+            </a:pPr>
+            <a:r>
+              <a:rPr sz="1550">
+                <a:solidFill>
+                  <a:srgbClr val="000000"/>
+                </a:solidFill>
+                <a:latin typeface="Times New Roman"/>
+              </a:rPr>
+              <a:t>•  Authentification sécurisée, par rôle</a:t>
+            </a:r>
+          </a:p>
+          <a:p>
+            <a:pPr>
+              <a:spcAft>
+                <a:spcPts val="1400"/>
+              </a:spcAft>
+            </a:pPr>
+            <a:r>
+              <a:rPr sz="1550">
+                <a:solidFill>
+                  <a:srgbClr val="000000"/>
+                </a:solidFill>
+                <a:latin typeface="Times New Roman"/>
+              </a:rPr>
+              <a:t>•  Gestion des étudiants, formateurs, formations (CRUD)</a:t>
+            </a:r>
+          </a:p>
+          <a:p>
+            <a:pPr>
+              <a:spcAft>
+                <a:spcPts val="1400"/>
+              </a:spcAft>
+            </a:pPr>
+            <a:r>
+              <a:rPr sz="1550">
+                <a:solidFill>
+                  <a:srgbClr val="000000"/>
+                </a:solidFill>
+                <a:latin typeface="Times New Roman"/>
+              </a:rPr>
+              <a:t>•  Inscriptions et annulations</a:t>
+            </a:r>
+          </a:p>
+          <a:p>
+            <a:pPr>
+              <a:spcAft>
+                <a:spcPts val="1400"/>
+              </a:spcAft>
+            </a:pPr>
+            <a:r>
+              <a:rPr sz="1550">
+                <a:solidFill>
+                  <a:srgbClr val="000000"/>
+                </a:solidFill>
+                <a:latin typeface="Times New Roman"/>
+              </a:rPr>
+              <a:t>•  Notation par le formateur (0 à 20)</a:t>
+            </a:r>
+          </a:p>
+          <a:p>
+            <a:pPr>
+              <a:spcAft>
+                <a:spcPts val="1400"/>
+              </a:spcAft>
+            </a:pPr>
+            <a:r>
+              <a:rPr sz="1550">
+                <a:solidFill>
+                  <a:srgbClr val="000000"/>
+                </a:solidFill>
+                <a:latin typeface="Times New Roman"/>
+              </a:rPr>
+              <a:t>•  Tableau de bord et statistiques</a:t>
+            </a:r>
+          </a:p>
+        </p:txBody>
+      </p:sp>
+      <p:sp>
+        <p:nvSpPr>
+          <p:cNvPr id="8" name="TextBox 7"/>
+          <p:cNvSpPr txBox="1"/>
+          <p:nvPr/>
+        </p:nvSpPr>
+        <p:spPr>
+          <a:xfrm>
+            <a:off x="6309360" y="1554480"/>
+            <a:ext cx="5120640" cy="365760"/>
+          </a:xfrm>
+          <a:prstGeom prst="rect">
+            <a:avLst/>
+          </a:prstGeom>
+          <a:noFill/>
+        </p:spPr>
+        <p:txBody>
+          <a:bodyPr wrap="square" anchor="t">
+            <a:spAutoFit/>
+          </a:bodyPr>
+          <a:lstStyle/>
+          <a:p>
+            <a:pPr algn="l"/>
+            <a:r>
+              <a:rPr sz="1600" b="1" i="0">
+                <a:solidFill>
+                  <a:srgbClr val="1F3C63"/>
+                </a:solidFill>
+                <a:latin typeface="Times New Roman"/>
+              </a:rPr>
+              <a:t>Non fonctionnels</a:t>
+            </a:r>
+          </a:p>
+        </p:txBody>
+      </p:sp>
+      <p:sp>
+        <p:nvSpPr>
+          <p:cNvPr id="9" name="TextBox 8"/>
+          <p:cNvSpPr txBox="1"/>
+          <p:nvPr/>
+        </p:nvSpPr>
+        <p:spPr>
+          <a:xfrm>
+            <a:off x="6309360" y="2011680"/>
+            <a:ext cx="5120640" cy="4206240"/>
+          </a:xfrm>
+          <a:prstGeom prst="rect">
+            <a:avLst/>
+          </a:prstGeom>
+          <a:noFill/>
+        </p:spPr>
+        <p:txBody>
+          <a:bodyPr wrap="square">
+            <a:spAutoFit/>
+          </a:bodyPr>
+          <a:lstStyle/>
+          <a:p>
+            <a:pPr>
+              <a:spcAft>
+                <a:spcPts val="1400"/>
+              </a:spcAft>
+            </a:pPr>
+            <a:r>
+              <a:rPr sz="1550">
+                <a:solidFill>
+                  <a:srgbClr val="000000"/>
+                </a:solidFill>
+                <a:latin typeface="Times New Roman"/>
+              </a:rPr>
+              <a:t>•  Sécurité : mots de passe hachés, CSRF, protection par rôle</a:t>
+            </a:r>
+          </a:p>
+          <a:p>
+            <a:pPr>
+              <a:spcAft>
+                <a:spcPts val="1400"/>
+              </a:spcAft>
+            </a:pPr>
+            <a:r>
+              <a:rPr sz="1550">
+                <a:solidFill>
+                  <a:srgbClr val="000000"/>
+                </a:solidFill>
+                <a:latin typeface="Times New Roman"/>
+              </a:rPr>
+              <a:t>•  Ergonomie : interface responsive, messages clairs</a:t>
+            </a:r>
+          </a:p>
+          <a:p>
+            <a:pPr>
+              <a:spcAft>
+                <a:spcPts val="1400"/>
+              </a:spcAft>
+            </a:pPr>
+            <a:r>
+              <a:rPr sz="1550">
+                <a:solidFill>
+                  <a:srgbClr val="000000"/>
+                </a:solidFill>
+                <a:latin typeface="Times New Roman"/>
+              </a:rPr>
+              <a:t>•  Performance : recherches indexées</a:t>
+            </a:r>
+          </a:p>
+          <a:p>
+            <a:pPr>
+              <a:spcAft>
+                <a:spcPts val="1400"/>
+              </a:spcAft>
+            </a:pPr>
+            <a:r>
+              <a:rPr sz="1550">
+                <a:solidFill>
+                  <a:srgbClr val="000000"/>
+                </a:solidFill>
+                <a:latin typeface="Times New Roman"/>
+              </a:rPr>
+              <a:t>•  Maintenabilité : architecture en blueprints (modèles / routes / gabarits)</a:t>
+            </a:r>
+          </a:p>
+        </p:txBody>
+      </p:sp>
+    </p:spTree>
+  </p:cSld>
+  <p:clrMapOvr>
+    <a:masterClrMapping/>
+  </p:clrMapOvr>
+</p:sld>
+</file>
+
+<file path=ppt/slides/slide4.xml><?xml version="1.0" encoding="utf-8"?>
+<p:sld xmlns:a="http://schemas.openxmlformats.org/drawingml/2006/main" xmlns:p="http://schemas.openxmlformats.org/presentationml/2006/main" xmlns:r="http://schemas.openxmlformats.org/officeDocument/2006/relationships">
+  <p:cSld>
+    <p:bg>
+      <p:bgPr>
+        <a:solidFill>
+          <a:srgbClr val="FFFFFF"/>
+        </a:solidFill>
+        <a:effectLst/>
+      </p:bgPr>
+    </p:bg>
+    <p:spTree>
+      <p:nvGrpSpPr>
+        <p:cNvPr id="1" name=""/>
+        <p:cNvGrpSpPr/>
+        <p:nvPr/>
+      </p:nvGrpSpPr>
+      <p:grpSpPr/>
+      <p:sp>
+        <p:nvSpPr>
+          <p:cNvPr id="2" name="TextBox 1"/>
+          <p:cNvSpPr txBox="1"/>
+          <p:nvPr/>
+        </p:nvSpPr>
+        <p:spPr>
+          <a:xfrm>
+            <a:off x="731520" y="365760"/>
+            <a:ext cx="10515600" cy="320040"/>
+          </a:xfrm>
+          <a:prstGeom prst="rect">
+            <a:avLst/>
+          </a:prstGeom>
+          <a:noFill/>
+        </p:spPr>
+        <p:txBody>
+          <a:bodyPr wrap="square" anchor="t">
+            <a:spAutoFit/>
+          </a:bodyPr>
+          <a:lstStyle/>
+          <a:p>
+            <a:pPr algn="l"/>
+            <a:r>
+              <a:rPr sz="1300" b="1" i="0">
+                <a:solidFill>
+                  <a:srgbClr val="1F3C63"/>
+                </a:solidFill>
+                <a:latin typeface="Times New Roman"/>
+              </a:rPr>
+              <a:t>PÉRIMÈTRE FONCTIONNEL</a:t>
+            </a:r>
+          </a:p>
+        </p:txBody>
+      </p:sp>
+      <p:sp>
+        <p:nvSpPr>
+          <p:cNvPr id="3" name="TextBox 2"/>
+          <p:cNvSpPr txBox="1"/>
+          <p:nvPr/>
+        </p:nvSpPr>
+        <p:spPr>
+          <a:xfrm>
+            <a:off x="731520" y="658368"/>
+            <a:ext cx="10698480" cy="731520"/>
+          </a:xfrm>
+          <a:prstGeom prst="rect">
+            <a:avLst/>
+          </a:prstGeom>
+          <a:noFill/>
+        </p:spPr>
+        <p:txBody>
+          <a:bodyPr wrap="square" anchor="t">
+            <a:spAutoFit/>
+          </a:bodyPr>
+          <a:lstStyle/>
+          <a:p>
+            <a:pPr algn="l"/>
+            <a:r>
+              <a:rPr sz="2800" b="1" i="0">
+                <a:solidFill>
+                  <a:srgbClr val="000000"/>
+                </a:solidFill>
+                <a:latin typeface="Times New Roman"/>
+              </a:rPr>
+              <a:t>Trois profils d'utilisateurs</a:t>
+            </a:r>
+          </a:p>
+        </p:txBody>
+      </p:sp>
+      <p:sp>
+        <p:nvSpPr>
+          <p:cNvPr id="4" name="Rectangle 3"/>
+          <p:cNvSpPr/>
+          <p:nvPr/>
+        </p:nvSpPr>
+        <p:spPr>
+          <a:xfrm>
+            <a:off x="731520" y="1344168"/>
+            <a:ext cx="10698480" cy="15875"/>
+          </a:xfrm>
+          <a:prstGeom prst="rect">
+            <a:avLst/>
+          </a:prstGeom>
+          <a:solidFill>
+            <a:srgbClr val="1F3C63"/>
+          </a:solidFill>
+          <a:ln>
+            <a:noFill/>
+          </a:ln>
+          <a:effectLst/>
+        </p:spPr>
+        <p:style>
+          <a:lnRef idx="1">
+            <a:schemeClr val="accent1"/>
+          </a:lnRef>
+          <a:fillRef idx="3">
+            <a:schemeClr val="accent1"/>
+          </a:fillRef>
+          <a:effectRef idx="2">
+            <a:schemeClr val="accent1"/>
+          </a:effectRef>
+          <a:fontRef idx="minor">
+            <a:schemeClr val="lt1"/>
+          </a:fontRef>
+        </p:style>
+        <p:txBody>
+          <a:bodyPr rtlCol="0" anchor="ctr"/>
+          <a:lstStyle/>
+          <a:p>
+            <a:pPr algn="ctr"/>
+          </a:p>
+        </p:txBody>
+      </p:sp>
+      <p:sp>
+        <p:nvSpPr>
+          <p:cNvPr id="5" name="TextBox 4"/>
+          <p:cNvSpPr txBox="1"/>
+          <p:nvPr/>
+        </p:nvSpPr>
+        <p:spPr>
+          <a:xfrm>
+            <a:off x="11185855" y="6400800"/>
+            <a:ext cx="640080" cy="320040"/>
+          </a:xfrm>
+          <a:prstGeom prst="rect">
+            <a:avLst/>
+          </a:prstGeom>
+          <a:noFill/>
+        </p:spPr>
+        <p:txBody>
+          <a:bodyPr wrap="square" anchor="t">
+            <a:spAutoFit/>
+          </a:bodyPr>
+          <a:lstStyle/>
+          <a:p>
+            <a:pPr algn="r"/>
+            <a:r>
+              <a:rPr sz="1100" b="0" i="0">
+                <a:solidFill>
+                  <a:srgbClr val="404040"/>
+                </a:solidFill>
+                <a:latin typeface="Times New Roman"/>
+              </a:rPr>
+              <a:t>3</a:t>
             </a:r>
           </a:p>
         </p:txBody>
@@ -5926,1693 +6834,6 @@
 </p:sld>
 </file>
 
-<file path=ppt/slides/slide4.xml><?xml version="1.0" encoding="utf-8"?>
-<p:sld xmlns:a="http://schemas.openxmlformats.org/drawingml/2006/main" xmlns:p="http://schemas.openxmlformats.org/presentationml/2006/main" xmlns:r="http://schemas.openxmlformats.org/officeDocument/2006/relationships">
-  <p:cSld>
-    <p:bg>
-      <p:bgPr>
-        <a:solidFill>
-          <a:srgbClr val="FFFFFF"/>
-        </a:solidFill>
-        <a:effectLst/>
-      </p:bgPr>
-    </p:bg>
-    <p:spTree>
-      <p:nvGrpSpPr>
-        <p:cNvPr id="1" name=""/>
-        <p:cNvGrpSpPr/>
-        <p:nvPr/>
-      </p:nvGrpSpPr>
-      <p:grpSpPr/>
-      <p:sp>
-        <p:nvSpPr>
-          <p:cNvPr id="2" name="TextBox 1"/>
-          <p:cNvSpPr txBox="1"/>
-          <p:nvPr/>
-        </p:nvSpPr>
-        <p:spPr>
-          <a:xfrm>
-            <a:off x="731520" y="365760"/>
-            <a:ext cx="10515600" cy="320040"/>
-          </a:xfrm>
-          <a:prstGeom prst="rect">
-            <a:avLst/>
-          </a:prstGeom>
-          <a:noFill/>
-        </p:spPr>
-        <p:txBody>
-          <a:bodyPr wrap="square" anchor="t">
-            <a:spAutoFit/>
-          </a:bodyPr>
-          <a:lstStyle/>
-          <a:p>
-            <a:pPr algn="l"/>
-            <a:r>
-              <a:rPr sz="1300" b="1" i="0">
-                <a:solidFill>
-                  <a:srgbClr val="1F3C63"/>
-                </a:solidFill>
-                <a:latin typeface="Times New Roman"/>
-              </a:rPr>
-              <a:t>PÉRIMÈTRE FONCTIONNEL</a:t>
-            </a:r>
-          </a:p>
-        </p:txBody>
-      </p:sp>
-      <p:sp>
-        <p:nvSpPr>
-          <p:cNvPr id="3" name="TextBox 2"/>
-          <p:cNvSpPr txBox="1"/>
-          <p:nvPr/>
-        </p:nvSpPr>
-        <p:spPr>
-          <a:xfrm>
-            <a:off x="731520" y="658368"/>
-            <a:ext cx="10698480" cy="731520"/>
-          </a:xfrm>
-          <a:prstGeom prst="rect">
-            <a:avLst/>
-          </a:prstGeom>
-          <a:noFill/>
-        </p:spPr>
-        <p:txBody>
-          <a:bodyPr wrap="square" anchor="t">
-            <a:spAutoFit/>
-          </a:bodyPr>
-          <a:lstStyle/>
-          <a:p>
-            <a:pPr algn="l"/>
-            <a:r>
-              <a:rPr sz="2800" b="1" i="0">
-                <a:solidFill>
-                  <a:srgbClr val="000000"/>
-                </a:solidFill>
-                <a:latin typeface="Times New Roman"/>
-              </a:rPr>
-              <a:t>Diagramme de cas d'utilisation</a:t>
-            </a:r>
-          </a:p>
-        </p:txBody>
-      </p:sp>
-      <p:sp>
-        <p:nvSpPr>
-          <p:cNvPr id="4" name="Rectangle 3"/>
-          <p:cNvSpPr/>
-          <p:nvPr/>
-        </p:nvSpPr>
-        <p:spPr>
-          <a:xfrm>
-            <a:off x="731520" y="1344168"/>
-            <a:ext cx="10698480" cy="15875"/>
-          </a:xfrm>
-          <a:prstGeom prst="rect">
-            <a:avLst/>
-          </a:prstGeom>
-          <a:solidFill>
-            <a:srgbClr val="1F3C63"/>
-          </a:solidFill>
-          <a:ln>
-            <a:noFill/>
-          </a:ln>
-          <a:effectLst/>
-        </p:spPr>
-        <p:style>
-          <a:lnRef idx="1">
-            <a:schemeClr val="accent1"/>
-          </a:lnRef>
-          <a:fillRef idx="3">
-            <a:schemeClr val="accent1"/>
-          </a:fillRef>
-          <a:effectRef idx="2">
-            <a:schemeClr val="accent1"/>
-          </a:effectRef>
-          <a:fontRef idx="minor">
-            <a:schemeClr val="lt1"/>
-          </a:fontRef>
-        </p:style>
-        <p:txBody>
-          <a:bodyPr rtlCol="0" anchor="ctr"/>
-          <a:lstStyle/>
-          <a:p>
-            <a:pPr algn="ctr"/>
-          </a:p>
-        </p:txBody>
-      </p:sp>
-      <p:sp>
-        <p:nvSpPr>
-          <p:cNvPr id="5" name="TextBox 4"/>
-          <p:cNvSpPr txBox="1"/>
-          <p:nvPr/>
-        </p:nvSpPr>
-        <p:spPr>
-          <a:xfrm>
-            <a:off x="11185855" y="6400800"/>
-            <a:ext cx="640080" cy="320040"/>
-          </a:xfrm>
-          <a:prstGeom prst="rect">
-            <a:avLst/>
-          </a:prstGeom>
-          <a:noFill/>
-        </p:spPr>
-        <p:txBody>
-          <a:bodyPr wrap="square" anchor="t">
-            <a:spAutoFit/>
-          </a:bodyPr>
-          <a:lstStyle/>
-          <a:p>
-            <a:pPr algn="r"/>
-            <a:r>
-              <a:rPr sz="1100" b="0" i="0">
-                <a:solidFill>
-                  <a:srgbClr val="404040"/>
-                </a:solidFill>
-                <a:latin typeface="Times New Roman"/>
-              </a:rPr>
-              <a:t>3</a:t>
-            </a:r>
-          </a:p>
-        </p:txBody>
-      </p:sp>
-      <p:sp>
-        <p:nvSpPr>
-          <p:cNvPr id="6" name="Oval 5"/>
-          <p:cNvSpPr/>
-          <p:nvPr/>
-        </p:nvSpPr>
-        <p:spPr>
-          <a:xfrm>
-            <a:off x="731520" y="1463040"/>
-            <a:ext cx="329184" cy="329184"/>
-          </a:xfrm>
-          <a:prstGeom prst="ellipse">
-            <a:avLst/>
-          </a:prstGeom>
-          <a:noFill/>
-          <a:ln w="22225">
-            <a:solidFill>
-              <a:srgbClr val="000000"/>
-            </a:solidFill>
-          </a:ln>
-          <a:effectLst/>
-        </p:spPr>
-        <p:style>
-          <a:lnRef idx="1">
-            <a:schemeClr val="accent1"/>
-          </a:lnRef>
-          <a:fillRef idx="3">
-            <a:schemeClr val="accent1"/>
-          </a:fillRef>
-          <a:effectRef idx="2">
-            <a:schemeClr val="accent1"/>
-          </a:effectRef>
-          <a:fontRef idx="minor">
-            <a:schemeClr val="lt1"/>
-          </a:fontRef>
-        </p:style>
-        <p:txBody>
-          <a:bodyPr rtlCol="0" anchor="ctr"/>
-          <a:lstStyle/>
-          <a:p>
-            <a:pPr algn="ctr"/>
-          </a:p>
-        </p:txBody>
-      </p:sp>
-      <p:cxnSp>
-        <p:nvCxnSpPr>
-          <p:cNvPr id="7" name="Connector 6"/>
-          <p:cNvCxnSpPr/>
-          <p:nvPr/>
-        </p:nvCxnSpPr>
-        <p:spPr>
-          <a:xfrm>
-            <a:off x="896112" y="1792224"/>
-            <a:ext cx="0" cy="438912"/>
-          </a:xfrm>
-          <a:prstGeom prst="line">
-            <a:avLst/>
-          </a:prstGeom>
-          <a:ln w="22225">
-            <a:solidFill>
-              <a:srgbClr val="000000"/>
-            </a:solidFill>
-          </a:ln>
-        </p:spPr>
-        <p:style>
-          <a:lnRef idx="2">
-            <a:schemeClr val="accent1"/>
-          </a:lnRef>
-          <a:fillRef idx="0">
-            <a:schemeClr val="accent1"/>
-          </a:fillRef>
-          <a:effectRef idx="1">
-            <a:schemeClr val="accent1"/>
-          </a:effectRef>
-          <a:fontRef idx="minor">
-            <a:schemeClr val="tx1"/>
-          </a:fontRef>
-        </p:style>
-      </p:cxnSp>
-      <p:cxnSp>
-        <p:nvCxnSpPr>
-          <p:cNvPr id="8" name="Connector 7"/>
-          <p:cNvCxnSpPr/>
-          <p:nvPr/>
-        </p:nvCxnSpPr>
-        <p:spPr>
-          <a:xfrm>
-            <a:off x="676656" y="1915119"/>
-            <a:ext cx="438912" cy="0"/>
-          </a:xfrm>
-          <a:prstGeom prst="line">
-            <a:avLst/>
-          </a:prstGeom>
-          <a:ln w="22225">
-            <a:solidFill>
-              <a:srgbClr val="000000"/>
-            </a:solidFill>
-          </a:ln>
-        </p:spPr>
-        <p:style>
-          <a:lnRef idx="2">
-            <a:schemeClr val="accent1"/>
-          </a:lnRef>
-          <a:fillRef idx="0">
-            <a:schemeClr val="accent1"/>
-          </a:fillRef>
-          <a:effectRef idx="1">
-            <a:schemeClr val="accent1"/>
-          </a:effectRef>
-          <a:fontRef idx="minor">
-            <a:schemeClr val="tx1"/>
-          </a:fontRef>
-        </p:style>
-      </p:cxnSp>
-      <p:cxnSp>
-        <p:nvCxnSpPr>
-          <p:cNvPr id="9" name="Connector 8"/>
-          <p:cNvCxnSpPr/>
-          <p:nvPr/>
-        </p:nvCxnSpPr>
-        <p:spPr>
-          <a:xfrm flipH="1">
-            <a:off x="676656" y="2231136"/>
-            <a:ext cx="219456" cy="285292"/>
-          </a:xfrm>
-          <a:prstGeom prst="line">
-            <a:avLst/>
-          </a:prstGeom>
-          <a:ln w="22225">
-            <a:solidFill>
-              <a:srgbClr val="000000"/>
-            </a:solidFill>
-          </a:ln>
-        </p:spPr>
-        <p:style>
-          <a:lnRef idx="2">
-            <a:schemeClr val="accent1"/>
-          </a:lnRef>
-          <a:fillRef idx="0">
-            <a:schemeClr val="accent1"/>
-          </a:fillRef>
-          <a:effectRef idx="1">
-            <a:schemeClr val="accent1"/>
-          </a:effectRef>
-          <a:fontRef idx="minor">
-            <a:schemeClr val="tx1"/>
-          </a:fontRef>
-        </p:style>
-      </p:cxnSp>
-      <p:cxnSp>
-        <p:nvCxnSpPr>
-          <p:cNvPr id="10" name="Connector 9"/>
-          <p:cNvCxnSpPr/>
-          <p:nvPr/>
-        </p:nvCxnSpPr>
-        <p:spPr>
-          <a:xfrm>
-            <a:off x="896112" y="2231136"/>
-            <a:ext cx="219456" cy="285292"/>
-          </a:xfrm>
-          <a:prstGeom prst="line">
-            <a:avLst/>
-          </a:prstGeom>
-          <a:ln w="22225">
-            <a:solidFill>
-              <a:srgbClr val="000000"/>
-            </a:solidFill>
-          </a:ln>
-        </p:spPr>
-        <p:style>
-          <a:lnRef idx="2">
-            <a:schemeClr val="accent1"/>
-          </a:lnRef>
-          <a:fillRef idx="0">
-            <a:schemeClr val="accent1"/>
-          </a:fillRef>
-          <a:effectRef idx="1">
-            <a:schemeClr val="accent1"/>
-          </a:effectRef>
-          <a:fontRef idx="minor">
-            <a:schemeClr val="tx1"/>
-          </a:fontRef>
-        </p:style>
-      </p:cxnSp>
-      <p:sp>
-        <p:nvSpPr>
-          <p:cNvPr id="11" name="TextBox 10"/>
-          <p:cNvSpPr txBox="1"/>
-          <p:nvPr/>
-        </p:nvSpPr>
-        <p:spPr>
-          <a:xfrm>
-            <a:off x="228600" y="2571292"/>
-            <a:ext cx="1335024" cy="274320"/>
-          </a:xfrm>
-          <a:prstGeom prst="rect">
-            <a:avLst/>
-          </a:prstGeom>
-          <a:noFill/>
-        </p:spPr>
-        <p:txBody>
-          <a:bodyPr wrap="square" anchor="t">
-            <a:spAutoFit/>
-          </a:bodyPr>
-          <a:lstStyle/>
-          <a:p>
-            <a:pPr algn="ctr"/>
-            <a:r>
-              <a:rPr sz="1250" b="1" i="0">
-                <a:solidFill>
-                  <a:srgbClr val="000000"/>
-                </a:solidFill>
-                <a:latin typeface="Times New Roman"/>
-              </a:rPr>
-              <a:t>Administrateur</a:t>
-            </a:r>
-          </a:p>
-        </p:txBody>
-      </p:sp>
-      <p:sp>
-        <p:nvSpPr>
-          <p:cNvPr id="12" name="Oval 11"/>
-          <p:cNvSpPr/>
-          <p:nvPr/>
-        </p:nvSpPr>
-        <p:spPr>
-          <a:xfrm>
-            <a:off x="731520" y="2788920"/>
-            <a:ext cx="329184" cy="329184"/>
-          </a:xfrm>
-          <a:prstGeom prst="ellipse">
-            <a:avLst/>
-          </a:prstGeom>
-          <a:noFill/>
-          <a:ln w="22225">
-            <a:solidFill>
-              <a:srgbClr val="000000"/>
-            </a:solidFill>
-          </a:ln>
-          <a:effectLst/>
-        </p:spPr>
-        <p:style>
-          <a:lnRef idx="1">
-            <a:schemeClr val="accent1"/>
-          </a:lnRef>
-          <a:fillRef idx="3">
-            <a:schemeClr val="accent1"/>
-          </a:fillRef>
-          <a:effectRef idx="2">
-            <a:schemeClr val="accent1"/>
-          </a:effectRef>
-          <a:fontRef idx="minor">
-            <a:schemeClr val="lt1"/>
-          </a:fontRef>
-        </p:style>
-        <p:txBody>
-          <a:bodyPr rtlCol="0" anchor="ctr"/>
-          <a:lstStyle/>
-          <a:p>
-            <a:pPr algn="ctr"/>
-          </a:p>
-        </p:txBody>
-      </p:sp>
-      <p:cxnSp>
-        <p:nvCxnSpPr>
-          <p:cNvPr id="13" name="Connector 12"/>
-          <p:cNvCxnSpPr/>
-          <p:nvPr/>
-        </p:nvCxnSpPr>
-        <p:spPr>
-          <a:xfrm>
-            <a:off x="896112" y="3118104"/>
-            <a:ext cx="0" cy="438912"/>
-          </a:xfrm>
-          <a:prstGeom prst="line">
-            <a:avLst/>
-          </a:prstGeom>
-          <a:ln w="22225">
-            <a:solidFill>
-              <a:srgbClr val="000000"/>
-            </a:solidFill>
-          </a:ln>
-        </p:spPr>
-        <p:style>
-          <a:lnRef idx="2">
-            <a:schemeClr val="accent1"/>
-          </a:lnRef>
-          <a:fillRef idx="0">
-            <a:schemeClr val="accent1"/>
-          </a:fillRef>
-          <a:effectRef idx="1">
-            <a:schemeClr val="accent1"/>
-          </a:effectRef>
-          <a:fontRef idx="minor">
-            <a:schemeClr val="tx1"/>
-          </a:fontRef>
-        </p:style>
-      </p:cxnSp>
-      <p:cxnSp>
-        <p:nvCxnSpPr>
-          <p:cNvPr id="14" name="Connector 13"/>
-          <p:cNvCxnSpPr/>
-          <p:nvPr/>
-        </p:nvCxnSpPr>
-        <p:spPr>
-          <a:xfrm>
-            <a:off x="676656" y="3240999"/>
-            <a:ext cx="438912" cy="0"/>
-          </a:xfrm>
-          <a:prstGeom prst="line">
-            <a:avLst/>
-          </a:prstGeom>
-          <a:ln w="22225">
-            <a:solidFill>
-              <a:srgbClr val="000000"/>
-            </a:solidFill>
-          </a:ln>
-        </p:spPr>
-        <p:style>
-          <a:lnRef idx="2">
-            <a:schemeClr val="accent1"/>
-          </a:lnRef>
-          <a:fillRef idx="0">
-            <a:schemeClr val="accent1"/>
-          </a:fillRef>
-          <a:effectRef idx="1">
-            <a:schemeClr val="accent1"/>
-          </a:effectRef>
-          <a:fontRef idx="minor">
-            <a:schemeClr val="tx1"/>
-          </a:fontRef>
-        </p:style>
-      </p:cxnSp>
-      <p:cxnSp>
-        <p:nvCxnSpPr>
-          <p:cNvPr id="15" name="Connector 14"/>
-          <p:cNvCxnSpPr/>
-          <p:nvPr/>
-        </p:nvCxnSpPr>
-        <p:spPr>
-          <a:xfrm flipH="1">
-            <a:off x="676656" y="3557016"/>
-            <a:ext cx="219456" cy="285292"/>
-          </a:xfrm>
-          <a:prstGeom prst="line">
-            <a:avLst/>
-          </a:prstGeom>
-          <a:ln w="22225">
-            <a:solidFill>
-              <a:srgbClr val="000000"/>
-            </a:solidFill>
-          </a:ln>
-        </p:spPr>
-        <p:style>
-          <a:lnRef idx="2">
-            <a:schemeClr val="accent1"/>
-          </a:lnRef>
-          <a:fillRef idx="0">
-            <a:schemeClr val="accent1"/>
-          </a:fillRef>
-          <a:effectRef idx="1">
-            <a:schemeClr val="accent1"/>
-          </a:effectRef>
-          <a:fontRef idx="minor">
-            <a:schemeClr val="tx1"/>
-          </a:fontRef>
-        </p:style>
-      </p:cxnSp>
-      <p:cxnSp>
-        <p:nvCxnSpPr>
-          <p:cNvPr id="16" name="Connector 15"/>
-          <p:cNvCxnSpPr/>
-          <p:nvPr/>
-        </p:nvCxnSpPr>
-        <p:spPr>
-          <a:xfrm>
-            <a:off x="896112" y="3557016"/>
-            <a:ext cx="219456" cy="285292"/>
-          </a:xfrm>
-          <a:prstGeom prst="line">
-            <a:avLst/>
-          </a:prstGeom>
-          <a:ln w="22225">
-            <a:solidFill>
-              <a:srgbClr val="000000"/>
-            </a:solidFill>
-          </a:ln>
-        </p:spPr>
-        <p:style>
-          <a:lnRef idx="2">
-            <a:schemeClr val="accent1"/>
-          </a:lnRef>
-          <a:fillRef idx="0">
-            <a:schemeClr val="accent1"/>
-          </a:fillRef>
-          <a:effectRef idx="1">
-            <a:schemeClr val="accent1"/>
-          </a:effectRef>
-          <a:fontRef idx="minor">
-            <a:schemeClr val="tx1"/>
-          </a:fontRef>
-        </p:style>
-      </p:cxnSp>
-      <p:sp>
-        <p:nvSpPr>
-          <p:cNvPr id="17" name="TextBox 16"/>
-          <p:cNvSpPr txBox="1"/>
-          <p:nvPr/>
-        </p:nvSpPr>
-        <p:spPr>
-          <a:xfrm>
-            <a:off x="228600" y="3897172"/>
-            <a:ext cx="1335024" cy="274320"/>
-          </a:xfrm>
-          <a:prstGeom prst="rect">
-            <a:avLst/>
-          </a:prstGeom>
-          <a:noFill/>
-        </p:spPr>
-        <p:txBody>
-          <a:bodyPr wrap="square" anchor="t">
-            <a:spAutoFit/>
-          </a:bodyPr>
-          <a:lstStyle/>
-          <a:p>
-            <a:pPr algn="ctr"/>
-            <a:r>
-              <a:rPr sz="1250" b="1" i="0">
-                <a:solidFill>
-                  <a:srgbClr val="000000"/>
-                </a:solidFill>
-                <a:latin typeface="Times New Roman"/>
-              </a:rPr>
-              <a:t>Formateur</a:t>
-            </a:r>
-          </a:p>
-        </p:txBody>
-      </p:sp>
-      <p:sp>
-        <p:nvSpPr>
-          <p:cNvPr id="18" name="Oval 17"/>
-          <p:cNvSpPr/>
-          <p:nvPr/>
-        </p:nvSpPr>
-        <p:spPr>
-          <a:xfrm>
-            <a:off x="731520" y="4114800"/>
-            <a:ext cx="329184" cy="329184"/>
-          </a:xfrm>
-          <a:prstGeom prst="ellipse">
-            <a:avLst/>
-          </a:prstGeom>
-          <a:noFill/>
-          <a:ln w="22225">
-            <a:solidFill>
-              <a:srgbClr val="000000"/>
-            </a:solidFill>
-          </a:ln>
-          <a:effectLst/>
-        </p:spPr>
-        <p:style>
-          <a:lnRef idx="1">
-            <a:schemeClr val="accent1"/>
-          </a:lnRef>
-          <a:fillRef idx="3">
-            <a:schemeClr val="accent1"/>
-          </a:fillRef>
-          <a:effectRef idx="2">
-            <a:schemeClr val="accent1"/>
-          </a:effectRef>
-          <a:fontRef idx="minor">
-            <a:schemeClr val="lt1"/>
-          </a:fontRef>
-        </p:style>
-        <p:txBody>
-          <a:bodyPr rtlCol="0" anchor="ctr"/>
-          <a:lstStyle/>
-          <a:p>
-            <a:pPr algn="ctr"/>
-          </a:p>
-        </p:txBody>
-      </p:sp>
-      <p:cxnSp>
-        <p:nvCxnSpPr>
-          <p:cNvPr id="19" name="Connector 18"/>
-          <p:cNvCxnSpPr/>
-          <p:nvPr/>
-        </p:nvCxnSpPr>
-        <p:spPr>
-          <a:xfrm>
-            <a:off x="896112" y="4443984"/>
-            <a:ext cx="0" cy="438912"/>
-          </a:xfrm>
-          <a:prstGeom prst="line">
-            <a:avLst/>
-          </a:prstGeom>
-          <a:ln w="22225">
-            <a:solidFill>
-              <a:srgbClr val="000000"/>
-            </a:solidFill>
-          </a:ln>
-        </p:spPr>
-        <p:style>
-          <a:lnRef idx="2">
-            <a:schemeClr val="accent1"/>
-          </a:lnRef>
-          <a:fillRef idx="0">
-            <a:schemeClr val="accent1"/>
-          </a:fillRef>
-          <a:effectRef idx="1">
-            <a:schemeClr val="accent1"/>
-          </a:effectRef>
-          <a:fontRef idx="minor">
-            <a:schemeClr val="tx1"/>
-          </a:fontRef>
-        </p:style>
-      </p:cxnSp>
-      <p:cxnSp>
-        <p:nvCxnSpPr>
-          <p:cNvPr id="20" name="Connector 19"/>
-          <p:cNvCxnSpPr/>
-          <p:nvPr/>
-        </p:nvCxnSpPr>
-        <p:spPr>
-          <a:xfrm>
-            <a:off x="676656" y="4566879"/>
-            <a:ext cx="438912" cy="0"/>
-          </a:xfrm>
-          <a:prstGeom prst="line">
-            <a:avLst/>
-          </a:prstGeom>
-          <a:ln w="22225">
-            <a:solidFill>
-              <a:srgbClr val="000000"/>
-            </a:solidFill>
-          </a:ln>
-        </p:spPr>
-        <p:style>
-          <a:lnRef idx="2">
-            <a:schemeClr val="accent1"/>
-          </a:lnRef>
-          <a:fillRef idx="0">
-            <a:schemeClr val="accent1"/>
-          </a:fillRef>
-          <a:effectRef idx="1">
-            <a:schemeClr val="accent1"/>
-          </a:effectRef>
-          <a:fontRef idx="minor">
-            <a:schemeClr val="tx1"/>
-          </a:fontRef>
-        </p:style>
-      </p:cxnSp>
-      <p:cxnSp>
-        <p:nvCxnSpPr>
-          <p:cNvPr id="21" name="Connector 20"/>
-          <p:cNvCxnSpPr/>
-          <p:nvPr/>
-        </p:nvCxnSpPr>
-        <p:spPr>
-          <a:xfrm flipH="1">
-            <a:off x="676656" y="4882896"/>
-            <a:ext cx="219456" cy="285292"/>
-          </a:xfrm>
-          <a:prstGeom prst="line">
-            <a:avLst/>
-          </a:prstGeom>
-          <a:ln w="22225">
-            <a:solidFill>
-              <a:srgbClr val="000000"/>
-            </a:solidFill>
-          </a:ln>
-        </p:spPr>
-        <p:style>
-          <a:lnRef idx="2">
-            <a:schemeClr val="accent1"/>
-          </a:lnRef>
-          <a:fillRef idx="0">
-            <a:schemeClr val="accent1"/>
-          </a:fillRef>
-          <a:effectRef idx="1">
-            <a:schemeClr val="accent1"/>
-          </a:effectRef>
-          <a:fontRef idx="minor">
-            <a:schemeClr val="tx1"/>
-          </a:fontRef>
-        </p:style>
-      </p:cxnSp>
-      <p:cxnSp>
-        <p:nvCxnSpPr>
-          <p:cNvPr id="22" name="Connector 21"/>
-          <p:cNvCxnSpPr/>
-          <p:nvPr/>
-        </p:nvCxnSpPr>
-        <p:spPr>
-          <a:xfrm>
-            <a:off x="896112" y="4882896"/>
-            <a:ext cx="219456" cy="285292"/>
-          </a:xfrm>
-          <a:prstGeom prst="line">
-            <a:avLst/>
-          </a:prstGeom>
-          <a:ln w="22225">
-            <a:solidFill>
-              <a:srgbClr val="000000"/>
-            </a:solidFill>
-          </a:ln>
-        </p:spPr>
-        <p:style>
-          <a:lnRef idx="2">
-            <a:schemeClr val="accent1"/>
-          </a:lnRef>
-          <a:fillRef idx="0">
-            <a:schemeClr val="accent1"/>
-          </a:fillRef>
-          <a:effectRef idx="1">
-            <a:schemeClr val="accent1"/>
-          </a:effectRef>
-          <a:fontRef idx="minor">
-            <a:schemeClr val="tx1"/>
-          </a:fontRef>
-        </p:style>
-      </p:cxnSp>
-      <p:sp>
-        <p:nvSpPr>
-          <p:cNvPr id="23" name="TextBox 22"/>
-          <p:cNvSpPr txBox="1"/>
-          <p:nvPr/>
-        </p:nvSpPr>
-        <p:spPr>
-          <a:xfrm>
-            <a:off x="228600" y="5223052"/>
-            <a:ext cx="1335024" cy="274320"/>
-          </a:xfrm>
-          <a:prstGeom prst="rect">
-            <a:avLst/>
-          </a:prstGeom>
-          <a:noFill/>
-        </p:spPr>
-        <p:txBody>
-          <a:bodyPr wrap="square" anchor="t">
-            <a:spAutoFit/>
-          </a:bodyPr>
-          <a:lstStyle/>
-          <a:p>
-            <a:pPr algn="ctr"/>
-            <a:r>
-              <a:rPr sz="1250" b="1" i="0">
-                <a:solidFill>
-                  <a:srgbClr val="000000"/>
-                </a:solidFill>
-                <a:latin typeface="Times New Roman"/>
-              </a:rPr>
-              <a:t>Étudiant</a:t>
-            </a:r>
-          </a:p>
-        </p:txBody>
-      </p:sp>
-      <p:sp>
-        <p:nvSpPr>
-          <p:cNvPr id="24" name="Oval 23"/>
-          <p:cNvSpPr/>
-          <p:nvPr/>
-        </p:nvSpPr>
-        <p:spPr>
-          <a:xfrm>
-            <a:off x="3200400" y="1417320"/>
-            <a:ext cx="3566160" cy="777240"/>
-          </a:xfrm>
-          <a:prstGeom prst="ellipse">
-            <a:avLst/>
-          </a:prstGeom>
-          <a:solidFill>
-            <a:srgbClr val="FFFFFF"/>
-          </a:solidFill>
-          <a:ln w="15875">
-            <a:solidFill>
-              <a:srgbClr val="1F3C63"/>
-            </a:solidFill>
-          </a:ln>
-          <a:effectLst/>
-        </p:spPr>
-        <p:style>
-          <a:lnRef idx="1">
-            <a:schemeClr val="accent1"/>
-          </a:lnRef>
-          <a:fillRef idx="3">
-            <a:schemeClr val="accent1"/>
-          </a:fillRef>
-          <a:effectRef idx="2">
-            <a:schemeClr val="accent1"/>
-          </a:effectRef>
-          <a:fontRef idx="minor">
-            <a:schemeClr val="lt1"/>
-          </a:fontRef>
-        </p:style>
-        <p:txBody>
-          <a:bodyPr rtlCol="0" anchor="ctr" wrap="square"/>
-          <a:lstStyle/>
-          <a:p>
-            <a:pPr algn="ctr"/>
-            <a:r>
-              <a:rPr sz="1300" b="1">
-                <a:solidFill>
-                  <a:srgbClr val="000000"/>
-                </a:solidFill>
-                <a:latin typeface="Times New Roman"/>
-              </a:rPr>
-              <a:t>Authentification</a:t>
-            </a:r>
-          </a:p>
-        </p:txBody>
-      </p:sp>
-      <p:sp>
-        <p:nvSpPr>
-          <p:cNvPr id="25" name="Oval 24"/>
-          <p:cNvSpPr/>
-          <p:nvPr/>
-        </p:nvSpPr>
-        <p:spPr>
-          <a:xfrm>
-            <a:off x="7315200" y="1417320"/>
-            <a:ext cx="3566160" cy="777240"/>
-          </a:xfrm>
-          <a:prstGeom prst="ellipse">
-            <a:avLst/>
-          </a:prstGeom>
-          <a:solidFill>
-            <a:srgbClr val="FFFFFF"/>
-          </a:solidFill>
-          <a:ln w="15875">
-            <a:solidFill>
-              <a:srgbClr val="1F3C63"/>
-            </a:solidFill>
-          </a:ln>
-          <a:effectLst/>
-        </p:spPr>
-        <p:style>
-          <a:lnRef idx="1">
-            <a:schemeClr val="accent1"/>
-          </a:lnRef>
-          <a:fillRef idx="3">
-            <a:schemeClr val="accent1"/>
-          </a:fillRef>
-          <a:effectRef idx="2">
-            <a:schemeClr val="accent1"/>
-          </a:effectRef>
-          <a:fontRef idx="minor">
-            <a:schemeClr val="lt1"/>
-          </a:fontRef>
-        </p:style>
-        <p:txBody>
-          <a:bodyPr rtlCol="0" anchor="ctr" wrap="square"/>
-          <a:lstStyle/>
-          <a:p>
-            <a:pPr algn="ctr"/>
-            <a:r>
-              <a:rPr sz="1300" b="1">
-                <a:solidFill>
-                  <a:srgbClr val="000000"/>
-                </a:solidFill>
-                <a:latin typeface="Times New Roman"/>
-              </a:rPr>
-              <a:t>Gestion étudiants</a:t>
-            </a:r>
-          </a:p>
-        </p:txBody>
-      </p:sp>
-      <p:sp>
-        <p:nvSpPr>
-          <p:cNvPr id="26" name="Oval 25"/>
-          <p:cNvSpPr/>
-          <p:nvPr/>
-        </p:nvSpPr>
-        <p:spPr>
-          <a:xfrm>
-            <a:off x="3200400" y="2468880"/>
-            <a:ext cx="3566160" cy="777240"/>
-          </a:xfrm>
-          <a:prstGeom prst="ellipse">
-            <a:avLst/>
-          </a:prstGeom>
-          <a:solidFill>
-            <a:srgbClr val="FFFFFF"/>
-          </a:solidFill>
-          <a:ln w="15875">
-            <a:solidFill>
-              <a:srgbClr val="1F3C63"/>
-            </a:solidFill>
-          </a:ln>
-          <a:effectLst/>
-        </p:spPr>
-        <p:style>
-          <a:lnRef idx="1">
-            <a:schemeClr val="accent1"/>
-          </a:lnRef>
-          <a:fillRef idx="3">
-            <a:schemeClr val="accent1"/>
-          </a:fillRef>
-          <a:effectRef idx="2">
-            <a:schemeClr val="accent1"/>
-          </a:effectRef>
-          <a:fontRef idx="minor">
-            <a:schemeClr val="lt1"/>
-          </a:fontRef>
-        </p:style>
-        <p:txBody>
-          <a:bodyPr rtlCol="0" anchor="ctr" wrap="square"/>
-          <a:lstStyle/>
-          <a:p>
-            <a:pPr algn="ctr"/>
-            <a:r>
-              <a:rPr sz="1300" b="1">
-                <a:solidFill>
-                  <a:srgbClr val="000000"/>
-                </a:solidFill>
-                <a:latin typeface="Times New Roman"/>
-              </a:rPr>
-              <a:t>Gestion formateurs</a:t>
-            </a:r>
-          </a:p>
-        </p:txBody>
-      </p:sp>
-      <p:sp>
-        <p:nvSpPr>
-          <p:cNvPr id="27" name="Oval 26"/>
-          <p:cNvSpPr/>
-          <p:nvPr/>
-        </p:nvSpPr>
-        <p:spPr>
-          <a:xfrm>
-            <a:off x="7315200" y="2468880"/>
-            <a:ext cx="3566160" cy="777240"/>
-          </a:xfrm>
-          <a:prstGeom prst="ellipse">
-            <a:avLst/>
-          </a:prstGeom>
-          <a:solidFill>
-            <a:srgbClr val="FFFFFF"/>
-          </a:solidFill>
-          <a:ln w="15875">
-            <a:solidFill>
-              <a:srgbClr val="1F3C63"/>
-            </a:solidFill>
-          </a:ln>
-          <a:effectLst/>
-        </p:spPr>
-        <p:style>
-          <a:lnRef idx="1">
-            <a:schemeClr val="accent1"/>
-          </a:lnRef>
-          <a:fillRef idx="3">
-            <a:schemeClr val="accent1"/>
-          </a:fillRef>
-          <a:effectRef idx="2">
-            <a:schemeClr val="accent1"/>
-          </a:effectRef>
-          <a:fontRef idx="minor">
-            <a:schemeClr val="lt1"/>
-          </a:fontRef>
-        </p:style>
-        <p:txBody>
-          <a:bodyPr rtlCol="0" anchor="ctr" wrap="square"/>
-          <a:lstStyle/>
-          <a:p>
-            <a:pPr algn="ctr"/>
-            <a:r>
-              <a:rPr sz="1300" b="1">
-                <a:solidFill>
-                  <a:srgbClr val="000000"/>
-                </a:solidFill>
-                <a:latin typeface="Times New Roman"/>
-              </a:rPr>
-              <a:t>Gestion formations</a:t>
-            </a:r>
-          </a:p>
-        </p:txBody>
-      </p:sp>
-      <p:sp>
-        <p:nvSpPr>
-          <p:cNvPr id="28" name="Oval 27"/>
-          <p:cNvSpPr/>
-          <p:nvPr/>
-        </p:nvSpPr>
-        <p:spPr>
-          <a:xfrm>
-            <a:off x="3200400" y="3520440"/>
-            <a:ext cx="3566160" cy="777240"/>
-          </a:xfrm>
-          <a:prstGeom prst="ellipse">
-            <a:avLst/>
-          </a:prstGeom>
-          <a:solidFill>
-            <a:srgbClr val="FFFFFF"/>
-          </a:solidFill>
-          <a:ln w="15875">
-            <a:solidFill>
-              <a:srgbClr val="1F3C63"/>
-            </a:solidFill>
-          </a:ln>
-          <a:effectLst/>
-        </p:spPr>
-        <p:style>
-          <a:lnRef idx="1">
-            <a:schemeClr val="accent1"/>
-          </a:lnRef>
-          <a:fillRef idx="3">
-            <a:schemeClr val="accent1"/>
-          </a:fillRef>
-          <a:effectRef idx="2">
-            <a:schemeClr val="accent1"/>
-          </a:effectRef>
-          <a:fontRef idx="minor">
-            <a:schemeClr val="lt1"/>
-          </a:fontRef>
-        </p:style>
-        <p:txBody>
-          <a:bodyPr rtlCol="0" anchor="ctr" wrap="square"/>
-          <a:lstStyle/>
-          <a:p>
-            <a:pPr algn="ctr"/>
-            <a:r>
-              <a:rPr sz="1300" b="1">
-                <a:solidFill>
-                  <a:srgbClr val="000000"/>
-                </a:solidFill>
-                <a:latin typeface="Times New Roman"/>
-              </a:rPr>
-              <a:t>Inscriptions &amp; notation</a:t>
-            </a:r>
-          </a:p>
-        </p:txBody>
-      </p:sp>
-      <p:sp>
-        <p:nvSpPr>
-          <p:cNvPr id="29" name="Oval 28"/>
-          <p:cNvSpPr/>
-          <p:nvPr/>
-        </p:nvSpPr>
-        <p:spPr>
-          <a:xfrm>
-            <a:off x="7315200" y="3520440"/>
-            <a:ext cx="3566160" cy="777240"/>
-          </a:xfrm>
-          <a:prstGeom prst="ellipse">
-            <a:avLst/>
-          </a:prstGeom>
-          <a:solidFill>
-            <a:srgbClr val="FFFFFF"/>
-          </a:solidFill>
-          <a:ln w="15875">
-            <a:solidFill>
-              <a:srgbClr val="1F3C63"/>
-            </a:solidFill>
-          </a:ln>
-          <a:effectLst/>
-        </p:spPr>
-        <p:style>
-          <a:lnRef idx="1">
-            <a:schemeClr val="accent1"/>
-          </a:lnRef>
-          <a:fillRef idx="3">
-            <a:schemeClr val="accent1"/>
-          </a:fillRef>
-          <a:effectRef idx="2">
-            <a:schemeClr val="accent1"/>
-          </a:effectRef>
-          <a:fontRef idx="minor">
-            <a:schemeClr val="lt1"/>
-          </a:fontRef>
-        </p:style>
-        <p:txBody>
-          <a:bodyPr rtlCol="0" anchor="ctr" wrap="square"/>
-          <a:lstStyle/>
-          <a:p>
-            <a:pPr algn="ctr"/>
-            <a:r>
-              <a:rPr sz="1300" b="1">
-                <a:solidFill>
-                  <a:srgbClr val="000000"/>
-                </a:solidFill>
-                <a:latin typeface="Times New Roman"/>
-              </a:rPr>
-              <a:t>Tableau de bord</a:t>
-            </a:r>
-          </a:p>
-        </p:txBody>
-      </p:sp>
-      <p:cxnSp>
-        <p:nvCxnSpPr>
-          <p:cNvPr id="30" name="Connector 29"/>
-          <p:cNvCxnSpPr/>
-          <p:nvPr/>
-        </p:nvCxnSpPr>
-        <p:spPr>
-          <a:xfrm flipV="1">
-            <a:off x="896112" y="1805940"/>
-            <a:ext cx="2304288" cy="205740"/>
-          </a:xfrm>
-          <a:prstGeom prst="line">
-            <a:avLst/>
-          </a:prstGeom>
-          <a:ln w="12700">
-            <a:solidFill>
-              <a:srgbClr val="B0B0B0"/>
-            </a:solidFill>
-          </a:ln>
-        </p:spPr>
-        <p:style>
-          <a:lnRef idx="2">
-            <a:schemeClr val="accent1"/>
-          </a:lnRef>
-          <a:fillRef idx="0">
-            <a:schemeClr val="accent1"/>
-          </a:fillRef>
-          <a:effectRef idx="1">
-            <a:schemeClr val="accent1"/>
-          </a:effectRef>
-          <a:fontRef idx="minor">
-            <a:schemeClr val="tx1"/>
-          </a:fontRef>
-        </p:style>
-      </p:cxnSp>
-      <p:cxnSp>
-        <p:nvCxnSpPr>
-          <p:cNvPr id="31" name="Connector 30"/>
-          <p:cNvCxnSpPr/>
-          <p:nvPr/>
-        </p:nvCxnSpPr>
-        <p:spPr>
-          <a:xfrm flipV="1">
-            <a:off x="896112" y="1805940"/>
-            <a:ext cx="6419088" cy="205740"/>
-          </a:xfrm>
-          <a:prstGeom prst="line">
-            <a:avLst/>
-          </a:prstGeom>
-          <a:ln w="12700">
-            <a:solidFill>
-              <a:srgbClr val="B0B0B0"/>
-            </a:solidFill>
-          </a:ln>
-        </p:spPr>
-        <p:style>
-          <a:lnRef idx="2">
-            <a:schemeClr val="accent1"/>
-          </a:lnRef>
-          <a:fillRef idx="0">
-            <a:schemeClr val="accent1"/>
-          </a:fillRef>
-          <a:effectRef idx="1">
-            <a:schemeClr val="accent1"/>
-          </a:effectRef>
-          <a:fontRef idx="minor">
-            <a:schemeClr val="tx1"/>
-          </a:fontRef>
-        </p:style>
-      </p:cxnSp>
-      <p:cxnSp>
-        <p:nvCxnSpPr>
-          <p:cNvPr id="32" name="Connector 31"/>
-          <p:cNvCxnSpPr/>
-          <p:nvPr/>
-        </p:nvCxnSpPr>
-        <p:spPr>
-          <a:xfrm>
-            <a:off x="896112" y="2011680"/>
-            <a:ext cx="2304288" cy="845820"/>
-          </a:xfrm>
-          <a:prstGeom prst="line">
-            <a:avLst/>
-          </a:prstGeom>
-          <a:ln w="12700">
-            <a:solidFill>
-              <a:srgbClr val="B0B0B0"/>
-            </a:solidFill>
-          </a:ln>
-        </p:spPr>
-        <p:style>
-          <a:lnRef idx="2">
-            <a:schemeClr val="accent1"/>
-          </a:lnRef>
-          <a:fillRef idx="0">
-            <a:schemeClr val="accent1"/>
-          </a:fillRef>
-          <a:effectRef idx="1">
-            <a:schemeClr val="accent1"/>
-          </a:effectRef>
-          <a:fontRef idx="minor">
-            <a:schemeClr val="tx1"/>
-          </a:fontRef>
-        </p:style>
-      </p:cxnSp>
-      <p:cxnSp>
-        <p:nvCxnSpPr>
-          <p:cNvPr id="33" name="Connector 32"/>
-          <p:cNvCxnSpPr/>
-          <p:nvPr/>
-        </p:nvCxnSpPr>
-        <p:spPr>
-          <a:xfrm>
-            <a:off x="896112" y="2011680"/>
-            <a:ext cx="6419088" cy="845820"/>
-          </a:xfrm>
-          <a:prstGeom prst="line">
-            <a:avLst/>
-          </a:prstGeom>
-          <a:ln w="12700">
-            <a:solidFill>
-              <a:srgbClr val="B0B0B0"/>
-            </a:solidFill>
-          </a:ln>
-        </p:spPr>
-        <p:style>
-          <a:lnRef idx="2">
-            <a:schemeClr val="accent1"/>
-          </a:lnRef>
-          <a:fillRef idx="0">
-            <a:schemeClr val="accent1"/>
-          </a:fillRef>
-          <a:effectRef idx="1">
-            <a:schemeClr val="accent1"/>
-          </a:effectRef>
-          <a:fontRef idx="minor">
-            <a:schemeClr val="tx1"/>
-          </a:fontRef>
-        </p:style>
-      </p:cxnSp>
-      <p:cxnSp>
-        <p:nvCxnSpPr>
-          <p:cNvPr id="34" name="Connector 33"/>
-          <p:cNvCxnSpPr/>
-          <p:nvPr/>
-        </p:nvCxnSpPr>
-        <p:spPr>
-          <a:xfrm>
-            <a:off x="896112" y="2011680"/>
-            <a:ext cx="2304288" cy="1897380"/>
-          </a:xfrm>
-          <a:prstGeom prst="line">
-            <a:avLst/>
-          </a:prstGeom>
-          <a:ln w="12700">
-            <a:solidFill>
-              <a:srgbClr val="B0B0B0"/>
-            </a:solidFill>
-          </a:ln>
-        </p:spPr>
-        <p:style>
-          <a:lnRef idx="2">
-            <a:schemeClr val="accent1"/>
-          </a:lnRef>
-          <a:fillRef idx="0">
-            <a:schemeClr val="accent1"/>
-          </a:fillRef>
-          <a:effectRef idx="1">
-            <a:schemeClr val="accent1"/>
-          </a:effectRef>
-          <a:fontRef idx="minor">
-            <a:schemeClr val="tx1"/>
-          </a:fontRef>
-        </p:style>
-      </p:cxnSp>
-      <p:cxnSp>
-        <p:nvCxnSpPr>
-          <p:cNvPr id="35" name="Connector 34"/>
-          <p:cNvCxnSpPr/>
-          <p:nvPr/>
-        </p:nvCxnSpPr>
-        <p:spPr>
-          <a:xfrm>
-            <a:off x="896112" y="2011680"/>
-            <a:ext cx="6419088" cy="1897380"/>
-          </a:xfrm>
-          <a:prstGeom prst="line">
-            <a:avLst/>
-          </a:prstGeom>
-          <a:ln w="12700">
-            <a:solidFill>
-              <a:srgbClr val="B0B0B0"/>
-            </a:solidFill>
-          </a:ln>
-        </p:spPr>
-        <p:style>
-          <a:lnRef idx="2">
-            <a:schemeClr val="accent1"/>
-          </a:lnRef>
-          <a:fillRef idx="0">
-            <a:schemeClr val="accent1"/>
-          </a:fillRef>
-          <a:effectRef idx="1">
-            <a:schemeClr val="accent1"/>
-          </a:effectRef>
-          <a:fontRef idx="minor">
-            <a:schemeClr val="tx1"/>
-          </a:fontRef>
-        </p:style>
-      </p:cxnSp>
-      <p:cxnSp>
-        <p:nvCxnSpPr>
-          <p:cNvPr id="36" name="Connector 35"/>
-          <p:cNvCxnSpPr/>
-          <p:nvPr/>
-        </p:nvCxnSpPr>
-        <p:spPr>
-          <a:xfrm flipV="1">
-            <a:off x="896112" y="1805940"/>
-            <a:ext cx="2304288" cy="1531620"/>
-          </a:xfrm>
-          <a:prstGeom prst="line">
-            <a:avLst/>
-          </a:prstGeom>
-          <a:ln w="12700">
-            <a:solidFill>
-              <a:srgbClr val="B0B0B0"/>
-            </a:solidFill>
-          </a:ln>
-        </p:spPr>
-        <p:style>
-          <a:lnRef idx="2">
-            <a:schemeClr val="accent1"/>
-          </a:lnRef>
-          <a:fillRef idx="0">
-            <a:schemeClr val="accent1"/>
-          </a:fillRef>
-          <a:effectRef idx="1">
-            <a:schemeClr val="accent1"/>
-          </a:effectRef>
-          <a:fontRef idx="minor">
-            <a:schemeClr val="tx1"/>
-          </a:fontRef>
-        </p:style>
-      </p:cxnSp>
-      <p:cxnSp>
-        <p:nvCxnSpPr>
-          <p:cNvPr id="37" name="Connector 36"/>
-          <p:cNvCxnSpPr/>
-          <p:nvPr/>
-        </p:nvCxnSpPr>
-        <p:spPr>
-          <a:xfrm flipV="1">
-            <a:off x="896112" y="2857500"/>
-            <a:ext cx="6419088" cy="480060"/>
-          </a:xfrm>
-          <a:prstGeom prst="line">
-            <a:avLst/>
-          </a:prstGeom>
-          <a:ln w="12700">
-            <a:solidFill>
-              <a:srgbClr val="B0B0B0"/>
-            </a:solidFill>
-          </a:ln>
-        </p:spPr>
-        <p:style>
-          <a:lnRef idx="2">
-            <a:schemeClr val="accent1"/>
-          </a:lnRef>
-          <a:fillRef idx="0">
-            <a:schemeClr val="accent1"/>
-          </a:fillRef>
-          <a:effectRef idx="1">
-            <a:schemeClr val="accent1"/>
-          </a:effectRef>
-          <a:fontRef idx="minor">
-            <a:schemeClr val="tx1"/>
-          </a:fontRef>
-        </p:style>
-      </p:cxnSp>
-      <p:cxnSp>
-        <p:nvCxnSpPr>
-          <p:cNvPr id="38" name="Connector 37"/>
-          <p:cNvCxnSpPr/>
-          <p:nvPr/>
-        </p:nvCxnSpPr>
-        <p:spPr>
-          <a:xfrm>
-            <a:off x="896112" y="3337560"/>
-            <a:ext cx="2304288" cy="571500"/>
-          </a:xfrm>
-          <a:prstGeom prst="line">
-            <a:avLst/>
-          </a:prstGeom>
-          <a:ln w="12700">
-            <a:solidFill>
-              <a:srgbClr val="B0B0B0"/>
-            </a:solidFill>
-          </a:ln>
-        </p:spPr>
-        <p:style>
-          <a:lnRef idx="2">
-            <a:schemeClr val="accent1"/>
-          </a:lnRef>
-          <a:fillRef idx="0">
-            <a:schemeClr val="accent1"/>
-          </a:fillRef>
-          <a:effectRef idx="1">
-            <a:schemeClr val="accent1"/>
-          </a:effectRef>
-          <a:fontRef idx="minor">
-            <a:schemeClr val="tx1"/>
-          </a:fontRef>
-        </p:style>
-      </p:cxnSp>
-      <p:cxnSp>
-        <p:nvCxnSpPr>
-          <p:cNvPr id="39" name="Connector 38"/>
-          <p:cNvCxnSpPr/>
-          <p:nvPr/>
-        </p:nvCxnSpPr>
-        <p:spPr>
-          <a:xfrm>
-            <a:off x="896112" y="3337560"/>
-            <a:ext cx="6419088" cy="571500"/>
-          </a:xfrm>
-          <a:prstGeom prst="line">
-            <a:avLst/>
-          </a:prstGeom>
-          <a:ln w="12700">
-            <a:solidFill>
-              <a:srgbClr val="B0B0B0"/>
-            </a:solidFill>
-          </a:ln>
-        </p:spPr>
-        <p:style>
-          <a:lnRef idx="2">
-            <a:schemeClr val="accent1"/>
-          </a:lnRef>
-          <a:fillRef idx="0">
-            <a:schemeClr val="accent1"/>
-          </a:fillRef>
-          <a:effectRef idx="1">
-            <a:schemeClr val="accent1"/>
-          </a:effectRef>
-          <a:fontRef idx="minor">
-            <a:schemeClr val="tx1"/>
-          </a:fontRef>
-        </p:style>
-      </p:cxnSp>
-      <p:cxnSp>
-        <p:nvCxnSpPr>
-          <p:cNvPr id="40" name="Connector 39"/>
-          <p:cNvCxnSpPr/>
-          <p:nvPr/>
-        </p:nvCxnSpPr>
-        <p:spPr>
-          <a:xfrm flipV="1">
-            <a:off x="896112" y="1805940"/>
-            <a:ext cx="2304288" cy="2857500"/>
-          </a:xfrm>
-          <a:prstGeom prst="line">
-            <a:avLst/>
-          </a:prstGeom>
-          <a:ln w="12700">
-            <a:solidFill>
-              <a:srgbClr val="B0B0B0"/>
-            </a:solidFill>
-          </a:ln>
-        </p:spPr>
-        <p:style>
-          <a:lnRef idx="2">
-            <a:schemeClr val="accent1"/>
-          </a:lnRef>
-          <a:fillRef idx="0">
-            <a:schemeClr val="accent1"/>
-          </a:fillRef>
-          <a:effectRef idx="1">
-            <a:schemeClr val="accent1"/>
-          </a:effectRef>
-          <a:fontRef idx="minor">
-            <a:schemeClr val="tx1"/>
-          </a:fontRef>
-        </p:style>
-      </p:cxnSp>
-      <p:cxnSp>
-        <p:nvCxnSpPr>
-          <p:cNvPr id="41" name="Connector 40"/>
-          <p:cNvCxnSpPr/>
-          <p:nvPr/>
-        </p:nvCxnSpPr>
-        <p:spPr>
-          <a:xfrm flipV="1">
-            <a:off x="896112" y="2857500"/>
-            <a:ext cx="6419088" cy="1805940"/>
-          </a:xfrm>
-          <a:prstGeom prst="line">
-            <a:avLst/>
-          </a:prstGeom>
-          <a:ln w="12700">
-            <a:solidFill>
-              <a:srgbClr val="B0B0B0"/>
-            </a:solidFill>
-          </a:ln>
-        </p:spPr>
-        <p:style>
-          <a:lnRef idx="2">
-            <a:schemeClr val="accent1"/>
-          </a:lnRef>
-          <a:fillRef idx="0">
-            <a:schemeClr val="accent1"/>
-          </a:fillRef>
-          <a:effectRef idx="1">
-            <a:schemeClr val="accent1"/>
-          </a:effectRef>
-          <a:fontRef idx="minor">
-            <a:schemeClr val="tx1"/>
-          </a:fontRef>
-        </p:style>
-      </p:cxnSp>
-      <p:cxnSp>
-        <p:nvCxnSpPr>
-          <p:cNvPr id="42" name="Connector 41"/>
-          <p:cNvCxnSpPr/>
-          <p:nvPr/>
-        </p:nvCxnSpPr>
-        <p:spPr>
-          <a:xfrm flipV="1">
-            <a:off x="896112" y="3909060"/>
-            <a:ext cx="2304288" cy="754380"/>
-          </a:xfrm>
-          <a:prstGeom prst="line">
-            <a:avLst/>
-          </a:prstGeom>
-          <a:ln w="12700">
-            <a:solidFill>
-              <a:srgbClr val="B0B0B0"/>
-            </a:solidFill>
-          </a:ln>
-        </p:spPr>
-        <p:style>
-          <a:lnRef idx="2">
-            <a:schemeClr val="accent1"/>
-          </a:lnRef>
-          <a:fillRef idx="0">
-            <a:schemeClr val="accent1"/>
-          </a:fillRef>
-          <a:effectRef idx="1">
-            <a:schemeClr val="accent1"/>
-          </a:effectRef>
-          <a:fontRef idx="minor">
-            <a:schemeClr val="tx1"/>
-          </a:fontRef>
-        </p:style>
-      </p:cxnSp>
-      <p:cxnSp>
-        <p:nvCxnSpPr>
-          <p:cNvPr id="43" name="Connector 42"/>
-          <p:cNvCxnSpPr/>
-          <p:nvPr/>
-        </p:nvCxnSpPr>
-        <p:spPr>
-          <a:xfrm flipV="1">
-            <a:off x="896112" y="3909060"/>
-            <a:ext cx="6419088" cy="754380"/>
-          </a:xfrm>
-          <a:prstGeom prst="line">
-            <a:avLst/>
-          </a:prstGeom>
-          <a:ln w="12700">
-            <a:solidFill>
-              <a:srgbClr val="B0B0B0"/>
-            </a:solidFill>
-          </a:ln>
-        </p:spPr>
-        <p:style>
-          <a:lnRef idx="2">
-            <a:schemeClr val="accent1"/>
-          </a:lnRef>
-          <a:fillRef idx="0">
-            <a:schemeClr val="accent1"/>
-          </a:fillRef>
-          <a:effectRef idx="1">
-            <a:schemeClr val="accent1"/>
-          </a:effectRef>
-          <a:fontRef idx="minor">
-            <a:schemeClr val="tx1"/>
-          </a:fontRef>
-        </p:style>
-      </p:cxnSp>
-      <p:sp>
-        <p:nvSpPr>
-          <p:cNvPr id="44" name="TextBox 43"/>
-          <p:cNvSpPr txBox="1"/>
-          <p:nvPr/>
-        </p:nvSpPr>
-        <p:spPr>
-          <a:xfrm>
-            <a:off x="731520" y="5760720"/>
-            <a:ext cx="10332720" cy="365760"/>
-          </a:xfrm>
-          <a:prstGeom prst="rect">
-            <a:avLst/>
-          </a:prstGeom>
-          <a:noFill/>
-        </p:spPr>
-        <p:txBody>
-          <a:bodyPr wrap="square" anchor="t">
-            <a:spAutoFit/>
-          </a:bodyPr>
-          <a:lstStyle/>
-          <a:p>
-            <a:pPr algn="l"/>
-            <a:r>
-              <a:rPr sz="1250" b="0" i="1">
-                <a:solidFill>
-                  <a:srgbClr val="404040"/>
-                </a:solidFill>
-                <a:latin typeface="Times New Roman"/>
-              </a:rPr>
-              <a:t>22 cas d'utilisation détaillés : voir docs/cas_utilisation.md (diagramme Mermaid + tableau de synthèse)</a:t>
-            </a:r>
-          </a:p>
-        </p:txBody>
-      </p:sp>
-    </p:spTree>
-  </p:cSld>
-  <p:clrMapOvr>
-    <a:masterClrMapping/>
-  </p:clrMapOvr>
-</p:sld>
-</file>
-
 <file path=ppt/slides/slide5.xml><?xml version="1.0" encoding="utf-8"?>
 <p:sld xmlns:a="http://schemas.openxmlformats.org/drawingml/2006/main" xmlns:p="http://schemas.openxmlformats.org/presentationml/2006/main" xmlns:r="http://schemas.openxmlformats.org/officeDocument/2006/relationships">
   <p:cSld>
@@ -7661,7 +6882,7 @@
                 </a:solidFill>
                 <a:latin typeface="Times New Roman"/>
               </a:rPr>
-              <a:t>CHOIX TECHNOLOGIQUES</a:t>
+              <a:t>PÉRIMÈTRE FONCTIONNEL</a:t>
             </a:r>
           </a:p>
         </p:txBody>
@@ -7696,7 +6917,7 @@
                 </a:solidFill>
                 <a:latin typeface="Times New Roman"/>
               </a:rPr>
-              <a:t>Stack technique</a:t>
+              <a:t>Diagramme de cas d'utilisation</a:t>
             </a:r>
           </a:p>
         </p:txBody>
@@ -7776,6 +6997,1693 @@
                 <a:latin typeface="Times New Roman"/>
               </a:rPr>
               <a:t>4</a:t>
+            </a:r>
+          </a:p>
+        </p:txBody>
+      </p:sp>
+      <p:sp>
+        <p:nvSpPr>
+          <p:cNvPr id="6" name="Oval 5"/>
+          <p:cNvSpPr/>
+          <p:nvPr/>
+        </p:nvSpPr>
+        <p:spPr>
+          <a:xfrm>
+            <a:off x="731520" y="1463040"/>
+            <a:ext cx="329184" cy="329184"/>
+          </a:xfrm>
+          <a:prstGeom prst="ellipse">
+            <a:avLst/>
+          </a:prstGeom>
+          <a:noFill/>
+          <a:ln w="22225">
+            <a:solidFill>
+              <a:srgbClr val="000000"/>
+            </a:solidFill>
+          </a:ln>
+          <a:effectLst/>
+        </p:spPr>
+        <p:style>
+          <a:lnRef idx="1">
+            <a:schemeClr val="accent1"/>
+          </a:lnRef>
+          <a:fillRef idx="3">
+            <a:schemeClr val="accent1"/>
+          </a:fillRef>
+          <a:effectRef idx="2">
+            <a:schemeClr val="accent1"/>
+          </a:effectRef>
+          <a:fontRef idx="minor">
+            <a:schemeClr val="lt1"/>
+          </a:fontRef>
+        </p:style>
+        <p:txBody>
+          <a:bodyPr rtlCol="0" anchor="ctr"/>
+          <a:lstStyle/>
+          <a:p>
+            <a:pPr algn="ctr"/>
+          </a:p>
+        </p:txBody>
+      </p:sp>
+      <p:cxnSp>
+        <p:nvCxnSpPr>
+          <p:cNvPr id="7" name="Connector 6"/>
+          <p:cNvCxnSpPr/>
+          <p:nvPr/>
+        </p:nvCxnSpPr>
+        <p:spPr>
+          <a:xfrm>
+            <a:off x="896112" y="1792224"/>
+            <a:ext cx="0" cy="438912"/>
+          </a:xfrm>
+          <a:prstGeom prst="line">
+            <a:avLst/>
+          </a:prstGeom>
+          <a:ln w="22225">
+            <a:solidFill>
+              <a:srgbClr val="000000"/>
+            </a:solidFill>
+          </a:ln>
+        </p:spPr>
+        <p:style>
+          <a:lnRef idx="2">
+            <a:schemeClr val="accent1"/>
+          </a:lnRef>
+          <a:fillRef idx="0">
+            <a:schemeClr val="accent1"/>
+          </a:fillRef>
+          <a:effectRef idx="1">
+            <a:schemeClr val="accent1"/>
+          </a:effectRef>
+          <a:fontRef idx="minor">
+            <a:schemeClr val="tx1"/>
+          </a:fontRef>
+        </p:style>
+      </p:cxnSp>
+      <p:cxnSp>
+        <p:nvCxnSpPr>
+          <p:cNvPr id="8" name="Connector 7"/>
+          <p:cNvCxnSpPr/>
+          <p:nvPr/>
+        </p:nvCxnSpPr>
+        <p:spPr>
+          <a:xfrm>
+            <a:off x="676656" y="1915119"/>
+            <a:ext cx="438912" cy="0"/>
+          </a:xfrm>
+          <a:prstGeom prst="line">
+            <a:avLst/>
+          </a:prstGeom>
+          <a:ln w="22225">
+            <a:solidFill>
+              <a:srgbClr val="000000"/>
+            </a:solidFill>
+          </a:ln>
+        </p:spPr>
+        <p:style>
+          <a:lnRef idx="2">
+            <a:schemeClr val="accent1"/>
+          </a:lnRef>
+          <a:fillRef idx="0">
+            <a:schemeClr val="accent1"/>
+          </a:fillRef>
+          <a:effectRef idx="1">
+            <a:schemeClr val="accent1"/>
+          </a:effectRef>
+          <a:fontRef idx="minor">
+            <a:schemeClr val="tx1"/>
+          </a:fontRef>
+        </p:style>
+      </p:cxnSp>
+      <p:cxnSp>
+        <p:nvCxnSpPr>
+          <p:cNvPr id="9" name="Connector 8"/>
+          <p:cNvCxnSpPr/>
+          <p:nvPr/>
+        </p:nvCxnSpPr>
+        <p:spPr>
+          <a:xfrm flipH="1">
+            <a:off x="676656" y="2231136"/>
+            <a:ext cx="219456" cy="285292"/>
+          </a:xfrm>
+          <a:prstGeom prst="line">
+            <a:avLst/>
+          </a:prstGeom>
+          <a:ln w="22225">
+            <a:solidFill>
+              <a:srgbClr val="000000"/>
+            </a:solidFill>
+          </a:ln>
+        </p:spPr>
+        <p:style>
+          <a:lnRef idx="2">
+            <a:schemeClr val="accent1"/>
+          </a:lnRef>
+          <a:fillRef idx="0">
+            <a:schemeClr val="accent1"/>
+          </a:fillRef>
+          <a:effectRef idx="1">
+            <a:schemeClr val="accent1"/>
+          </a:effectRef>
+          <a:fontRef idx="minor">
+            <a:schemeClr val="tx1"/>
+          </a:fontRef>
+        </p:style>
+      </p:cxnSp>
+      <p:cxnSp>
+        <p:nvCxnSpPr>
+          <p:cNvPr id="10" name="Connector 9"/>
+          <p:cNvCxnSpPr/>
+          <p:nvPr/>
+        </p:nvCxnSpPr>
+        <p:spPr>
+          <a:xfrm>
+            <a:off x="896112" y="2231136"/>
+            <a:ext cx="219456" cy="285292"/>
+          </a:xfrm>
+          <a:prstGeom prst="line">
+            <a:avLst/>
+          </a:prstGeom>
+          <a:ln w="22225">
+            <a:solidFill>
+              <a:srgbClr val="000000"/>
+            </a:solidFill>
+          </a:ln>
+        </p:spPr>
+        <p:style>
+          <a:lnRef idx="2">
+            <a:schemeClr val="accent1"/>
+          </a:lnRef>
+          <a:fillRef idx="0">
+            <a:schemeClr val="accent1"/>
+          </a:fillRef>
+          <a:effectRef idx="1">
+            <a:schemeClr val="accent1"/>
+          </a:effectRef>
+          <a:fontRef idx="minor">
+            <a:schemeClr val="tx1"/>
+          </a:fontRef>
+        </p:style>
+      </p:cxnSp>
+      <p:sp>
+        <p:nvSpPr>
+          <p:cNvPr id="11" name="TextBox 10"/>
+          <p:cNvSpPr txBox="1"/>
+          <p:nvPr/>
+        </p:nvSpPr>
+        <p:spPr>
+          <a:xfrm>
+            <a:off x="228600" y="2571292"/>
+            <a:ext cx="1335024" cy="274320"/>
+          </a:xfrm>
+          <a:prstGeom prst="rect">
+            <a:avLst/>
+          </a:prstGeom>
+          <a:noFill/>
+        </p:spPr>
+        <p:txBody>
+          <a:bodyPr wrap="square" anchor="t">
+            <a:spAutoFit/>
+          </a:bodyPr>
+          <a:lstStyle/>
+          <a:p>
+            <a:pPr algn="ctr"/>
+            <a:r>
+              <a:rPr sz="1250" b="1" i="0">
+                <a:solidFill>
+                  <a:srgbClr val="000000"/>
+                </a:solidFill>
+                <a:latin typeface="Times New Roman"/>
+              </a:rPr>
+              <a:t>Administrateur</a:t>
+            </a:r>
+          </a:p>
+        </p:txBody>
+      </p:sp>
+      <p:sp>
+        <p:nvSpPr>
+          <p:cNvPr id="12" name="Oval 11"/>
+          <p:cNvSpPr/>
+          <p:nvPr/>
+        </p:nvSpPr>
+        <p:spPr>
+          <a:xfrm>
+            <a:off x="731520" y="2788920"/>
+            <a:ext cx="329184" cy="329184"/>
+          </a:xfrm>
+          <a:prstGeom prst="ellipse">
+            <a:avLst/>
+          </a:prstGeom>
+          <a:noFill/>
+          <a:ln w="22225">
+            <a:solidFill>
+              <a:srgbClr val="000000"/>
+            </a:solidFill>
+          </a:ln>
+          <a:effectLst/>
+        </p:spPr>
+        <p:style>
+          <a:lnRef idx="1">
+            <a:schemeClr val="accent1"/>
+          </a:lnRef>
+          <a:fillRef idx="3">
+            <a:schemeClr val="accent1"/>
+          </a:fillRef>
+          <a:effectRef idx="2">
+            <a:schemeClr val="accent1"/>
+          </a:effectRef>
+          <a:fontRef idx="minor">
+            <a:schemeClr val="lt1"/>
+          </a:fontRef>
+        </p:style>
+        <p:txBody>
+          <a:bodyPr rtlCol="0" anchor="ctr"/>
+          <a:lstStyle/>
+          <a:p>
+            <a:pPr algn="ctr"/>
+          </a:p>
+        </p:txBody>
+      </p:sp>
+      <p:cxnSp>
+        <p:nvCxnSpPr>
+          <p:cNvPr id="13" name="Connector 12"/>
+          <p:cNvCxnSpPr/>
+          <p:nvPr/>
+        </p:nvCxnSpPr>
+        <p:spPr>
+          <a:xfrm>
+            <a:off x="896112" y="3118104"/>
+            <a:ext cx="0" cy="438912"/>
+          </a:xfrm>
+          <a:prstGeom prst="line">
+            <a:avLst/>
+          </a:prstGeom>
+          <a:ln w="22225">
+            <a:solidFill>
+              <a:srgbClr val="000000"/>
+            </a:solidFill>
+          </a:ln>
+        </p:spPr>
+        <p:style>
+          <a:lnRef idx="2">
+            <a:schemeClr val="accent1"/>
+          </a:lnRef>
+          <a:fillRef idx="0">
+            <a:schemeClr val="accent1"/>
+          </a:fillRef>
+          <a:effectRef idx="1">
+            <a:schemeClr val="accent1"/>
+          </a:effectRef>
+          <a:fontRef idx="minor">
+            <a:schemeClr val="tx1"/>
+          </a:fontRef>
+        </p:style>
+      </p:cxnSp>
+      <p:cxnSp>
+        <p:nvCxnSpPr>
+          <p:cNvPr id="14" name="Connector 13"/>
+          <p:cNvCxnSpPr/>
+          <p:nvPr/>
+        </p:nvCxnSpPr>
+        <p:spPr>
+          <a:xfrm>
+            <a:off x="676656" y="3240999"/>
+            <a:ext cx="438912" cy="0"/>
+          </a:xfrm>
+          <a:prstGeom prst="line">
+            <a:avLst/>
+          </a:prstGeom>
+          <a:ln w="22225">
+            <a:solidFill>
+              <a:srgbClr val="000000"/>
+            </a:solidFill>
+          </a:ln>
+        </p:spPr>
+        <p:style>
+          <a:lnRef idx="2">
+            <a:schemeClr val="accent1"/>
+          </a:lnRef>
+          <a:fillRef idx="0">
+            <a:schemeClr val="accent1"/>
+          </a:fillRef>
+          <a:effectRef idx="1">
+            <a:schemeClr val="accent1"/>
+          </a:effectRef>
+          <a:fontRef idx="minor">
+            <a:schemeClr val="tx1"/>
+          </a:fontRef>
+        </p:style>
+      </p:cxnSp>
+      <p:cxnSp>
+        <p:nvCxnSpPr>
+          <p:cNvPr id="15" name="Connector 14"/>
+          <p:cNvCxnSpPr/>
+          <p:nvPr/>
+        </p:nvCxnSpPr>
+        <p:spPr>
+          <a:xfrm flipH="1">
+            <a:off x="676656" y="3557016"/>
+            <a:ext cx="219456" cy="285292"/>
+          </a:xfrm>
+          <a:prstGeom prst="line">
+            <a:avLst/>
+          </a:prstGeom>
+          <a:ln w="22225">
+            <a:solidFill>
+              <a:srgbClr val="000000"/>
+            </a:solidFill>
+          </a:ln>
+        </p:spPr>
+        <p:style>
+          <a:lnRef idx="2">
+            <a:schemeClr val="accent1"/>
+          </a:lnRef>
+          <a:fillRef idx="0">
+            <a:schemeClr val="accent1"/>
+          </a:fillRef>
+          <a:effectRef idx="1">
+            <a:schemeClr val="accent1"/>
+          </a:effectRef>
+          <a:fontRef idx="minor">
+            <a:schemeClr val="tx1"/>
+          </a:fontRef>
+        </p:style>
+      </p:cxnSp>
+      <p:cxnSp>
+        <p:nvCxnSpPr>
+          <p:cNvPr id="16" name="Connector 15"/>
+          <p:cNvCxnSpPr/>
+          <p:nvPr/>
+        </p:nvCxnSpPr>
+        <p:spPr>
+          <a:xfrm>
+            <a:off x="896112" y="3557016"/>
+            <a:ext cx="219456" cy="285292"/>
+          </a:xfrm>
+          <a:prstGeom prst="line">
+            <a:avLst/>
+          </a:prstGeom>
+          <a:ln w="22225">
+            <a:solidFill>
+              <a:srgbClr val="000000"/>
+            </a:solidFill>
+          </a:ln>
+        </p:spPr>
+        <p:style>
+          <a:lnRef idx="2">
+            <a:schemeClr val="accent1"/>
+          </a:lnRef>
+          <a:fillRef idx="0">
+            <a:schemeClr val="accent1"/>
+          </a:fillRef>
+          <a:effectRef idx="1">
+            <a:schemeClr val="accent1"/>
+          </a:effectRef>
+          <a:fontRef idx="minor">
+            <a:schemeClr val="tx1"/>
+          </a:fontRef>
+        </p:style>
+      </p:cxnSp>
+      <p:sp>
+        <p:nvSpPr>
+          <p:cNvPr id="17" name="TextBox 16"/>
+          <p:cNvSpPr txBox="1"/>
+          <p:nvPr/>
+        </p:nvSpPr>
+        <p:spPr>
+          <a:xfrm>
+            <a:off x="228600" y="3897172"/>
+            <a:ext cx="1335024" cy="274320"/>
+          </a:xfrm>
+          <a:prstGeom prst="rect">
+            <a:avLst/>
+          </a:prstGeom>
+          <a:noFill/>
+        </p:spPr>
+        <p:txBody>
+          <a:bodyPr wrap="square" anchor="t">
+            <a:spAutoFit/>
+          </a:bodyPr>
+          <a:lstStyle/>
+          <a:p>
+            <a:pPr algn="ctr"/>
+            <a:r>
+              <a:rPr sz="1250" b="1" i="0">
+                <a:solidFill>
+                  <a:srgbClr val="000000"/>
+                </a:solidFill>
+                <a:latin typeface="Times New Roman"/>
+              </a:rPr>
+              <a:t>Formateur</a:t>
+            </a:r>
+          </a:p>
+        </p:txBody>
+      </p:sp>
+      <p:sp>
+        <p:nvSpPr>
+          <p:cNvPr id="18" name="Oval 17"/>
+          <p:cNvSpPr/>
+          <p:nvPr/>
+        </p:nvSpPr>
+        <p:spPr>
+          <a:xfrm>
+            <a:off x="731520" y="4114800"/>
+            <a:ext cx="329184" cy="329184"/>
+          </a:xfrm>
+          <a:prstGeom prst="ellipse">
+            <a:avLst/>
+          </a:prstGeom>
+          <a:noFill/>
+          <a:ln w="22225">
+            <a:solidFill>
+              <a:srgbClr val="000000"/>
+            </a:solidFill>
+          </a:ln>
+          <a:effectLst/>
+        </p:spPr>
+        <p:style>
+          <a:lnRef idx="1">
+            <a:schemeClr val="accent1"/>
+          </a:lnRef>
+          <a:fillRef idx="3">
+            <a:schemeClr val="accent1"/>
+          </a:fillRef>
+          <a:effectRef idx="2">
+            <a:schemeClr val="accent1"/>
+          </a:effectRef>
+          <a:fontRef idx="minor">
+            <a:schemeClr val="lt1"/>
+          </a:fontRef>
+        </p:style>
+        <p:txBody>
+          <a:bodyPr rtlCol="0" anchor="ctr"/>
+          <a:lstStyle/>
+          <a:p>
+            <a:pPr algn="ctr"/>
+          </a:p>
+        </p:txBody>
+      </p:sp>
+      <p:cxnSp>
+        <p:nvCxnSpPr>
+          <p:cNvPr id="19" name="Connector 18"/>
+          <p:cNvCxnSpPr/>
+          <p:nvPr/>
+        </p:nvCxnSpPr>
+        <p:spPr>
+          <a:xfrm>
+            <a:off x="896112" y="4443984"/>
+            <a:ext cx="0" cy="438912"/>
+          </a:xfrm>
+          <a:prstGeom prst="line">
+            <a:avLst/>
+          </a:prstGeom>
+          <a:ln w="22225">
+            <a:solidFill>
+              <a:srgbClr val="000000"/>
+            </a:solidFill>
+          </a:ln>
+        </p:spPr>
+        <p:style>
+          <a:lnRef idx="2">
+            <a:schemeClr val="accent1"/>
+          </a:lnRef>
+          <a:fillRef idx="0">
+            <a:schemeClr val="accent1"/>
+          </a:fillRef>
+          <a:effectRef idx="1">
+            <a:schemeClr val="accent1"/>
+          </a:effectRef>
+          <a:fontRef idx="minor">
+            <a:schemeClr val="tx1"/>
+          </a:fontRef>
+        </p:style>
+      </p:cxnSp>
+      <p:cxnSp>
+        <p:nvCxnSpPr>
+          <p:cNvPr id="20" name="Connector 19"/>
+          <p:cNvCxnSpPr/>
+          <p:nvPr/>
+        </p:nvCxnSpPr>
+        <p:spPr>
+          <a:xfrm>
+            <a:off x="676656" y="4566879"/>
+            <a:ext cx="438912" cy="0"/>
+          </a:xfrm>
+          <a:prstGeom prst="line">
+            <a:avLst/>
+          </a:prstGeom>
+          <a:ln w="22225">
+            <a:solidFill>
+              <a:srgbClr val="000000"/>
+            </a:solidFill>
+          </a:ln>
+        </p:spPr>
+        <p:style>
+          <a:lnRef idx="2">
+            <a:schemeClr val="accent1"/>
+          </a:lnRef>
+          <a:fillRef idx="0">
+            <a:schemeClr val="accent1"/>
+          </a:fillRef>
+          <a:effectRef idx="1">
+            <a:schemeClr val="accent1"/>
+          </a:effectRef>
+          <a:fontRef idx="minor">
+            <a:schemeClr val="tx1"/>
+          </a:fontRef>
+        </p:style>
+      </p:cxnSp>
+      <p:cxnSp>
+        <p:nvCxnSpPr>
+          <p:cNvPr id="21" name="Connector 20"/>
+          <p:cNvCxnSpPr/>
+          <p:nvPr/>
+        </p:nvCxnSpPr>
+        <p:spPr>
+          <a:xfrm flipH="1">
+            <a:off x="676656" y="4882896"/>
+            <a:ext cx="219456" cy="285292"/>
+          </a:xfrm>
+          <a:prstGeom prst="line">
+            <a:avLst/>
+          </a:prstGeom>
+          <a:ln w="22225">
+            <a:solidFill>
+              <a:srgbClr val="000000"/>
+            </a:solidFill>
+          </a:ln>
+        </p:spPr>
+        <p:style>
+          <a:lnRef idx="2">
+            <a:schemeClr val="accent1"/>
+          </a:lnRef>
+          <a:fillRef idx="0">
+            <a:schemeClr val="accent1"/>
+          </a:fillRef>
+          <a:effectRef idx="1">
+            <a:schemeClr val="accent1"/>
+          </a:effectRef>
+          <a:fontRef idx="minor">
+            <a:schemeClr val="tx1"/>
+          </a:fontRef>
+        </p:style>
+      </p:cxnSp>
+      <p:cxnSp>
+        <p:nvCxnSpPr>
+          <p:cNvPr id="22" name="Connector 21"/>
+          <p:cNvCxnSpPr/>
+          <p:nvPr/>
+        </p:nvCxnSpPr>
+        <p:spPr>
+          <a:xfrm>
+            <a:off x="896112" y="4882896"/>
+            <a:ext cx="219456" cy="285292"/>
+          </a:xfrm>
+          <a:prstGeom prst="line">
+            <a:avLst/>
+          </a:prstGeom>
+          <a:ln w="22225">
+            <a:solidFill>
+              <a:srgbClr val="000000"/>
+            </a:solidFill>
+          </a:ln>
+        </p:spPr>
+        <p:style>
+          <a:lnRef idx="2">
+            <a:schemeClr val="accent1"/>
+          </a:lnRef>
+          <a:fillRef idx="0">
+            <a:schemeClr val="accent1"/>
+          </a:fillRef>
+          <a:effectRef idx="1">
+            <a:schemeClr val="accent1"/>
+          </a:effectRef>
+          <a:fontRef idx="minor">
+            <a:schemeClr val="tx1"/>
+          </a:fontRef>
+        </p:style>
+      </p:cxnSp>
+      <p:sp>
+        <p:nvSpPr>
+          <p:cNvPr id="23" name="TextBox 22"/>
+          <p:cNvSpPr txBox="1"/>
+          <p:nvPr/>
+        </p:nvSpPr>
+        <p:spPr>
+          <a:xfrm>
+            <a:off x="228600" y="5223052"/>
+            <a:ext cx="1335024" cy="274320"/>
+          </a:xfrm>
+          <a:prstGeom prst="rect">
+            <a:avLst/>
+          </a:prstGeom>
+          <a:noFill/>
+        </p:spPr>
+        <p:txBody>
+          <a:bodyPr wrap="square" anchor="t">
+            <a:spAutoFit/>
+          </a:bodyPr>
+          <a:lstStyle/>
+          <a:p>
+            <a:pPr algn="ctr"/>
+            <a:r>
+              <a:rPr sz="1250" b="1" i="0">
+                <a:solidFill>
+                  <a:srgbClr val="000000"/>
+                </a:solidFill>
+                <a:latin typeface="Times New Roman"/>
+              </a:rPr>
+              <a:t>Étudiant</a:t>
+            </a:r>
+          </a:p>
+        </p:txBody>
+      </p:sp>
+      <p:sp>
+        <p:nvSpPr>
+          <p:cNvPr id="24" name="Oval 23"/>
+          <p:cNvSpPr/>
+          <p:nvPr/>
+        </p:nvSpPr>
+        <p:spPr>
+          <a:xfrm>
+            <a:off x="3200400" y="1417320"/>
+            <a:ext cx="3566160" cy="777240"/>
+          </a:xfrm>
+          <a:prstGeom prst="ellipse">
+            <a:avLst/>
+          </a:prstGeom>
+          <a:solidFill>
+            <a:srgbClr val="FFFFFF"/>
+          </a:solidFill>
+          <a:ln w="15875">
+            <a:solidFill>
+              <a:srgbClr val="1F3C63"/>
+            </a:solidFill>
+          </a:ln>
+          <a:effectLst/>
+        </p:spPr>
+        <p:style>
+          <a:lnRef idx="1">
+            <a:schemeClr val="accent1"/>
+          </a:lnRef>
+          <a:fillRef idx="3">
+            <a:schemeClr val="accent1"/>
+          </a:fillRef>
+          <a:effectRef idx="2">
+            <a:schemeClr val="accent1"/>
+          </a:effectRef>
+          <a:fontRef idx="minor">
+            <a:schemeClr val="lt1"/>
+          </a:fontRef>
+        </p:style>
+        <p:txBody>
+          <a:bodyPr rtlCol="0" anchor="ctr" wrap="square"/>
+          <a:lstStyle/>
+          <a:p>
+            <a:pPr algn="ctr"/>
+            <a:r>
+              <a:rPr sz="1300" b="1">
+                <a:solidFill>
+                  <a:srgbClr val="000000"/>
+                </a:solidFill>
+                <a:latin typeface="Times New Roman"/>
+              </a:rPr>
+              <a:t>Authentification</a:t>
+            </a:r>
+          </a:p>
+        </p:txBody>
+      </p:sp>
+      <p:sp>
+        <p:nvSpPr>
+          <p:cNvPr id="25" name="Oval 24"/>
+          <p:cNvSpPr/>
+          <p:nvPr/>
+        </p:nvSpPr>
+        <p:spPr>
+          <a:xfrm>
+            <a:off x="7315200" y="1417320"/>
+            <a:ext cx="3566160" cy="777240"/>
+          </a:xfrm>
+          <a:prstGeom prst="ellipse">
+            <a:avLst/>
+          </a:prstGeom>
+          <a:solidFill>
+            <a:srgbClr val="FFFFFF"/>
+          </a:solidFill>
+          <a:ln w="15875">
+            <a:solidFill>
+              <a:srgbClr val="1F3C63"/>
+            </a:solidFill>
+          </a:ln>
+          <a:effectLst/>
+        </p:spPr>
+        <p:style>
+          <a:lnRef idx="1">
+            <a:schemeClr val="accent1"/>
+          </a:lnRef>
+          <a:fillRef idx="3">
+            <a:schemeClr val="accent1"/>
+          </a:fillRef>
+          <a:effectRef idx="2">
+            <a:schemeClr val="accent1"/>
+          </a:effectRef>
+          <a:fontRef idx="minor">
+            <a:schemeClr val="lt1"/>
+          </a:fontRef>
+        </p:style>
+        <p:txBody>
+          <a:bodyPr rtlCol="0" anchor="ctr" wrap="square"/>
+          <a:lstStyle/>
+          <a:p>
+            <a:pPr algn="ctr"/>
+            <a:r>
+              <a:rPr sz="1300" b="1">
+                <a:solidFill>
+                  <a:srgbClr val="000000"/>
+                </a:solidFill>
+                <a:latin typeface="Times New Roman"/>
+              </a:rPr>
+              <a:t>Gestion étudiants</a:t>
+            </a:r>
+          </a:p>
+        </p:txBody>
+      </p:sp>
+      <p:sp>
+        <p:nvSpPr>
+          <p:cNvPr id="26" name="Oval 25"/>
+          <p:cNvSpPr/>
+          <p:nvPr/>
+        </p:nvSpPr>
+        <p:spPr>
+          <a:xfrm>
+            <a:off x="3200400" y="2468880"/>
+            <a:ext cx="3566160" cy="777240"/>
+          </a:xfrm>
+          <a:prstGeom prst="ellipse">
+            <a:avLst/>
+          </a:prstGeom>
+          <a:solidFill>
+            <a:srgbClr val="FFFFFF"/>
+          </a:solidFill>
+          <a:ln w="15875">
+            <a:solidFill>
+              <a:srgbClr val="1F3C63"/>
+            </a:solidFill>
+          </a:ln>
+          <a:effectLst/>
+        </p:spPr>
+        <p:style>
+          <a:lnRef idx="1">
+            <a:schemeClr val="accent1"/>
+          </a:lnRef>
+          <a:fillRef idx="3">
+            <a:schemeClr val="accent1"/>
+          </a:fillRef>
+          <a:effectRef idx="2">
+            <a:schemeClr val="accent1"/>
+          </a:effectRef>
+          <a:fontRef idx="minor">
+            <a:schemeClr val="lt1"/>
+          </a:fontRef>
+        </p:style>
+        <p:txBody>
+          <a:bodyPr rtlCol="0" anchor="ctr" wrap="square"/>
+          <a:lstStyle/>
+          <a:p>
+            <a:pPr algn="ctr"/>
+            <a:r>
+              <a:rPr sz="1300" b="1">
+                <a:solidFill>
+                  <a:srgbClr val="000000"/>
+                </a:solidFill>
+                <a:latin typeface="Times New Roman"/>
+              </a:rPr>
+              <a:t>Gestion formateurs</a:t>
+            </a:r>
+          </a:p>
+        </p:txBody>
+      </p:sp>
+      <p:sp>
+        <p:nvSpPr>
+          <p:cNvPr id="27" name="Oval 26"/>
+          <p:cNvSpPr/>
+          <p:nvPr/>
+        </p:nvSpPr>
+        <p:spPr>
+          <a:xfrm>
+            <a:off x="7315200" y="2468880"/>
+            <a:ext cx="3566160" cy="777240"/>
+          </a:xfrm>
+          <a:prstGeom prst="ellipse">
+            <a:avLst/>
+          </a:prstGeom>
+          <a:solidFill>
+            <a:srgbClr val="FFFFFF"/>
+          </a:solidFill>
+          <a:ln w="15875">
+            <a:solidFill>
+              <a:srgbClr val="1F3C63"/>
+            </a:solidFill>
+          </a:ln>
+          <a:effectLst/>
+        </p:spPr>
+        <p:style>
+          <a:lnRef idx="1">
+            <a:schemeClr val="accent1"/>
+          </a:lnRef>
+          <a:fillRef idx="3">
+            <a:schemeClr val="accent1"/>
+          </a:fillRef>
+          <a:effectRef idx="2">
+            <a:schemeClr val="accent1"/>
+          </a:effectRef>
+          <a:fontRef idx="minor">
+            <a:schemeClr val="lt1"/>
+          </a:fontRef>
+        </p:style>
+        <p:txBody>
+          <a:bodyPr rtlCol="0" anchor="ctr" wrap="square"/>
+          <a:lstStyle/>
+          <a:p>
+            <a:pPr algn="ctr"/>
+            <a:r>
+              <a:rPr sz="1300" b="1">
+                <a:solidFill>
+                  <a:srgbClr val="000000"/>
+                </a:solidFill>
+                <a:latin typeface="Times New Roman"/>
+              </a:rPr>
+              <a:t>Gestion formations</a:t>
+            </a:r>
+          </a:p>
+        </p:txBody>
+      </p:sp>
+      <p:sp>
+        <p:nvSpPr>
+          <p:cNvPr id="28" name="Oval 27"/>
+          <p:cNvSpPr/>
+          <p:nvPr/>
+        </p:nvSpPr>
+        <p:spPr>
+          <a:xfrm>
+            <a:off x="3200400" y="3520440"/>
+            <a:ext cx="3566160" cy="777240"/>
+          </a:xfrm>
+          <a:prstGeom prst="ellipse">
+            <a:avLst/>
+          </a:prstGeom>
+          <a:solidFill>
+            <a:srgbClr val="FFFFFF"/>
+          </a:solidFill>
+          <a:ln w="15875">
+            <a:solidFill>
+              <a:srgbClr val="1F3C63"/>
+            </a:solidFill>
+          </a:ln>
+          <a:effectLst/>
+        </p:spPr>
+        <p:style>
+          <a:lnRef idx="1">
+            <a:schemeClr val="accent1"/>
+          </a:lnRef>
+          <a:fillRef idx="3">
+            <a:schemeClr val="accent1"/>
+          </a:fillRef>
+          <a:effectRef idx="2">
+            <a:schemeClr val="accent1"/>
+          </a:effectRef>
+          <a:fontRef idx="minor">
+            <a:schemeClr val="lt1"/>
+          </a:fontRef>
+        </p:style>
+        <p:txBody>
+          <a:bodyPr rtlCol="0" anchor="ctr" wrap="square"/>
+          <a:lstStyle/>
+          <a:p>
+            <a:pPr algn="ctr"/>
+            <a:r>
+              <a:rPr sz="1300" b="1">
+                <a:solidFill>
+                  <a:srgbClr val="000000"/>
+                </a:solidFill>
+                <a:latin typeface="Times New Roman"/>
+              </a:rPr>
+              <a:t>Inscriptions &amp; notation</a:t>
+            </a:r>
+          </a:p>
+        </p:txBody>
+      </p:sp>
+      <p:sp>
+        <p:nvSpPr>
+          <p:cNvPr id="29" name="Oval 28"/>
+          <p:cNvSpPr/>
+          <p:nvPr/>
+        </p:nvSpPr>
+        <p:spPr>
+          <a:xfrm>
+            <a:off x="7315200" y="3520440"/>
+            <a:ext cx="3566160" cy="777240"/>
+          </a:xfrm>
+          <a:prstGeom prst="ellipse">
+            <a:avLst/>
+          </a:prstGeom>
+          <a:solidFill>
+            <a:srgbClr val="FFFFFF"/>
+          </a:solidFill>
+          <a:ln w="15875">
+            <a:solidFill>
+              <a:srgbClr val="1F3C63"/>
+            </a:solidFill>
+          </a:ln>
+          <a:effectLst/>
+        </p:spPr>
+        <p:style>
+          <a:lnRef idx="1">
+            <a:schemeClr val="accent1"/>
+          </a:lnRef>
+          <a:fillRef idx="3">
+            <a:schemeClr val="accent1"/>
+          </a:fillRef>
+          <a:effectRef idx="2">
+            <a:schemeClr val="accent1"/>
+          </a:effectRef>
+          <a:fontRef idx="minor">
+            <a:schemeClr val="lt1"/>
+          </a:fontRef>
+        </p:style>
+        <p:txBody>
+          <a:bodyPr rtlCol="0" anchor="ctr" wrap="square"/>
+          <a:lstStyle/>
+          <a:p>
+            <a:pPr algn="ctr"/>
+            <a:r>
+              <a:rPr sz="1300" b="1">
+                <a:solidFill>
+                  <a:srgbClr val="000000"/>
+                </a:solidFill>
+                <a:latin typeface="Times New Roman"/>
+              </a:rPr>
+              <a:t>Tableau de bord</a:t>
+            </a:r>
+          </a:p>
+        </p:txBody>
+      </p:sp>
+      <p:cxnSp>
+        <p:nvCxnSpPr>
+          <p:cNvPr id="30" name="Connector 29"/>
+          <p:cNvCxnSpPr/>
+          <p:nvPr/>
+        </p:nvCxnSpPr>
+        <p:spPr>
+          <a:xfrm flipV="1">
+            <a:off x="896112" y="1805940"/>
+            <a:ext cx="2304288" cy="205740"/>
+          </a:xfrm>
+          <a:prstGeom prst="line">
+            <a:avLst/>
+          </a:prstGeom>
+          <a:ln w="12700">
+            <a:solidFill>
+              <a:srgbClr val="B0B0B0"/>
+            </a:solidFill>
+          </a:ln>
+        </p:spPr>
+        <p:style>
+          <a:lnRef idx="2">
+            <a:schemeClr val="accent1"/>
+          </a:lnRef>
+          <a:fillRef idx="0">
+            <a:schemeClr val="accent1"/>
+          </a:fillRef>
+          <a:effectRef idx="1">
+            <a:schemeClr val="accent1"/>
+          </a:effectRef>
+          <a:fontRef idx="minor">
+            <a:schemeClr val="tx1"/>
+          </a:fontRef>
+        </p:style>
+      </p:cxnSp>
+      <p:cxnSp>
+        <p:nvCxnSpPr>
+          <p:cNvPr id="31" name="Connector 30"/>
+          <p:cNvCxnSpPr/>
+          <p:nvPr/>
+        </p:nvCxnSpPr>
+        <p:spPr>
+          <a:xfrm flipV="1">
+            <a:off x="896112" y="1805940"/>
+            <a:ext cx="6419088" cy="205740"/>
+          </a:xfrm>
+          <a:prstGeom prst="line">
+            <a:avLst/>
+          </a:prstGeom>
+          <a:ln w="12700">
+            <a:solidFill>
+              <a:srgbClr val="B0B0B0"/>
+            </a:solidFill>
+          </a:ln>
+        </p:spPr>
+        <p:style>
+          <a:lnRef idx="2">
+            <a:schemeClr val="accent1"/>
+          </a:lnRef>
+          <a:fillRef idx="0">
+            <a:schemeClr val="accent1"/>
+          </a:fillRef>
+          <a:effectRef idx="1">
+            <a:schemeClr val="accent1"/>
+          </a:effectRef>
+          <a:fontRef idx="minor">
+            <a:schemeClr val="tx1"/>
+          </a:fontRef>
+        </p:style>
+      </p:cxnSp>
+      <p:cxnSp>
+        <p:nvCxnSpPr>
+          <p:cNvPr id="32" name="Connector 31"/>
+          <p:cNvCxnSpPr/>
+          <p:nvPr/>
+        </p:nvCxnSpPr>
+        <p:spPr>
+          <a:xfrm>
+            <a:off x="896112" y="2011680"/>
+            <a:ext cx="2304288" cy="845820"/>
+          </a:xfrm>
+          <a:prstGeom prst="line">
+            <a:avLst/>
+          </a:prstGeom>
+          <a:ln w="12700">
+            <a:solidFill>
+              <a:srgbClr val="B0B0B0"/>
+            </a:solidFill>
+          </a:ln>
+        </p:spPr>
+        <p:style>
+          <a:lnRef idx="2">
+            <a:schemeClr val="accent1"/>
+          </a:lnRef>
+          <a:fillRef idx="0">
+            <a:schemeClr val="accent1"/>
+          </a:fillRef>
+          <a:effectRef idx="1">
+            <a:schemeClr val="accent1"/>
+          </a:effectRef>
+          <a:fontRef idx="minor">
+            <a:schemeClr val="tx1"/>
+          </a:fontRef>
+        </p:style>
+      </p:cxnSp>
+      <p:cxnSp>
+        <p:nvCxnSpPr>
+          <p:cNvPr id="33" name="Connector 32"/>
+          <p:cNvCxnSpPr/>
+          <p:nvPr/>
+        </p:nvCxnSpPr>
+        <p:spPr>
+          <a:xfrm>
+            <a:off x="896112" y="2011680"/>
+            <a:ext cx="6419088" cy="845820"/>
+          </a:xfrm>
+          <a:prstGeom prst="line">
+            <a:avLst/>
+          </a:prstGeom>
+          <a:ln w="12700">
+            <a:solidFill>
+              <a:srgbClr val="B0B0B0"/>
+            </a:solidFill>
+          </a:ln>
+        </p:spPr>
+        <p:style>
+          <a:lnRef idx="2">
+            <a:schemeClr val="accent1"/>
+          </a:lnRef>
+          <a:fillRef idx="0">
+            <a:schemeClr val="accent1"/>
+          </a:fillRef>
+          <a:effectRef idx="1">
+            <a:schemeClr val="accent1"/>
+          </a:effectRef>
+          <a:fontRef idx="minor">
+            <a:schemeClr val="tx1"/>
+          </a:fontRef>
+        </p:style>
+      </p:cxnSp>
+      <p:cxnSp>
+        <p:nvCxnSpPr>
+          <p:cNvPr id="34" name="Connector 33"/>
+          <p:cNvCxnSpPr/>
+          <p:nvPr/>
+        </p:nvCxnSpPr>
+        <p:spPr>
+          <a:xfrm>
+            <a:off x="896112" y="2011680"/>
+            <a:ext cx="2304288" cy="1897380"/>
+          </a:xfrm>
+          <a:prstGeom prst="line">
+            <a:avLst/>
+          </a:prstGeom>
+          <a:ln w="12700">
+            <a:solidFill>
+              <a:srgbClr val="B0B0B0"/>
+            </a:solidFill>
+          </a:ln>
+        </p:spPr>
+        <p:style>
+          <a:lnRef idx="2">
+            <a:schemeClr val="accent1"/>
+          </a:lnRef>
+          <a:fillRef idx="0">
+            <a:schemeClr val="accent1"/>
+          </a:fillRef>
+          <a:effectRef idx="1">
+            <a:schemeClr val="accent1"/>
+          </a:effectRef>
+          <a:fontRef idx="minor">
+            <a:schemeClr val="tx1"/>
+          </a:fontRef>
+        </p:style>
+      </p:cxnSp>
+      <p:cxnSp>
+        <p:nvCxnSpPr>
+          <p:cNvPr id="35" name="Connector 34"/>
+          <p:cNvCxnSpPr/>
+          <p:nvPr/>
+        </p:nvCxnSpPr>
+        <p:spPr>
+          <a:xfrm>
+            <a:off x="896112" y="2011680"/>
+            <a:ext cx="6419088" cy="1897380"/>
+          </a:xfrm>
+          <a:prstGeom prst="line">
+            <a:avLst/>
+          </a:prstGeom>
+          <a:ln w="12700">
+            <a:solidFill>
+              <a:srgbClr val="B0B0B0"/>
+            </a:solidFill>
+          </a:ln>
+        </p:spPr>
+        <p:style>
+          <a:lnRef idx="2">
+            <a:schemeClr val="accent1"/>
+          </a:lnRef>
+          <a:fillRef idx="0">
+            <a:schemeClr val="accent1"/>
+          </a:fillRef>
+          <a:effectRef idx="1">
+            <a:schemeClr val="accent1"/>
+          </a:effectRef>
+          <a:fontRef idx="minor">
+            <a:schemeClr val="tx1"/>
+          </a:fontRef>
+        </p:style>
+      </p:cxnSp>
+      <p:cxnSp>
+        <p:nvCxnSpPr>
+          <p:cNvPr id="36" name="Connector 35"/>
+          <p:cNvCxnSpPr/>
+          <p:nvPr/>
+        </p:nvCxnSpPr>
+        <p:spPr>
+          <a:xfrm flipV="1">
+            <a:off x="896112" y="1805940"/>
+            <a:ext cx="2304288" cy="1531620"/>
+          </a:xfrm>
+          <a:prstGeom prst="line">
+            <a:avLst/>
+          </a:prstGeom>
+          <a:ln w="12700">
+            <a:solidFill>
+              <a:srgbClr val="B0B0B0"/>
+            </a:solidFill>
+          </a:ln>
+        </p:spPr>
+        <p:style>
+          <a:lnRef idx="2">
+            <a:schemeClr val="accent1"/>
+          </a:lnRef>
+          <a:fillRef idx="0">
+            <a:schemeClr val="accent1"/>
+          </a:fillRef>
+          <a:effectRef idx="1">
+            <a:schemeClr val="accent1"/>
+          </a:effectRef>
+          <a:fontRef idx="minor">
+            <a:schemeClr val="tx1"/>
+          </a:fontRef>
+        </p:style>
+      </p:cxnSp>
+      <p:cxnSp>
+        <p:nvCxnSpPr>
+          <p:cNvPr id="37" name="Connector 36"/>
+          <p:cNvCxnSpPr/>
+          <p:nvPr/>
+        </p:nvCxnSpPr>
+        <p:spPr>
+          <a:xfrm flipV="1">
+            <a:off x="896112" y="2857500"/>
+            <a:ext cx="6419088" cy="480060"/>
+          </a:xfrm>
+          <a:prstGeom prst="line">
+            <a:avLst/>
+          </a:prstGeom>
+          <a:ln w="12700">
+            <a:solidFill>
+              <a:srgbClr val="B0B0B0"/>
+            </a:solidFill>
+          </a:ln>
+        </p:spPr>
+        <p:style>
+          <a:lnRef idx="2">
+            <a:schemeClr val="accent1"/>
+          </a:lnRef>
+          <a:fillRef idx="0">
+            <a:schemeClr val="accent1"/>
+          </a:fillRef>
+          <a:effectRef idx="1">
+            <a:schemeClr val="accent1"/>
+          </a:effectRef>
+          <a:fontRef idx="minor">
+            <a:schemeClr val="tx1"/>
+          </a:fontRef>
+        </p:style>
+      </p:cxnSp>
+      <p:cxnSp>
+        <p:nvCxnSpPr>
+          <p:cNvPr id="38" name="Connector 37"/>
+          <p:cNvCxnSpPr/>
+          <p:nvPr/>
+        </p:nvCxnSpPr>
+        <p:spPr>
+          <a:xfrm>
+            <a:off x="896112" y="3337560"/>
+            <a:ext cx="2304288" cy="571500"/>
+          </a:xfrm>
+          <a:prstGeom prst="line">
+            <a:avLst/>
+          </a:prstGeom>
+          <a:ln w="12700">
+            <a:solidFill>
+              <a:srgbClr val="B0B0B0"/>
+            </a:solidFill>
+          </a:ln>
+        </p:spPr>
+        <p:style>
+          <a:lnRef idx="2">
+            <a:schemeClr val="accent1"/>
+          </a:lnRef>
+          <a:fillRef idx="0">
+            <a:schemeClr val="accent1"/>
+          </a:fillRef>
+          <a:effectRef idx="1">
+            <a:schemeClr val="accent1"/>
+          </a:effectRef>
+          <a:fontRef idx="minor">
+            <a:schemeClr val="tx1"/>
+          </a:fontRef>
+        </p:style>
+      </p:cxnSp>
+      <p:cxnSp>
+        <p:nvCxnSpPr>
+          <p:cNvPr id="39" name="Connector 38"/>
+          <p:cNvCxnSpPr/>
+          <p:nvPr/>
+        </p:nvCxnSpPr>
+        <p:spPr>
+          <a:xfrm>
+            <a:off x="896112" y="3337560"/>
+            <a:ext cx="6419088" cy="571500"/>
+          </a:xfrm>
+          <a:prstGeom prst="line">
+            <a:avLst/>
+          </a:prstGeom>
+          <a:ln w="12700">
+            <a:solidFill>
+              <a:srgbClr val="B0B0B0"/>
+            </a:solidFill>
+          </a:ln>
+        </p:spPr>
+        <p:style>
+          <a:lnRef idx="2">
+            <a:schemeClr val="accent1"/>
+          </a:lnRef>
+          <a:fillRef idx="0">
+            <a:schemeClr val="accent1"/>
+          </a:fillRef>
+          <a:effectRef idx="1">
+            <a:schemeClr val="accent1"/>
+          </a:effectRef>
+          <a:fontRef idx="minor">
+            <a:schemeClr val="tx1"/>
+          </a:fontRef>
+        </p:style>
+      </p:cxnSp>
+      <p:cxnSp>
+        <p:nvCxnSpPr>
+          <p:cNvPr id="40" name="Connector 39"/>
+          <p:cNvCxnSpPr/>
+          <p:nvPr/>
+        </p:nvCxnSpPr>
+        <p:spPr>
+          <a:xfrm flipV="1">
+            <a:off x="896112" y="1805940"/>
+            <a:ext cx="2304288" cy="2857500"/>
+          </a:xfrm>
+          <a:prstGeom prst="line">
+            <a:avLst/>
+          </a:prstGeom>
+          <a:ln w="12700">
+            <a:solidFill>
+              <a:srgbClr val="B0B0B0"/>
+            </a:solidFill>
+          </a:ln>
+        </p:spPr>
+        <p:style>
+          <a:lnRef idx="2">
+            <a:schemeClr val="accent1"/>
+          </a:lnRef>
+          <a:fillRef idx="0">
+            <a:schemeClr val="accent1"/>
+          </a:fillRef>
+          <a:effectRef idx="1">
+            <a:schemeClr val="accent1"/>
+          </a:effectRef>
+          <a:fontRef idx="minor">
+            <a:schemeClr val="tx1"/>
+          </a:fontRef>
+        </p:style>
+      </p:cxnSp>
+      <p:cxnSp>
+        <p:nvCxnSpPr>
+          <p:cNvPr id="41" name="Connector 40"/>
+          <p:cNvCxnSpPr/>
+          <p:nvPr/>
+        </p:nvCxnSpPr>
+        <p:spPr>
+          <a:xfrm flipV="1">
+            <a:off x="896112" y="2857500"/>
+            <a:ext cx="6419088" cy="1805940"/>
+          </a:xfrm>
+          <a:prstGeom prst="line">
+            <a:avLst/>
+          </a:prstGeom>
+          <a:ln w="12700">
+            <a:solidFill>
+              <a:srgbClr val="B0B0B0"/>
+            </a:solidFill>
+          </a:ln>
+        </p:spPr>
+        <p:style>
+          <a:lnRef idx="2">
+            <a:schemeClr val="accent1"/>
+          </a:lnRef>
+          <a:fillRef idx="0">
+            <a:schemeClr val="accent1"/>
+          </a:fillRef>
+          <a:effectRef idx="1">
+            <a:schemeClr val="accent1"/>
+          </a:effectRef>
+          <a:fontRef idx="minor">
+            <a:schemeClr val="tx1"/>
+          </a:fontRef>
+        </p:style>
+      </p:cxnSp>
+      <p:cxnSp>
+        <p:nvCxnSpPr>
+          <p:cNvPr id="42" name="Connector 41"/>
+          <p:cNvCxnSpPr/>
+          <p:nvPr/>
+        </p:nvCxnSpPr>
+        <p:spPr>
+          <a:xfrm flipV="1">
+            <a:off x="896112" y="3909060"/>
+            <a:ext cx="2304288" cy="754380"/>
+          </a:xfrm>
+          <a:prstGeom prst="line">
+            <a:avLst/>
+          </a:prstGeom>
+          <a:ln w="12700">
+            <a:solidFill>
+              <a:srgbClr val="B0B0B0"/>
+            </a:solidFill>
+          </a:ln>
+        </p:spPr>
+        <p:style>
+          <a:lnRef idx="2">
+            <a:schemeClr val="accent1"/>
+          </a:lnRef>
+          <a:fillRef idx="0">
+            <a:schemeClr val="accent1"/>
+          </a:fillRef>
+          <a:effectRef idx="1">
+            <a:schemeClr val="accent1"/>
+          </a:effectRef>
+          <a:fontRef idx="minor">
+            <a:schemeClr val="tx1"/>
+          </a:fontRef>
+        </p:style>
+      </p:cxnSp>
+      <p:cxnSp>
+        <p:nvCxnSpPr>
+          <p:cNvPr id="43" name="Connector 42"/>
+          <p:cNvCxnSpPr/>
+          <p:nvPr/>
+        </p:nvCxnSpPr>
+        <p:spPr>
+          <a:xfrm flipV="1">
+            <a:off x="896112" y="3909060"/>
+            <a:ext cx="6419088" cy="754380"/>
+          </a:xfrm>
+          <a:prstGeom prst="line">
+            <a:avLst/>
+          </a:prstGeom>
+          <a:ln w="12700">
+            <a:solidFill>
+              <a:srgbClr val="B0B0B0"/>
+            </a:solidFill>
+          </a:ln>
+        </p:spPr>
+        <p:style>
+          <a:lnRef idx="2">
+            <a:schemeClr val="accent1"/>
+          </a:lnRef>
+          <a:fillRef idx="0">
+            <a:schemeClr val="accent1"/>
+          </a:fillRef>
+          <a:effectRef idx="1">
+            <a:schemeClr val="accent1"/>
+          </a:effectRef>
+          <a:fontRef idx="minor">
+            <a:schemeClr val="tx1"/>
+          </a:fontRef>
+        </p:style>
+      </p:cxnSp>
+      <p:sp>
+        <p:nvSpPr>
+          <p:cNvPr id="44" name="TextBox 43"/>
+          <p:cNvSpPr txBox="1"/>
+          <p:nvPr/>
+        </p:nvSpPr>
+        <p:spPr>
+          <a:xfrm>
+            <a:off x="731520" y="5760720"/>
+            <a:ext cx="10332720" cy="365760"/>
+          </a:xfrm>
+          <a:prstGeom prst="rect">
+            <a:avLst/>
+          </a:prstGeom>
+          <a:noFill/>
+        </p:spPr>
+        <p:txBody>
+          <a:bodyPr wrap="square" anchor="t">
+            <a:spAutoFit/>
+          </a:bodyPr>
+          <a:lstStyle/>
+          <a:p>
+            <a:pPr algn="l"/>
+            <a:r>
+              <a:rPr sz="1250" b="0" i="1">
+                <a:solidFill>
+                  <a:srgbClr val="404040"/>
+                </a:solidFill>
+                <a:latin typeface="Times New Roman"/>
+              </a:rPr>
+              <a:t>22 cas d'utilisation détaillés : voir docs/cas_utilisation.md (diagramme Mermaid + tableau de synthèse)</a:t>
+            </a:r>
+          </a:p>
+        </p:txBody>
+      </p:sp>
+    </p:spTree>
+  </p:cSld>
+  <p:clrMapOvr>
+    <a:masterClrMapping/>
+  </p:clrMapOvr>
+</p:sld>
+</file>
+
+<file path=ppt/slides/slide6.xml><?xml version="1.0" encoding="utf-8"?>
+<p:sld xmlns:a="http://schemas.openxmlformats.org/drawingml/2006/main" xmlns:p="http://schemas.openxmlformats.org/presentationml/2006/main" xmlns:r="http://schemas.openxmlformats.org/officeDocument/2006/relationships">
+  <p:cSld>
+    <p:bg>
+      <p:bgPr>
+        <a:solidFill>
+          <a:srgbClr val="FFFFFF"/>
+        </a:solidFill>
+        <a:effectLst/>
+      </p:bgPr>
+    </p:bg>
+    <p:spTree>
+      <p:nvGrpSpPr>
+        <p:cNvPr id="1" name=""/>
+        <p:cNvGrpSpPr/>
+        <p:nvPr/>
+      </p:nvGrpSpPr>
+      <p:grpSpPr/>
+      <p:sp>
+        <p:nvSpPr>
+          <p:cNvPr id="2" name="TextBox 1"/>
+          <p:cNvSpPr txBox="1"/>
+          <p:nvPr/>
+        </p:nvSpPr>
+        <p:spPr>
+          <a:xfrm>
+            <a:off x="731520" y="365760"/>
+            <a:ext cx="10515600" cy="320040"/>
+          </a:xfrm>
+          <a:prstGeom prst="rect">
+            <a:avLst/>
+          </a:prstGeom>
+          <a:noFill/>
+        </p:spPr>
+        <p:txBody>
+          <a:bodyPr wrap="square" anchor="t">
+            <a:spAutoFit/>
+          </a:bodyPr>
+          <a:lstStyle/>
+          <a:p>
+            <a:pPr algn="l"/>
+            <a:r>
+              <a:rPr sz="1300" b="1" i="0">
+                <a:solidFill>
+                  <a:srgbClr val="1F3C63"/>
+                </a:solidFill>
+                <a:latin typeface="Times New Roman"/>
+              </a:rPr>
+              <a:t>CHOIX TECHNOLOGIQUES</a:t>
+            </a:r>
+          </a:p>
+        </p:txBody>
+      </p:sp>
+      <p:sp>
+        <p:nvSpPr>
+          <p:cNvPr id="3" name="TextBox 2"/>
+          <p:cNvSpPr txBox="1"/>
+          <p:nvPr/>
+        </p:nvSpPr>
+        <p:spPr>
+          <a:xfrm>
+            <a:off x="731520" y="658368"/>
+            <a:ext cx="10698480" cy="731520"/>
+          </a:xfrm>
+          <a:prstGeom prst="rect">
+            <a:avLst/>
+          </a:prstGeom>
+          <a:noFill/>
+        </p:spPr>
+        <p:txBody>
+          <a:bodyPr wrap="square" anchor="t">
+            <a:spAutoFit/>
+          </a:bodyPr>
+          <a:lstStyle/>
+          <a:p>
+            <a:pPr algn="l"/>
+            <a:r>
+              <a:rPr sz="2800" b="1" i="0">
+                <a:solidFill>
+                  <a:srgbClr val="000000"/>
+                </a:solidFill>
+                <a:latin typeface="Times New Roman"/>
+              </a:rPr>
+              <a:t>Stack technique</a:t>
+            </a:r>
+          </a:p>
+        </p:txBody>
+      </p:sp>
+      <p:sp>
+        <p:nvSpPr>
+          <p:cNvPr id="4" name="Rectangle 3"/>
+          <p:cNvSpPr/>
+          <p:nvPr/>
+        </p:nvSpPr>
+        <p:spPr>
+          <a:xfrm>
+            <a:off x="731520" y="1344168"/>
+            <a:ext cx="10698480" cy="15875"/>
+          </a:xfrm>
+          <a:prstGeom prst="rect">
+            <a:avLst/>
+          </a:prstGeom>
+          <a:solidFill>
+            <a:srgbClr val="1F3C63"/>
+          </a:solidFill>
+          <a:ln>
+            <a:noFill/>
+          </a:ln>
+          <a:effectLst/>
+        </p:spPr>
+        <p:style>
+          <a:lnRef idx="1">
+            <a:schemeClr val="accent1"/>
+          </a:lnRef>
+          <a:fillRef idx="3">
+            <a:schemeClr val="accent1"/>
+          </a:fillRef>
+          <a:effectRef idx="2">
+            <a:schemeClr val="accent1"/>
+          </a:effectRef>
+          <a:fontRef idx="minor">
+            <a:schemeClr val="lt1"/>
+          </a:fontRef>
+        </p:style>
+        <p:txBody>
+          <a:bodyPr rtlCol="0" anchor="ctr"/>
+          <a:lstStyle/>
+          <a:p>
+            <a:pPr algn="ctr"/>
+          </a:p>
+        </p:txBody>
+      </p:sp>
+      <p:sp>
+        <p:nvSpPr>
+          <p:cNvPr id="5" name="TextBox 4"/>
+          <p:cNvSpPr txBox="1"/>
+          <p:nvPr/>
+        </p:nvSpPr>
+        <p:spPr>
+          <a:xfrm>
+            <a:off x="11185855" y="6400800"/>
+            <a:ext cx="640080" cy="320040"/>
+          </a:xfrm>
+          <a:prstGeom prst="rect">
+            <a:avLst/>
+          </a:prstGeom>
+          <a:noFill/>
+        </p:spPr>
+        <p:txBody>
+          <a:bodyPr wrap="square" anchor="t">
+            <a:spAutoFit/>
+          </a:bodyPr>
+          <a:lstStyle/>
+          <a:p>
+            <a:pPr algn="r"/>
+            <a:r>
+              <a:rPr sz="1100" b="0" i="0">
+                <a:solidFill>
+                  <a:srgbClr val="404040"/>
+                </a:solidFill>
+                <a:latin typeface="Times New Roman"/>
+              </a:rPr>
+              <a:t>5</a:t>
             </a:r>
           </a:p>
         </p:txBody>
@@ -8136,7 +9044,7 @@
 </p:sld>
 </file>
 
-<file path=ppt/slides/slide6.xml><?xml version="1.0" encoding="utf-8"?>
+<file path=ppt/slides/slide7.xml><?xml version="1.0" encoding="utf-8"?>
 <p:sld xmlns:a="http://schemas.openxmlformats.org/drawingml/2006/main" xmlns:p="http://schemas.openxmlformats.org/presentationml/2006/main" xmlns:r="http://schemas.openxmlformats.org/officeDocument/2006/relationships">
   <p:cSld>
     <p:bg>
@@ -8298,7 +9206,7 @@
                 </a:solidFill>
                 <a:latin typeface="Times New Roman"/>
               </a:rPr>
-              <a:t>5</a:t>
+              <a:t>6</a:t>
             </a:r>
           </a:p>
         </p:txBody>
@@ -8781,303 +9689,6 @@
 </p:sld>
 </file>
 
-<file path=ppt/slides/slide7.xml><?xml version="1.0" encoding="utf-8"?>
-<p:sld xmlns:a="http://schemas.openxmlformats.org/drawingml/2006/main" xmlns:p="http://schemas.openxmlformats.org/presentationml/2006/main" xmlns:r="http://schemas.openxmlformats.org/officeDocument/2006/relationships">
-  <p:cSld>
-    <p:bg>
-      <p:bgPr>
-        <a:solidFill>
-          <a:srgbClr val="FFFFFF"/>
-        </a:solidFill>
-        <a:effectLst/>
-      </p:bgPr>
-    </p:bg>
-    <p:spTree>
-      <p:nvGrpSpPr>
-        <p:cNvPr id="1" name=""/>
-        <p:cNvGrpSpPr/>
-        <p:nvPr/>
-      </p:nvGrpSpPr>
-      <p:grpSpPr/>
-      <p:sp>
-        <p:nvSpPr>
-          <p:cNvPr id="2" name="TextBox 1"/>
-          <p:cNvSpPr txBox="1"/>
-          <p:nvPr/>
-        </p:nvSpPr>
-        <p:spPr>
-          <a:xfrm>
-            <a:off x="731520" y="365760"/>
-            <a:ext cx="10515600" cy="320040"/>
-          </a:xfrm>
-          <a:prstGeom prst="rect">
-            <a:avLst/>
-          </a:prstGeom>
-          <a:noFill/>
-        </p:spPr>
-        <p:txBody>
-          <a:bodyPr wrap="square" anchor="t">
-            <a:spAutoFit/>
-          </a:bodyPr>
-          <a:lstStyle/>
-          <a:p>
-            <a:pPr algn="l"/>
-            <a:r>
-              <a:rPr sz="1300" b="1" i="0">
-                <a:solidFill>
-                  <a:srgbClr val="1F3C63"/>
-                </a:solidFill>
-                <a:latin typeface="Times New Roman"/>
-              </a:rPr>
-              <a:t>BASE DE DONNÉES</a:t>
-            </a:r>
-          </a:p>
-        </p:txBody>
-      </p:sp>
-      <p:sp>
-        <p:nvSpPr>
-          <p:cNvPr id="3" name="TextBox 2"/>
-          <p:cNvSpPr txBox="1"/>
-          <p:nvPr/>
-        </p:nvSpPr>
-        <p:spPr>
-          <a:xfrm>
-            <a:off x="731520" y="658368"/>
-            <a:ext cx="10698480" cy="731520"/>
-          </a:xfrm>
-          <a:prstGeom prst="rect">
-            <a:avLst/>
-          </a:prstGeom>
-          <a:noFill/>
-        </p:spPr>
-        <p:txBody>
-          <a:bodyPr wrap="square" anchor="t">
-            <a:spAutoFit/>
-          </a:bodyPr>
-          <a:lstStyle/>
-          <a:p>
-            <a:pPr algn="l"/>
-            <a:r>
-              <a:rPr sz="2800" b="1" i="0">
-                <a:solidFill>
-                  <a:srgbClr val="000000"/>
-                </a:solidFill>
-                <a:latin typeface="Times New Roman"/>
-              </a:rPr>
-              <a:t>Références plutôt que documents imbriqués</a:t>
-            </a:r>
-          </a:p>
-        </p:txBody>
-      </p:sp>
-      <p:sp>
-        <p:nvSpPr>
-          <p:cNvPr id="4" name="Rectangle 3"/>
-          <p:cNvSpPr/>
-          <p:nvPr/>
-        </p:nvSpPr>
-        <p:spPr>
-          <a:xfrm>
-            <a:off x="731520" y="1344168"/>
-            <a:ext cx="10698480" cy="15875"/>
-          </a:xfrm>
-          <a:prstGeom prst="rect">
-            <a:avLst/>
-          </a:prstGeom>
-          <a:solidFill>
-            <a:srgbClr val="1F3C63"/>
-          </a:solidFill>
-          <a:ln>
-            <a:noFill/>
-          </a:ln>
-          <a:effectLst/>
-        </p:spPr>
-        <p:style>
-          <a:lnRef idx="1">
-            <a:schemeClr val="accent1"/>
-          </a:lnRef>
-          <a:fillRef idx="3">
-            <a:schemeClr val="accent1"/>
-          </a:fillRef>
-          <a:effectRef idx="2">
-            <a:schemeClr val="accent1"/>
-          </a:effectRef>
-          <a:fontRef idx="minor">
-            <a:schemeClr val="lt1"/>
-          </a:fontRef>
-        </p:style>
-        <p:txBody>
-          <a:bodyPr rtlCol="0" anchor="ctr"/>
-          <a:lstStyle/>
-          <a:p>
-            <a:pPr algn="ctr"/>
-          </a:p>
-        </p:txBody>
-      </p:sp>
-      <p:sp>
-        <p:nvSpPr>
-          <p:cNvPr id="5" name="TextBox 4"/>
-          <p:cNvSpPr txBox="1"/>
-          <p:nvPr/>
-        </p:nvSpPr>
-        <p:spPr>
-          <a:xfrm>
-            <a:off x="11185855" y="6400800"/>
-            <a:ext cx="640080" cy="320040"/>
-          </a:xfrm>
-          <a:prstGeom prst="rect">
-            <a:avLst/>
-          </a:prstGeom>
-          <a:noFill/>
-        </p:spPr>
-        <p:txBody>
-          <a:bodyPr wrap="square" anchor="t">
-            <a:spAutoFit/>
-          </a:bodyPr>
-          <a:lstStyle/>
-          <a:p>
-            <a:pPr algn="r"/>
-            <a:r>
-              <a:rPr sz="1100" b="0" i="0">
-                <a:solidFill>
-                  <a:srgbClr val="404040"/>
-                </a:solidFill>
-                <a:latin typeface="Times New Roman"/>
-              </a:rPr>
-              <a:t>6</a:t>
-            </a:r>
-          </a:p>
-        </p:txBody>
-      </p:sp>
-      <p:sp>
-        <p:nvSpPr>
-          <p:cNvPr id="6" name="TextBox 5"/>
-          <p:cNvSpPr txBox="1"/>
-          <p:nvPr/>
-        </p:nvSpPr>
-        <p:spPr>
-          <a:xfrm>
-            <a:off x="731520" y="1691640"/>
-            <a:ext cx="10332720" cy="3291840"/>
-          </a:xfrm>
-          <a:prstGeom prst="rect">
-            <a:avLst/>
-          </a:prstGeom>
-          <a:noFill/>
-        </p:spPr>
-        <p:txBody>
-          <a:bodyPr wrap="square">
-            <a:spAutoFit/>
-          </a:bodyPr>
-          <a:lstStyle/>
-          <a:p>
-            <a:pPr>
-              <a:spcAft>
-                <a:spcPts val="1400"/>
-              </a:spcAft>
-            </a:pPr>
-            <a:r>
-              <a:rPr sz="1650">
-                <a:solidFill>
-                  <a:srgbClr val="000000"/>
-                </a:solidFill>
-                <a:latin typeface="Times New Roman"/>
-              </a:rPr>
-              <a:t>•  Relation many-to-many : un étudiant suit plusieurs formations, une formation a plusieurs étudiants</a:t>
-            </a:r>
-          </a:p>
-          <a:p>
-            <a:pPr>
-              <a:spcAft>
-                <a:spcPts val="1400"/>
-              </a:spcAft>
-            </a:pPr>
-            <a:r>
-              <a:rPr sz="1650">
-                <a:solidFill>
-                  <a:srgbClr val="000000"/>
-                </a:solidFill>
-                <a:latin typeface="Times New Roman"/>
-              </a:rPr>
-              <a:t>•  Écritures fréquentes et indépendantes : inscription, annulation, notation</a:t>
-            </a:r>
-          </a:p>
-          <a:p>
-            <a:pPr>
-              <a:spcAft>
-                <a:spcPts val="1400"/>
-              </a:spcAft>
-            </a:pPr>
-            <a:r>
-              <a:rPr sz="1650">
-                <a:solidFill>
-                  <a:srgbClr val="000000"/>
-                </a:solidFill>
-                <a:latin typeface="Times New Roman"/>
-              </a:rPr>
-              <a:t>•  Requêtes transversales pour les statistiques (top formations, top étudiants) sur toute la collection</a:t>
-            </a:r>
-          </a:p>
-          <a:p>
-            <a:pPr>
-              <a:spcAft>
-                <a:spcPts val="1400"/>
-              </a:spcAft>
-            </a:pPr>
-            <a:r>
-              <a:rPr sz="1650">
-                <a:solidFill>
-                  <a:srgbClr val="000000"/>
-                </a:solidFill>
-                <a:latin typeface="Times New Roman"/>
-              </a:rPr>
-              <a:t>•  Unicité et capacité maximale garanties par des index dédiés sur une collection séparée</a:t>
-            </a:r>
-          </a:p>
-        </p:txBody>
-      </p:sp>
-      <p:sp>
-        <p:nvSpPr>
-          <p:cNvPr id="7" name="TextBox 6"/>
-          <p:cNvSpPr txBox="1"/>
-          <p:nvPr/>
-        </p:nvSpPr>
-        <p:spPr>
-          <a:xfrm>
-            <a:off x="731520" y="4846320"/>
-            <a:ext cx="10332720" cy="1280160"/>
-          </a:xfrm>
-          <a:prstGeom prst="rect">
-            <a:avLst/>
-          </a:prstGeom>
-          <a:noFill/>
-        </p:spPr>
-        <p:txBody>
-          <a:bodyPr wrap="square" anchor="t">
-            <a:spAutoFit/>
-          </a:bodyPr>
-          <a:lstStyle/>
-          <a:p>
-            <a:pPr algn="l"/>
-            <a:r>
-              <a:rPr sz="1450" b="0" i="1">
-                <a:solidFill>
-                  <a:srgbClr val="404040"/>
-                </a:solidFill>
-                <a:latin typeface="Times New Roman"/>
-              </a:rPr>
-              <a:t>Nuance : les vues composites (formation + formateur, inscription + étudiant) sont reconstituées à la lecture via des pipelines $lookup / $unwind, sans dupliquer les données en base.</a:t>
-            </a:r>
-          </a:p>
-        </p:txBody>
-      </p:sp>
-    </p:spTree>
-  </p:cSld>
-  <p:clrMapOvr>
-    <a:masterClrMapping/>
-  </p:clrMapOvr>
-</p:sld>
-</file>
-
 <file path=ppt/slides/slide8.xml><?xml version="1.0" encoding="utf-8"?>
 <p:sld xmlns:a="http://schemas.openxmlformats.org/drawingml/2006/main" xmlns:p="http://schemas.openxmlformats.org/presentationml/2006/main" xmlns:r="http://schemas.openxmlformats.org/officeDocument/2006/relationships">
   <p:cSld>
@@ -9161,7 +9772,7 @@
                 </a:solidFill>
                 <a:latin typeface="Times New Roman"/>
               </a:rPr>
-              <a:t>Fonctions et méthodes principales (couche modèle)</a:t>
+              <a:t>Références plutôt que documents imbriqués</a:t>
             </a:r>
           </a:p>
         </p:txBody>
@@ -9245,308 +9856,93 @@
           </a:p>
         </p:txBody>
       </p:sp>
-      <p:graphicFrame>
-        <p:nvGraphicFramePr>
-          <p:cNvPr id="6" name="Table 5"/>
-          <p:cNvGraphicFramePr>
-            <a:graphicFrameLocks noGrp="1"/>
-          </p:cNvGraphicFramePr>
-          <p:nvPr/>
-        </p:nvGraphicFramePr>
-        <p:xfrm>
-          <a:off x="731520" y="1645920"/>
-          <a:ext cx="10332720" cy="3950208"/>
-        </p:xfrm>
-        <a:graphic>
-          <a:graphicData uri="http://schemas.openxmlformats.org/drawingml/2006/table">
-            <a:tbl>
-              <a:tblPr firstRow="1" bandRow="1">
-                <a:tableStyleId>{5C22544A-7EE6-4342-B048-85BDC9FD1C3A}</a:tableStyleId>
-              </a:tblPr>
-              <a:tblGrid>
-                <a:gridCol w="2560320"/>
-                <a:gridCol w="7772400"/>
-              </a:tblGrid>
-              <a:tr h="658368">
-                <a:tc>
-                  <a:txBody>
-                    <a:bodyPr wrap="square"/>
-                    <a:lstStyle/>
-                    <a:p>
-                      <a:r>
-                        <a:rPr sz="1400" b="1">
-                          <a:solidFill>
-                            <a:srgbClr val="FFFFFF"/>
-                          </a:solidFill>
-                          <a:latin typeface="Times New Roman"/>
-                        </a:rPr>
-                        <a:t>Classe (app/models/)</a:t>
-                      </a:r>
-                    </a:p>
-                  </a:txBody>
-                  <a:tcPr marL="101600" marR="101600" marT="50800" marB="50800" anchor="ctr">
-                    <a:solidFill>
-                      <a:srgbClr val="1F3C63"/>
-                    </a:solidFill>
-                  </a:tcPr>
-                </a:tc>
-                <a:tc>
-                  <a:txBody>
-                    <a:bodyPr wrap="square"/>
-                    <a:lstStyle/>
-                    <a:p>
-                      <a:r>
-                        <a:rPr sz="1400" b="1">
-                          <a:solidFill>
-                            <a:srgbClr val="FFFFFF"/>
-                          </a:solidFill>
-                          <a:latin typeface="Times New Roman"/>
-                        </a:rPr>
-                        <a:t>Méthodes principales</a:t>
-                      </a:r>
-                    </a:p>
-                  </a:txBody>
-                  <a:tcPr marL="101600" marR="101600" marT="50800" marB="50800" anchor="ctr">
-                    <a:solidFill>
-                      <a:srgbClr val="1F3C63"/>
-                    </a:solidFill>
-                  </a:tcPr>
-                </a:tc>
-              </a:tr>
-              <a:tr h="658368">
-                <a:tc>
-                  <a:txBody>
-                    <a:bodyPr wrap="square"/>
-                    <a:lstStyle/>
-                    <a:p>
-                      <a:r>
-                        <a:rPr sz="1300" b="0">
-                          <a:solidFill>
-                            <a:srgbClr val="000000"/>
-                          </a:solidFill>
-                          <a:latin typeface="Times New Roman"/>
-                        </a:rPr>
-                        <a:t>Student</a:t>
-                      </a:r>
-                    </a:p>
-                  </a:txBody>
-                  <a:tcPr marL="101600" marR="101600" marT="50800" marB="50800" anchor="ctr">
-                    <a:solidFill>
-                      <a:srgbClr val="FFFFFF"/>
-                    </a:solidFill>
-                  </a:tcPr>
-                </a:tc>
-                <a:tc>
-                  <a:txBody>
-                    <a:bodyPr wrap="square"/>
-                    <a:lstStyle/>
-                    <a:p>
-                      <a:r>
-                        <a:rPr sz="1300" b="0">
-                          <a:solidFill>
-                            <a:srgbClr val="000000"/>
-                          </a:solidFill>
-                          <a:latin typeface="Times New Roman"/>
-                        </a:rPr>
-                        <a:t>create, get_by_id, get_by_email, update, delete, find_all, count</a:t>
-                      </a:r>
-                    </a:p>
-                  </a:txBody>
-                  <a:tcPr marL="101600" marR="101600" marT="50800" marB="50800" anchor="ctr">
-                    <a:solidFill>
-                      <a:srgbClr val="FFFFFF"/>
-                    </a:solidFill>
-                  </a:tcPr>
-                </a:tc>
-              </a:tr>
-              <a:tr h="658368">
-                <a:tc>
-                  <a:txBody>
-                    <a:bodyPr wrap="square"/>
-                    <a:lstStyle/>
-                    <a:p>
-                      <a:r>
-                        <a:rPr sz="1300" b="0">
-                          <a:solidFill>
-                            <a:srgbClr val="000000"/>
-                          </a:solidFill>
-                          <a:latin typeface="Times New Roman"/>
-                        </a:rPr>
-                        <a:t>Teacher</a:t>
-                      </a:r>
-                    </a:p>
-                  </a:txBody>
-                  <a:tcPr marL="101600" marR="101600" marT="50800" marB="50800" anchor="ctr">
-                    <a:solidFill>
-                      <a:srgbClr val="EAEAEA"/>
-                    </a:solidFill>
-                  </a:tcPr>
-                </a:tc>
-                <a:tc>
-                  <a:txBody>
-                    <a:bodyPr wrap="square"/>
-                    <a:lstStyle/>
-                    <a:p>
-                      <a:r>
-                        <a:rPr sz="1300" b="0">
-                          <a:solidFill>
-                            <a:srgbClr val="000000"/>
-                          </a:solidFill>
-                          <a:latin typeface="Times New Roman"/>
-                        </a:rPr>
-                        <a:t>create, get_by_id, update, delete, find_all, distinct_specialites</a:t>
-                      </a:r>
-                    </a:p>
-                  </a:txBody>
-                  <a:tcPr marL="101600" marR="101600" marT="50800" marB="50800" anchor="ctr">
-                    <a:solidFill>
-                      <a:srgbClr val="EAEAEA"/>
-                    </a:solidFill>
-                  </a:tcPr>
-                </a:tc>
-              </a:tr>
-              <a:tr h="658368">
-                <a:tc>
-                  <a:txBody>
-                    <a:bodyPr wrap="square"/>
-                    <a:lstStyle/>
-                    <a:p>
-                      <a:r>
-                        <a:rPr sz="1300" b="0">
-                          <a:solidFill>
-                            <a:srgbClr val="000000"/>
-                          </a:solidFill>
-                          <a:latin typeface="Times New Roman"/>
-                        </a:rPr>
-                        <a:t>Course</a:t>
-                      </a:r>
-                    </a:p>
-                  </a:txBody>
-                  <a:tcPr marL="101600" marR="101600" marT="50800" marB="50800" anchor="ctr">
-                    <a:solidFill>
-                      <a:srgbClr val="FFFFFF"/>
-                    </a:solidFill>
-                  </a:tcPr>
-                </a:tc>
-                <a:tc>
-                  <a:txBody>
-                    <a:bodyPr wrap="square"/>
-                    <a:lstStyle/>
-                    <a:p>
-                      <a:r>
-                        <a:rPr sz="1300" b="0">
-                          <a:solidFill>
-                            <a:srgbClr val="000000"/>
-                          </a:solidFill>
-                          <a:latin typeface="Times New Roman"/>
-                        </a:rPr>
-                        <a:t>create, get_with_formateur, update, delete, has_enrollments, find_all, count_by_categorie, prix_moyen</a:t>
-                      </a:r>
-                    </a:p>
-                  </a:txBody>
-                  <a:tcPr marL="101600" marR="101600" marT="50800" marB="50800" anchor="ctr">
-                    <a:solidFill>
-                      <a:srgbClr val="FFFFFF"/>
-                    </a:solidFill>
-                  </a:tcPr>
-                </a:tc>
-              </a:tr>
-              <a:tr h="658368">
-                <a:tc>
-                  <a:txBody>
-                    <a:bodyPr wrap="square"/>
-                    <a:lstStyle/>
-                    <a:p>
-                      <a:r>
-                        <a:rPr sz="1300" b="0">
-                          <a:solidFill>
-                            <a:srgbClr val="000000"/>
-                          </a:solidFill>
-                          <a:latin typeface="Times New Roman"/>
-                        </a:rPr>
-                        <a:t>Enrollment</a:t>
-                      </a:r>
-                    </a:p>
-                  </a:txBody>
-                  <a:tcPr marL="101600" marR="101600" marT="50800" marB="50800" anchor="ctr">
-                    <a:solidFill>
-                      <a:srgbClr val="EAEAEA"/>
-                    </a:solidFill>
-                  </a:tcPr>
-                </a:tc>
-                <a:tc>
-                  <a:txBody>
-                    <a:bodyPr wrap="square"/>
-                    <a:lstStyle/>
-                    <a:p>
-                      <a:r>
-                        <a:rPr sz="1300" b="0">
-                          <a:solidFill>
-                            <a:srgbClr val="000000"/>
-                          </a:solidFill>
-                          <a:latin typeface="Times New Roman"/>
-                        </a:rPr>
-                        <a:t>create, cancel, set_note, find_by_student, find_by_course, moyenne_etudiant, top_formations, top_etudiants</a:t>
-                      </a:r>
-                    </a:p>
-                  </a:txBody>
-                  <a:tcPr marL="101600" marR="101600" marT="50800" marB="50800" anchor="ctr">
-                    <a:solidFill>
-                      <a:srgbClr val="EAEAEA"/>
-                    </a:solidFill>
-                  </a:tcPr>
-                </a:tc>
-              </a:tr>
-              <a:tr h="658368">
-                <a:tc>
-                  <a:txBody>
-                    <a:bodyPr wrap="square"/>
-                    <a:lstStyle/>
-                    <a:p>
-                      <a:r>
-                        <a:rPr sz="1300" b="0">
-                          <a:solidFill>
-                            <a:srgbClr val="000000"/>
-                          </a:solidFill>
-                          <a:latin typeface="Times New Roman"/>
-                        </a:rPr>
-                        <a:t>User</a:t>
-                      </a:r>
-                    </a:p>
-                  </a:txBody>
-                  <a:tcPr marL="101600" marR="101600" marT="50800" marB="50800" anchor="ctr">
-                    <a:solidFill>
-                      <a:srgbClr val="FFFFFF"/>
-                    </a:solidFill>
-                  </a:tcPr>
-                </a:tc>
-                <a:tc>
-                  <a:txBody>
-                    <a:bodyPr wrap="square"/>
-                    <a:lstStyle/>
-                    <a:p>
-                      <a:r>
-                        <a:rPr sz="1300" b="0">
-                          <a:solidFill>
-                            <a:srgbClr val="000000"/>
-                          </a:solidFill>
-                          <a:latin typeface="Times New Roman"/>
-                        </a:rPr>
-                        <a:t>create, get_by_email, check_password, set_active, delete_by_ref</a:t>
-                      </a:r>
-                    </a:p>
-                  </a:txBody>
-                  <a:tcPr marL="101600" marR="101600" marT="50800" marB="50800" anchor="ctr">
-                    <a:solidFill>
-                      <a:srgbClr val="FFFFFF"/>
-                    </a:solidFill>
-                  </a:tcPr>
-                </a:tc>
-              </a:tr>
-            </a:tbl>
-          </a:graphicData>
-        </a:graphic>
-      </p:graphicFrame>
+      <p:sp>
+        <p:nvSpPr>
+          <p:cNvPr id="6" name="TextBox 5"/>
+          <p:cNvSpPr txBox="1"/>
+          <p:nvPr/>
+        </p:nvSpPr>
+        <p:spPr>
+          <a:xfrm>
+            <a:off x="731520" y="1691640"/>
+            <a:ext cx="10332720" cy="3291840"/>
+          </a:xfrm>
+          <a:prstGeom prst="rect">
+            <a:avLst/>
+          </a:prstGeom>
+          <a:noFill/>
+        </p:spPr>
+        <p:txBody>
+          <a:bodyPr wrap="square">
+            <a:spAutoFit/>
+          </a:bodyPr>
+          <a:lstStyle/>
+          <a:p>
+            <a:pPr>
+              <a:spcAft>
+                <a:spcPts val="1400"/>
+              </a:spcAft>
+            </a:pPr>
+            <a:r>
+              <a:rPr sz="1650">
+                <a:solidFill>
+                  <a:srgbClr val="000000"/>
+                </a:solidFill>
+                <a:latin typeface="Times New Roman"/>
+              </a:rPr>
+              <a:t>•  Relation many-to-many : un étudiant suit plusieurs formations, une formation a plusieurs étudiants</a:t>
+            </a:r>
+          </a:p>
+          <a:p>
+            <a:pPr>
+              <a:spcAft>
+                <a:spcPts val="1400"/>
+              </a:spcAft>
+            </a:pPr>
+            <a:r>
+              <a:rPr sz="1650">
+                <a:solidFill>
+                  <a:srgbClr val="000000"/>
+                </a:solidFill>
+                <a:latin typeface="Times New Roman"/>
+              </a:rPr>
+              <a:t>•  Écritures fréquentes et indépendantes : inscription, annulation, notation</a:t>
+            </a:r>
+          </a:p>
+          <a:p>
+            <a:pPr>
+              <a:spcAft>
+                <a:spcPts val="1400"/>
+              </a:spcAft>
+            </a:pPr>
+            <a:r>
+              <a:rPr sz="1650">
+                <a:solidFill>
+                  <a:srgbClr val="000000"/>
+                </a:solidFill>
+                <a:latin typeface="Times New Roman"/>
+              </a:rPr>
+              <a:t>•  Requêtes transversales pour les statistiques (top formations, top étudiants) sur toute la collection</a:t>
+            </a:r>
+          </a:p>
+          <a:p>
+            <a:pPr>
+              <a:spcAft>
+                <a:spcPts val="1400"/>
+              </a:spcAft>
+            </a:pPr>
+            <a:r>
+              <a:rPr sz="1650">
+                <a:solidFill>
+                  <a:srgbClr val="000000"/>
+                </a:solidFill>
+                <a:latin typeface="Times New Roman"/>
+              </a:rPr>
+              <a:t>•  Unicité et capacité maximale garanties par des index dédiés sur une collection séparée</a:t>
+            </a:r>
+          </a:p>
+        </p:txBody>
+      </p:sp>
       <p:sp>
         <p:nvSpPr>
           <p:cNvPr id="7" name="TextBox 6"/>
@@ -9555,8 +9951,8 @@
         </p:nvSpPr>
         <p:spPr>
           <a:xfrm>
-            <a:off x="731520" y="5989320"/>
-            <a:ext cx="10332720" cy="365760"/>
+            <a:off x="731520" y="4846320"/>
+            <a:ext cx="10332720" cy="1280160"/>
           </a:xfrm>
           <a:prstGeom prst="rect">
             <a:avLst/>
@@ -9571,13 +9967,13 @@
           <a:p>
             <a:pPr algn="l"/>
             <a:r>
-              <a:rPr sz="1250" b="0" i="1">
+              <a:rPr sz="1450" b="0" i="1">
                 <a:solidFill>
                   <a:srgbClr val="404040"/>
                 </a:solidFill>
                 <a:latin typeface="Times New Roman"/>
               </a:rPr>
-              <a:t>Les règles de gestion (unicité, capacité, plage de note) sont centralisées dans ces fonctions, pas dans les routes.</a:t>
+              <a:t>Nuance : les vues composites (formation + formateur, inscription + étudiant) sont reconstituées à la lecture via des pipelines $lookup / $unwind, sans dupliquer les données en base.</a:t>
             </a:r>
           </a:p>
         </p:txBody>
@@ -9673,7 +10069,7 @@
                 </a:solidFill>
                 <a:latin typeface="Times New Roman"/>
               </a:rPr>
-              <a:t>Pipelines d'agrégation</a:t>
+              <a:t>Fonctions et méthodes principales (couche modèle)</a:t>
             </a:r>
           </a:p>
         </p:txBody>
@@ -9765,7 +10161,7 @@
         </p:nvSpPr>
         <p:spPr>
           <a:xfrm>
-            <a:off x="731520" y="1600200"/>
+            <a:off x="731520" y="1554480"/>
             <a:ext cx="10332720" cy="365760"/>
           </a:xfrm>
           <a:prstGeom prst="rect">
@@ -9787,227 +10183,341 @@
                 </a:solidFill>
                 <a:latin typeface="Times New Roman"/>
               </a:rPr>
-              <a:t>Statistiques calculées avec $match, $group, $sort, $limit, $lookup, $unwind</a:t>
-            </a:r>
-          </a:p>
-        </p:txBody>
-      </p:sp>
-      <p:sp>
-        <p:nvSpPr>
-          <p:cNvPr id="7" name="Rectangle 6"/>
-          <p:cNvSpPr/>
-          <p:nvPr/>
-        </p:nvSpPr>
-        <p:spPr>
-          <a:xfrm>
-            <a:off x="731520" y="2103120"/>
-            <a:ext cx="5212080" cy="3566160"/>
+              <a:t>Une classe par collection dans app/models/, avec son propre CRUD</a:t>
+            </a:r>
+          </a:p>
+        </p:txBody>
+      </p:sp>
+      <p:graphicFrame>
+        <p:nvGraphicFramePr>
+          <p:cNvPr id="7" name="Table 6"/>
+          <p:cNvGraphicFramePr>
+            <a:graphicFrameLocks noGrp="1"/>
+          </p:cNvGraphicFramePr>
+          <p:nvPr/>
+        </p:nvGraphicFramePr>
+        <p:xfrm>
+          <a:off x="731520" y="2057400"/>
+          <a:ext cx="10332720" cy="3108960"/>
+        </p:xfrm>
+        <a:graphic>
+          <a:graphicData uri="http://schemas.openxmlformats.org/drawingml/2006/table">
+            <a:tbl>
+              <a:tblPr firstRow="1" bandRow="1">
+                <a:tableStyleId>{5C22544A-7EE6-4342-B048-85BDC9FD1C3A}</a:tableStyleId>
+              </a:tblPr>
+              <a:tblGrid>
+                <a:gridCol w="2103120"/>
+                <a:gridCol w="4114800"/>
+                <a:gridCol w="4114800"/>
+              </a:tblGrid>
+              <a:tr h="777240">
+                <a:tc>
+                  <a:txBody>
+                    <a:bodyPr wrap="square"/>
+                    <a:lstStyle/>
+                    <a:p>
+                      <a:r>
+                        <a:rPr sz="1550" b="1">
+                          <a:solidFill>
+                            <a:srgbClr val="FFFFFF"/>
+                          </a:solidFill>
+                          <a:latin typeface="Times New Roman"/>
+                        </a:rPr>
+                        <a:t>Classe</a:t>
+                      </a:r>
+                    </a:p>
+                  </a:txBody>
+                  <a:tcPr marL="101600" marR="101600" marT="50800" marB="50800" anchor="ctr">
+                    <a:solidFill>
+                      <a:srgbClr val="1F3C63"/>
+                    </a:solidFill>
+                  </a:tcPr>
+                </a:tc>
+                <a:tc>
+                  <a:txBody>
+                    <a:bodyPr wrap="square"/>
+                    <a:lstStyle/>
+                    <a:p>
+                      <a:r>
+                        <a:rPr sz="1550" b="1">
+                          <a:solidFill>
+                            <a:srgbClr val="FFFFFF"/>
+                          </a:solidFill>
+                          <a:latin typeface="Times New Roman"/>
+                        </a:rPr>
+                        <a:t>Méthodes clés</a:t>
+                      </a:r>
+                    </a:p>
+                  </a:txBody>
+                  <a:tcPr marL="101600" marR="101600" marT="50800" marB="50800" anchor="ctr">
+                    <a:solidFill>
+                      <a:srgbClr val="1F3C63"/>
+                    </a:solidFill>
+                  </a:tcPr>
+                </a:tc>
+                <a:tc>
+                  <a:txBody>
+                    <a:bodyPr wrap="square"/>
+                    <a:lstStyle/>
+                    <a:p>
+                      <a:r>
+                        <a:rPr sz="1550" b="1">
+                          <a:solidFill>
+                            <a:srgbClr val="FFFFFF"/>
+                          </a:solidFill>
+                          <a:latin typeface="Times New Roman"/>
+                        </a:rPr>
+                        <a:t>Rôle</a:t>
+                      </a:r>
+                    </a:p>
+                  </a:txBody>
+                  <a:tcPr marL="101600" marR="101600" marT="50800" marB="50800" anchor="ctr">
+                    <a:solidFill>
+                      <a:srgbClr val="1F3C63"/>
+                    </a:solidFill>
+                  </a:tcPr>
+                </a:tc>
+              </a:tr>
+              <a:tr h="777240">
+                <a:tc>
+                  <a:txBody>
+                    <a:bodyPr wrap="square"/>
+                    <a:lstStyle/>
+                    <a:p>
+                      <a:r>
+                        <a:rPr sz="1450" b="0">
+                          <a:solidFill>
+                            <a:srgbClr val="000000"/>
+                          </a:solidFill>
+                          <a:latin typeface="Times New Roman"/>
+                        </a:rPr>
+                        <a:t>Student</a:t>
+                      </a:r>
+                    </a:p>
+                  </a:txBody>
+                  <a:tcPr marL="101600" marR="101600" marT="50800" marB="50800" anchor="ctr">
+                    <a:solidFill>
+                      <a:srgbClr val="FFFFFF"/>
+                    </a:solidFill>
+                  </a:tcPr>
+                </a:tc>
+                <a:tc>
+                  <a:txBody>
+                    <a:bodyPr wrap="square"/>
+                    <a:lstStyle/>
+                    <a:p>
+                      <a:r>
+                        <a:rPr sz="1450" b="0">
+                          <a:solidFill>
+                            <a:srgbClr val="000000"/>
+                          </a:solidFill>
+                          <a:latin typeface="Times New Roman"/>
+                        </a:rPr>
+                        <a:t>create, find_all, update, delete</a:t>
+                      </a:r>
+                    </a:p>
+                  </a:txBody>
+                  <a:tcPr marL="101600" marR="101600" marT="50800" marB="50800" anchor="ctr">
+                    <a:solidFill>
+                      <a:srgbClr val="FFFFFF"/>
+                    </a:solidFill>
+                  </a:tcPr>
+                </a:tc>
+                <a:tc>
+                  <a:txBody>
+                    <a:bodyPr wrap="square"/>
+                    <a:lstStyle/>
+                    <a:p>
+                      <a:r>
+                        <a:rPr sz="1450" b="0">
+                          <a:solidFill>
+                            <a:srgbClr val="000000"/>
+                          </a:solidFill>
+                          <a:latin typeface="Times New Roman"/>
+                        </a:rPr>
+                        <a:t>CRUD simple (email unique)</a:t>
+                      </a:r>
+                    </a:p>
+                  </a:txBody>
+                  <a:tcPr marL="101600" marR="101600" marT="50800" marB="50800" anchor="ctr">
+                    <a:solidFill>
+                      <a:srgbClr val="FFFFFF"/>
+                    </a:solidFill>
+                  </a:tcPr>
+                </a:tc>
+              </a:tr>
+              <a:tr h="777240">
+                <a:tc>
+                  <a:txBody>
+                    <a:bodyPr wrap="square"/>
+                    <a:lstStyle/>
+                    <a:p>
+                      <a:r>
+                        <a:rPr sz="1450" b="0">
+                          <a:solidFill>
+                            <a:srgbClr val="000000"/>
+                          </a:solidFill>
+                          <a:latin typeface="Times New Roman"/>
+                        </a:rPr>
+                        <a:t>Course</a:t>
+                      </a:r>
+                    </a:p>
+                  </a:txBody>
+                  <a:tcPr marL="101600" marR="101600" marT="50800" marB="50800" anchor="ctr">
+                    <a:solidFill>
+                      <a:srgbClr val="EAEAEA"/>
+                    </a:solidFill>
+                  </a:tcPr>
+                </a:tc>
+                <a:tc>
+                  <a:txBody>
+                    <a:bodyPr wrap="square"/>
+                    <a:lstStyle/>
+                    <a:p>
+                      <a:r>
+                        <a:rPr sz="1450" b="0">
+                          <a:solidFill>
+                            <a:srgbClr val="000000"/>
+                          </a:solidFill>
+                          <a:latin typeface="Times New Roman"/>
+                        </a:rPr>
+                        <a:t>create, find_all, prix_moyen</a:t>
+                      </a:r>
+                    </a:p>
+                  </a:txBody>
+                  <a:tcPr marL="101600" marR="101600" marT="50800" marB="50800" anchor="ctr">
+                    <a:solidFill>
+                      <a:srgbClr val="EAEAEA"/>
+                    </a:solidFill>
+                  </a:tcPr>
+                </a:tc>
+                <a:tc>
+                  <a:txBody>
+                    <a:bodyPr wrap="square"/>
+                    <a:lstStyle/>
+                    <a:p>
+                      <a:r>
+                        <a:rPr sz="1450" b="0">
+                          <a:solidFill>
+                            <a:srgbClr val="000000"/>
+                          </a:solidFill>
+                          <a:latin typeface="Times New Roman"/>
+                        </a:rPr>
+                        <a:t>CRUD + statistique</a:t>
+                      </a:r>
+                    </a:p>
+                  </a:txBody>
+                  <a:tcPr marL="101600" marR="101600" marT="50800" marB="50800" anchor="ctr">
+                    <a:solidFill>
+                      <a:srgbClr val="EAEAEA"/>
+                    </a:solidFill>
+                  </a:tcPr>
+                </a:tc>
+              </a:tr>
+              <a:tr h="777240">
+                <a:tc>
+                  <a:txBody>
+                    <a:bodyPr wrap="square"/>
+                    <a:lstStyle/>
+                    <a:p>
+                      <a:r>
+                        <a:rPr sz="1450" b="0">
+                          <a:solidFill>
+                            <a:srgbClr val="000000"/>
+                          </a:solidFill>
+                          <a:latin typeface="Times New Roman"/>
+                        </a:rPr>
+                        <a:t>Enrollment</a:t>
+                      </a:r>
+                    </a:p>
+                  </a:txBody>
+                  <a:tcPr marL="101600" marR="101600" marT="50800" marB="50800" anchor="ctr">
+                    <a:solidFill>
+                      <a:srgbClr val="FFFFFF"/>
+                    </a:solidFill>
+                  </a:tcPr>
+                </a:tc>
+                <a:tc>
+                  <a:txBody>
+                    <a:bodyPr wrap="square"/>
+                    <a:lstStyle/>
+                    <a:p>
+                      <a:r>
+                        <a:rPr sz="1450" b="0">
+                          <a:solidFill>
+                            <a:srgbClr val="000000"/>
+                          </a:solidFill>
+                          <a:latin typeface="Times New Roman"/>
+                        </a:rPr>
+                        <a:t>create, set_note, top_formations</a:t>
+                      </a:r>
+                    </a:p>
+                  </a:txBody>
+                  <a:tcPr marL="101600" marR="101600" marT="50800" marB="50800" anchor="ctr">
+                    <a:solidFill>
+                      <a:srgbClr val="FFFFFF"/>
+                    </a:solidFill>
+                  </a:tcPr>
+                </a:tc>
+                <a:tc>
+                  <a:txBody>
+                    <a:bodyPr wrap="square"/>
+                    <a:lstStyle/>
+                    <a:p>
+                      <a:r>
+                        <a:rPr sz="1450" b="0">
+                          <a:solidFill>
+                            <a:srgbClr val="000000"/>
+                          </a:solidFill>
+                          <a:latin typeface="Times New Roman"/>
+                        </a:rPr>
+                        <a:t>Règles de gestion + agrégations</a:t>
+                      </a:r>
+                    </a:p>
+                  </a:txBody>
+                  <a:tcPr marL="101600" marR="101600" marT="50800" marB="50800" anchor="ctr">
+                    <a:solidFill>
+                      <a:srgbClr val="FFFFFF"/>
+                    </a:solidFill>
+                  </a:tcPr>
+                </a:tc>
+              </a:tr>
+            </a:tbl>
+          </a:graphicData>
+        </a:graphic>
+      </p:graphicFrame>
+      <p:sp>
+        <p:nvSpPr>
+          <p:cNvPr id="8" name="TextBox 7"/>
+          <p:cNvSpPr txBox="1"/>
+          <p:nvPr/>
+        </p:nvSpPr>
+        <p:spPr>
+          <a:xfrm>
+            <a:off x="731520" y="5212080"/>
+            <a:ext cx="10332720" cy="548640"/>
           </a:xfrm>
           <a:prstGeom prst="rect">
             <a:avLst/>
           </a:prstGeom>
-          <a:solidFill>
-            <a:srgbClr val="FFFFFF"/>
-          </a:solidFill>
-          <a:ln w="12700">
-            <a:solidFill>
-              <a:srgbClr val="9A9A9A"/>
-            </a:solidFill>
-          </a:ln>
-          <a:effectLst/>
-        </p:spPr>
-        <p:style>
-          <a:lnRef idx="1">
-            <a:schemeClr val="accent1"/>
-          </a:lnRef>
-          <a:fillRef idx="3">
-            <a:schemeClr val="accent1"/>
-          </a:fillRef>
-          <a:effectRef idx="2">
-            <a:schemeClr val="accent1"/>
-          </a:effectRef>
-          <a:fontRef idx="minor">
-            <a:schemeClr val="lt1"/>
-          </a:fontRef>
-        </p:style>
-        <p:txBody>
-          <a:bodyPr rtlCol="0" anchor="ctr" wrap="square" lIns="152400" tIns="127000"/>
-          <a:lstStyle/>
-          <a:p>
-            <a:pPr algn="ctr"/>
-            <a:r>
-              <a:rPr sz="1300">
-                <a:solidFill>
-                  <a:srgbClr val="000000"/>
-                </a:solidFill>
-                <a:latin typeface="Courier New"/>
-              </a:rPr>
-              <a:t># Enrollment.top_formations()</a:t>
-            </a:r>
-          </a:p>
-          <a:p>
-            <a:r>
-              <a:rPr sz="1300">
-                <a:solidFill>
-                  <a:srgbClr val="000000"/>
-                </a:solidFill>
-                <a:latin typeface="Courier New"/>
-              </a:rPr>
-              <a:t>[{"$match": {"statut": "active"}},</a:t>
-            </a:r>
-          </a:p>
-          <a:p>
-            <a:r>
-              <a:rPr sz="1300">
-                <a:solidFill>
-                  <a:srgbClr val="000000"/>
-                </a:solidFill>
-                <a:latin typeface="Courier New"/>
-              </a:rPr>
-              <a:t> {"$group": {"_id": "$formation_id",</a:t>
-            </a:r>
-          </a:p>
-          <a:p>
-            <a:r>
-              <a:rPr sz="1300">
-                <a:solidFill>
-                  <a:srgbClr val="000000"/>
-                </a:solidFill>
-                <a:latin typeface="Courier New"/>
-              </a:rPr>
-              <a:t>              "nb_inscrits": {"$sum": 1}}},</a:t>
-            </a:r>
-          </a:p>
-          <a:p>
-            <a:r>
-              <a:rPr sz="1300">
-                <a:solidFill>
-                  <a:srgbClr val="000000"/>
-                </a:solidFill>
-                <a:latin typeface="Courier New"/>
-              </a:rPr>
-              <a:t> {"$sort": {"nb_inscrits": -1}}, {"$limit": 5},</a:t>
-            </a:r>
-          </a:p>
-          <a:p>
-            <a:r>
-              <a:rPr sz="1300">
-                <a:solidFill>
-                  <a:srgbClr val="000000"/>
-                </a:solidFill>
-                <a:latin typeface="Courier New"/>
-              </a:rPr>
-              <a:t> {"$lookup": {...}}, {"$unwind": "$formation"}]</a:t>
-            </a:r>
-          </a:p>
-        </p:txBody>
-      </p:sp>
-      <p:sp>
-        <p:nvSpPr>
-          <p:cNvPr id="8" name="Rectangle 7"/>
-          <p:cNvSpPr/>
-          <p:nvPr/>
-        </p:nvSpPr>
-        <p:spPr>
-          <a:xfrm>
-            <a:off x="6217920" y="2103120"/>
-            <a:ext cx="5212080" cy="3566160"/>
-          </a:xfrm>
-          <a:prstGeom prst="rect">
-            <a:avLst/>
-          </a:prstGeom>
-          <a:solidFill>
-            <a:srgbClr val="FFFFFF"/>
-          </a:solidFill>
-          <a:ln w="12700">
-            <a:solidFill>
-              <a:srgbClr val="9A9A9A"/>
-            </a:solidFill>
-          </a:ln>
-          <a:effectLst/>
-        </p:spPr>
-        <p:style>
-          <a:lnRef idx="1">
-            <a:schemeClr val="accent1"/>
-          </a:lnRef>
-          <a:fillRef idx="3">
-            <a:schemeClr val="accent1"/>
-          </a:fillRef>
-          <a:effectRef idx="2">
-            <a:schemeClr val="accent1"/>
-          </a:effectRef>
-          <a:fontRef idx="minor">
-            <a:schemeClr val="lt1"/>
-          </a:fontRef>
-        </p:style>
-        <p:txBody>
-          <a:bodyPr rtlCol="0" anchor="ctr" wrap="square" lIns="152400" tIns="127000"/>
-          <a:lstStyle/>
-          <a:p>
-            <a:pPr algn="ctr"/>
-            <a:r>
-              <a:rPr sz="1300">
-                <a:solidFill>
-                  <a:srgbClr val="000000"/>
-                </a:solidFill>
-                <a:latin typeface="Courier New"/>
-              </a:rPr>
-              <a:t># Enrollment.top_etudiants()</a:t>
-            </a:r>
-          </a:p>
-          <a:p>
-            <a:r>
-              <a:rPr sz="1300">
-                <a:solidFill>
-                  <a:srgbClr val="000000"/>
-                </a:solidFill>
-                <a:latin typeface="Courier New"/>
-              </a:rPr>
-              <a:t>[{"$match": {"statut": "active",</a:t>
-            </a:r>
-          </a:p>
-          <a:p>
-            <a:r>
-              <a:rPr sz="1300">
-                <a:solidFill>
-                  <a:srgbClr val="000000"/>
-                </a:solidFill>
-                <a:latin typeface="Courier New"/>
-              </a:rPr>
-              <a:t>              "note": {"$ne": None}}},</a:t>
-            </a:r>
-          </a:p>
-          <a:p>
-            <a:r>
-              <a:rPr sz="1300">
-                <a:solidFill>
-                  <a:srgbClr val="000000"/>
-                </a:solidFill>
-                <a:latin typeface="Courier New"/>
-              </a:rPr>
-              <a:t> {"$group": {"_id": "$etudiant_id",</a:t>
-            </a:r>
-          </a:p>
-          <a:p>
-            <a:r>
-              <a:rPr sz="1300">
-                <a:solidFill>
-                  <a:srgbClr val="000000"/>
-                </a:solidFill>
-                <a:latin typeface="Courier New"/>
-              </a:rPr>
-              <a:t>              "moyenne": {"$avg": "$note"}}},</a:t>
-            </a:r>
-          </a:p>
-          <a:p>
-            <a:r>
-              <a:rPr sz="1300">
-                <a:solidFill>
-                  <a:srgbClr val="000000"/>
-                </a:solidFill>
-                <a:latin typeface="Courier New"/>
-              </a:rPr>
-              <a:t> {"$sort": {"moyenne": -1}}, {"$limit": 5}]</a:t>
+          <a:noFill/>
+        </p:spPr>
+        <p:txBody>
+          <a:bodyPr wrap="square" anchor="t">
+            <a:spAutoFit/>
+          </a:bodyPr>
+          <a:lstStyle/>
+          <a:p>
+            <a:pPr algn="l"/>
+            <a:r>
+              <a:rPr sz="1350" b="0" i="1">
+                <a:solidFill>
+                  <a:srgbClr val="404040"/>
+                </a:solidFill>
+                <a:latin typeface="Times New Roman"/>
+              </a:rPr>
+              <a:t>Les règles de gestion (unicité, capacité, plage de note) sont centralisées ici, pas dans les routes : même appelée depuis un script, la règle s'applique.</a:t>
             </a:r>
           </a:p>
         </p:txBody>

--- a/complet/report/Presentation_Projet_Gestion_Formations.pptx
+++ b/complet/report/Presentation_Projet_Gestion_Formations.pptx
@@ -20,6 +20,7 @@
     <p:sldId id="268" r:id="rId19"/>
     <p:sldId id="269" r:id="rId20"/>
     <p:sldId id="270" r:id="rId21"/>
+    <p:sldId id="271" r:id="rId22"/>
   </p:sldIdLst>
   <p:sldSz cx="12191695" cy="6858000" type="screen4x3"/>
   <p:notesSz cx="6858000" cy="9144000"/>
@@ -3544,7 +3545,7 @@
                 </a:solidFill>
                 <a:latin typeface="Times New Roman"/>
               </a:rPr>
-              <a:t>Pipelines d'agrégation</a:t>
+              <a:t>Fonctions et méthodes principales (couche modèle)</a:t>
             </a:r>
           </a:p>
         </p:txBody>
@@ -3658,132 +3659,310 @@
                 </a:solidFill>
                 <a:latin typeface="Times New Roman"/>
               </a:rPr>
-              <a:t>Les statistiques sont calculées par MongoDB, pas en Python</a:t>
-            </a:r>
-          </a:p>
-        </p:txBody>
-      </p:sp>
-      <p:sp>
-        <p:nvSpPr>
-          <p:cNvPr id="7" name="Rectangle 6"/>
-          <p:cNvSpPr/>
-          <p:nvPr/>
-        </p:nvSpPr>
-        <p:spPr>
-          <a:xfrm>
-            <a:off x="731520" y="2057400"/>
-            <a:ext cx="5394960" cy="3749039"/>
-          </a:xfrm>
-          <a:prstGeom prst="rect">
-            <a:avLst/>
-          </a:prstGeom>
-          <a:solidFill>
-            <a:srgbClr val="FFFFFF"/>
-          </a:solidFill>
-          <a:ln w="12700">
-            <a:solidFill>
-              <a:srgbClr val="9A9A9A"/>
-            </a:solidFill>
-          </a:ln>
-          <a:effectLst/>
-        </p:spPr>
-        <p:style>
-          <a:lnRef idx="1">
-            <a:schemeClr val="accent1"/>
-          </a:lnRef>
-          <a:fillRef idx="3">
-            <a:schemeClr val="accent1"/>
-          </a:fillRef>
-          <a:effectRef idx="2">
-            <a:schemeClr val="accent1"/>
-          </a:effectRef>
-          <a:fontRef idx="minor">
-            <a:schemeClr val="lt1"/>
-          </a:fontRef>
-        </p:style>
-        <p:txBody>
-          <a:bodyPr rtlCol="0" anchor="ctr" wrap="square" lIns="152400" tIns="127000"/>
-          <a:lstStyle/>
-          <a:p>
-            <a:pPr algn="ctr"/>
-            <a:r>
-              <a:rPr sz="1400">
-                <a:solidFill>
-                  <a:srgbClr val="000000"/>
-                </a:solidFill>
-                <a:latin typeface="Courier New"/>
-              </a:rPr>
-              <a:t># Enrollment.top_formations()</a:t>
-            </a:r>
-          </a:p>
-          <a:p>
-            <a:r>
-              <a:rPr sz="1400">
-                <a:solidFill>
-                  <a:srgbClr val="000000"/>
-                </a:solidFill>
-                <a:latin typeface="Courier New"/>
-              </a:rPr>
-              <a:t>[{"$match": {"statut": "active"}},</a:t>
-            </a:r>
-          </a:p>
-          <a:p>
-            <a:r>
-              <a:rPr sz="1400">
-                <a:solidFill>
-                  <a:srgbClr val="000000"/>
-                </a:solidFill>
-                <a:latin typeface="Courier New"/>
-              </a:rPr>
-              <a:t> {"$group": {"_id": "$formation_id",</a:t>
-            </a:r>
-          </a:p>
-          <a:p>
-            <a:r>
-              <a:rPr sz="1400">
-                <a:solidFill>
-                  <a:srgbClr val="000000"/>
-                </a:solidFill>
-                <a:latin typeface="Courier New"/>
-              </a:rPr>
-              <a:t>              "nb_inscrits": {"$sum": 1}}},</a:t>
-            </a:r>
-          </a:p>
-          <a:p>
-            <a:r>
-              <a:rPr sz="1400">
-                <a:solidFill>
-                  <a:srgbClr val="000000"/>
-                </a:solidFill>
-                <a:latin typeface="Courier New"/>
-              </a:rPr>
-              <a:t> {"$sort": {"nb_inscrits": -1}},</a:t>
-            </a:r>
-          </a:p>
-          <a:p>
-            <a:r>
-              <a:rPr sz="1400">
-                <a:solidFill>
-                  <a:srgbClr val="000000"/>
-                </a:solidFill>
-                <a:latin typeface="Courier New"/>
-              </a:rPr>
-              <a:t> {"$limit": 5},</a:t>
-            </a:r>
-          </a:p>
-          <a:p>
-            <a:r>
-              <a:rPr sz="1400">
-                <a:solidFill>
-                  <a:srgbClr val="000000"/>
-                </a:solidFill>
-                <a:latin typeface="Courier New"/>
-              </a:rPr>
-              <a:t> {"$lookup": {...}}]</a:t>
-            </a:r>
-          </a:p>
-        </p:txBody>
-      </p:sp>
+              <a:t>Une classe par collection dans app/models/, avec son propre CRUD</a:t>
+            </a:r>
+          </a:p>
+        </p:txBody>
+      </p:sp>
+      <p:graphicFrame>
+        <p:nvGraphicFramePr>
+          <p:cNvPr id="7" name="Table 6"/>
+          <p:cNvGraphicFramePr>
+            <a:graphicFrameLocks noGrp="1"/>
+          </p:cNvGraphicFramePr>
+          <p:nvPr/>
+        </p:nvGraphicFramePr>
+        <p:xfrm>
+          <a:off x="731520" y="2057400"/>
+          <a:ext cx="10332720" cy="3108960"/>
+        </p:xfrm>
+        <a:graphic>
+          <a:graphicData uri="http://schemas.openxmlformats.org/drawingml/2006/table">
+            <a:tbl>
+              <a:tblPr firstRow="1" bandRow="1">
+                <a:tableStyleId>{5C22544A-7EE6-4342-B048-85BDC9FD1C3A}</a:tableStyleId>
+              </a:tblPr>
+              <a:tblGrid>
+                <a:gridCol w="2103120"/>
+                <a:gridCol w="4114800"/>
+                <a:gridCol w="4114800"/>
+              </a:tblGrid>
+              <a:tr h="777240">
+                <a:tc>
+                  <a:txBody>
+                    <a:bodyPr wrap="square"/>
+                    <a:lstStyle/>
+                    <a:p>
+                      <a:r>
+                        <a:rPr sz="1550" b="1">
+                          <a:solidFill>
+                            <a:srgbClr val="FFFFFF"/>
+                          </a:solidFill>
+                          <a:latin typeface="Times New Roman"/>
+                        </a:rPr>
+                        <a:t>Classe</a:t>
+                      </a:r>
+                    </a:p>
+                  </a:txBody>
+                  <a:tcPr marL="101600" marR="101600" marT="50800" marB="50800" anchor="ctr">
+                    <a:solidFill>
+                      <a:srgbClr val="1F3C63"/>
+                    </a:solidFill>
+                  </a:tcPr>
+                </a:tc>
+                <a:tc>
+                  <a:txBody>
+                    <a:bodyPr wrap="square"/>
+                    <a:lstStyle/>
+                    <a:p>
+                      <a:r>
+                        <a:rPr sz="1550" b="1">
+                          <a:solidFill>
+                            <a:srgbClr val="FFFFFF"/>
+                          </a:solidFill>
+                          <a:latin typeface="Times New Roman"/>
+                        </a:rPr>
+                        <a:t>Méthodes clés</a:t>
+                      </a:r>
+                    </a:p>
+                  </a:txBody>
+                  <a:tcPr marL="101600" marR="101600" marT="50800" marB="50800" anchor="ctr">
+                    <a:solidFill>
+                      <a:srgbClr val="1F3C63"/>
+                    </a:solidFill>
+                  </a:tcPr>
+                </a:tc>
+                <a:tc>
+                  <a:txBody>
+                    <a:bodyPr wrap="square"/>
+                    <a:lstStyle/>
+                    <a:p>
+                      <a:r>
+                        <a:rPr sz="1550" b="1">
+                          <a:solidFill>
+                            <a:srgbClr val="FFFFFF"/>
+                          </a:solidFill>
+                          <a:latin typeface="Times New Roman"/>
+                        </a:rPr>
+                        <a:t>Rôle</a:t>
+                      </a:r>
+                    </a:p>
+                  </a:txBody>
+                  <a:tcPr marL="101600" marR="101600" marT="50800" marB="50800" anchor="ctr">
+                    <a:solidFill>
+                      <a:srgbClr val="1F3C63"/>
+                    </a:solidFill>
+                  </a:tcPr>
+                </a:tc>
+              </a:tr>
+              <a:tr h="777240">
+                <a:tc>
+                  <a:txBody>
+                    <a:bodyPr wrap="square"/>
+                    <a:lstStyle/>
+                    <a:p>
+                      <a:r>
+                        <a:rPr sz="1450" b="0">
+                          <a:solidFill>
+                            <a:srgbClr val="000000"/>
+                          </a:solidFill>
+                          <a:latin typeface="Times New Roman"/>
+                        </a:rPr>
+                        <a:t>Student</a:t>
+                      </a:r>
+                    </a:p>
+                  </a:txBody>
+                  <a:tcPr marL="101600" marR="101600" marT="50800" marB="50800" anchor="ctr">
+                    <a:solidFill>
+                      <a:srgbClr val="FFFFFF"/>
+                    </a:solidFill>
+                  </a:tcPr>
+                </a:tc>
+                <a:tc>
+                  <a:txBody>
+                    <a:bodyPr wrap="square"/>
+                    <a:lstStyle/>
+                    <a:p>
+                      <a:r>
+                        <a:rPr sz="1450" b="0">
+                          <a:solidFill>
+                            <a:srgbClr val="000000"/>
+                          </a:solidFill>
+                          <a:latin typeface="Times New Roman"/>
+                        </a:rPr>
+                        <a:t>create, find_all, update, delete</a:t>
+                      </a:r>
+                    </a:p>
+                  </a:txBody>
+                  <a:tcPr marL="101600" marR="101600" marT="50800" marB="50800" anchor="ctr">
+                    <a:solidFill>
+                      <a:srgbClr val="FFFFFF"/>
+                    </a:solidFill>
+                  </a:tcPr>
+                </a:tc>
+                <a:tc>
+                  <a:txBody>
+                    <a:bodyPr wrap="square"/>
+                    <a:lstStyle/>
+                    <a:p>
+                      <a:r>
+                        <a:rPr sz="1450" b="0">
+                          <a:solidFill>
+                            <a:srgbClr val="000000"/>
+                          </a:solidFill>
+                          <a:latin typeface="Times New Roman"/>
+                        </a:rPr>
+                        <a:t>CRUD simple (email unique)</a:t>
+                      </a:r>
+                    </a:p>
+                  </a:txBody>
+                  <a:tcPr marL="101600" marR="101600" marT="50800" marB="50800" anchor="ctr">
+                    <a:solidFill>
+                      <a:srgbClr val="FFFFFF"/>
+                    </a:solidFill>
+                  </a:tcPr>
+                </a:tc>
+              </a:tr>
+              <a:tr h="777240">
+                <a:tc>
+                  <a:txBody>
+                    <a:bodyPr wrap="square"/>
+                    <a:lstStyle/>
+                    <a:p>
+                      <a:r>
+                        <a:rPr sz="1450" b="0">
+                          <a:solidFill>
+                            <a:srgbClr val="000000"/>
+                          </a:solidFill>
+                          <a:latin typeface="Times New Roman"/>
+                        </a:rPr>
+                        <a:t>Course</a:t>
+                      </a:r>
+                    </a:p>
+                  </a:txBody>
+                  <a:tcPr marL="101600" marR="101600" marT="50800" marB="50800" anchor="ctr">
+                    <a:solidFill>
+                      <a:srgbClr val="EAEAEA"/>
+                    </a:solidFill>
+                  </a:tcPr>
+                </a:tc>
+                <a:tc>
+                  <a:txBody>
+                    <a:bodyPr wrap="square"/>
+                    <a:lstStyle/>
+                    <a:p>
+                      <a:r>
+                        <a:rPr sz="1450" b="0">
+                          <a:solidFill>
+                            <a:srgbClr val="000000"/>
+                          </a:solidFill>
+                          <a:latin typeface="Times New Roman"/>
+                        </a:rPr>
+                        <a:t>create, find_all, prix_moyen</a:t>
+                      </a:r>
+                    </a:p>
+                  </a:txBody>
+                  <a:tcPr marL="101600" marR="101600" marT="50800" marB="50800" anchor="ctr">
+                    <a:solidFill>
+                      <a:srgbClr val="EAEAEA"/>
+                    </a:solidFill>
+                  </a:tcPr>
+                </a:tc>
+                <a:tc>
+                  <a:txBody>
+                    <a:bodyPr wrap="square"/>
+                    <a:lstStyle/>
+                    <a:p>
+                      <a:r>
+                        <a:rPr sz="1450" b="0">
+                          <a:solidFill>
+                            <a:srgbClr val="000000"/>
+                          </a:solidFill>
+                          <a:latin typeface="Times New Roman"/>
+                        </a:rPr>
+                        <a:t>CRUD + statistique</a:t>
+                      </a:r>
+                    </a:p>
+                  </a:txBody>
+                  <a:tcPr marL="101600" marR="101600" marT="50800" marB="50800" anchor="ctr">
+                    <a:solidFill>
+                      <a:srgbClr val="EAEAEA"/>
+                    </a:solidFill>
+                  </a:tcPr>
+                </a:tc>
+              </a:tr>
+              <a:tr h="777240">
+                <a:tc>
+                  <a:txBody>
+                    <a:bodyPr wrap="square"/>
+                    <a:lstStyle/>
+                    <a:p>
+                      <a:r>
+                        <a:rPr sz="1450" b="0">
+                          <a:solidFill>
+                            <a:srgbClr val="000000"/>
+                          </a:solidFill>
+                          <a:latin typeface="Times New Roman"/>
+                        </a:rPr>
+                        <a:t>Enrollment</a:t>
+                      </a:r>
+                    </a:p>
+                  </a:txBody>
+                  <a:tcPr marL="101600" marR="101600" marT="50800" marB="50800" anchor="ctr">
+                    <a:solidFill>
+                      <a:srgbClr val="FFFFFF"/>
+                    </a:solidFill>
+                  </a:tcPr>
+                </a:tc>
+                <a:tc>
+                  <a:txBody>
+                    <a:bodyPr wrap="square"/>
+                    <a:lstStyle/>
+                    <a:p>
+                      <a:r>
+                        <a:rPr sz="1450" b="0">
+                          <a:solidFill>
+                            <a:srgbClr val="000000"/>
+                          </a:solidFill>
+                          <a:latin typeface="Times New Roman"/>
+                        </a:rPr>
+                        <a:t>create, set_note, top_formations</a:t>
+                      </a:r>
+                    </a:p>
+                  </a:txBody>
+                  <a:tcPr marL="101600" marR="101600" marT="50800" marB="50800" anchor="ctr">
+                    <a:solidFill>
+                      <a:srgbClr val="FFFFFF"/>
+                    </a:solidFill>
+                  </a:tcPr>
+                </a:tc>
+                <a:tc>
+                  <a:txBody>
+                    <a:bodyPr wrap="square"/>
+                    <a:lstStyle/>
+                    <a:p>
+                      <a:r>
+                        <a:rPr sz="1450" b="0">
+                          <a:solidFill>
+                            <a:srgbClr val="000000"/>
+                          </a:solidFill>
+                          <a:latin typeface="Times New Roman"/>
+                        </a:rPr>
+                        <a:t>Règles de gestion + agrégations</a:t>
+                      </a:r>
+                    </a:p>
+                  </a:txBody>
+                  <a:tcPr marL="101600" marR="101600" marT="50800" marB="50800" anchor="ctr">
+                    <a:solidFill>
+                      <a:srgbClr val="FFFFFF"/>
+                    </a:solidFill>
+                  </a:tcPr>
+                </a:tc>
+              </a:tr>
+            </a:tbl>
+          </a:graphicData>
+        </a:graphic>
+      </p:graphicFrame>
       <p:sp>
         <p:nvSpPr>
           <p:cNvPr id="8" name="TextBox 7"/>
@@ -3792,8 +3971,8 @@
         </p:nvSpPr>
         <p:spPr>
           <a:xfrm>
-            <a:off x="6400800" y="2103120"/>
-            <a:ext cx="4846320" cy="365760"/>
+            <a:off x="731520" y="5212080"/>
+            <a:ext cx="10332720" cy="548640"/>
           </a:xfrm>
           <a:prstGeom prst="rect">
             <a:avLst/>
@@ -3808,135 +3987,13 @@
           <a:p>
             <a:pPr algn="l"/>
             <a:r>
-              <a:rPr sz="1500" b="1" i="0">
-                <a:solidFill>
-                  <a:srgbClr val="1F3C63"/>
-                </a:solidFill>
-                <a:latin typeface="Times New Roman"/>
-              </a:rPr>
-              <a:t>Étape par étape</a:t>
-            </a:r>
-          </a:p>
-        </p:txBody>
-      </p:sp>
-      <p:sp>
-        <p:nvSpPr>
-          <p:cNvPr id="9" name="TextBox 8"/>
-          <p:cNvSpPr txBox="1"/>
-          <p:nvPr/>
-        </p:nvSpPr>
-        <p:spPr>
-          <a:xfrm>
-            <a:off x="6400800" y="2560320"/>
-            <a:ext cx="4846320" cy="2926080"/>
-          </a:xfrm>
-          <a:prstGeom prst="rect">
-            <a:avLst/>
-          </a:prstGeom>
-          <a:noFill/>
-        </p:spPr>
-        <p:txBody>
-          <a:bodyPr wrap="square">
-            <a:spAutoFit/>
-          </a:bodyPr>
-          <a:lstStyle/>
-          <a:p>
-            <a:pPr>
-              <a:spcAft>
-                <a:spcPts val="1200"/>
-              </a:spcAft>
-            </a:pPr>
-            <a:r>
-              <a:rPr sz="1450">
-                <a:solidFill>
-                  <a:srgbClr val="000000"/>
-                </a:solidFill>
-                <a:latin typeface="Times New Roman"/>
-              </a:rPr>
-              <a:t>•  $match : ne garder que les inscriptions actives</a:t>
-            </a:r>
-          </a:p>
-          <a:p>
-            <a:pPr>
-              <a:spcAft>
-                <a:spcPts val="1200"/>
-              </a:spcAft>
-            </a:pPr>
-            <a:r>
-              <a:rPr sz="1450">
-                <a:solidFill>
-                  <a:srgbClr val="000000"/>
-                </a:solidFill>
-                <a:latin typeface="Times New Roman"/>
-              </a:rPr>
-              <a:t>•  $group : compter les inscrits par formation</a:t>
-            </a:r>
-          </a:p>
-          <a:p>
-            <a:pPr>
-              <a:spcAft>
-                <a:spcPts val="1200"/>
-              </a:spcAft>
-            </a:pPr>
-            <a:r>
-              <a:rPr sz="1450">
-                <a:solidFill>
-                  <a:srgbClr val="000000"/>
-                </a:solidFill>
-                <a:latin typeface="Times New Roman"/>
-              </a:rPr>
-              <a:t>•  $sort + $limit : garder le top 5</a:t>
-            </a:r>
-          </a:p>
-          <a:p>
-            <a:pPr>
-              <a:spcAft>
-                <a:spcPts val="1200"/>
-              </a:spcAft>
-            </a:pPr>
-            <a:r>
-              <a:rPr sz="1450">
-                <a:solidFill>
-                  <a:srgbClr val="000000"/>
-                </a:solidFill>
-                <a:latin typeface="Times New Roman"/>
-              </a:rPr>
-              <a:t>•  $lookup : récupérer le titre de la formation</a:t>
-            </a:r>
-          </a:p>
-        </p:txBody>
-      </p:sp>
-      <p:sp>
-        <p:nvSpPr>
-          <p:cNvPr id="10" name="TextBox 9"/>
-          <p:cNvSpPr txBox="1"/>
-          <p:nvPr/>
-        </p:nvSpPr>
-        <p:spPr>
-          <a:xfrm>
-            <a:off x="731520" y="5989320"/>
-            <a:ext cx="10332720" cy="457200"/>
-          </a:xfrm>
-          <a:prstGeom prst="rect">
-            <a:avLst/>
-          </a:prstGeom>
-          <a:noFill/>
-        </p:spPr>
-        <p:txBody>
-          <a:bodyPr wrap="square" anchor="t">
-            <a:spAutoFit/>
-          </a:bodyPr>
-          <a:lstStyle/>
-          <a:p>
-            <a:pPr algn="l"/>
-            <a:r>
-              <a:rPr sz="1300" b="0" i="1">
+              <a:rPr sz="1350" b="0" i="1">
                 <a:solidFill>
                   <a:srgbClr val="404040"/>
                 </a:solidFill>
                 <a:latin typeface="Times New Roman"/>
               </a:rPr>
-              <a:t>top_etudiants suit la même logique, avec une moyenne ($avg) à la place d'un comptage.</a:t>
+              <a:t>Les règles de gestion (unicité, capacité, plage de note) sont centralisées ici, pas dans les routes : même appelée depuis un script, la règle s'applique.</a:t>
             </a:r>
           </a:p>
         </p:txBody>
@@ -4032,7 +4089,7 @@
                 </a:solidFill>
                 <a:latin typeface="Times New Roman"/>
               </a:rPr>
-              <a:t>Aperçu réel de la base de données</a:t>
+              <a:t>Pipelines d'agrégation</a:t>
             </a:r>
           </a:p>
         </p:txBody>
@@ -4118,14 +4175,49 @@
       </p:sp>
       <p:sp>
         <p:nvSpPr>
-          <p:cNvPr id="6" name="Rectangle 5"/>
+          <p:cNvPr id="6" name="TextBox 5"/>
+          <p:cNvSpPr txBox="1"/>
+          <p:nvPr/>
+        </p:nvSpPr>
+        <p:spPr>
+          <a:xfrm>
+            <a:off x="731520" y="1554480"/>
+            <a:ext cx="10332720" cy="365760"/>
+          </a:xfrm>
+          <a:prstGeom prst="rect">
+            <a:avLst/>
+          </a:prstGeom>
+          <a:noFill/>
+        </p:spPr>
+        <p:txBody>
+          <a:bodyPr wrap="square" anchor="t">
+            <a:spAutoFit/>
+          </a:bodyPr>
+          <a:lstStyle/>
+          <a:p>
+            <a:pPr algn="l"/>
+            <a:r>
+              <a:rPr sz="1500" b="0" i="0">
+                <a:solidFill>
+                  <a:srgbClr val="404040"/>
+                </a:solidFill>
+                <a:latin typeface="Times New Roman"/>
+              </a:rPr>
+              <a:t>Les statistiques sont calculées par MongoDB, pas en Python</a:t>
+            </a:r>
+          </a:p>
+        </p:txBody>
+      </p:sp>
+      <p:sp>
+        <p:nvSpPr>
+          <p:cNvPr id="7" name="Rectangle 6"/>
           <p:cNvSpPr/>
           <p:nvPr/>
         </p:nvSpPr>
         <p:spPr>
           <a:xfrm>
-            <a:off x="731520" y="1691640"/>
-            <a:ext cx="6583680" cy="4206240"/>
+            <a:off x="731520" y="2057400"/>
+            <a:ext cx="5394960" cy="3749039"/>
           </a:xfrm>
           <a:prstGeom prst="rect">
             <a:avLst/>
@@ -4166,7 +4258,7 @@
                 </a:solidFill>
                 <a:latin typeface="Courier New"/>
               </a:rPr>
-              <a:t>$ mongosh ecole_formation</a:t>
+              <a:t># Enrollment.top_formations()</a:t>
             </a:r>
           </a:p>
           <a:p>
@@ -4177,7 +4269,7 @@
                 </a:solidFill>
                 <a:latin typeface="Courier New"/>
               </a:rPr>
-              <a:t> </a:t>
+              <a:t>[{"$match": {"statut": "active"}},</a:t>
             </a:r>
           </a:p>
           <a:p>
@@ -4188,7 +4280,7 @@
                 </a:solidFill>
                 <a:latin typeface="Courier New"/>
               </a:rPr>
-              <a:t>test&gt; db.getCollectionNames()</a:t>
+              <a:t> {"$group": {"_id": "$formation_id",</a:t>
             </a:r>
           </a:p>
           <a:p>
@@ -4199,7 +4291,7 @@
                 </a:solidFill>
                 <a:latin typeface="Courier New"/>
               </a:rPr>
-              <a:t>[ 'utilisateurs', 'etudiants', 'formateurs',</a:t>
+              <a:t>              "nb_inscrits": {"$sum": 1}}},</a:t>
             </a:r>
           </a:p>
           <a:p>
@@ -4210,7 +4302,7 @@
                 </a:solidFill>
                 <a:latin typeface="Courier New"/>
               </a:rPr>
-              <a:t>  'formations', 'inscriptions' ]</a:t>
+              <a:t> {"$sort": {"nb_inscrits": -1}},</a:t>
             </a:r>
           </a:p>
           <a:p>
@@ -4221,7 +4313,7 @@
                 </a:solidFill>
                 <a:latin typeface="Courier New"/>
               </a:rPr>
-              <a:t> </a:t>
+              <a:t> {"$limit": 5},</a:t>
             </a:r>
           </a:p>
           <a:p>
@@ -4232,54 +4324,21 @@
                 </a:solidFill>
                 <a:latin typeface="Courier New"/>
               </a:rPr>
-              <a:t>test&gt; db.etudiants.countDocuments()      100</a:t>
-            </a:r>
-          </a:p>
-          <a:p>
-            <a:r>
-              <a:rPr sz="1400">
-                <a:solidFill>
-                  <a:srgbClr val="000000"/>
-                </a:solidFill>
-                <a:latin typeface="Courier New"/>
-              </a:rPr>
-              <a:t>test&gt; db.formateurs.countDocuments()      20</a:t>
-            </a:r>
-          </a:p>
-          <a:p>
-            <a:r>
-              <a:rPr sz="1400">
-                <a:solidFill>
-                  <a:srgbClr val="000000"/>
-                </a:solidFill>
-                <a:latin typeface="Courier New"/>
-              </a:rPr>
-              <a:t>test&gt; db.formations.countDocuments()      30</a:t>
-            </a:r>
-          </a:p>
-          <a:p>
-            <a:r>
-              <a:rPr sz="1400">
-                <a:solidFill>
-                  <a:srgbClr val="000000"/>
-                </a:solidFill>
-                <a:latin typeface="Courier New"/>
-              </a:rPr>
-              <a:t>test&gt; db.inscriptions.countDocuments()   200</a:t>
-            </a:r>
-          </a:p>
-        </p:txBody>
-      </p:sp>
-      <p:sp>
-        <p:nvSpPr>
-          <p:cNvPr id="7" name="TextBox 6"/>
+              <a:t> {"$lookup": {...}}]</a:t>
+            </a:r>
+          </a:p>
+        </p:txBody>
+      </p:sp>
+      <p:sp>
+        <p:nvSpPr>
+          <p:cNvPr id="8" name="TextBox 7"/>
           <p:cNvSpPr txBox="1"/>
           <p:nvPr/>
         </p:nvSpPr>
         <p:spPr>
           <a:xfrm>
-            <a:off x="7589520" y="1920240"/>
-            <a:ext cx="3840480" cy="365760"/>
+            <a:off x="6400800" y="2103120"/>
+            <a:ext cx="4846320" cy="365760"/>
           </a:xfrm>
           <a:prstGeom prst="rect">
             <a:avLst/>
@@ -4300,21 +4359,21 @@
                 </a:solidFill>
                 <a:latin typeface="Times New Roman"/>
               </a:rPr>
-              <a:t>Index et performances</a:t>
-            </a:r>
-          </a:p>
-        </p:txBody>
-      </p:sp>
-      <p:sp>
-        <p:nvSpPr>
-          <p:cNvPr id="8" name="TextBox 7"/>
+              <a:t>Étape par étape</a:t>
+            </a:r>
+          </a:p>
+        </p:txBody>
+      </p:sp>
+      <p:sp>
+        <p:nvSpPr>
+          <p:cNvPr id="9" name="TextBox 8"/>
           <p:cNvSpPr txBox="1"/>
           <p:nvPr/>
         </p:nvSpPr>
         <p:spPr>
           <a:xfrm>
-            <a:off x="7589520" y="2423160"/>
-            <a:ext cx="3840480" cy="3200400"/>
+            <a:off x="6400800" y="2560320"/>
+            <a:ext cx="4846320" cy="2926080"/>
           </a:xfrm>
           <a:prstGeom prst="rect">
             <a:avLst/>
@@ -4329,49 +4388,100 @@
           <a:p>
             <a:pPr>
               <a:spcAft>
-                <a:spcPts val="1400"/>
+                <a:spcPts val="1200"/>
               </a:spcAft>
             </a:pPr>
             <a:r>
-              <a:rPr sz="1400">
+              <a:rPr sz="1450">
                 <a:solidFill>
                   <a:srgbClr val="000000"/>
                 </a:solidFill>
                 <a:latin typeface="Times New Roman"/>
               </a:rPr>
-              <a:t>•  Email unique (login rapide)</a:t>
+              <a:t>•  $match : ne garder que les inscriptions actives</a:t>
             </a:r>
           </a:p>
           <a:p>
             <a:pPr>
               <a:spcAft>
-                <a:spcPts val="1400"/>
+                <a:spcPts val="1200"/>
               </a:spcAft>
             </a:pPr>
             <a:r>
-              <a:rPr sz="1400">
+              <a:rPr sz="1450">
                 <a:solidFill>
                   <a:srgbClr val="000000"/>
                 </a:solidFill>
                 <a:latin typeface="Times New Roman"/>
               </a:rPr>
-              <a:t>•  Inscription active unique par étudiant/formation</a:t>
+              <a:t>•  $group : compter les inscrits par formation</a:t>
             </a:r>
           </a:p>
           <a:p>
             <a:pPr>
               <a:spcAft>
-                <a:spcPts val="1400"/>
+                <a:spcPts val="1200"/>
               </a:spcAft>
             </a:pPr>
             <a:r>
-              <a:rPr sz="1400">
+              <a:rPr sz="1450">
                 <a:solidFill>
                   <a:srgbClr val="000000"/>
                 </a:solidFill>
                 <a:latin typeface="Times New Roman"/>
               </a:rPr>
-              <a:t>•  COLLSCAN → IXSCAN après index</a:t>
+              <a:t>•  $sort + $limit : garder le top 5</a:t>
+            </a:r>
+          </a:p>
+          <a:p>
+            <a:pPr>
+              <a:spcAft>
+                <a:spcPts val="1200"/>
+              </a:spcAft>
+            </a:pPr>
+            <a:r>
+              <a:rPr sz="1450">
+                <a:solidFill>
+                  <a:srgbClr val="000000"/>
+                </a:solidFill>
+                <a:latin typeface="Times New Roman"/>
+              </a:rPr>
+              <a:t>•  $lookup : récupérer le titre de la formation</a:t>
+            </a:r>
+          </a:p>
+        </p:txBody>
+      </p:sp>
+      <p:sp>
+        <p:nvSpPr>
+          <p:cNvPr id="10" name="TextBox 9"/>
+          <p:cNvSpPr txBox="1"/>
+          <p:nvPr/>
+        </p:nvSpPr>
+        <p:spPr>
+          <a:xfrm>
+            <a:off x="731520" y="5989320"/>
+            <a:ext cx="10332720" cy="457200"/>
+          </a:xfrm>
+          <a:prstGeom prst="rect">
+            <a:avLst/>
+          </a:prstGeom>
+          <a:noFill/>
+        </p:spPr>
+        <p:txBody>
+          <a:bodyPr wrap="square" anchor="t">
+            <a:spAutoFit/>
+          </a:bodyPr>
+          <a:lstStyle/>
+          <a:p>
+            <a:pPr algn="l"/>
+            <a:r>
+              <a:rPr sz="1300" b="0" i="1">
+                <a:solidFill>
+                  <a:srgbClr val="404040"/>
+                </a:solidFill>
+                <a:latin typeface="Times New Roman"/>
+              </a:rPr>
+              <a:t>top_etudiants suit la même logique, avec une moyenne ($avg) à la place d'un comptage.</a:t>
             </a:r>
           </a:p>
         </p:txBody>
@@ -4432,7 +4542,7 @@
                 </a:solidFill>
                 <a:latin typeface="Times New Roman"/>
               </a:rPr>
-              <a:t>APPLICATION</a:t>
+              <a:t>BASE DE DONNÉES</a:t>
             </a:r>
           </a:p>
         </p:txBody>
@@ -4467,7 +4577,7 @@
                 </a:solidFill>
                 <a:latin typeface="Times New Roman"/>
               </a:rPr>
-              <a:t>Sécurité</a:t>
+              <a:t>Aperçu réel de la base de données</a:t>
             </a:r>
           </a:p>
         </p:txBody>
@@ -4553,14 +4663,203 @@
       </p:sp>
       <p:sp>
         <p:nvSpPr>
-          <p:cNvPr id="6" name="TextBox 5"/>
+          <p:cNvPr id="6" name="Rectangle 5"/>
+          <p:cNvSpPr/>
+          <p:nvPr/>
+        </p:nvSpPr>
+        <p:spPr>
+          <a:xfrm>
+            <a:off x="731520" y="1691640"/>
+            <a:ext cx="6583680" cy="4206240"/>
+          </a:xfrm>
+          <a:prstGeom prst="rect">
+            <a:avLst/>
+          </a:prstGeom>
+          <a:solidFill>
+            <a:srgbClr val="FFFFFF"/>
+          </a:solidFill>
+          <a:ln w="12700">
+            <a:solidFill>
+              <a:srgbClr val="9A9A9A"/>
+            </a:solidFill>
+          </a:ln>
+          <a:effectLst/>
+        </p:spPr>
+        <p:style>
+          <a:lnRef idx="1">
+            <a:schemeClr val="accent1"/>
+          </a:lnRef>
+          <a:fillRef idx="3">
+            <a:schemeClr val="accent1"/>
+          </a:fillRef>
+          <a:effectRef idx="2">
+            <a:schemeClr val="accent1"/>
+          </a:effectRef>
+          <a:fontRef idx="minor">
+            <a:schemeClr val="lt1"/>
+          </a:fontRef>
+        </p:style>
+        <p:txBody>
+          <a:bodyPr rtlCol="0" anchor="ctr" wrap="square" lIns="152400" tIns="127000"/>
+          <a:lstStyle/>
+          <a:p>
+            <a:pPr algn="ctr"/>
+            <a:r>
+              <a:rPr sz="1400">
+                <a:solidFill>
+                  <a:srgbClr val="000000"/>
+                </a:solidFill>
+                <a:latin typeface="Courier New"/>
+              </a:rPr>
+              <a:t>$ mongosh ecole_formation</a:t>
+            </a:r>
+          </a:p>
+          <a:p>
+            <a:r>
+              <a:rPr sz="1400">
+                <a:solidFill>
+                  <a:srgbClr val="000000"/>
+                </a:solidFill>
+                <a:latin typeface="Courier New"/>
+              </a:rPr>
+              <a:t> </a:t>
+            </a:r>
+          </a:p>
+          <a:p>
+            <a:r>
+              <a:rPr sz="1400">
+                <a:solidFill>
+                  <a:srgbClr val="000000"/>
+                </a:solidFill>
+                <a:latin typeface="Courier New"/>
+              </a:rPr>
+              <a:t>test&gt; db.getCollectionNames()</a:t>
+            </a:r>
+          </a:p>
+          <a:p>
+            <a:r>
+              <a:rPr sz="1400">
+                <a:solidFill>
+                  <a:srgbClr val="000000"/>
+                </a:solidFill>
+                <a:latin typeface="Courier New"/>
+              </a:rPr>
+              <a:t>[ 'utilisateurs', 'etudiants', 'formateurs',</a:t>
+            </a:r>
+          </a:p>
+          <a:p>
+            <a:r>
+              <a:rPr sz="1400">
+                <a:solidFill>
+                  <a:srgbClr val="000000"/>
+                </a:solidFill>
+                <a:latin typeface="Courier New"/>
+              </a:rPr>
+              <a:t>  'formations', 'inscriptions' ]</a:t>
+            </a:r>
+          </a:p>
+          <a:p>
+            <a:r>
+              <a:rPr sz="1400">
+                <a:solidFill>
+                  <a:srgbClr val="000000"/>
+                </a:solidFill>
+                <a:latin typeface="Courier New"/>
+              </a:rPr>
+              <a:t> </a:t>
+            </a:r>
+          </a:p>
+          <a:p>
+            <a:r>
+              <a:rPr sz="1400">
+                <a:solidFill>
+                  <a:srgbClr val="000000"/>
+                </a:solidFill>
+                <a:latin typeface="Courier New"/>
+              </a:rPr>
+              <a:t>test&gt; db.etudiants.countDocuments()      100</a:t>
+            </a:r>
+          </a:p>
+          <a:p>
+            <a:r>
+              <a:rPr sz="1400">
+                <a:solidFill>
+                  <a:srgbClr val="000000"/>
+                </a:solidFill>
+                <a:latin typeface="Courier New"/>
+              </a:rPr>
+              <a:t>test&gt; db.formateurs.countDocuments()      20</a:t>
+            </a:r>
+          </a:p>
+          <a:p>
+            <a:r>
+              <a:rPr sz="1400">
+                <a:solidFill>
+                  <a:srgbClr val="000000"/>
+                </a:solidFill>
+                <a:latin typeface="Courier New"/>
+              </a:rPr>
+              <a:t>test&gt; db.formations.countDocuments()      30</a:t>
+            </a:r>
+          </a:p>
+          <a:p>
+            <a:r>
+              <a:rPr sz="1400">
+                <a:solidFill>
+                  <a:srgbClr val="000000"/>
+                </a:solidFill>
+                <a:latin typeface="Courier New"/>
+              </a:rPr>
+              <a:t>test&gt; db.inscriptions.countDocuments()   200</a:t>
+            </a:r>
+          </a:p>
+        </p:txBody>
+      </p:sp>
+      <p:sp>
+        <p:nvSpPr>
+          <p:cNvPr id="7" name="TextBox 6"/>
           <p:cNvSpPr txBox="1"/>
           <p:nvPr/>
         </p:nvSpPr>
         <p:spPr>
           <a:xfrm>
-            <a:off x="731520" y="1691640"/>
-            <a:ext cx="10332720" cy="4114800"/>
+            <a:off x="7589520" y="1920240"/>
+            <a:ext cx="3840480" cy="365760"/>
+          </a:xfrm>
+          <a:prstGeom prst="rect">
+            <a:avLst/>
+          </a:prstGeom>
+          <a:noFill/>
+        </p:spPr>
+        <p:txBody>
+          <a:bodyPr wrap="square" anchor="t">
+            <a:spAutoFit/>
+          </a:bodyPr>
+          <a:lstStyle/>
+          <a:p>
+            <a:pPr algn="l"/>
+            <a:r>
+              <a:rPr sz="1500" b="1" i="0">
+                <a:solidFill>
+                  <a:srgbClr val="1F3C63"/>
+                </a:solidFill>
+                <a:latin typeface="Times New Roman"/>
+              </a:rPr>
+              <a:t>Index et performances</a:t>
+            </a:r>
+          </a:p>
+        </p:txBody>
+      </p:sp>
+      <p:sp>
+        <p:nvSpPr>
+          <p:cNvPr id="8" name="TextBox 7"/>
+          <p:cNvSpPr txBox="1"/>
+          <p:nvPr/>
+        </p:nvSpPr>
+        <p:spPr>
+          <a:xfrm>
+            <a:off x="7589520" y="2423160"/>
+            <a:ext cx="3840480" cy="3200400"/>
           </a:xfrm>
           <a:prstGeom prst="rect">
             <a:avLst/>
@@ -4575,81 +4874,49 @@
           <a:p>
             <a:pPr>
               <a:spcAft>
-                <a:spcPts val="1600"/>
+                <a:spcPts val="1400"/>
               </a:spcAft>
             </a:pPr>
             <a:r>
-              <a:rPr sz="1700">
+              <a:rPr sz="1400">
                 <a:solidFill>
                   <a:srgbClr val="000000"/>
                 </a:solidFill>
                 <a:latin typeface="Times New Roman"/>
               </a:rPr>
-              <a:t>•  Mots de passe hachés (PBKDF2-SHA256, Werkzeug), jamais stockés en clair</a:t>
+              <a:t>•  Email unique (login rapide)</a:t>
             </a:r>
           </a:p>
           <a:p>
             <a:pPr>
               <a:spcAft>
-                <a:spcPts val="1600"/>
+                <a:spcPts val="1400"/>
               </a:spcAft>
             </a:pPr>
             <a:r>
-              <a:rPr sz="1700">
+              <a:rPr sz="1400">
                 <a:solidFill>
                   <a:srgbClr val="000000"/>
                 </a:solidFill>
                 <a:latin typeface="Times New Roman"/>
               </a:rPr>
-              <a:t>•  Protection CSRF sur tous les formulaires (Flask-WTF)</a:t>
+              <a:t>•  Inscription active unique par étudiant/formation</a:t>
             </a:r>
           </a:p>
           <a:p>
             <a:pPr>
               <a:spcAft>
-                <a:spcPts val="1600"/>
+                <a:spcPts val="1400"/>
               </a:spcAft>
             </a:pPr>
             <a:r>
-              <a:rPr sz="1700">
+              <a:rPr sz="1400">
                 <a:solidFill>
                   <a:srgbClr val="000000"/>
                 </a:solidFill>
                 <a:latin typeface="Times New Roman"/>
               </a:rPr>
-              <a:t>•  Requêtes PyMongo paramétrées : pas d'injection NoSQL possible</a:t>
-            </a:r>
-          </a:p>
-          <a:p>
-            <a:pPr>
-              <a:spcAft>
-                <a:spcPts val="1600"/>
-              </a:spcAft>
-            </a:pPr>
-            <a:r>
-              <a:rPr sz="1700">
-                <a:solidFill>
-                  <a:srgbClr val="000000"/>
-                </a:solidFill>
-                <a:latin typeface="Times New Roman"/>
-              </a:rPr>
-              <a:t>•  Auto-échappement Jinja2 : protection XSS systématique</a:t>
-            </a:r>
-          </a:p>
-          <a:p>
-            <a:pPr>
-              <a:spcAft>
-                <a:spcPts val="1600"/>
-              </a:spcAft>
-            </a:pPr>
-            <a:r>
-              <a:rPr sz="1700">
-                <a:solidFill>
-                  <a:srgbClr val="000000"/>
-                </a:solidFill>
-                <a:latin typeface="Times New Roman"/>
-              </a:rPr>
-              <a:t>•  Autorisations par rôle (@roles_required) + vérification de propriété (formateur / étudiant)</a:t>
+              <a:t>•  COLLSCAN → IXSCAN après index</a:t>
             </a:r>
           </a:p>
         </p:txBody>
@@ -4710,7 +4977,7 @@
                 </a:solidFill>
                 <a:latin typeface="Times New Roman"/>
               </a:rPr>
-              <a:t>DÉMONSTRATION</a:t>
+              <a:t>APPLICATION</a:t>
             </a:r>
           </a:p>
         </p:txBody>
@@ -4745,7 +5012,7 @@
                 </a:solidFill>
                 <a:latin typeface="Times New Roman"/>
               </a:rPr>
-              <a:t>Aperçu de l'application</a:t>
+              <a:t>Sécurité</a:t>
             </a:r>
           </a:p>
         </p:txBody>
@@ -4831,103 +5098,103 @@
       </p:sp>
       <p:sp>
         <p:nvSpPr>
-          <p:cNvPr id="6" name="Rectangle 5"/>
-          <p:cNvSpPr/>
-          <p:nvPr/>
-        </p:nvSpPr>
-        <p:spPr>
-          <a:xfrm>
-            <a:off x="2169160" y="1574800"/>
-            <a:ext cx="6897827" cy="4805680"/>
+          <p:cNvPr id="6" name="TextBox 5"/>
+          <p:cNvSpPr txBox="1"/>
+          <p:nvPr/>
+        </p:nvSpPr>
+        <p:spPr>
+          <a:xfrm>
+            <a:off x="731520" y="1691640"/>
+            <a:ext cx="10332720" cy="4114800"/>
           </a:xfrm>
           <a:prstGeom prst="rect">
             <a:avLst/>
           </a:prstGeom>
           <a:noFill/>
-          <a:ln w="12700">
-            <a:solidFill>
-              <a:srgbClr val="9A9A9A"/>
-            </a:solidFill>
-          </a:ln>
-          <a:effectLst/>
-        </p:spPr>
-        <p:style>
-          <a:lnRef idx="1">
-            <a:schemeClr val="accent1"/>
-          </a:lnRef>
-          <a:fillRef idx="3">
-            <a:schemeClr val="accent1"/>
-          </a:fillRef>
-          <a:effectRef idx="2">
-            <a:schemeClr val="accent1"/>
-          </a:effectRef>
-          <a:fontRef idx="minor">
-            <a:schemeClr val="lt1"/>
-          </a:fontRef>
-        </p:style>
-        <p:txBody>
-          <a:bodyPr rtlCol="0" anchor="ctr"/>
-          <a:lstStyle/>
-          <a:p>
-            <a:pPr algn="ctr"/>
-          </a:p>
-        </p:txBody>
-      </p:sp>
-      <p:pic>
-        <p:nvPicPr>
-          <p:cNvPr id="7" name="Picture 6" descr="admin_dashboard_crop.png"/>
-          <p:cNvPicPr>
-            <a:picLocks noChangeAspect="1"/>
-          </p:cNvPicPr>
-          <p:nvPr/>
-        </p:nvPicPr>
-        <p:blipFill>
-          <a:blip r:embed="rId2"/>
-          <a:stretch>
-            <a:fillRect/>
-          </a:stretch>
-        </p:blipFill>
-        <p:spPr>
-          <a:xfrm>
-            <a:off x="2194560" y="1600200"/>
-            <a:ext cx="6847027" cy="4754880"/>
-          </a:xfrm>
-          <a:prstGeom prst="rect">
-            <a:avLst/>
-          </a:prstGeom>
-        </p:spPr>
-      </p:pic>
-      <p:sp>
-        <p:nvSpPr>
-          <p:cNvPr id="8" name="TextBox 7"/>
-          <p:cNvSpPr txBox="1"/>
-          <p:nvPr/>
-        </p:nvSpPr>
-        <p:spPr>
-          <a:xfrm>
-            <a:off x="2194560" y="6431280"/>
-            <a:ext cx="6847027" cy="320040"/>
-          </a:xfrm>
-          <a:prstGeom prst="rect">
-            <a:avLst/>
-          </a:prstGeom>
-          <a:noFill/>
-        </p:spPr>
-        <p:txBody>
-          <a:bodyPr wrap="square" anchor="t">
+        </p:spPr>
+        <p:txBody>
+          <a:bodyPr wrap="square">
             <a:spAutoFit/>
           </a:bodyPr>
           <a:lstStyle/>
           <a:p>
-            <a:pPr algn="ctr"/>
-            <a:r>
-              <a:rPr sz="1200" b="0" i="1">
-                <a:solidFill>
-                  <a:srgbClr val="404040"/>
-                </a:solidFill>
-                <a:latin typeface="Times New Roman"/>
-              </a:rPr>
-              <a:t>Tableau de bord administrateur — statistiques calculées par agrégation MongoDB</a:t>
+            <a:pPr>
+              <a:spcAft>
+                <a:spcPts val="1600"/>
+              </a:spcAft>
+            </a:pPr>
+            <a:r>
+              <a:rPr sz="1700">
+                <a:solidFill>
+                  <a:srgbClr val="000000"/>
+                </a:solidFill>
+                <a:latin typeface="Times New Roman"/>
+              </a:rPr>
+              <a:t>•  Mots de passe hachés (PBKDF2-SHA256, Werkzeug), jamais stockés en clair</a:t>
+            </a:r>
+          </a:p>
+          <a:p>
+            <a:pPr>
+              <a:spcAft>
+                <a:spcPts val="1600"/>
+              </a:spcAft>
+            </a:pPr>
+            <a:r>
+              <a:rPr sz="1700">
+                <a:solidFill>
+                  <a:srgbClr val="000000"/>
+                </a:solidFill>
+                <a:latin typeface="Times New Roman"/>
+              </a:rPr>
+              <a:t>•  Protection CSRF sur tous les formulaires (Flask-WTF)</a:t>
+            </a:r>
+          </a:p>
+          <a:p>
+            <a:pPr>
+              <a:spcAft>
+                <a:spcPts val="1600"/>
+              </a:spcAft>
+            </a:pPr>
+            <a:r>
+              <a:rPr sz="1700">
+                <a:solidFill>
+                  <a:srgbClr val="000000"/>
+                </a:solidFill>
+                <a:latin typeface="Times New Roman"/>
+              </a:rPr>
+              <a:t>•  Requêtes PyMongo paramétrées : pas d'injection NoSQL possible</a:t>
+            </a:r>
+          </a:p>
+          <a:p>
+            <a:pPr>
+              <a:spcAft>
+                <a:spcPts val="1600"/>
+              </a:spcAft>
+            </a:pPr>
+            <a:r>
+              <a:rPr sz="1700">
+                <a:solidFill>
+                  <a:srgbClr val="000000"/>
+                </a:solidFill>
+                <a:latin typeface="Times New Roman"/>
+              </a:rPr>
+              <a:t>•  Auto-échappement Jinja2 : protection XSS systématique</a:t>
+            </a:r>
+          </a:p>
+          <a:p>
+            <a:pPr>
+              <a:spcAft>
+                <a:spcPts val="1600"/>
+              </a:spcAft>
+            </a:pPr>
+            <a:r>
+              <a:rPr sz="1700">
+                <a:solidFill>
+                  <a:srgbClr val="000000"/>
+                </a:solidFill>
+                <a:latin typeface="Times New Roman"/>
+              </a:rPr>
+              <a:t>•  Autorisations par rôle (@roles_required) + vérification de propriété (formateur / étudiant)</a:t>
             </a:r>
           </a:p>
         </p:txBody>
@@ -4988,7 +5255,7 @@
                 </a:solidFill>
                 <a:latin typeface="Times New Roman"/>
               </a:rPr>
-              <a:t>ORGANISATION</a:t>
+              <a:t>DÉMONSTRATION</a:t>
             </a:r>
           </a:p>
         </p:txBody>
@@ -5023,7 +5290,7 @@
                 </a:solidFill>
                 <a:latin typeface="Times New Roman"/>
               </a:rPr>
-              <a:t>Répartition du travail — 3 développeurs</a:t>
+              <a:t>Aperçu de l'application</a:t>
             </a:r>
           </a:p>
         </p:txBody>
@@ -5103,6 +5370,284 @@
                 <a:latin typeface="Times New Roman"/>
               </a:rPr>
               <a:t>13</a:t>
+            </a:r>
+          </a:p>
+        </p:txBody>
+      </p:sp>
+      <p:sp>
+        <p:nvSpPr>
+          <p:cNvPr id="6" name="Rectangle 5"/>
+          <p:cNvSpPr/>
+          <p:nvPr/>
+        </p:nvSpPr>
+        <p:spPr>
+          <a:xfrm>
+            <a:off x="2169160" y="1574800"/>
+            <a:ext cx="6897827" cy="4805680"/>
+          </a:xfrm>
+          <a:prstGeom prst="rect">
+            <a:avLst/>
+          </a:prstGeom>
+          <a:noFill/>
+          <a:ln w="12700">
+            <a:solidFill>
+              <a:srgbClr val="9A9A9A"/>
+            </a:solidFill>
+          </a:ln>
+          <a:effectLst/>
+        </p:spPr>
+        <p:style>
+          <a:lnRef idx="1">
+            <a:schemeClr val="accent1"/>
+          </a:lnRef>
+          <a:fillRef idx="3">
+            <a:schemeClr val="accent1"/>
+          </a:fillRef>
+          <a:effectRef idx="2">
+            <a:schemeClr val="accent1"/>
+          </a:effectRef>
+          <a:fontRef idx="minor">
+            <a:schemeClr val="lt1"/>
+          </a:fontRef>
+        </p:style>
+        <p:txBody>
+          <a:bodyPr rtlCol="0" anchor="ctr"/>
+          <a:lstStyle/>
+          <a:p>
+            <a:pPr algn="ctr"/>
+          </a:p>
+        </p:txBody>
+      </p:sp>
+      <p:pic>
+        <p:nvPicPr>
+          <p:cNvPr id="7" name="Picture 6" descr="admin_dashboard_crop.png"/>
+          <p:cNvPicPr>
+            <a:picLocks noChangeAspect="1"/>
+          </p:cNvPicPr>
+          <p:nvPr/>
+        </p:nvPicPr>
+        <p:blipFill>
+          <a:blip r:embed="rId2"/>
+          <a:stretch>
+            <a:fillRect/>
+          </a:stretch>
+        </p:blipFill>
+        <p:spPr>
+          <a:xfrm>
+            <a:off x="2194560" y="1600200"/>
+            <a:ext cx="6847027" cy="4754880"/>
+          </a:xfrm>
+          <a:prstGeom prst="rect">
+            <a:avLst/>
+          </a:prstGeom>
+        </p:spPr>
+      </p:pic>
+      <p:sp>
+        <p:nvSpPr>
+          <p:cNvPr id="8" name="TextBox 7"/>
+          <p:cNvSpPr txBox="1"/>
+          <p:nvPr/>
+        </p:nvSpPr>
+        <p:spPr>
+          <a:xfrm>
+            <a:off x="2194560" y="6431280"/>
+            <a:ext cx="6847027" cy="320040"/>
+          </a:xfrm>
+          <a:prstGeom prst="rect">
+            <a:avLst/>
+          </a:prstGeom>
+          <a:noFill/>
+        </p:spPr>
+        <p:txBody>
+          <a:bodyPr wrap="square" anchor="t">
+            <a:spAutoFit/>
+          </a:bodyPr>
+          <a:lstStyle/>
+          <a:p>
+            <a:pPr algn="ctr"/>
+            <a:r>
+              <a:rPr sz="1200" b="0" i="1">
+                <a:solidFill>
+                  <a:srgbClr val="404040"/>
+                </a:solidFill>
+                <a:latin typeface="Times New Roman"/>
+              </a:rPr>
+              <a:t>Tableau de bord administrateur — statistiques calculées par agrégation MongoDB</a:t>
+            </a:r>
+          </a:p>
+        </p:txBody>
+      </p:sp>
+    </p:spTree>
+  </p:cSld>
+  <p:clrMapOvr>
+    <a:masterClrMapping/>
+  </p:clrMapOvr>
+</p:sld>
+</file>
+
+<file path=ppt/slides/slide15.xml><?xml version="1.0" encoding="utf-8"?>
+<p:sld xmlns:a="http://schemas.openxmlformats.org/drawingml/2006/main" xmlns:p="http://schemas.openxmlformats.org/presentationml/2006/main" xmlns:r="http://schemas.openxmlformats.org/officeDocument/2006/relationships">
+  <p:cSld>
+    <p:bg>
+      <p:bgPr>
+        <a:solidFill>
+          <a:srgbClr val="FFFFFF"/>
+        </a:solidFill>
+        <a:effectLst/>
+      </p:bgPr>
+    </p:bg>
+    <p:spTree>
+      <p:nvGrpSpPr>
+        <p:cNvPr id="1" name=""/>
+        <p:cNvGrpSpPr/>
+        <p:nvPr/>
+      </p:nvGrpSpPr>
+      <p:grpSpPr/>
+      <p:sp>
+        <p:nvSpPr>
+          <p:cNvPr id="2" name="TextBox 1"/>
+          <p:cNvSpPr txBox="1"/>
+          <p:nvPr/>
+        </p:nvSpPr>
+        <p:spPr>
+          <a:xfrm>
+            <a:off x="731520" y="365760"/>
+            <a:ext cx="10515600" cy="320040"/>
+          </a:xfrm>
+          <a:prstGeom prst="rect">
+            <a:avLst/>
+          </a:prstGeom>
+          <a:noFill/>
+        </p:spPr>
+        <p:txBody>
+          <a:bodyPr wrap="square" anchor="t">
+            <a:spAutoFit/>
+          </a:bodyPr>
+          <a:lstStyle/>
+          <a:p>
+            <a:pPr algn="l"/>
+            <a:r>
+              <a:rPr sz="1300" b="1" i="0">
+                <a:solidFill>
+                  <a:srgbClr val="1F3C63"/>
+                </a:solidFill>
+                <a:latin typeface="Times New Roman"/>
+              </a:rPr>
+              <a:t>ORGANISATION</a:t>
+            </a:r>
+          </a:p>
+        </p:txBody>
+      </p:sp>
+      <p:sp>
+        <p:nvSpPr>
+          <p:cNvPr id="3" name="TextBox 2"/>
+          <p:cNvSpPr txBox="1"/>
+          <p:nvPr/>
+        </p:nvSpPr>
+        <p:spPr>
+          <a:xfrm>
+            <a:off x="731520" y="658368"/>
+            <a:ext cx="10698480" cy="731520"/>
+          </a:xfrm>
+          <a:prstGeom prst="rect">
+            <a:avLst/>
+          </a:prstGeom>
+          <a:noFill/>
+        </p:spPr>
+        <p:txBody>
+          <a:bodyPr wrap="square" anchor="t">
+            <a:spAutoFit/>
+          </a:bodyPr>
+          <a:lstStyle/>
+          <a:p>
+            <a:pPr algn="l"/>
+            <a:r>
+              <a:rPr sz="2800" b="1" i="0">
+                <a:solidFill>
+                  <a:srgbClr val="000000"/>
+                </a:solidFill>
+                <a:latin typeface="Times New Roman"/>
+              </a:rPr>
+              <a:t>Répartition du travail — 3 développeurs</a:t>
+            </a:r>
+          </a:p>
+        </p:txBody>
+      </p:sp>
+      <p:sp>
+        <p:nvSpPr>
+          <p:cNvPr id="4" name="Rectangle 3"/>
+          <p:cNvSpPr/>
+          <p:nvPr/>
+        </p:nvSpPr>
+        <p:spPr>
+          <a:xfrm>
+            <a:off x="731520" y="1344168"/>
+            <a:ext cx="10698480" cy="15875"/>
+          </a:xfrm>
+          <a:prstGeom prst="rect">
+            <a:avLst/>
+          </a:prstGeom>
+          <a:solidFill>
+            <a:srgbClr val="1F3C63"/>
+          </a:solidFill>
+          <a:ln>
+            <a:noFill/>
+          </a:ln>
+          <a:effectLst/>
+        </p:spPr>
+        <p:style>
+          <a:lnRef idx="1">
+            <a:schemeClr val="accent1"/>
+          </a:lnRef>
+          <a:fillRef idx="3">
+            <a:schemeClr val="accent1"/>
+          </a:fillRef>
+          <a:effectRef idx="2">
+            <a:schemeClr val="accent1"/>
+          </a:effectRef>
+          <a:fontRef idx="minor">
+            <a:schemeClr val="lt1"/>
+          </a:fontRef>
+        </p:style>
+        <p:txBody>
+          <a:bodyPr rtlCol="0" anchor="ctr"/>
+          <a:lstStyle/>
+          <a:p>
+            <a:pPr algn="ctr"/>
+          </a:p>
+        </p:txBody>
+      </p:sp>
+      <p:sp>
+        <p:nvSpPr>
+          <p:cNvPr id="5" name="TextBox 4"/>
+          <p:cNvSpPr txBox="1"/>
+          <p:nvPr/>
+        </p:nvSpPr>
+        <p:spPr>
+          <a:xfrm>
+            <a:off x="11185855" y="6400800"/>
+            <a:ext cx="640080" cy="320040"/>
+          </a:xfrm>
+          <a:prstGeom prst="rect">
+            <a:avLst/>
+          </a:prstGeom>
+          <a:noFill/>
+        </p:spPr>
+        <p:txBody>
+          <a:bodyPr wrap="square" anchor="t">
+            <a:spAutoFit/>
+          </a:bodyPr>
+          <a:lstStyle/>
+          <a:p>
+            <a:pPr algn="r"/>
+            <a:r>
+              <a:rPr sz="1100" b="0" i="0">
+                <a:solidFill>
+                  <a:srgbClr val="404040"/>
+                </a:solidFill>
+                <a:latin typeface="Times New Roman"/>
+              </a:rPr>
+              <a:t>14</a:t>
             </a:r>
           </a:p>
         </p:txBody>
@@ -5279,7 +5824,7 @@
 </p:sld>
 </file>
 
-<file path=ppt/slides/slide15.xml><?xml version="1.0" encoding="utf-8"?>
+<file path=ppt/slides/slide16.xml><?xml version="1.0" encoding="utf-8"?>
 <p:sld xmlns:a="http://schemas.openxmlformats.org/drawingml/2006/main" xmlns:p="http://schemas.openxmlformats.org/presentationml/2006/main" xmlns:r="http://schemas.openxmlformats.org/officeDocument/2006/relationships">
   <p:cSld>
     <p:bg>
@@ -5441,7 +5986,7 @@
                 </a:solidFill>
                 <a:latin typeface="Times New Roman"/>
               </a:rPr>
-              <a:t>14</a:t>
+              <a:t>15</a:t>
             </a:r>
           </a:p>
         </p:txBody>
@@ -5726,7 +6271,7 @@
                 </a:solidFill>
                 <a:latin typeface="Times New Roman"/>
               </a:rPr>
-              <a:t>INTRODUCTION</a:t>
+              <a:t>PLAN DE LA PRÉSENTATION</a:t>
             </a:r>
           </a:p>
         </p:txBody>
@@ -5761,7 +6306,7 @@
                 </a:solidFill>
                 <a:latin typeface="Times New Roman"/>
               </a:rPr>
-              <a:t>Contexte et objectifs</a:t>
+              <a:t>Sommaire</a:t>
             </a:r>
           </a:p>
         </p:txBody>
@@ -5853,8 +6398,8 @@
         </p:nvSpPr>
         <p:spPr>
           <a:xfrm>
-            <a:off x="731520" y="1645920"/>
-            <a:ext cx="10332720" cy="2011680"/>
+            <a:off x="731520" y="1737360"/>
+            <a:ext cx="5120640" cy="4389120"/>
           </a:xfrm>
           <a:prstGeom prst="rect">
             <a:avLst/>
@@ -5869,49 +6414,113 @@
           <a:p>
             <a:pPr>
               <a:spcAft>
-                <a:spcPts val="1400"/>
+                <a:spcPts val="1800"/>
               </a:spcAft>
             </a:pPr>
             <a:r>
-              <a:rPr sz="1700">
+              <a:rPr sz="1600">
                 <a:solidFill>
                   <a:srgbClr val="000000"/>
                 </a:solidFill>
                 <a:latin typeface="Times New Roman"/>
               </a:rPr>
-              <a:t>•  Une école veut centraliser la gestion de ses étudiants, formateurs, formations et inscriptions</a:t>
+              <a:t>1. Contexte et objectifs</a:t>
             </a:r>
           </a:p>
           <a:p>
             <a:pPr>
               <a:spcAft>
-                <a:spcPts val="1400"/>
+                <a:spcPts val="1800"/>
               </a:spcAft>
             </a:pPr>
             <a:r>
-              <a:rPr sz="1700">
+              <a:rPr sz="1600">
                 <a:solidFill>
                   <a:srgbClr val="000000"/>
                 </a:solidFill>
                 <a:latin typeface="Times New Roman"/>
               </a:rPr>
-              <a:t>•  Remplacement des outils manuels (tableurs, emails) par une application web unique</a:t>
+              <a:t>2. Besoins fonctionnels et non fonctionnels</a:t>
             </a:r>
           </a:p>
           <a:p>
             <a:pPr>
               <a:spcAft>
-                <a:spcPts val="1400"/>
+                <a:spcPts val="1800"/>
               </a:spcAft>
             </a:pPr>
             <a:r>
-              <a:rPr sz="1700">
+              <a:rPr sz="1600">
                 <a:solidFill>
                   <a:srgbClr val="000000"/>
                 </a:solidFill>
                 <a:latin typeface="Times New Roman"/>
               </a:rPr>
-              <a:t>•  Trois profils d'accès : administrateur, formateur, étudiant</a:t>
+              <a:t>3. Acteurs</a:t>
+            </a:r>
+          </a:p>
+          <a:p>
+            <a:pPr>
+              <a:spcAft>
+                <a:spcPts val="1800"/>
+              </a:spcAft>
+            </a:pPr>
+            <a:r>
+              <a:rPr sz="1600">
+                <a:solidFill>
+                  <a:srgbClr val="000000"/>
+                </a:solidFill>
+                <a:latin typeface="Times New Roman"/>
+              </a:rPr>
+              <a:t>4. Diagramme de cas d'utilisation</a:t>
+            </a:r>
+          </a:p>
+          <a:p>
+            <a:pPr>
+              <a:spcAft>
+                <a:spcPts val="1800"/>
+              </a:spcAft>
+            </a:pPr>
+            <a:r>
+              <a:rPr sz="1600">
+                <a:solidFill>
+                  <a:srgbClr val="000000"/>
+                </a:solidFill>
+                <a:latin typeface="Times New Roman"/>
+              </a:rPr>
+              <a:t>5. Stack technique</a:t>
+            </a:r>
+          </a:p>
+          <a:p>
+            <a:pPr>
+              <a:spcAft>
+                <a:spcPts val="1800"/>
+              </a:spcAft>
+            </a:pPr>
+            <a:r>
+              <a:rPr sz="1600">
+                <a:solidFill>
+                  <a:srgbClr val="000000"/>
+                </a:solidFill>
+                <a:latin typeface="Times New Roman"/>
+              </a:rPr>
+              <a:t>6. Les 5 collections MongoDB</a:t>
+            </a:r>
+          </a:p>
+          <a:p>
+            <a:pPr>
+              <a:spcAft>
+                <a:spcPts val="1800"/>
+              </a:spcAft>
+            </a:pPr>
+            <a:r>
+              <a:rPr sz="1600">
+                <a:solidFill>
+                  <a:srgbClr val="000000"/>
+                </a:solidFill>
+                <a:latin typeface="Times New Roman"/>
+              </a:rPr>
+              <a:t>7. Références vs documents imbriqués</a:t>
             </a:r>
           </a:p>
         </p:txBody>
@@ -5924,43 +6533,8 @@
         </p:nvSpPr>
         <p:spPr>
           <a:xfrm>
-            <a:off x="731520" y="3931920"/>
-            <a:ext cx="10332720" cy="365760"/>
-          </a:xfrm>
-          <a:prstGeom prst="rect">
-            <a:avLst/>
-          </a:prstGeom>
-          <a:noFill/>
-        </p:spPr>
-        <p:txBody>
-          <a:bodyPr wrap="square" anchor="t">
-            <a:spAutoFit/>
-          </a:bodyPr>
-          <a:lstStyle/>
-          <a:p>
-            <a:pPr algn="l"/>
-            <a:r>
-              <a:rPr sz="1600" b="1" i="0">
-                <a:solidFill>
-                  <a:srgbClr val="1F3C63"/>
-                </a:solidFill>
-                <a:latin typeface="Times New Roman"/>
-              </a:rPr>
-              <a:t>Contrainte imposée</a:t>
-            </a:r>
-          </a:p>
-        </p:txBody>
-      </p:sp>
-      <p:sp>
-        <p:nvSpPr>
-          <p:cNvPr id="8" name="TextBox 7"/>
-          <p:cNvSpPr txBox="1"/>
-          <p:nvPr/>
-        </p:nvSpPr>
-        <p:spPr>
-          <a:xfrm>
-            <a:off x="731520" y="4389120"/>
-            <a:ext cx="10332720" cy="1645920"/>
+            <a:off x="6309360" y="1737360"/>
+            <a:ext cx="5120640" cy="4389120"/>
           </a:xfrm>
           <a:prstGeom prst="rect">
             <a:avLst/>
@@ -5975,7 +6549,7 @@
           <a:p>
             <a:pPr>
               <a:spcAft>
-                <a:spcPts val="1200"/>
+                <a:spcPts val="1800"/>
               </a:spcAft>
             </a:pPr>
             <a:r>
@@ -5985,13 +6559,13 @@
                 </a:solidFill>
                 <a:latin typeface="Times New Roman"/>
               </a:rPr>
-              <a:t>•  Base de données NoSQL obligatoire : MongoDB</a:t>
+              <a:t>8. Fonctions et méthodes principales</a:t>
             </a:r>
           </a:p>
           <a:p>
             <a:pPr>
               <a:spcAft>
-                <a:spcPts val="1200"/>
+                <a:spcPts val="1800"/>
               </a:spcAft>
             </a:pPr>
             <a:r>
@@ -6001,7 +6575,87 @@
                 </a:solidFill>
                 <a:latin typeface="Times New Roman"/>
               </a:rPr>
-              <a:t>•  Accès aux données via PyMongo, sans ORM — manipulation directe des documents et pipelines d'agrégation</a:t>
+              <a:t>9. Pipelines d'agrégation</a:t>
+            </a:r>
+          </a:p>
+          <a:p>
+            <a:pPr>
+              <a:spcAft>
+                <a:spcPts val="1800"/>
+              </a:spcAft>
+            </a:pPr>
+            <a:r>
+              <a:rPr sz="1600">
+                <a:solidFill>
+                  <a:srgbClr val="000000"/>
+                </a:solidFill>
+                <a:latin typeface="Times New Roman"/>
+              </a:rPr>
+              <a:t>10. Aperçu réel de la base de données</a:t>
+            </a:r>
+          </a:p>
+          <a:p>
+            <a:pPr>
+              <a:spcAft>
+                <a:spcPts val="1800"/>
+              </a:spcAft>
+            </a:pPr>
+            <a:r>
+              <a:rPr sz="1600">
+                <a:solidFill>
+                  <a:srgbClr val="000000"/>
+                </a:solidFill>
+                <a:latin typeface="Times New Roman"/>
+              </a:rPr>
+              <a:t>11. Sécurité</a:t>
+            </a:r>
+          </a:p>
+          <a:p>
+            <a:pPr>
+              <a:spcAft>
+                <a:spcPts val="1800"/>
+              </a:spcAft>
+            </a:pPr>
+            <a:r>
+              <a:rPr sz="1600">
+                <a:solidFill>
+                  <a:srgbClr val="000000"/>
+                </a:solidFill>
+                <a:latin typeface="Times New Roman"/>
+              </a:rPr>
+              <a:t>12. Aperçu de l'application</a:t>
+            </a:r>
+          </a:p>
+          <a:p>
+            <a:pPr>
+              <a:spcAft>
+                <a:spcPts val="1800"/>
+              </a:spcAft>
+            </a:pPr>
+            <a:r>
+              <a:rPr sz="1600">
+                <a:solidFill>
+                  <a:srgbClr val="000000"/>
+                </a:solidFill>
+                <a:latin typeface="Times New Roman"/>
+              </a:rPr>
+              <a:t>13. Répartition du travail</a:t>
+            </a:r>
+          </a:p>
+          <a:p>
+            <a:pPr>
+              <a:spcAft>
+                <a:spcPts val="1800"/>
+              </a:spcAft>
+            </a:pPr>
+            <a:r>
+              <a:rPr sz="1600">
+                <a:solidFill>
+                  <a:srgbClr val="000000"/>
+                </a:solidFill>
+                <a:latin typeface="Times New Roman"/>
+              </a:rPr>
+              <a:t>14. Conclusion et perspectives</a:t>
             </a:r>
           </a:p>
         </p:txBody>
@@ -6062,7 +6716,7 @@
                 </a:solidFill>
                 <a:latin typeface="Times New Roman"/>
               </a:rPr>
-              <a:t>CAHIER DES CHARGES</a:t>
+              <a:t>INTRODUCTION</a:t>
             </a:r>
           </a:p>
         </p:txBody>
@@ -6097,7 +6751,7 @@
                 </a:solidFill>
                 <a:latin typeface="Times New Roman"/>
               </a:rPr>
-              <a:t>Besoins fonctionnels et non fonctionnels</a:t>
+              <a:t>Contexte et objectifs</a:t>
             </a:r>
           </a:p>
         </p:txBody>
@@ -6189,43 +6843,8 @@
         </p:nvSpPr>
         <p:spPr>
           <a:xfrm>
-            <a:off x="731520" y="1554480"/>
-            <a:ext cx="5120640" cy="365760"/>
-          </a:xfrm>
-          <a:prstGeom prst="rect">
-            <a:avLst/>
-          </a:prstGeom>
-          <a:noFill/>
-        </p:spPr>
-        <p:txBody>
-          <a:bodyPr wrap="square" anchor="t">
-            <a:spAutoFit/>
-          </a:bodyPr>
-          <a:lstStyle/>
-          <a:p>
-            <a:pPr algn="l"/>
-            <a:r>
-              <a:rPr sz="1600" b="1" i="0">
-                <a:solidFill>
-                  <a:srgbClr val="1F3C63"/>
-                </a:solidFill>
-                <a:latin typeface="Times New Roman"/>
-              </a:rPr>
-              <a:t>Fonctionnels</a:t>
-            </a:r>
-          </a:p>
-        </p:txBody>
-      </p:sp>
-      <p:sp>
-        <p:nvSpPr>
-          <p:cNvPr id="7" name="TextBox 6"/>
-          <p:cNvSpPr txBox="1"/>
-          <p:nvPr/>
-        </p:nvSpPr>
-        <p:spPr>
-          <a:xfrm>
-            <a:off x="731520" y="2011680"/>
-            <a:ext cx="5120640" cy="4206240"/>
+            <a:off x="731520" y="1645920"/>
+            <a:ext cx="10332720" cy="2011680"/>
           </a:xfrm>
           <a:prstGeom prst="rect">
             <a:avLst/>
@@ -6244,13 +6863,13 @@
               </a:spcAft>
             </a:pPr>
             <a:r>
-              <a:rPr sz="1550">
+              <a:rPr sz="1700">
                 <a:solidFill>
                   <a:srgbClr val="000000"/>
                 </a:solidFill>
                 <a:latin typeface="Times New Roman"/>
               </a:rPr>
-              <a:t>•  Authentification sécurisée, par rôle</a:t>
+              <a:t>•  Une école veut centraliser la gestion de ses étudiants, formateurs, formations et inscriptions</a:t>
             </a:r>
           </a:p>
           <a:p>
@@ -6260,13 +6879,13 @@
               </a:spcAft>
             </a:pPr>
             <a:r>
-              <a:rPr sz="1550">
+              <a:rPr sz="1700">
                 <a:solidFill>
                   <a:srgbClr val="000000"/>
                 </a:solidFill>
                 <a:latin typeface="Times New Roman"/>
               </a:rPr>
-              <a:t>•  Gestion des étudiants, formateurs, formations (CRUD)</a:t>
+              <a:t>•  Remplacement des outils manuels (tableurs, emails) par une application web unique</a:t>
             </a:r>
           </a:p>
           <a:p>
@@ -6276,59 +6895,27 @@
               </a:spcAft>
             </a:pPr>
             <a:r>
-              <a:rPr sz="1550">
+              <a:rPr sz="1700">
                 <a:solidFill>
                   <a:srgbClr val="000000"/>
                 </a:solidFill>
                 <a:latin typeface="Times New Roman"/>
               </a:rPr>
-              <a:t>•  Inscriptions et annulations</a:t>
-            </a:r>
-          </a:p>
-          <a:p>
-            <a:pPr>
-              <a:spcAft>
-                <a:spcPts val="1400"/>
-              </a:spcAft>
-            </a:pPr>
-            <a:r>
-              <a:rPr sz="1550">
-                <a:solidFill>
-                  <a:srgbClr val="000000"/>
-                </a:solidFill>
-                <a:latin typeface="Times New Roman"/>
-              </a:rPr>
-              <a:t>•  Notation par le formateur (0 à 20)</a:t>
-            </a:r>
-          </a:p>
-          <a:p>
-            <a:pPr>
-              <a:spcAft>
-                <a:spcPts val="1400"/>
-              </a:spcAft>
-            </a:pPr>
-            <a:r>
-              <a:rPr sz="1550">
-                <a:solidFill>
-                  <a:srgbClr val="000000"/>
-                </a:solidFill>
-                <a:latin typeface="Times New Roman"/>
-              </a:rPr>
-              <a:t>•  Tableau de bord et statistiques</a:t>
-            </a:r>
-          </a:p>
-        </p:txBody>
-      </p:sp>
-      <p:sp>
-        <p:nvSpPr>
-          <p:cNvPr id="8" name="TextBox 7"/>
+              <a:t>•  Trois profils d'accès : administrateur, formateur, étudiant</a:t>
+            </a:r>
+          </a:p>
+        </p:txBody>
+      </p:sp>
+      <p:sp>
+        <p:nvSpPr>
+          <p:cNvPr id="7" name="TextBox 6"/>
           <p:cNvSpPr txBox="1"/>
           <p:nvPr/>
         </p:nvSpPr>
         <p:spPr>
           <a:xfrm>
-            <a:off x="6309360" y="1554480"/>
-            <a:ext cx="5120640" cy="365760"/>
+            <a:off x="731520" y="3931920"/>
+            <a:ext cx="10332720" cy="365760"/>
           </a:xfrm>
           <a:prstGeom prst="rect">
             <a:avLst/>
@@ -6349,21 +6936,21 @@
                 </a:solidFill>
                 <a:latin typeface="Times New Roman"/>
               </a:rPr>
-              <a:t>Non fonctionnels</a:t>
-            </a:r>
-          </a:p>
-        </p:txBody>
-      </p:sp>
-      <p:sp>
-        <p:nvSpPr>
-          <p:cNvPr id="9" name="TextBox 8"/>
+              <a:t>Contrainte imposée</a:t>
+            </a:r>
+          </a:p>
+        </p:txBody>
+      </p:sp>
+      <p:sp>
+        <p:nvSpPr>
+          <p:cNvPr id="8" name="TextBox 7"/>
           <p:cNvSpPr txBox="1"/>
           <p:nvPr/>
         </p:nvSpPr>
         <p:spPr>
           <a:xfrm>
-            <a:off x="6309360" y="2011680"/>
-            <a:ext cx="5120640" cy="4206240"/>
+            <a:off x="731520" y="4389120"/>
+            <a:ext cx="10332720" cy="1645920"/>
           </a:xfrm>
           <a:prstGeom prst="rect">
             <a:avLst/>
@@ -6378,65 +6965,33 @@
           <a:p>
             <a:pPr>
               <a:spcAft>
-                <a:spcPts val="1400"/>
+                <a:spcPts val="1200"/>
               </a:spcAft>
             </a:pPr>
             <a:r>
-              <a:rPr sz="1550">
+              <a:rPr sz="1600">
                 <a:solidFill>
                   <a:srgbClr val="000000"/>
                 </a:solidFill>
                 <a:latin typeface="Times New Roman"/>
               </a:rPr>
-              <a:t>•  Sécurité : mots de passe hachés, CSRF, protection par rôle</a:t>
+              <a:t>•  Base de données NoSQL obligatoire : MongoDB</a:t>
             </a:r>
           </a:p>
           <a:p>
             <a:pPr>
               <a:spcAft>
-                <a:spcPts val="1400"/>
+                <a:spcPts val="1200"/>
               </a:spcAft>
             </a:pPr>
             <a:r>
-              <a:rPr sz="1550">
+              <a:rPr sz="1600">
                 <a:solidFill>
                   <a:srgbClr val="000000"/>
                 </a:solidFill>
                 <a:latin typeface="Times New Roman"/>
               </a:rPr>
-              <a:t>•  Ergonomie : interface responsive, messages clairs</a:t>
-            </a:r>
-          </a:p>
-          <a:p>
-            <a:pPr>
-              <a:spcAft>
-                <a:spcPts val="1400"/>
-              </a:spcAft>
-            </a:pPr>
-            <a:r>
-              <a:rPr sz="1550">
-                <a:solidFill>
-                  <a:srgbClr val="000000"/>
-                </a:solidFill>
-                <a:latin typeface="Times New Roman"/>
-              </a:rPr>
-              <a:t>•  Performance : recherches indexées</a:t>
-            </a:r>
-          </a:p>
-          <a:p>
-            <a:pPr>
-              <a:spcAft>
-                <a:spcPts val="1400"/>
-              </a:spcAft>
-            </a:pPr>
-            <a:r>
-              <a:rPr sz="1550">
-                <a:solidFill>
-                  <a:srgbClr val="000000"/>
-                </a:solidFill>
-                <a:latin typeface="Times New Roman"/>
-              </a:rPr>
-              <a:t>•  Maintenabilité : architecture en blueprints (modèles / routes / gabarits)</a:t>
+              <a:t>•  Accès aux données via PyMongo, sans ORM — manipulation directe des documents et pipelines d'agrégation</a:t>
             </a:r>
           </a:p>
         </p:txBody>
@@ -6497,7 +7052,7 @@
                 </a:solidFill>
                 <a:latin typeface="Times New Roman"/>
               </a:rPr>
-              <a:t>PÉRIMÈTRE FONCTIONNEL</a:t>
+              <a:t>CAHIER DES CHARGES</a:t>
             </a:r>
           </a:p>
         </p:txBody>
@@ -6532,7 +7087,7 @@
                 </a:solidFill>
                 <a:latin typeface="Times New Roman"/>
               </a:rPr>
-              <a:t>Trois profils d'utilisateurs</a:t>
+              <a:t>Besoins fonctionnels et non fonctionnels</a:t>
             </a:r>
           </a:p>
         </p:txBody>
@@ -6612,6 +7167,441 @@
                 <a:latin typeface="Times New Roman"/>
               </a:rPr>
               <a:t>3</a:t>
+            </a:r>
+          </a:p>
+        </p:txBody>
+      </p:sp>
+      <p:sp>
+        <p:nvSpPr>
+          <p:cNvPr id="6" name="TextBox 5"/>
+          <p:cNvSpPr txBox="1"/>
+          <p:nvPr/>
+        </p:nvSpPr>
+        <p:spPr>
+          <a:xfrm>
+            <a:off x="731520" y="1554480"/>
+            <a:ext cx="5120640" cy="365760"/>
+          </a:xfrm>
+          <a:prstGeom prst="rect">
+            <a:avLst/>
+          </a:prstGeom>
+          <a:noFill/>
+        </p:spPr>
+        <p:txBody>
+          <a:bodyPr wrap="square" anchor="t">
+            <a:spAutoFit/>
+          </a:bodyPr>
+          <a:lstStyle/>
+          <a:p>
+            <a:pPr algn="l"/>
+            <a:r>
+              <a:rPr sz="1600" b="1" i="0">
+                <a:solidFill>
+                  <a:srgbClr val="1F3C63"/>
+                </a:solidFill>
+                <a:latin typeface="Times New Roman"/>
+              </a:rPr>
+              <a:t>Fonctionnels</a:t>
+            </a:r>
+          </a:p>
+        </p:txBody>
+      </p:sp>
+      <p:sp>
+        <p:nvSpPr>
+          <p:cNvPr id="7" name="TextBox 6"/>
+          <p:cNvSpPr txBox="1"/>
+          <p:nvPr/>
+        </p:nvSpPr>
+        <p:spPr>
+          <a:xfrm>
+            <a:off x="731520" y="2011680"/>
+            <a:ext cx="5120640" cy="4206240"/>
+          </a:xfrm>
+          <a:prstGeom prst="rect">
+            <a:avLst/>
+          </a:prstGeom>
+          <a:noFill/>
+        </p:spPr>
+        <p:txBody>
+          <a:bodyPr wrap="square">
+            <a:spAutoFit/>
+          </a:bodyPr>
+          <a:lstStyle/>
+          <a:p>
+            <a:pPr>
+              <a:spcAft>
+                <a:spcPts val="1400"/>
+              </a:spcAft>
+            </a:pPr>
+            <a:r>
+              <a:rPr sz="1550">
+                <a:solidFill>
+                  <a:srgbClr val="000000"/>
+                </a:solidFill>
+                <a:latin typeface="Times New Roman"/>
+              </a:rPr>
+              <a:t>•  Authentification sécurisée, par rôle</a:t>
+            </a:r>
+          </a:p>
+          <a:p>
+            <a:pPr>
+              <a:spcAft>
+                <a:spcPts val="1400"/>
+              </a:spcAft>
+            </a:pPr>
+            <a:r>
+              <a:rPr sz="1550">
+                <a:solidFill>
+                  <a:srgbClr val="000000"/>
+                </a:solidFill>
+                <a:latin typeface="Times New Roman"/>
+              </a:rPr>
+              <a:t>•  Gestion des étudiants, formateurs, formations (CRUD)</a:t>
+            </a:r>
+          </a:p>
+          <a:p>
+            <a:pPr>
+              <a:spcAft>
+                <a:spcPts val="1400"/>
+              </a:spcAft>
+            </a:pPr>
+            <a:r>
+              <a:rPr sz="1550">
+                <a:solidFill>
+                  <a:srgbClr val="000000"/>
+                </a:solidFill>
+                <a:latin typeface="Times New Roman"/>
+              </a:rPr>
+              <a:t>•  Inscriptions et annulations</a:t>
+            </a:r>
+          </a:p>
+          <a:p>
+            <a:pPr>
+              <a:spcAft>
+                <a:spcPts val="1400"/>
+              </a:spcAft>
+            </a:pPr>
+            <a:r>
+              <a:rPr sz="1550">
+                <a:solidFill>
+                  <a:srgbClr val="000000"/>
+                </a:solidFill>
+                <a:latin typeface="Times New Roman"/>
+              </a:rPr>
+              <a:t>•  Notation par le formateur (0 à 20)</a:t>
+            </a:r>
+          </a:p>
+          <a:p>
+            <a:pPr>
+              <a:spcAft>
+                <a:spcPts val="1400"/>
+              </a:spcAft>
+            </a:pPr>
+            <a:r>
+              <a:rPr sz="1550">
+                <a:solidFill>
+                  <a:srgbClr val="000000"/>
+                </a:solidFill>
+                <a:latin typeface="Times New Roman"/>
+              </a:rPr>
+              <a:t>•  Tableau de bord et statistiques</a:t>
+            </a:r>
+          </a:p>
+        </p:txBody>
+      </p:sp>
+      <p:sp>
+        <p:nvSpPr>
+          <p:cNvPr id="8" name="TextBox 7"/>
+          <p:cNvSpPr txBox="1"/>
+          <p:nvPr/>
+        </p:nvSpPr>
+        <p:spPr>
+          <a:xfrm>
+            <a:off x="6309360" y="1554480"/>
+            <a:ext cx="5120640" cy="365760"/>
+          </a:xfrm>
+          <a:prstGeom prst="rect">
+            <a:avLst/>
+          </a:prstGeom>
+          <a:noFill/>
+        </p:spPr>
+        <p:txBody>
+          <a:bodyPr wrap="square" anchor="t">
+            <a:spAutoFit/>
+          </a:bodyPr>
+          <a:lstStyle/>
+          <a:p>
+            <a:pPr algn="l"/>
+            <a:r>
+              <a:rPr sz="1600" b="1" i="0">
+                <a:solidFill>
+                  <a:srgbClr val="1F3C63"/>
+                </a:solidFill>
+                <a:latin typeface="Times New Roman"/>
+              </a:rPr>
+              <a:t>Non fonctionnels</a:t>
+            </a:r>
+          </a:p>
+        </p:txBody>
+      </p:sp>
+      <p:sp>
+        <p:nvSpPr>
+          <p:cNvPr id="9" name="TextBox 8"/>
+          <p:cNvSpPr txBox="1"/>
+          <p:nvPr/>
+        </p:nvSpPr>
+        <p:spPr>
+          <a:xfrm>
+            <a:off x="6309360" y="2011680"/>
+            <a:ext cx="5120640" cy="4206240"/>
+          </a:xfrm>
+          <a:prstGeom prst="rect">
+            <a:avLst/>
+          </a:prstGeom>
+          <a:noFill/>
+        </p:spPr>
+        <p:txBody>
+          <a:bodyPr wrap="square">
+            <a:spAutoFit/>
+          </a:bodyPr>
+          <a:lstStyle/>
+          <a:p>
+            <a:pPr>
+              <a:spcAft>
+                <a:spcPts val="1400"/>
+              </a:spcAft>
+            </a:pPr>
+            <a:r>
+              <a:rPr sz="1550">
+                <a:solidFill>
+                  <a:srgbClr val="000000"/>
+                </a:solidFill>
+                <a:latin typeface="Times New Roman"/>
+              </a:rPr>
+              <a:t>•  Sécurité : mots de passe hachés, CSRF, protection par rôle</a:t>
+            </a:r>
+          </a:p>
+          <a:p>
+            <a:pPr>
+              <a:spcAft>
+                <a:spcPts val="1400"/>
+              </a:spcAft>
+            </a:pPr>
+            <a:r>
+              <a:rPr sz="1550">
+                <a:solidFill>
+                  <a:srgbClr val="000000"/>
+                </a:solidFill>
+                <a:latin typeface="Times New Roman"/>
+              </a:rPr>
+              <a:t>•  Ergonomie : interface responsive, messages clairs</a:t>
+            </a:r>
+          </a:p>
+          <a:p>
+            <a:pPr>
+              <a:spcAft>
+                <a:spcPts val="1400"/>
+              </a:spcAft>
+            </a:pPr>
+            <a:r>
+              <a:rPr sz="1550">
+                <a:solidFill>
+                  <a:srgbClr val="000000"/>
+                </a:solidFill>
+                <a:latin typeface="Times New Roman"/>
+              </a:rPr>
+              <a:t>•  Performance : recherches indexées</a:t>
+            </a:r>
+          </a:p>
+          <a:p>
+            <a:pPr>
+              <a:spcAft>
+                <a:spcPts val="1400"/>
+              </a:spcAft>
+            </a:pPr>
+            <a:r>
+              <a:rPr sz="1550">
+                <a:solidFill>
+                  <a:srgbClr val="000000"/>
+                </a:solidFill>
+                <a:latin typeface="Times New Roman"/>
+              </a:rPr>
+              <a:t>•  Maintenabilité : architecture en blueprints (modèles / routes / gabarits)</a:t>
+            </a:r>
+          </a:p>
+        </p:txBody>
+      </p:sp>
+    </p:spTree>
+  </p:cSld>
+  <p:clrMapOvr>
+    <a:masterClrMapping/>
+  </p:clrMapOvr>
+</p:sld>
+</file>
+
+<file path=ppt/slides/slide5.xml><?xml version="1.0" encoding="utf-8"?>
+<p:sld xmlns:a="http://schemas.openxmlformats.org/drawingml/2006/main" xmlns:p="http://schemas.openxmlformats.org/presentationml/2006/main" xmlns:r="http://schemas.openxmlformats.org/officeDocument/2006/relationships">
+  <p:cSld>
+    <p:bg>
+      <p:bgPr>
+        <a:solidFill>
+          <a:srgbClr val="FFFFFF"/>
+        </a:solidFill>
+        <a:effectLst/>
+      </p:bgPr>
+    </p:bg>
+    <p:spTree>
+      <p:nvGrpSpPr>
+        <p:cNvPr id="1" name=""/>
+        <p:cNvGrpSpPr/>
+        <p:nvPr/>
+      </p:nvGrpSpPr>
+      <p:grpSpPr/>
+      <p:sp>
+        <p:nvSpPr>
+          <p:cNvPr id="2" name="TextBox 1"/>
+          <p:cNvSpPr txBox="1"/>
+          <p:nvPr/>
+        </p:nvSpPr>
+        <p:spPr>
+          <a:xfrm>
+            <a:off x="731520" y="365760"/>
+            <a:ext cx="10515600" cy="320040"/>
+          </a:xfrm>
+          <a:prstGeom prst="rect">
+            <a:avLst/>
+          </a:prstGeom>
+          <a:noFill/>
+        </p:spPr>
+        <p:txBody>
+          <a:bodyPr wrap="square" anchor="t">
+            <a:spAutoFit/>
+          </a:bodyPr>
+          <a:lstStyle/>
+          <a:p>
+            <a:pPr algn="l"/>
+            <a:r>
+              <a:rPr sz="1300" b="1" i="0">
+                <a:solidFill>
+                  <a:srgbClr val="1F3C63"/>
+                </a:solidFill>
+                <a:latin typeface="Times New Roman"/>
+              </a:rPr>
+              <a:t>PÉRIMÈTRE FONCTIONNEL</a:t>
+            </a:r>
+          </a:p>
+        </p:txBody>
+      </p:sp>
+      <p:sp>
+        <p:nvSpPr>
+          <p:cNvPr id="3" name="TextBox 2"/>
+          <p:cNvSpPr txBox="1"/>
+          <p:nvPr/>
+        </p:nvSpPr>
+        <p:spPr>
+          <a:xfrm>
+            <a:off x="731520" y="658368"/>
+            <a:ext cx="10698480" cy="731520"/>
+          </a:xfrm>
+          <a:prstGeom prst="rect">
+            <a:avLst/>
+          </a:prstGeom>
+          <a:noFill/>
+        </p:spPr>
+        <p:txBody>
+          <a:bodyPr wrap="square" anchor="t">
+            <a:spAutoFit/>
+          </a:bodyPr>
+          <a:lstStyle/>
+          <a:p>
+            <a:pPr algn="l"/>
+            <a:r>
+              <a:rPr sz="2800" b="1" i="0">
+                <a:solidFill>
+                  <a:srgbClr val="000000"/>
+                </a:solidFill>
+                <a:latin typeface="Times New Roman"/>
+              </a:rPr>
+              <a:t>Trois profils d'utilisateurs</a:t>
+            </a:r>
+          </a:p>
+        </p:txBody>
+      </p:sp>
+      <p:sp>
+        <p:nvSpPr>
+          <p:cNvPr id="4" name="Rectangle 3"/>
+          <p:cNvSpPr/>
+          <p:nvPr/>
+        </p:nvSpPr>
+        <p:spPr>
+          <a:xfrm>
+            <a:off x="731520" y="1344168"/>
+            <a:ext cx="10698480" cy="15875"/>
+          </a:xfrm>
+          <a:prstGeom prst="rect">
+            <a:avLst/>
+          </a:prstGeom>
+          <a:solidFill>
+            <a:srgbClr val="1F3C63"/>
+          </a:solidFill>
+          <a:ln>
+            <a:noFill/>
+          </a:ln>
+          <a:effectLst/>
+        </p:spPr>
+        <p:style>
+          <a:lnRef idx="1">
+            <a:schemeClr val="accent1"/>
+          </a:lnRef>
+          <a:fillRef idx="3">
+            <a:schemeClr val="accent1"/>
+          </a:fillRef>
+          <a:effectRef idx="2">
+            <a:schemeClr val="accent1"/>
+          </a:effectRef>
+          <a:fontRef idx="minor">
+            <a:schemeClr val="lt1"/>
+          </a:fontRef>
+        </p:style>
+        <p:txBody>
+          <a:bodyPr rtlCol="0" anchor="ctr"/>
+          <a:lstStyle/>
+          <a:p>
+            <a:pPr algn="ctr"/>
+          </a:p>
+        </p:txBody>
+      </p:sp>
+      <p:sp>
+        <p:nvSpPr>
+          <p:cNvPr id="5" name="TextBox 4"/>
+          <p:cNvSpPr txBox="1"/>
+          <p:nvPr/>
+        </p:nvSpPr>
+        <p:spPr>
+          <a:xfrm>
+            <a:off x="11185855" y="6400800"/>
+            <a:ext cx="640080" cy="320040"/>
+          </a:xfrm>
+          <a:prstGeom prst="rect">
+            <a:avLst/>
+          </a:prstGeom>
+          <a:noFill/>
+        </p:spPr>
+        <p:txBody>
+          <a:bodyPr wrap="square" anchor="t">
+            <a:spAutoFit/>
+          </a:bodyPr>
+          <a:lstStyle/>
+          <a:p>
+            <a:pPr algn="r"/>
+            <a:r>
+              <a:rPr sz="1100" b="0" i="0">
+                <a:solidFill>
+                  <a:srgbClr val="404040"/>
+                </a:solidFill>
+                <a:latin typeface="Times New Roman"/>
+              </a:rPr>
+              <a:t>4</a:t>
             </a:r>
           </a:p>
         </p:txBody>
@@ -6834,1693 +7824,6 @@
 </p:sld>
 </file>
 
-<file path=ppt/slides/slide5.xml><?xml version="1.0" encoding="utf-8"?>
-<p:sld xmlns:a="http://schemas.openxmlformats.org/drawingml/2006/main" xmlns:p="http://schemas.openxmlformats.org/presentationml/2006/main" xmlns:r="http://schemas.openxmlformats.org/officeDocument/2006/relationships">
-  <p:cSld>
-    <p:bg>
-      <p:bgPr>
-        <a:solidFill>
-          <a:srgbClr val="FFFFFF"/>
-        </a:solidFill>
-        <a:effectLst/>
-      </p:bgPr>
-    </p:bg>
-    <p:spTree>
-      <p:nvGrpSpPr>
-        <p:cNvPr id="1" name=""/>
-        <p:cNvGrpSpPr/>
-        <p:nvPr/>
-      </p:nvGrpSpPr>
-      <p:grpSpPr/>
-      <p:sp>
-        <p:nvSpPr>
-          <p:cNvPr id="2" name="TextBox 1"/>
-          <p:cNvSpPr txBox="1"/>
-          <p:nvPr/>
-        </p:nvSpPr>
-        <p:spPr>
-          <a:xfrm>
-            <a:off x="731520" y="365760"/>
-            <a:ext cx="10515600" cy="320040"/>
-          </a:xfrm>
-          <a:prstGeom prst="rect">
-            <a:avLst/>
-          </a:prstGeom>
-          <a:noFill/>
-        </p:spPr>
-        <p:txBody>
-          <a:bodyPr wrap="square" anchor="t">
-            <a:spAutoFit/>
-          </a:bodyPr>
-          <a:lstStyle/>
-          <a:p>
-            <a:pPr algn="l"/>
-            <a:r>
-              <a:rPr sz="1300" b="1" i="0">
-                <a:solidFill>
-                  <a:srgbClr val="1F3C63"/>
-                </a:solidFill>
-                <a:latin typeface="Times New Roman"/>
-              </a:rPr>
-              <a:t>PÉRIMÈTRE FONCTIONNEL</a:t>
-            </a:r>
-          </a:p>
-        </p:txBody>
-      </p:sp>
-      <p:sp>
-        <p:nvSpPr>
-          <p:cNvPr id="3" name="TextBox 2"/>
-          <p:cNvSpPr txBox="1"/>
-          <p:nvPr/>
-        </p:nvSpPr>
-        <p:spPr>
-          <a:xfrm>
-            <a:off x="731520" y="658368"/>
-            <a:ext cx="10698480" cy="731520"/>
-          </a:xfrm>
-          <a:prstGeom prst="rect">
-            <a:avLst/>
-          </a:prstGeom>
-          <a:noFill/>
-        </p:spPr>
-        <p:txBody>
-          <a:bodyPr wrap="square" anchor="t">
-            <a:spAutoFit/>
-          </a:bodyPr>
-          <a:lstStyle/>
-          <a:p>
-            <a:pPr algn="l"/>
-            <a:r>
-              <a:rPr sz="2800" b="1" i="0">
-                <a:solidFill>
-                  <a:srgbClr val="000000"/>
-                </a:solidFill>
-                <a:latin typeface="Times New Roman"/>
-              </a:rPr>
-              <a:t>Diagramme de cas d'utilisation</a:t>
-            </a:r>
-          </a:p>
-        </p:txBody>
-      </p:sp>
-      <p:sp>
-        <p:nvSpPr>
-          <p:cNvPr id="4" name="Rectangle 3"/>
-          <p:cNvSpPr/>
-          <p:nvPr/>
-        </p:nvSpPr>
-        <p:spPr>
-          <a:xfrm>
-            <a:off x="731520" y="1344168"/>
-            <a:ext cx="10698480" cy="15875"/>
-          </a:xfrm>
-          <a:prstGeom prst="rect">
-            <a:avLst/>
-          </a:prstGeom>
-          <a:solidFill>
-            <a:srgbClr val="1F3C63"/>
-          </a:solidFill>
-          <a:ln>
-            <a:noFill/>
-          </a:ln>
-          <a:effectLst/>
-        </p:spPr>
-        <p:style>
-          <a:lnRef idx="1">
-            <a:schemeClr val="accent1"/>
-          </a:lnRef>
-          <a:fillRef idx="3">
-            <a:schemeClr val="accent1"/>
-          </a:fillRef>
-          <a:effectRef idx="2">
-            <a:schemeClr val="accent1"/>
-          </a:effectRef>
-          <a:fontRef idx="minor">
-            <a:schemeClr val="lt1"/>
-          </a:fontRef>
-        </p:style>
-        <p:txBody>
-          <a:bodyPr rtlCol="0" anchor="ctr"/>
-          <a:lstStyle/>
-          <a:p>
-            <a:pPr algn="ctr"/>
-          </a:p>
-        </p:txBody>
-      </p:sp>
-      <p:sp>
-        <p:nvSpPr>
-          <p:cNvPr id="5" name="TextBox 4"/>
-          <p:cNvSpPr txBox="1"/>
-          <p:nvPr/>
-        </p:nvSpPr>
-        <p:spPr>
-          <a:xfrm>
-            <a:off x="11185855" y="6400800"/>
-            <a:ext cx="640080" cy="320040"/>
-          </a:xfrm>
-          <a:prstGeom prst="rect">
-            <a:avLst/>
-          </a:prstGeom>
-          <a:noFill/>
-        </p:spPr>
-        <p:txBody>
-          <a:bodyPr wrap="square" anchor="t">
-            <a:spAutoFit/>
-          </a:bodyPr>
-          <a:lstStyle/>
-          <a:p>
-            <a:pPr algn="r"/>
-            <a:r>
-              <a:rPr sz="1100" b="0" i="0">
-                <a:solidFill>
-                  <a:srgbClr val="404040"/>
-                </a:solidFill>
-                <a:latin typeface="Times New Roman"/>
-              </a:rPr>
-              <a:t>4</a:t>
-            </a:r>
-          </a:p>
-        </p:txBody>
-      </p:sp>
-      <p:sp>
-        <p:nvSpPr>
-          <p:cNvPr id="6" name="Oval 5"/>
-          <p:cNvSpPr/>
-          <p:nvPr/>
-        </p:nvSpPr>
-        <p:spPr>
-          <a:xfrm>
-            <a:off x="731520" y="1463040"/>
-            <a:ext cx="329184" cy="329184"/>
-          </a:xfrm>
-          <a:prstGeom prst="ellipse">
-            <a:avLst/>
-          </a:prstGeom>
-          <a:noFill/>
-          <a:ln w="22225">
-            <a:solidFill>
-              <a:srgbClr val="000000"/>
-            </a:solidFill>
-          </a:ln>
-          <a:effectLst/>
-        </p:spPr>
-        <p:style>
-          <a:lnRef idx="1">
-            <a:schemeClr val="accent1"/>
-          </a:lnRef>
-          <a:fillRef idx="3">
-            <a:schemeClr val="accent1"/>
-          </a:fillRef>
-          <a:effectRef idx="2">
-            <a:schemeClr val="accent1"/>
-          </a:effectRef>
-          <a:fontRef idx="minor">
-            <a:schemeClr val="lt1"/>
-          </a:fontRef>
-        </p:style>
-        <p:txBody>
-          <a:bodyPr rtlCol="0" anchor="ctr"/>
-          <a:lstStyle/>
-          <a:p>
-            <a:pPr algn="ctr"/>
-          </a:p>
-        </p:txBody>
-      </p:sp>
-      <p:cxnSp>
-        <p:nvCxnSpPr>
-          <p:cNvPr id="7" name="Connector 6"/>
-          <p:cNvCxnSpPr/>
-          <p:nvPr/>
-        </p:nvCxnSpPr>
-        <p:spPr>
-          <a:xfrm>
-            <a:off x="896112" y="1792224"/>
-            <a:ext cx="0" cy="438912"/>
-          </a:xfrm>
-          <a:prstGeom prst="line">
-            <a:avLst/>
-          </a:prstGeom>
-          <a:ln w="22225">
-            <a:solidFill>
-              <a:srgbClr val="000000"/>
-            </a:solidFill>
-          </a:ln>
-        </p:spPr>
-        <p:style>
-          <a:lnRef idx="2">
-            <a:schemeClr val="accent1"/>
-          </a:lnRef>
-          <a:fillRef idx="0">
-            <a:schemeClr val="accent1"/>
-          </a:fillRef>
-          <a:effectRef idx="1">
-            <a:schemeClr val="accent1"/>
-          </a:effectRef>
-          <a:fontRef idx="minor">
-            <a:schemeClr val="tx1"/>
-          </a:fontRef>
-        </p:style>
-      </p:cxnSp>
-      <p:cxnSp>
-        <p:nvCxnSpPr>
-          <p:cNvPr id="8" name="Connector 7"/>
-          <p:cNvCxnSpPr/>
-          <p:nvPr/>
-        </p:nvCxnSpPr>
-        <p:spPr>
-          <a:xfrm>
-            <a:off x="676656" y="1915119"/>
-            <a:ext cx="438912" cy="0"/>
-          </a:xfrm>
-          <a:prstGeom prst="line">
-            <a:avLst/>
-          </a:prstGeom>
-          <a:ln w="22225">
-            <a:solidFill>
-              <a:srgbClr val="000000"/>
-            </a:solidFill>
-          </a:ln>
-        </p:spPr>
-        <p:style>
-          <a:lnRef idx="2">
-            <a:schemeClr val="accent1"/>
-          </a:lnRef>
-          <a:fillRef idx="0">
-            <a:schemeClr val="accent1"/>
-          </a:fillRef>
-          <a:effectRef idx="1">
-            <a:schemeClr val="accent1"/>
-          </a:effectRef>
-          <a:fontRef idx="minor">
-            <a:schemeClr val="tx1"/>
-          </a:fontRef>
-        </p:style>
-      </p:cxnSp>
-      <p:cxnSp>
-        <p:nvCxnSpPr>
-          <p:cNvPr id="9" name="Connector 8"/>
-          <p:cNvCxnSpPr/>
-          <p:nvPr/>
-        </p:nvCxnSpPr>
-        <p:spPr>
-          <a:xfrm flipH="1">
-            <a:off x="676656" y="2231136"/>
-            <a:ext cx="219456" cy="285292"/>
-          </a:xfrm>
-          <a:prstGeom prst="line">
-            <a:avLst/>
-          </a:prstGeom>
-          <a:ln w="22225">
-            <a:solidFill>
-              <a:srgbClr val="000000"/>
-            </a:solidFill>
-          </a:ln>
-        </p:spPr>
-        <p:style>
-          <a:lnRef idx="2">
-            <a:schemeClr val="accent1"/>
-          </a:lnRef>
-          <a:fillRef idx="0">
-            <a:schemeClr val="accent1"/>
-          </a:fillRef>
-          <a:effectRef idx="1">
-            <a:schemeClr val="accent1"/>
-          </a:effectRef>
-          <a:fontRef idx="minor">
-            <a:schemeClr val="tx1"/>
-          </a:fontRef>
-        </p:style>
-      </p:cxnSp>
-      <p:cxnSp>
-        <p:nvCxnSpPr>
-          <p:cNvPr id="10" name="Connector 9"/>
-          <p:cNvCxnSpPr/>
-          <p:nvPr/>
-        </p:nvCxnSpPr>
-        <p:spPr>
-          <a:xfrm>
-            <a:off x="896112" y="2231136"/>
-            <a:ext cx="219456" cy="285292"/>
-          </a:xfrm>
-          <a:prstGeom prst="line">
-            <a:avLst/>
-          </a:prstGeom>
-          <a:ln w="22225">
-            <a:solidFill>
-              <a:srgbClr val="000000"/>
-            </a:solidFill>
-          </a:ln>
-        </p:spPr>
-        <p:style>
-          <a:lnRef idx="2">
-            <a:schemeClr val="accent1"/>
-          </a:lnRef>
-          <a:fillRef idx="0">
-            <a:schemeClr val="accent1"/>
-          </a:fillRef>
-          <a:effectRef idx="1">
-            <a:schemeClr val="accent1"/>
-          </a:effectRef>
-          <a:fontRef idx="minor">
-            <a:schemeClr val="tx1"/>
-          </a:fontRef>
-        </p:style>
-      </p:cxnSp>
-      <p:sp>
-        <p:nvSpPr>
-          <p:cNvPr id="11" name="TextBox 10"/>
-          <p:cNvSpPr txBox="1"/>
-          <p:nvPr/>
-        </p:nvSpPr>
-        <p:spPr>
-          <a:xfrm>
-            <a:off x="228600" y="2571292"/>
-            <a:ext cx="1335024" cy="274320"/>
-          </a:xfrm>
-          <a:prstGeom prst="rect">
-            <a:avLst/>
-          </a:prstGeom>
-          <a:noFill/>
-        </p:spPr>
-        <p:txBody>
-          <a:bodyPr wrap="square" anchor="t">
-            <a:spAutoFit/>
-          </a:bodyPr>
-          <a:lstStyle/>
-          <a:p>
-            <a:pPr algn="ctr"/>
-            <a:r>
-              <a:rPr sz="1250" b="1" i="0">
-                <a:solidFill>
-                  <a:srgbClr val="000000"/>
-                </a:solidFill>
-                <a:latin typeface="Times New Roman"/>
-              </a:rPr>
-              <a:t>Administrateur</a:t>
-            </a:r>
-          </a:p>
-        </p:txBody>
-      </p:sp>
-      <p:sp>
-        <p:nvSpPr>
-          <p:cNvPr id="12" name="Oval 11"/>
-          <p:cNvSpPr/>
-          <p:nvPr/>
-        </p:nvSpPr>
-        <p:spPr>
-          <a:xfrm>
-            <a:off x="731520" y="2788920"/>
-            <a:ext cx="329184" cy="329184"/>
-          </a:xfrm>
-          <a:prstGeom prst="ellipse">
-            <a:avLst/>
-          </a:prstGeom>
-          <a:noFill/>
-          <a:ln w="22225">
-            <a:solidFill>
-              <a:srgbClr val="000000"/>
-            </a:solidFill>
-          </a:ln>
-          <a:effectLst/>
-        </p:spPr>
-        <p:style>
-          <a:lnRef idx="1">
-            <a:schemeClr val="accent1"/>
-          </a:lnRef>
-          <a:fillRef idx="3">
-            <a:schemeClr val="accent1"/>
-          </a:fillRef>
-          <a:effectRef idx="2">
-            <a:schemeClr val="accent1"/>
-          </a:effectRef>
-          <a:fontRef idx="minor">
-            <a:schemeClr val="lt1"/>
-          </a:fontRef>
-        </p:style>
-        <p:txBody>
-          <a:bodyPr rtlCol="0" anchor="ctr"/>
-          <a:lstStyle/>
-          <a:p>
-            <a:pPr algn="ctr"/>
-          </a:p>
-        </p:txBody>
-      </p:sp>
-      <p:cxnSp>
-        <p:nvCxnSpPr>
-          <p:cNvPr id="13" name="Connector 12"/>
-          <p:cNvCxnSpPr/>
-          <p:nvPr/>
-        </p:nvCxnSpPr>
-        <p:spPr>
-          <a:xfrm>
-            <a:off x="896112" y="3118104"/>
-            <a:ext cx="0" cy="438912"/>
-          </a:xfrm>
-          <a:prstGeom prst="line">
-            <a:avLst/>
-          </a:prstGeom>
-          <a:ln w="22225">
-            <a:solidFill>
-              <a:srgbClr val="000000"/>
-            </a:solidFill>
-          </a:ln>
-        </p:spPr>
-        <p:style>
-          <a:lnRef idx="2">
-            <a:schemeClr val="accent1"/>
-          </a:lnRef>
-          <a:fillRef idx="0">
-            <a:schemeClr val="accent1"/>
-          </a:fillRef>
-          <a:effectRef idx="1">
-            <a:schemeClr val="accent1"/>
-          </a:effectRef>
-          <a:fontRef idx="minor">
-            <a:schemeClr val="tx1"/>
-          </a:fontRef>
-        </p:style>
-      </p:cxnSp>
-      <p:cxnSp>
-        <p:nvCxnSpPr>
-          <p:cNvPr id="14" name="Connector 13"/>
-          <p:cNvCxnSpPr/>
-          <p:nvPr/>
-        </p:nvCxnSpPr>
-        <p:spPr>
-          <a:xfrm>
-            <a:off x="676656" y="3240999"/>
-            <a:ext cx="438912" cy="0"/>
-          </a:xfrm>
-          <a:prstGeom prst="line">
-            <a:avLst/>
-          </a:prstGeom>
-          <a:ln w="22225">
-            <a:solidFill>
-              <a:srgbClr val="000000"/>
-            </a:solidFill>
-          </a:ln>
-        </p:spPr>
-        <p:style>
-          <a:lnRef idx="2">
-            <a:schemeClr val="accent1"/>
-          </a:lnRef>
-          <a:fillRef idx="0">
-            <a:schemeClr val="accent1"/>
-          </a:fillRef>
-          <a:effectRef idx="1">
-            <a:schemeClr val="accent1"/>
-          </a:effectRef>
-          <a:fontRef idx="minor">
-            <a:schemeClr val="tx1"/>
-          </a:fontRef>
-        </p:style>
-      </p:cxnSp>
-      <p:cxnSp>
-        <p:nvCxnSpPr>
-          <p:cNvPr id="15" name="Connector 14"/>
-          <p:cNvCxnSpPr/>
-          <p:nvPr/>
-        </p:nvCxnSpPr>
-        <p:spPr>
-          <a:xfrm flipH="1">
-            <a:off x="676656" y="3557016"/>
-            <a:ext cx="219456" cy="285292"/>
-          </a:xfrm>
-          <a:prstGeom prst="line">
-            <a:avLst/>
-          </a:prstGeom>
-          <a:ln w="22225">
-            <a:solidFill>
-              <a:srgbClr val="000000"/>
-            </a:solidFill>
-          </a:ln>
-        </p:spPr>
-        <p:style>
-          <a:lnRef idx="2">
-            <a:schemeClr val="accent1"/>
-          </a:lnRef>
-          <a:fillRef idx="0">
-            <a:schemeClr val="accent1"/>
-          </a:fillRef>
-          <a:effectRef idx="1">
-            <a:schemeClr val="accent1"/>
-          </a:effectRef>
-          <a:fontRef idx="minor">
-            <a:schemeClr val="tx1"/>
-          </a:fontRef>
-        </p:style>
-      </p:cxnSp>
-      <p:cxnSp>
-        <p:nvCxnSpPr>
-          <p:cNvPr id="16" name="Connector 15"/>
-          <p:cNvCxnSpPr/>
-          <p:nvPr/>
-        </p:nvCxnSpPr>
-        <p:spPr>
-          <a:xfrm>
-            <a:off x="896112" y="3557016"/>
-            <a:ext cx="219456" cy="285292"/>
-          </a:xfrm>
-          <a:prstGeom prst="line">
-            <a:avLst/>
-          </a:prstGeom>
-          <a:ln w="22225">
-            <a:solidFill>
-              <a:srgbClr val="000000"/>
-            </a:solidFill>
-          </a:ln>
-        </p:spPr>
-        <p:style>
-          <a:lnRef idx="2">
-            <a:schemeClr val="accent1"/>
-          </a:lnRef>
-          <a:fillRef idx="0">
-            <a:schemeClr val="accent1"/>
-          </a:fillRef>
-          <a:effectRef idx="1">
-            <a:schemeClr val="accent1"/>
-          </a:effectRef>
-          <a:fontRef idx="minor">
-            <a:schemeClr val="tx1"/>
-          </a:fontRef>
-        </p:style>
-      </p:cxnSp>
-      <p:sp>
-        <p:nvSpPr>
-          <p:cNvPr id="17" name="TextBox 16"/>
-          <p:cNvSpPr txBox="1"/>
-          <p:nvPr/>
-        </p:nvSpPr>
-        <p:spPr>
-          <a:xfrm>
-            <a:off x="228600" y="3897172"/>
-            <a:ext cx="1335024" cy="274320"/>
-          </a:xfrm>
-          <a:prstGeom prst="rect">
-            <a:avLst/>
-          </a:prstGeom>
-          <a:noFill/>
-        </p:spPr>
-        <p:txBody>
-          <a:bodyPr wrap="square" anchor="t">
-            <a:spAutoFit/>
-          </a:bodyPr>
-          <a:lstStyle/>
-          <a:p>
-            <a:pPr algn="ctr"/>
-            <a:r>
-              <a:rPr sz="1250" b="1" i="0">
-                <a:solidFill>
-                  <a:srgbClr val="000000"/>
-                </a:solidFill>
-                <a:latin typeface="Times New Roman"/>
-              </a:rPr>
-              <a:t>Formateur</a:t>
-            </a:r>
-          </a:p>
-        </p:txBody>
-      </p:sp>
-      <p:sp>
-        <p:nvSpPr>
-          <p:cNvPr id="18" name="Oval 17"/>
-          <p:cNvSpPr/>
-          <p:nvPr/>
-        </p:nvSpPr>
-        <p:spPr>
-          <a:xfrm>
-            <a:off x="731520" y="4114800"/>
-            <a:ext cx="329184" cy="329184"/>
-          </a:xfrm>
-          <a:prstGeom prst="ellipse">
-            <a:avLst/>
-          </a:prstGeom>
-          <a:noFill/>
-          <a:ln w="22225">
-            <a:solidFill>
-              <a:srgbClr val="000000"/>
-            </a:solidFill>
-          </a:ln>
-          <a:effectLst/>
-        </p:spPr>
-        <p:style>
-          <a:lnRef idx="1">
-            <a:schemeClr val="accent1"/>
-          </a:lnRef>
-          <a:fillRef idx="3">
-            <a:schemeClr val="accent1"/>
-          </a:fillRef>
-          <a:effectRef idx="2">
-            <a:schemeClr val="accent1"/>
-          </a:effectRef>
-          <a:fontRef idx="minor">
-            <a:schemeClr val="lt1"/>
-          </a:fontRef>
-        </p:style>
-        <p:txBody>
-          <a:bodyPr rtlCol="0" anchor="ctr"/>
-          <a:lstStyle/>
-          <a:p>
-            <a:pPr algn="ctr"/>
-          </a:p>
-        </p:txBody>
-      </p:sp>
-      <p:cxnSp>
-        <p:nvCxnSpPr>
-          <p:cNvPr id="19" name="Connector 18"/>
-          <p:cNvCxnSpPr/>
-          <p:nvPr/>
-        </p:nvCxnSpPr>
-        <p:spPr>
-          <a:xfrm>
-            <a:off x="896112" y="4443984"/>
-            <a:ext cx="0" cy="438912"/>
-          </a:xfrm>
-          <a:prstGeom prst="line">
-            <a:avLst/>
-          </a:prstGeom>
-          <a:ln w="22225">
-            <a:solidFill>
-              <a:srgbClr val="000000"/>
-            </a:solidFill>
-          </a:ln>
-        </p:spPr>
-        <p:style>
-          <a:lnRef idx="2">
-            <a:schemeClr val="accent1"/>
-          </a:lnRef>
-          <a:fillRef idx="0">
-            <a:schemeClr val="accent1"/>
-          </a:fillRef>
-          <a:effectRef idx="1">
-            <a:schemeClr val="accent1"/>
-          </a:effectRef>
-          <a:fontRef idx="minor">
-            <a:schemeClr val="tx1"/>
-          </a:fontRef>
-        </p:style>
-      </p:cxnSp>
-      <p:cxnSp>
-        <p:nvCxnSpPr>
-          <p:cNvPr id="20" name="Connector 19"/>
-          <p:cNvCxnSpPr/>
-          <p:nvPr/>
-        </p:nvCxnSpPr>
-        <p:spPr>
-          <a:xfrm>
-            <a:off x="676656" y="4566879"/>
-            <a:ext cx="438912" cy="0"/>
-          </a:xfrm>
-          <a:prstGeom prst="line">
-            <a:avLst/>
-          </a:prstGeom>
-          <a:ln w="22225">
-            <a:solidFill>
-              <a:srgbClr val="000000"/>
-            </a:solidFill>
-          </a:ln>
-        </p:spPr>
-        <p:style>
-          <a:lnRef idx="2">
-            <a:schemeClr val="accent1"/>
-          </a:lnRef>
-          <a:fillRef idx="0">
-            <a:schemeClr val="accent1"/>
-          </a:fillRef>
-          <a:effectRef idx="1">
-            <a:schemeClr val="accent1"/>
-          </a:effectRef>
-          <a:fontRef idx="minor">
-            <a:schemeClr val="tx1"/>
-          </a:fontRef>
-        </p:style>
-      </p:cxnSp>
-      <p:cxnSp>
-        <p:nvCxnSpPr>
-          <p:cNvPr id="21" name="Connector 20"/>
-          <p:cNvCxnSpPr/>
-          <p:nvPr/>
-        </p:nvCxnSpPr>
-        <p:spPr>
-          <a:xfrm flipH="1">
-            <a:off x="676656" y="4882896"/>
-            <a:ext cx="219456" cy="285292"/>
-          </a:xfrm>
-          <a:prstGeom prst="line">
-            <a:avLst/>
-          </a:prstGeom>
-          <a:ln w="22225">
-            <a:solidFill>
-              <a:srgbClr val="000000"/>
-            </a:solidFill>
-          </a:ln>
-        </p:spPr>
-        <p:style>
-          <a:lnRef idx="2">
-            <a:schemeClr val="accent1"/>
-          </a:lnRef>
-          <a:fillRef idx="0">
-            <a:schemeClr val="accent1"/>
-          </a:fillRef>
-          <a:effectRef idx="1">
-            <a:schemeClr val="accent1"/>
-          </a:effectRef>
-          <a:fontRef idx="minor">
-            <a:schemeClr val="tx1"/>
-          </a:fontRef>
-        </p:style>
-      </p:cxnSp>
-      <p:cxnSp>
-        <p:nvCxnSpPr>
-          <p:cNvPr id="22" name="Connector 21"/>
-          <p:cNvCxnSpPr/>
-          <p:nvPr/>
-        </p:nvCxnSpPr>
-        <p:spPr>
-          <a:xfrm>
-            <a:off x="896112" y="4882896"/>
-            <a:ext cx="219456" cy="285292"/>
-          </a:xfrm>
-          <a:prstGeom prst="line">
-            <a:avLst/>
-          </a:prstGeom>
-          <a:ln w="22225">
-            <a:solidFill>
-              <a:srgbClr val="000000"/>
-            </a:solidFill>
-          </a:ln>
-        </p:spPr>
-        <p:style>
-          <a:lnRef idx="2">
-            <a:schemeClr val="accent1"/>
-          </a:lnRef>
-          <a:fillRef idx="0">
-            <a:schemeClr val="accent1"/>
-          </a:fillRef>
-          <a:effectRef idx="1">
-            <a:schemeClr val="accent1"/>
-          </a:effectRef>
-          <a:fontRef idx="minor">
-            <a:schemeClr val="tx1"/>
-          </a:fontRef>
-        </p:style>
-      </p:cxnSp>
-      <p:sp>
-        <p:nvSpPr>
-          <p:cNvPr id="23" name="TextBox 22"/>
-          <p:cNvSpPr txBox="1"/>
-          <p:nvPr/>
-        </p:nvSpPr>
-        <p:spPr>
-          <a:xfrm>
-            <a:off x="228600" y="5223052"/>
-            <a:ext cx="1335024" cy="274320"/>
-          </a:xfrm>
-          <a:prstGeom prst="rect">
-            <a:avLst/>
-          </a:prstGeom>
-          <a:noFill/>
-        </p:spPr>
-        <p:txBody>
-          <a:bodyPr wrap="square" anchor="t">
-            <a:spAutoFit/>
-          </a:bodyPr>
-          <a:lstStyle/>
-          <a:p>
-            <a:pPr algn="ctr"/>
-            <a:r>
-              <a:rPr sz="1250" b="1" i="0">
-                <a:solidFill>
-                  <a:srgbClr val="000000"/>
-                </a:solidFill>
-                <a:latin typeface="Times New Roman"/>
-              </a:rPr>
-              <a:t>Étudiant</a:t>
-            </a:r>
-          </a:p>
-        </p:txBody>
-      </p:sp>
-      <p:sp>
-        <p:nvSpPr>
-          <p:cNvPr id="24" name="Oval 23"/>
-          <p:cNvSpPr/>
-          <p:nvPr/>
-        </p:nvSpPr>
-        <p:spPr>
-          <a:xfrm>
-            <a:off x="3200400" y="1417320"/>
-            <a:ext cx="3566160" cy="777240"/>
-          </a:xfrm>
-          <a:prstGeom prst="ellipse">
-            <a:avLst/>
-          </a:prstGeom>
-          <a:solidFill>
-            <a:srgbClr val="FFFFFF"/>
-          </a:solidFill>
-          <a:ln w="15875">
-            <a:solidFill>
-              <a:srgbClr val="1F3C63"/>
-            </a:solidFill>
-          </a:ln>
-          <a:effectLst/>
-        </p:spPr>
-        <p:style>
-          <a:lnRef idx="1">
-            <a:schemeClr val="accent1"/>
-          </a:lnRef>
-          <a:fillRef idx="3">
-            <a:schemeClr val="accent1"/>
-          </a:fillRef>
-          <a:effectRef idx="2">
-            <a:schemeClr val="accent1"/>
-          </a:effectRef>
-          <a:fontRef idx="minor">
-            <a:schemeClr val="lt1"/>
-          </a:fontRef>
-        </p:style>
-        <p:txBody>
-          <a:bodyPr rtlCol="0" anchor="ctr" wrap="square"/>
-          <a:lstStyle/>
-          <a:p>
-            <a:pPr algn="ctr"/>
-            <a:r>
-              <a:rPr sz="1300" b="1">
-                <a:solidFill>
-                  <a:srgbClr val="000000"/>
-                </a:solidFill>
-                <a:latin typeface="Times New Roman"/>
-              </a:rPr>
-              <a:t>Authentification</a:t>
-            </a:r>
-          </a:p>
-        </p:txBody>
-      </p:sp>
-      <p:sp>
-        <p:nvSpPr>
-          <p:cNvPr id="25" name="Oval 24"/>
-          <p:cNvSpPr/>
-          <p:nvPr/>
-        </p:nvSpPr>
-        <p:spPr>
-          <a:xfrm>
-            <a:off x="7315200" y="1417320"/>
-            <a:ext cx="3566160" cy="777240"/>
-          </a:xfrm>
-          <a:prstGeom prst="ellipse">
-            <a:avLst/>
-          </a:prstGeom>
-          <a:solidFill>
-            <a:srgbClr val="FFFFFF"/>
-          </a:solidFill>
-          <a:ln w="15875">
-            <a:solidFill>
-              <a:srgbClr val="1F3C63"/>
-            </a:solidFill>
-          </a:ln>
-          <a:effectLst/>
-        </p:spPr>
-        <p:style>
-          <a:lnRef idx="1">
-            <a:schemeClr val="accent1"/>
-          </a:lnRef>
-          <a:fillRef idx="3">
-            <a:schemeClr val="accent1"/>
-          </a:fillRef>
-          <a:effectRef idx="2">
-            <a:schemeClr val="accent1"/>
-          </a:effectRef>
-          <a:fontRef idx="minor">
-            <a:schemeClr val="lt1"/>
-          </a:fontRef>
-        </p:style>
-        <p:txBody>
-          <a:bodyPr rtlCol="0" anchor="ctr" wrap="square"/>
-          <a:lstStyle/>
-          <a:p>
-            <a:pPr algn="ctr"/>
-            <a:r>
-              <a:rPr sz="1300" b="1">
-                <a:solidFill>
-                  <a:srgbClr val="000000"/>
-                </a:solidFill>
-                <a:latin typeface="Times New Roman"/>
-              </a:rPr>
-              <a:t>Gestion étudiants</a:t>
-            </a:r>
-          </a:p>
-        </p:txBody>
-      </p:sp>
-      <p:sp>
-        <p:nvSpPr>
-          <p:cNvPr id="26" name="Oval 25"/>
-          <p:cNvSpPr/>
-          <p:nvPr/>
-        </p:nvSpPr>
-        <p:spPr>
-          <a:xfrm>
-            <a:off x="3200400" y="2468880"/>
-            <a:ext cx="3566160" cy="777240"/>
-          </a:xfrm>
-          <a:prstGeom prst="ellipse">
-            <a:avLst/>
-          </a:prstGeom>
-          <a:solidFill>
-            <a:srgbClr val="FFFFFF"/>
-          </a:solidFill>
-          <a:ln w="15875">
-            <a:solidFill>
-              <a:srgbClr val="1F3C63"/>
-            </a:solidFill>
-          </a:ln>
-          <a:effectLst/>
-        </p:spPr>
-        <p:style>
-          <a:lnRef idx="1">
-            <a:schemeClr val="accent1"/>
-          </a:lnRef>
-          <a:fillRef idx="3">
-            <a:schemeClr val="accent1"/>
-          </a:fillRef>
-          <a:effectRef idx="2">
-            <a:schemeClr val="accent1"/>
-          </a:effectRef>
-          <a:fontRef idx="minor">
-            <a:schemeClr val="lt1"/>
-          </a:fontRef>
-        </p:style>
-        <p:txBody>
-          <a:bodyPr rtlCol="0" anchor="ctr" wrap="square"/>
-          <a:lstStyle/>
-          <a:p>
-            <a:pPr algn="ctr"/>
-            <a:r>
-              <a:rPr sz="1300" b="1">
-                <a:solidFill>
-                  <a:srgbClr val="000000"/>
-                </a:solidFill>
-                <a:latin typeface="Times New Roman"/>
-              </a:rPr>
-              <a:t>Gestion formateurs</a:t>
-            </a:r>
-          </a:p>
-        </p:txBody>
-      </p:sp>
-      <p:sp>
-        <p:nvSpPr>
-          <p:cNvPr id="27" name="Oval 26"/>
-          <p:cNvSpPr/>
-          <p:nvPr/>
-        </p:nvSpPr>
-        <p:spPr>
-          <a:xfrm>
-            <a:off x="7315200" y="2468880"/>
-            <a:ext cx="3566160" cy="777240"/>
-          </a:xfrm>
-          <a:prstGeom prst="ellipse">
-            <a:avLst/>
-          </a:prstGeom>
-          <a:solidFill>
-            <a:srgbClr val="FFFFFF"/>
-          </a:solidFill>
-          <a:ln w="15875">
-            <a:solidFill>
-              <a:srgbClr val="1F3C63"/>
-            </a:solidFill>
-          </a:ln>
-          <a:effectLst/>
-        </p:spPr>
-        <p:style>
-          <a:lnRef idx="1">
-            <a:schemeClr val="accent1"/>
-          </a:lnRef>
-          <a:fillRef idx="3">
-            <a:schemeClr val="accent1"/>
-          </a:fillRef>
-          <a:effectRef idx="2">
-            <a:schemeClr val="accent1"/>
-          </a:effectRef>
-          <a:fontRef idx="minor">
-            <a:schemeClr val="lt1"/>
-          </a:fontRef>
-        </p:style>
-        <p:txBody>
-          <a:bodyPr rtlCol="0" anchor="ctr" wrap="square"/>
-          <a:lstStyle/>
-          <a:p>
-            <a:pPr algn="ctr"/>
-            <a:r>
-              <a:rPr sz="1300" b="1">
-                <a:solidFill>
-                  <a:srgbClr val="000000"/>
-                </a:solidFill>
-                <a:latin typeface="Times New Roman"/>
-              </a:rPr>
-              <a:t>Gestion formations</a:t>
-            </a:r>
-          </a:p>
-        </p:txBody>
-      </p:sp>
-      <p:sp>
-        <p:nvSpPr>
-          <p:cNvPr id="28" name="Oval 27"/>
-          <p:cNvSpPr/>
-          <p:nvPr/>
-        </p:nvSpPr>
-        <p:spPr>
-          <a:xfrm>
-            <a:off x="3200400" y="3520440"/>
-            <a:ext cx="3566160" cy="777240"/>
-          </a:xfrm>
-          <a:prstGeom prst="ellipse">
-            <a:avLst/>
-          </a:prstGeom>
-          <a:solidFill>
-            <a:srgbClr val="FFFFFF"/>
-          </a:solidFill>
-          <a:ln w="15875">
-            <a:solidFill>
-              <a:srgbClr val="1F3C63"/>
-            </a:solidFill>
-          </a:ln>
-          <a:effectLst/>
-        </p:spPr>
-        <p:style>
-          <a:lnRef idx="1">
-            <a:schemeClr val="accent1"/>
-          </a:lnRef>
-          <a:fillRef idx="3">
-            <a:schemeClr val="accent1"/>
-          </a:fillRef>
-          <a:effectRef idx="2">
-            <a:schemeClr val="accent1"/>
-          </a:effectRef>
-          <a:fontRef idx="minor">
-            <a:schemeClr val="lt1"/>
-          </a:fontRef>
-        </p:style>
-        <p:txBody>
-          <a:bodyPr rtlCol="0" anchor="ctr" wrap="square"/>
-          <a:lstStyle/>
-          <a:p>
-            <a:pPr algn="ctr"/>
-            <a:r>
-              <a:rPr sz="1300" b="1">
-                <a:solidFill>
-                  <a:srgbClr val="000000"/>
-                </a:solidFill>
-                <a:latin typeface="Times New Roman"/>
-              </a:rPr>
-              <a:t>Inscriptions &amp; notation</a:t>
-            </a:r>
-          </a:p>
-        </p:txBody>
-      </p:sp>
-      <p:sp>
-        <p:nvSpPr>
-          <p:cNvPr id="29" name="Oval 28"/>
-          <p:cNvSpPr/>
-          <p:nvPr/>
-        </p:nvSpPr>
-        <p:spPr>
-          <a:xfrm>
-            <a:off x="7315200" y="3520440"/>
-            <a:ext cx="3566160" cy="777240"/>
-          </a:xfrm>
-          <a:prstGeom prst="ellipse">
-            <a:avLst/>
-          </a:prstGeom>
-          <a:solidFill>
-            <a:srgbClr val="FFFFFF"/>
-          </a:solidFill>
-          <a:ln w="15875">
-            <a:solidFill>
-              <a:srgbClr val="1F3C63"/>
-            </a:solidFill>
-          </a:ln>
-          <a:effectLst/>
-        </p:spPr>
-        <p:style>
-          <a:lnRef idx="1">
-            <a:schemeClr val="accent1"/>
-          </a:lnRef>
-          <a:fillRef idx="3">
-            <a:schemeClr val="accent1"/>
-          </a:fillRef>
-          <a:effectRef idx="2">
-            <a:schemeClr val="accent1"/>
-          </a:effectRef>
-          <a:fontRef idx="minor">
-            <a:schemeClr val="lt1"/>
-          </a:fontRef>
-        </p:style>
-        <p:txBody>
-          <a:bodyPr rtlCol="0" anchor="ctr" wrap="square"/>
-          <a:lstStyle/>
-          <a:p>
-            <a:pPr algn="ctr"/>
-            <a:r>
-              <a:rPr sz="1300" b="1">
-                <a:solidFill>
-                  <a:srgbClr val="000000"/>
-                </a:solidFill>
-                <a:latin typeface="Times New Roman"/>
-              </a:rPr>
-              <a:t>Tableau de bord</a:t>
-            </a:r>
-          </a:p>
-        </p:txBody>
-      </p:sp>
-      <p:cxnSp>
-        <p:nvCxnSpPr>
-          <p:cNvPr id="30" name="Connector 29"/>
-          <p:cNvCxnSpPr/>
-          <p:nvPr/>
-        </p:nvCxnSpPr>
-        <p:spPr>
-          <a:xfrm flipV="1">
-            <a:off x="896112" y="1805940"/>
-            <a:ext cx="2304288" cy="205740"/>
-          </a:xfrm>
-          <a:prstGeom prst="line">
-            <a:avLst/>
-          </a:prstGeom>
-          <a:ln w="12700">
-            <a:solidFill>
-              <a:srgbClr val="B0B0B0"/>
-            </a:solidFill>
-          </a:ln>
-        </p:spPr>
-        <p:style>
-          <a:lnRef idx="2">
-            <a:schemeClr val="accent1"/>
-          </a:lnRef>
-          <a:fillRef idx="0">
-            <a:schemeClr val="accent1"/>
-          </a:fillRef>
-          <a:effectRef idx="1">
-            <a:schemeClr val="accent1"/>
-          </a:effectRef>
-          <a:fontRef idx="minor">
-            <a:schemeClr val="tx1"/>
-          </a:fontRef>
-        </p:style>
-      </p:cxnSp>
-      <p:cxnSp>
-        <p:nvCxnSpPr>
-          <p:cNvPr id="31" name="Connector 30"/>
-          <p:cNvCxnSpPr/>
-          <p:nvPr/>
-        </p:nvCxnSpPr>
-        <p:spPr>
-          <a:xfrm flipV="1">
-            <a:off x="896112" y="1805940"/>
-            <a:ext cx="6419088" cy="205740"/>
-          </a:xfrm>
-          <a:prstGeom prst="line">
-            <a:avLst/>
-          </a:prstGeom>
-          <a:ln w="12700">
-            <a:solidFill>
-              <a:srgbClr val="B0B0B0"/>
-            </a:solidFill>
-          </a:ln>
-        </p:spPr>
-        <p:style>
-          <a:lnRef idx="2">
-            <a:schemeClr val="accent1"/>
-          </a:lnRef>
-          <a:fillRef idx="0">
-            <a:schemeClr val="accent1"/>
-          </a:fillRef>
-          <a:effectRef idx="1">
-            <a:schemeClr val="accent1"/>
-          </a:effectRef>
-          <a:fontRef idx="minor">
-            <a:schemeClr val="tx1"/>
-          </a:fontRef>
-        </p:style>
-      </p:cxnSp>
-      <p:cxnSp>
-        <p:nvCxnSpPr>
-          <p:cNvPr id="32" name="Connector 31"/>
-          <p:cNvCxnSpPr/>
-          <p:nvPr/>
-        </p:nvCxnSpPr>
-        <p:spPr>
-          <a:xfrm>
-            <a:off x="896112" y="2011680"/>
-            <a:ext cx="2304288" cy="845820"/>
-          </a:xfrm>
-          <a:prstGeom prst="line">
-            <a:avLst/>
-          </a:prstGeom>
-          <a:ln w="12700">
-            <a:solidFill>
-              <a:srgbClr val="B0B0B0"/>
-            </a:solidFill>
-          </a:ln>
-        </p:spPr>
-        <p:style>
-          <a:lnRef idx="2">
-            <a:schemeClr val="accent1"/>
-          </a:lnRef>
-          <a:fillRef idx="0">
-            <a:schemeClr val="accent1"/>
-          </a:fillRef>
-          <a:effectRef idx="1">
-            <a:schemeClr val="accent1"/>
-          </a:effectRef>
-          <a:fontRef idx="minor">
-            <a:schemeClr val="tx1"/>
-          </a:fontRef>
-        </p:style>
-      </p:cxnSp>
-      <p:cxnSp>
-        <p:nvCxnSpPr>
-          <p:cNvPr id="33" name="Connector 32"/>
-          <p:cNvCxnSpPr/>
-          <p:nvPr/>
-        </p:nvCxnSpPr>
-        <p:spPr>
-          <a:xfrm>
-            <a:off x="896112" y="2011680"/>
-            <a:ext cx="6419088" cy="845820"/>
-          </a:xfrm>
-          <a:prstGeom prst="line">
-            <a:avLst/>
-          </a:prstGeom>
-          <a:ln w="12700">
-            <a:solidFill>
-              <a:srgbClr val="B0B0B0"/>
-            </a:solidFill>
-          </a:ln>
-        </p:spPr>
-        <p:style>
-          <a:lnRef idx="2">
-            <a:schemeClr val="accent1"/>
-          </a:lnRef>
-          <a:fillRef idx="0">
-            <a:schemeClr val="accent1"/>
-          </a:fillRef>
-          <a:effectRef idx="1">
-            <a:schemeClr val="accent1"/>
-          </a:effectRef>
-          <a:fontRef idx="minor">
-            <a:schemeClr val="tx1"/>
-          </a:fontRef>
-        </p:style>
-      </p:cxnSp>
-      <p:cxnSp>
-        <p:nvCxnSpPr>
-          <p:cNvPr id="34" name="Connector 33"/>
-          <p:cNvCxnSpPr/>
-          <p:nvPr/>
-        </p:nvCxnSpPr>
-        <p:spPr>
-          <a:xfrm>
-            <a:off x="896112" y="2011680"/>
-            <a:ext cx="2304288" cy="1897380"/>
-          </a:xfrm>
-          <a:prstGeom prst="line">
-            <a:avLst/>
-          </a:prstGeom>
-          <a:ln w="12700">
-            <a:solidFill>
-              <a:srgbClr val="B0B0B0"/>
-            </a:solidFill>
-          </a:ln>
-        </p:spPr>
-        <p:style>
-          <a:lnRef idx="2">
-            <a:schemeClr val="accent1"/>
-          </a:lnRef>
-          <a:fillRef idx="0">
-            <a:schemeClr val="accent1"/>
-          </a:fillRef>
-          <a:effectRef idx="1">
-            <a:schemeClr val="accent1"/>
-          </a:effectRef>
-          <a:fontRef idx="minor">
-            <a:schemeClr val="tx1"/>
-          </a:fontRef>
-        </p:style>
-      </p:cxnSp>
-      <p:cxnSp>
-        <p:nvCxnSpPr>
-          <p:cNvPr id="35" name="Connector 34"/>
-          <p:cNvCxnSpPr/>
-          <p:nvPr/>
-        </p:nvCxnSpPr>
-        <p:spPr>
-          <a:xfrm>
-            <a:off x="896112" y="2011680"/>
-            <a:ext cx="6419088" cy="1897380"/>
-          </a:xfrm>
-          <a:prstGeom prst="line">
-            <a:avLst/>
-          </a:prstGeom>
-          <a:ln w="12700">
-            <a:solidFill>
-              <a:srgbClr val="B0B0B0"/>
-            </a:solidFill>
-          </a:ln>
-        </p:spPr>
-        <p:style>
-          <a:lnRef idx="2">
-            <a:schemeClr val="accent1"/>
-          </a:lnRef>
-          <a:fillRef idx="0">
-            <a:schemeClr val="accent1"/>
-          </a:fillRef>
-          <a:effectRef idx="1">
-            <a:schemeClr val="accent1"/>
-          </a:effectRef>
-          <a:fontRef idx="minor">
-            <a:schemeClr val="tx1"/>
-          </a:fontRef>
-        </p:style>
-      </p:cxnSp>
-      <p:cxnSp>
-        <p:nvCxnSpPr>
-          <p:cNvPr id="36" name="Connector 35"/>
-          <p:cNvCxnSpPr/>
-          <p:nvPr/>
-        </p:nvCxnSpPr>
-        <p:spPr>
-          <a:xfrm flipV="1">
-            <a:off x="896112" y="1805940"/>
-            <a:ext cx="2304288" cy="1531620"/>
-          </a:xfrm>
-          <a:prstGeom prst="line">
-            <a:avLst/>
-          </a:prstGeom>
-          <a:ln w="12700">
-            <a:solidFill>
-              <a:srgbClr val="B0B0B0"/>
-            </a:solidFill>
-          </a:ln>
-        </p:spPr>
-        <p:style>
-          <a:lnRef idx="2">
-            <a:schemeClr val="accent1"/>
-          </a:lnRef>
-          <a:fillRef idx="0">
-            <a:schemeClr val="accent1"/>
-          </a:fillRef>
-          <a:effectRef idx="1">
-            <a:schemeClr val="accent1"/>
-          </a:effectRef>
-          <a:fontRef idx="minor">
-            <a:schemeClr val="tx1"/>
-          </a:fontRef>
-        </p:style>
-      </p:cxnSp>
-      <p:cxnSp>
-        <p:nvCxnSpPr>
-          <p:cNvPr id="37" name="Connector 36"/>
-          <p:cNvCxnSpPr/>
-          <p:nvPr/>
-        </p:nvCxnSpPr>
-        <p:spPr>
-          <a:xfrm flipV="1">
-            <a:off x="896112" y="2857500"/>
-            <a:ext cx="6419088" cy="480060"/>
-          </a:xfrm>
-          <a:prstGeom prst="line">
-            <a:avLst/>
-          </a:prstGeom>
-          <a:ln w="12700">
-            <a:solidFill>
-              <a:srgbClr val="B0B0B0"/>
-            </a:solidFill>
-          </a:ln>
-        </p:spPr>
-        <p:style>
-          <a:lnRef idx="2">
-            <a:schemeClr val="accent1"/>
-          </a:lnRef>
-          <a:fillRef idx="0">
-            <a:schemeClr val="accent1"/>
-          </a:fillRef>
-          <a:effectRef idx="1">
-            <a:schemeClr val="accent1"/>
-          </a:effectRef>
-          <a:fontRef idx="minor">
-            <a:schemeClr val="tx1"/>
-          </a:fontRef>
-        </p:style>
-      </p:cxnSp>
-      <p:cxnSp>
-        <p:nvCxnSpPr>
-          <p:cNvPr id="38" name="Connector 37"/>
-          <p:cNvCxnSpPr/>
-          <p:nvPr/>
-        </p:nvCxnSpPr>
-        <p:spPr>
-          <a:xfrm>
-            <a:off x="896112" y="3337560"/>
-            <a:ext cx="2304288" cy="571500"/>
-          </a:xfrm>
-          <a:prstGeom prst="line">
-            <a:avLst/>
-          </a:prstGeom>
-          <a:ln w="12700">
-            <a:solidFill>
-              <a:srgbClr val="B0B0B0"/>
-            </a:solidFill>
-          </a:ln>
-        </p:spPr>
-        <p:style>
-          <a:lnRef idx="2">
-            <a:schemeClr val="accent1"/>
-          </a:lnRef>
-          <a:fillRef idx="0">
-            <a:schemeClr val="accent1"/>
-          </a:fillRef>
-          <a:effectRef idx="1">
-            <a:schemeClr val="accent1"/>
-          </a:effectRef>
-          <a:fontRef idx="minor">
-            <a:schemeClr val="tx1"/>
-          </a:fontRef>
-        </p:style>
-      </p:cxnSp>
-      <p:cxnSp>
-        <p:nvCxnSpPr>
-          <p:cNvPr id="39" name="Connector 38"/>
-          <p:cNvCxnSpPr/>
-          <p:nvPr/>
-        </p:nvCxnSpPr>
-        <p:spPr>
-          <a:xfrm>
-            <a:off x="896112" y="3337560"/>
-            <a:ext cx="6419088" cy="571500"/>
-          </a:xfrm>
-          <a:prstGeom prst="line">
-            <a:avLst/>
-          </a:prstGeom>
-          <a:ln w="12700">
-            <a:solidFill>
-              <a:srgbClr val="B0B0B0"/>
-            </a:solidFill>
-          </a:ln>
-        </p:spPr>
-        <p:style>
-          <a:lnRef idx="2">
-            <a:schemeClr val="accent1"/>
-          </a:lnRef>
-          <a:fillRef idx="0">
-            <a:schemeClr val="accent1"/>
-          </a:fillRef>
-          <a:effectRef idx="1">
-            <a:schemeClr val="accent1"/>
-          </a:effectRef>
-          <a:fontRef idx="minor">
-            <a:schemeClr val="tx1"/>
-          </a:fontRef>
-        </p:style>
-      </p:cxnSp>
-      <p:cxnSp>
-        <p:nvCxnSpPr>
-          <p:cNvPr id="40" name="Connector 39"/>
-          <p:cNvCxnSpPr/>
-          <p:nvPr/>
-        </p:nvCxnSpPr>
-        <p:spPr>
-          <a:xfrm flipV="1">
-            <a:off x="896112" y="1805940"/>
-            <a:ext cx="2304288" cy="2857500"/>
-          </a:xfrm>
-          <a:prstGeom prst="line">
-            <a:avLst/>
-          </a:prstGeom>
-          <a:ln w="12700">
-            <a:solidFill>
-              <a:srgbClr val="B0B0B0"/>
-            </a:solidFill>
-          </a:ln>
-        </p:spPr>
-        <p:style>
-          <a:lnRef idx="2">
-            <a:schemeClr val="accent1"/>
-          </a:lnRef>
-          <a:fillRef idx="0">
-            <a:schemeClr val="accent1"/>
-          </a:fillRef>
-          <a:effectRef idx="1">
-            <a:schemeClr val="accent1"/>
-          </a:effectRef>
-          <a:fontRef idx="minor">
-            <a:schemeClr val="tx1"/>
-          </a:fontRef>
-        </p:style>
-      </p:cxnSp>
-      <p:cxnSp>
-        <p:nvCxnSpPr>
-          <p:cNvPr id="41" name="Connector 40"/>
-          <p:cNvCxnSpPr/>
-          <p:nvPr/>
-        </p:nvCxnSpPr>
-        <p:spPr>
-          <a:xfrm flipV="1">
-            <a:off x="896112" y="2857500"/>
-            <a:ext cx="6419088" cy="1805940"/>
-          </a:xfrm>
-          <a:prstGeom prst="line">
-            <a:avLst/>
-          </a:prstGeom>
-          <a:ln w="12700">
-            <a:solidFill>
-              <a:srgbClr val="B0B0B0"/>
-            </a:solidFill>
-          </a:ln>
-        </p:spPr>
-        <p:style>
-          <a:lnRef idx="2">
-            <a:schemeClr val="accent1"/>
-          </a:lnRef>
-          <a:fillRef idx="0">
-            <a:schemeClr val="accent1"/>
-          </a:fillRef>
-          <a:effectRef idx="1">
-            <a:schemeClr val="accent1"/>
-          </a:effectRef>
-          <a:fontRef idx="minor">
-            <a:schemeClr val="tx1"/>
-          </a:fontRef>
-        </p:style>
-      </p:cxnSp>
-      <p:cxnSp>
-        <p:nvCxnSpPr>
-          <p:cNvPr id="42" name="Connector 41"/>
-          <p:cNvCxnSpPr/>
-          <p:nvPr/>
-        </p:nvCxnSpPr>
-        <p:spPr>
-          <a:xfrm flipV="1">
-            <a:off x="896112" y="3909060"/>
-            <a:ext cx="2304288" cy="754380"/>
-          </a:xfrm>
-          <a:prstGeom prst="line">
-            <a:avLst/>
-          </a:prstGeom>
-          <a:ln w="12700">
-            <a:solidFill>
-              <a:srgbClr val="B0B0B0"/>
-            </a:solidFill>
-          </a:ln>
-        </p:spPr>
-        <p:style>
-          <a:lnRef idx="2">
-            <a:schemeClr val="accent1"/>
-          </a:lnRef>
-          <a:fillRef idx="0">
-            <a:schemeClr val="accent1"/>
-          </a:fillRef>
-          <a:effectRef idx="1">
-            <a:schemeClr val="accent1"/>
-          </a:effectRef>
-          <a:fontRef idx="minor">
-            <a:schemeClr val="tx1"/>
-          </a:fontRef>
-        </p:style>
-      </p:cxnSp>
-      <p:cxnSp>
-        <p:nvCxnSpPr>
-          <p:cNvPr id="43" name="Connector 42"/>
-          <p:cNvCxnSpPr/>
-          <p:nvPr/>
-        </p:nvCxnSpPr>
-        <p:spPr>
-          <a:xfrm flipV="1">
-            <a:off x="896112" y="3909060"/>
-            <a:ext cx="6419088" cy="754380"/>
-          </a:xfrm>
-          <a:prstGeom prst="line">
-            <a:avLst/>
-          </a:prstGeom>
-          <a:ln w="12700">
-            <a:solidFill>
-              <a:srgbClr val="B0B0B0"/>
-            </a:solidFill>
-          </a:ln>
-        </p:spPr>
-        <p:style>
-          <a:lnRef idx="2">
-            <a:schemeClr val="accent1"/>
-          </a:lnRef>
-          <a:fillRef idx="0">
-            <a:schemeClr val="accent1"/>
-          </a:fillRef>
-          <a:effectRef idx="1">
-            <a:schemeClr val="accent1"/>
-          </a:effectRef>
-          <a:fontRef idx="minor">
-            <a:schemeClr val="tx1"/>
-          </a:fontRef>
-        </p:style>
-      </p:cxnSp>
-      <p:sp>
-        <p:nvSpPr>
-          <p:cNvPr id="44" name="TextBox 43"/>
-          <p:cNvSpPr txBox="1"/>
-          <p:nvPr/>
-        </p:nvSpPr>
-        <p:spPr>
-          <a:xfrm>
-            <a:off x="731520" y="5760720"/>
-            <a:ext cx="10332720" cy="365760"/>
-          </a:xfrm>
-          <a:prstGeom prst="rect">
-            <a:avLst/>
-          </a:prstGeom>
-          <a:noFill/>
-        </p:spPr>
-        <p:txBody>
-          <a:bodyPr wrap="square" anchor="t">
-            <a:spAutoFit/>
-          </a:bodyPr>
-          <a:lstStyle/>
-          <a:p>
-            <a:pPr algn="l"/>
-            <a:r>
-              <a:rPr sz="1250" b="0" i="1">
-                <a:solidFill>
-                  <a:srgbClr val="404040"/>
-                </a:solidFill>
-                <a:latin typeface="Times New Roman"/>
-              </a:rPr>
-              <a:t>22 cas d'utilisation détaillés : voir docs/cas_utilisation.md (diagramme Mermaid + tableau de synthèse)</a:t>
-            </a:r>
-          </a:p>
-        </p:txBody>
-      </p:sp>
-    </p:spTree>
-  </p:cSld>
-  <p:clrMapOvr>
-    <a:masterClrMapping/>
-  </p:clrMapOvr>
-</p:sld>
-</file>
-
 <file path=ppt/slides/slide6.xml><?xml version="1.0" encoding="utf-8"?>
 <p:sld xmlns:a="http://schemas.openxmlformats.org/drawingml/2006/main" xmlns:p="http://schemas.openxmlformats.org/presentationml/2006/main" xmlns:r="http://schemas.openxmlformats.org/officeDocument/2006/relationships">
   <p:cSld>
@@ -8569,7 +7872,7 @@
                 </a:solidFill>
                 <a:latin typeface="Times New Roman"/>
               </a:rPr>
-              <a:t>CHOIX TECHNOLOGIQUES</a:t>
+              <a:t>PÉRIMÈTRE FONCTIONNEL</a:t>
             </a:r>
           </a:p>
         </p:txBody>
@@ -8604,7 +7907,7 @@
                 </a:solidFill>
                 <a:latin typeface="Times New Roman"/>
               </a:rPr>
-              <a:t>Stack technique</a:t>
+              <a:t>Diagramme de cas d'utilisation</a:t>
             </a:r>
           </a:p>
         </p:txBody>
@@ -8684,6 +7987,1693 @@
                 <a:latin typeface="Times New Roman"/>
               </a:rPr>
               <a:t>5</a:t>
+            </a:r>
+          </a:p>
+        </p:txBody>
+      </p:sp>
+      <p:sp>
+        <p:nvSpPr>
+          <p:cNvPr id="6" name="Oval 5"/>
+          <p:cNvSpPr/>
+          <p:nvPr/>
+        </p:nvSpPr>
+        <p:spPr>
+          <a:xfrm>
+            <a:off x="731520" y="1463040"/>
+            <a:ext cx="329184" cy="329184"/>
+          </a:xfrm>
+          <a:prstGeom prst="ellipse">
+            <a:avLst/>
+          </a:prstGeom>
+          <a:noFill/>
+          <a:ln w="22225">
+            <a:solidFill>
+              <a:srgbClr val="000000"/>
+            </a:solidFill>
+          </a:ln>
+          <a:effectLst/>
+        </p:spPr>
+        <p:style>
+          <a:lnRef idx="1">
+            <a:schemeClr val="accent1"/>
+          </a:lnRef>
+          <a:fillRef idx="3">
+            <a:schemeClr val="accent1"/>
+          </a:fillRef>
+          <a:effectRef idx="2">
+            <a:schemeClr val="accent1"/>
+          </a:effectRef>
+          <a:fontRef idx="minor">
+            <a:schemeClr val="lt1"/>
+          </a:fontRef>
+        </p:style>
+        <p:txBody>
+          <a:bodyPr rtlCol="0" anchor="ctr"/>
+          <a:lstStyle/>
+          <a:p>
+            <a:pPr algn="ctr"/>
+          </a:p>
+        </p:txBody>
+      </p:sp>
+      <p:cxnSp>
+        <p:nvCxnSpPr>
+          <p:cNvPr id="7" name="Connector 6"/>
+          <p:cNvCxnSpPr/>
+          <p:nvPr/>
+        </p:nvCxnSpPr>
+        <p:spPr>
+          <a:xfrm>
+            <a:off x="896112" y="1792224"/>
+            <a:ext cx="0" cy="438912"/>
+          </a:xfrm>
+          <a:prstGeom prst="line">
+            <a:avLst/>
+          </a:prstGeom>
+          <a:ln w="22225">
+            <a:solidFill>
+              <a:srgbClr val="000000"/>
+            </a:solidFill>
+          </a:ln>
+        </p:spPr>
+        <p:style>
+          <a:lnRef idx="2">
+            <a:schemeClr val="accent1"/>
+          </a:lnRef>
+          <a:fillRef idx="0">
+            <a:schemeClr val="accent1"/>
+          </a:fillRef>
+          <a:effectRef idx="1">
+            <a:schemeClr val="accent1"/>
+          </a:effectRef>
+          <a:fontRef idx="minor">
+            <a:schemeClr val="tx1"/>
+          </a:fontRef>
+        </p:style>
+      </p:cxnSp>
+      <p:cxnSp>
+        <p:nvCxnSpPr>
+          <p:cNvPr id="8" name="Connector 7"/>
+          <p:cNvCxnSpPr/>
+          <p:nvPr/>
+        </p:nvCxnSpPr>
+        <p:spPr>
+          <a:xfrm>
+            <a:off x="676656" y="1915119"/>
+            <a:ext cx="438912" cy="0"/>
+          </a:xfrm>
+          <a:prstGeom prst="line">
+            <a:avLst/>
+          </a:prstGeom>
+          <a:ln w="22225">
+            <a:solidFill>
+              <a:srgbClr val="000000"/>
+            </a:solidFill>
+          </a:ln>
+        </p:spPr>
+        <p:style>
+          <a:lnRef idx="2">
+            <a:schemeClr val="accent1"/>
+          </a:lnRef>
+          <a:fillRef idx="0">
+            <a:schemeClr val="accent1"/>
+          </a:fillRef>
+          <a:effectRef idx="1">
+            <a:schemeClr val="accent1"/>
+          </a:effectRef>
+          <a:fontRef idx="minor">
+            <a:schemeClr val="tx1"/>
+          </a:fontRef>
+        </p:style>
+      </p:cxnSp>
+      <p:cxnSp>
+        <p:nvCxnSpPr>
+          <p:cNvPr id="9" name="Connector 8"/>
+          <p:cNvCxnSpPr/>
+          <p:nvPr/>
+        </p:nvCxnSpPr>
+        <p:spPr>
+          <a:xfrm flipH="1">
+            <a:off x="676656" y="2231136"/>
+            <a:ext cx="219456" cy="285292"/>
+          </a:xfrm>
+          <a:prstGeom prst="line">
+            <a:avLst/>
+          </a:prstGeom>
+          <a:ln w="22225">
+            <a:solidFill>
+              <a:srgbClr val="000000"/>
+            </a:solidFill>
+          </a:ln>
+        </p:spPr>
+        <p:style>
+          <a:lnRef idx="2">
+            <a:schemeClr val="accent1"/>
+          </a:lnRef>
+          <a:fillRef idx="0">
+            <a:schemeClr val="accent1"/>
+          </a:fillRef>
+          <a:effectRef idx="1">
+            <a:schemeClr val="accent1"/>
+          </a:effectRef>
+          <a:fontRef idx="minor">
+            <a:schemeClr val="tx1"/>
+          </a:fontRef>
+        </p:style>
+      </p:cxnSp>
+      <p:cxnSp>
+        <p:nvCxnSpPr>
+          <p:cNvPr id="10" name="Connector 9"/>
+          <p:cNvCxnSpPr/>
+          <p:nvPr/>
+        </p:nvCxnSpPr>
+        <p:spPr>
+          <a:xfrm>
+            <a:off x="896112" y="2231136"/>
+            <a:ext cx="219456" cy="285292"/>
+          </a:xfrm>
+          <a:prstGeom prst="line">
+            <a:avLst/>
+          </a:prstGeom>
+          <a:ln w="22225">
+            <a:solidFill>
+              <a:srgbClr val="000000"/>
+            </a:solidFill>
+          </a:ln>
+        </p:spPr>
+        <p:style>
+          <a:lnRef idx="2">
+            <a:schemeClr val="accent1"/>
+          </a:lnRef>
+          <a:fillRef idx="0">
+            <a:schemeClr val="accent1"/>
+          </a:fillRef>
+          <a:effectRef idx="1">
+            <a:schemeClr val="accent1"/>
+          </a:effectRef>
+          <a:fontRef idx="minor">
+            <a:schemeClr val="tx1"/>
+          </a:fontRef>
+        </p:style>
+      </p:cxnSp>
+      <p:sp>
+        <p:nvSpPr>
+          <p:cNvPr id="11" name="TextBox 10"/>
+          <p:cNvSpPr txBox="1"/>
+          <p:nvPr/>
+        </p:nvSpPr>
+        <p:spPr>
+          <a:xfrm>
+            <a:off x="228600" y="2571292"/>
+            <a:ext cx="1335024" cy="274320"/>
+          </a:xfrm>
+          <a:prstGeom prst="rect">
+            <a:avLst/>
+          </a:prstGeom>
+          <a:noFill/>
+        </p:spPr>
+        <p:txBody>
+          <a:bodyPr wrap="square" anchor="t">
+            <a:spAutoFit/>
+          </a:bodyPr>
+          <a:lstStyle/>
+          <a:p>
+            <a:pPr algn="ctr"/>
+            <a:r>
+              <a:rPr sz="1250" b="1" i="0">
+                <a:solidFill>
+                  <a:srgbClr val="000000"/>
+                </a:solidFill>
+                <a:latin typeface="Times New Roman"/>
+              </a:rPr>
+              <a:t>Administrateur</a:t>
+            </a:r>
+          </a:p>
+        </p:txBody>
+      </p:sp>
+      <p:sp>
+        <p:nvSpPr>
+          <p:cNvPr id="12" name="Oval 11"/>
+          <p:cNvSpPr/>
+          <p:nvPr/>
+        </p:nvSpPr>
+        <p:spPr>
+          <a:xfrm>
+            <a:off x="731520" y="2788920"/>
+            <a:ext cx="329184" cy="329184"/>
+          </a:xfrm>
+          <a:prstGeom prst="ellipse">
+            <a:avLst/>
+          </a:prstGeom>
+          <a:noFill/>
+          <a:ln w="22225">
+            <a:solidFill>
+              <a:srgbClr val="000000"/>
+            </a:solidFill>
+          </a:ln>
+          <a:effectLst/>
+        </p:spPr>
+        <p:style>
+          <a:lnRef idx="1">
+            <a:schemeClr val="accent1"/>
+          </a:lnRef>
+          <a:fillRef idx="3">
+            <a:schemeClr val="accent1"/>
+          </a:fillRef>
+          <a:effectRef idx="2">
+            <a:schemeClr val="accent1"/>
+          </a:effectRef>
+          <a:fontRef idx="minor">
+            <a:schemeClr val="lt1"/>
+          </a:fontRef>
+        </p:style>
+        <p:txBody>
+          <a:bodyPr rtlCol="0" anchor="ctr"/>
+          <a:lstStyle/>
+          <a:p>
+            <a:pPr algn="ctr"/>
+          </a:p>
+        </p:txBody>
+      </p:sp>
+      <p:cxnSp>
+        <p:nvCxnSpPr>
+          <p:cNvPr id="13" name="Connector 12"/>
+          <p:cNvCxnSpPr/>
+          <p:nvPr/>
+        </p:nvCxnSpPr>
+        <p:spPr>
+          <a:xfrm>
+            <a:off x="896112" y="3118104"/>
+            <a:ext cx="0" cy="438912"/>
+          </a:xfrm>
+          <a:prstGeom prst="line">
+            <a:avLst/>
+          </a:prstGeom>
+          <a:ln w="22225">
+            <a:solidFill>
+              <a:srgbClr val="000000"/>
+            </a:solidFill>
+          </a:ln>
+        </p:spPr>
+        <p:style>
+          <a:lnRef idx="2">
+            <a:schemeClr val="accent1"/>
+          </a:lnRef>
+          <a:fillRef idx="0">
+            <a:schemeClr val="accent1"/>
+          </a:fillRef>
+          <a:effectRef idx="1">
+            <a:schemeClr val="accent1"/>
+          </a:effectRef>
+          <a:fontRef idx="minor">
+            <a:schemeClr val="tx1"/>
+          </a:fontRef>
+        </p:style>
+      </p:cxnSp>
+      <p:cxnSp>
+        <p:nvCxnSpPr>
+          <p:cNvPr id="14" name="Connector 13"/>
+          <p:cNvCxnSpPr/>
+          <p:nvPr/>
+        </p:nvCxnSpPr>
+        <p:spPr>
+          <a:xfrm>
+            <a:off x="676656" y="3240999"/>
+            <a:ext cx="438912" cy="0"/>
+          </a:xfrm>
+          <a:prstGeom prst="line">
+            <a:avLst/>
+          </a:prstGeom>
+          <a:ln w="22225">
+            <a:solidFill>
+              <a:srgbClr val="000000"/>
+            </a:solidFill>
+          </a:ln>
+        </p:spPr>
+        <p:style>
+          <a:lnRef idx="2">
+            <a:schemeClr val="accent1"/>
+          </a:lnRef>
+          <a:fillRef idx="0">
+            <a:schemeClr val="accent1"/>
+          </a:fillRef>
+          <a:effectRef idx="1">
+            <a:schemeClr val="accent1"/>
+          </a:effectRef>
+          <a:fontRef idx="minor">
+            <a:schemeClr val="tx1"/>
+          </a:fontRef>
+        </p:style>
+      </p:cxnSp>
+      <p:cxnSp>
+        <p:nvCxnSpPr>
+          <p:cNvPr id="15" name="Connector 14"/>
+          <p:cNvCxnSpPr/>
+          <p:nvPr/>
+        </p:nvCxnSpPr>
+        <p:spPr>
+          <a:xfrm flipH="1">
+            <a:off x="676656" y="3557016"/>
+            <a:ext cx="219456" cy="285292"/>
+          </a:xfrm>
+          <a:prstGeom prst="line">
+            <a:avLst/>
+          </a:prstGeom>
+          <a:ln w="22225">
+            <a:solidFill>
+              <a:srgbClr val="000000"/>
+            </a:solidFill>
+          </a:ln>
+        </p:spPr>
+        <p:style>
+          <a:lnRef idx="2">
+            <a:schemeClr val="accent1"/>
+          </a:lnRef>
+          <a:fillRef idx="0">
+            <a:schemeClr val="accent1"/>
+          </a:fillRef>
+          <a:effectRef idx="1">
+            <a:schemeClr val="accent1"/>
+          </a:effectRef>
+          <a:fontRef idx="minor">
+            <a:schemeClr val="tx1"/>
+          </a:fontRef>
+        </p:style>
+      </p:cxnSp>
+      <p:cxnSp>
+        <p:nvCxnSpPr>
+          <p:cNvPr id="16" name="Connector 15"/>
+          <p:cNvCxnSpPr/>
+          <p:nvPr/>
+        </p:nvCxnSpPr>
+        <p:spPr>
+          <a:xfrm>
+            <a:off x="896112" y="3557016"/>
+            <a:ext cx="219456" cy="285292"/>
+          </a:xfrm>
+          <a:prstGeom prst="line">
+            <a:avLst/>
+          </a:prstGeom>
+          <a:ln w="22225">
+            <a:solidFill>
+              <a:srgbClr val="000000"/>
+            </a:solidFill>
+          </a:ln>
+        </p:spPr>
+        <p:style>
+          <a:lnRef idx="2">
+            <a:schemeClr val="accent1"/>
+          </a:lnRef>
+          <a:fillRef idx="0">
+            <a:schemeClr val="accent1"/>
+          </a:fillRef>
+          <a:effectRef idx="1">
+            <a:schemeClr val="accent1"/>
+          </a:effectRef>
+          <a:fontRef idx="minor">
+            <a:schemeClr val="tx1"/>
+          </a:fontRef>
+        </p:style>
+      </p:cxnSp>
+      <p:sp>
+        <p:nvSpPr>
+          <p:cNvPr id="17" name="TextBox 16"/>
+          <p:cNvSpPr txBox="1"/>
+          <p:nvPr/>
+        </p:nvSpPr>
+        <p:spPr>
+          <a:xfrm>
+            <a:off x="228600" y="3897172"/>
+            <a:ext cx="1335024" cy="274320"/>
+          </a:xfrm>
+          <a:prstGeom prst="rect">
+            <a:avLst/>
+          </a:prstGeom>
+          <a:noFill/>
+        </p:spPr>
+        <p:txBody>
+          <a:bodyPr wrap="square" anchor="t">
+            <a:spAutoFit/>
+          </a:bodyPr>
+          <a:lstStyle/>
+          <a:p>
+            <a:pPr algn="ctr"/>
+            <a:r>
+              <a:rPr sz="1250" b="1" i="0">
+                <a:solidFill>
+                  <a:srgbClr val="000000"/>
+                </a:solidFill>
+                <a:latin typeface="Times New Roman"/>
+              </a:rPr>
+              <a:t>Formateur</a:t>
+            </a:r>
+          </a:p>
+        </p:txBody>
+      </p:sp>
+      <p:sp>
+        <p:nvSpPr>
+          <p:cNvPr id="18" name="Oval 17"/>
+          <p:cNvSpPr/>
+          <p:nvPr/>
+        </p:nvSpPr>
+        <p:spPr>
+          <a:xfrm>
+            <a:off x="731520" y="4114800"/>
+            <a:ext cx="329184" cy="329184"/>
+          </a:xfrm>
+          <a:prstGeom prst="ellipse">
+            <a:avLst/>
+          </a:prstGeom>
+          <a:noFill/>
+          <a:ln w="22225">
+            <a:solidFill>
+              <a:srgbClr val="000000"/>
+            </a:solidFill>
+          </a:ln>
+          <a:effectLst/>
+        </p:spPr>
+        <p:style>
+          <a:lnRef idx="1">
+            <a:schemeClr val="accent1"/>
+          </a:lnRef>
+          <a:fillRef idx="3">
+            <a:schemeClr val="accent1"/>
+          </a:fillRef>
+          <a:effectRef idx="2">
+            <a:schemeClr val="accent1"/>
+          </a:effectRef>
+          <a:fontRef idx="minor">
+            <a:schemeClr val="lt1"/>
+          </a:fontRef>
+        </p:style>
+        <p:txBody>
+          <a:bodyPr rtlCol="0" anchor="ctr"/>
+          <a:lstStyle/>
+          <a:p>
+            <a:pPr algn="ctr"/>
+          </a:p>
+        </p:txBody>
+      </p:sp>
+      <p:cxnSp>
+        <p:nvCxnSpPr>
+          <p:cNvPr id="19" name="Connector 18"/>
+          <p:cNvCxnSpPr/>
+          <p:nvPr/>
+        </p:nvCxnSpPr>
+        <p:spPr>
+          <a:xfrm>
+            <a:off x="896112" y="4443984"/>
+            <a:ext cx="0" cy="438912"/>
+          </a:xfrm>
+          <a:prstGeom prst="line">
+            <a:avLst/>
+          </a:prstGeom>
+          <a:ln w="22225">
+            <a:solidFill>
+              <a:srgbClr val="000000"/>
+            </a:solidFill>
+          </a:ln>
+        </p:spPr>
+        <p:style>
+          <a:lnRef idx="2">
+            <a:schemeClr val="accent1"/>
+          </a:lnRef>
+          <a:fillRef idx="0">
+            <a:schemeClr val="accent1"/>
+          </a:fillRef>
+          <a:effectRef idx="1">
+            <a:schemeClr val="accent1"/>
+          </a:effectRef>
+          <a:fontRef idx="minor">
+            <a:schemeClr val="tx1"/>
+          </a:fontRef>
+        </p:style>
+      </p:cxnSp>
+      <p:cxnSp>
+        <p:nvCxnSpPr>
+          <p:cNvPr id="20" name="Connector 19"/>
+          <p:cNvCxnSpPr/>
+          <p:nvPr/>
+        </p:nvCxnSpPr>
+        <p:spPr>
+          <a:xfrm>
+            <a:off x="676656" y="4566879"/>
+            <a:ext cx="438912" cy="0"/>
+          </a:xfrm>
+          <a:prstGeom prst="line">
+            <a:avLst/>
+          </a:prstGeom>
+          <a:ln w="22225">
+            <a:solidFill>
+              <a:srgbClr val="000000"/>
+            </a:solidFill>
+          </a:ln>
+        </p:spPr>
+        <p:style>
+          <a:lnRef idx="2">
+            <a:schemeClr val="accent1"/>
+          </a:lnRef>
+          <a:fillRef idx="0">
+            <a:schemeClr val="accent1"/>
+          </a:fillRef>
+          <a:effectRef idx="1">
+            <a:schemeClr val="accent1"/>
+          </a:effectRef>
+          <a:fontRef idx="minor">
+            <a:schemeClr val="tx1"/>
+          </a:fontRef>
+        </p:style>
+      </p:cxnSp>
+      <p:cxnSp>
+        <p:nvCxnSpPr>
+          <p:cNvPr id="21" name="Connector 20"/>
+          <p:cNvCxnSpPr/>
+          <p:nvPr/>
+        </p:nvCxnSpPr>
+        <p:spPr>
+          <a:xfrm flipH="1">
+            <a:off x="676656" y="4882896"/>
+            <a:ext cx="219456" cy="285292"/>
+          </a:xfrm>
+          <a:prstGeom prst="line">
+            <a:avLst/>
+          </a:prstGeom>
+          <a:ln w="22225">
+            <a:solidFill>
+              <a:srgbClr val="000000"/>
+            </a:solidFill>
+          </a:ln>
+        </p:spPr>
+        <p:style>
+          <a:lnRef idx="2">
+            <a:schemeClr val="accent1"/>
+          </a:lnRef>
+          <a:fillRef idx="0">
+            <a:schemeClr val="accent1"/>
+          </a:fillRef>
+          <a:effectRef idx="1">
+            <a:schemeClr val="accent1"/>
+          </a:effectRef>
+          <a:fontRef idx="minor">
+            <a:schemeClr val="tx1"/>
+          </a:fontRef>
+        </p:style>
+      </p:cxnSp>
+      <p:cxnSp>
+        <p:nvCxnSpPr>
+          <p:cNvPr id="22" name="Connector 21"/>
+          <p:cNvCxnSpPr/>
+          <p:nvPr/>
+        </p:nvCxnSpPr>
+        <p:spPr>
+          <a:xfrm>
+            <a:off x="896112" y="4882896"/>
+            <a:ext cx="219456" cy="285292"/>
+          </a:xfrm>
+          <a:prstGeom prst="line">
+            <a:avLst/>
+          </a:prstGeom>
+          <a:ln w="22225">
+            <a:solidFill>
+              <a:srgbClr val="000000"/>
+            </a:solidFill>
+          </a:ln>
+        </p:spPr>
+        <p:style>
+          <a:lnRef idx="2">
+            <a:schemeClr val="accent1"/>
+          </a:lnRef>
+          <a:fillRef idx="0">
+            <a:schemeClr val="accent1"/>
+          </a:fillRef>
+          <a:effectRef idx="1">
+            <a:schemeClr val="accent1"/>
+          </a:effectRef>
+          <a:fontRef idx="minor">
+            <a:schemeClr val="tx1"/>
+          </a:fontRef>
+        </p:style>
+      </p:cxnSp>
+      <p:sp>
+        <p:nvSpPr>
+          <p:cNvPr id="23" name="TextBox 22"/>
+          <p:cNvSpPr txBox="1"/>
+          <p:nvPr/>
+        </p:nvSpPr>
+        <p:spPr>
+          <a:xfrm>
+            <a:off x="228600" y="5223052"/>
+            <a:ext cx="1335024" cy="274320"/>
+          </a:xfrm>
+          <a:prstGeom prst="rect">
+            <a:avLst/>
+          </a:prstGeom>
+          <a:noFill/>
+        </p:spPr>
+        <p:txBody>
+          <a:bodyPr wrap="square" anchor="t">
+            <a:spAutoFit/>
+          </a:bodyPr>
+          <a:lstStyle/>
+          <a:p>
+            <a:pPr algn="ctr"/>
+            <a:r>
+              <a:rPr sz="1250" b="1" i="0">
+                <a:solidFill>
+                  <a:srgbClr val="000000"/>
+                </a:solidFill>
+                <a:latin typeface="Times New Roman"/>
+              </a:rPr>
+              <a:t>Étudiant</a:t>
+            </a:r>
+          </a:p>
+        </p:txBody>
+      </p:sp>
+      <p:sp>
+        <p:nvSpPr>
+          <p:cNvPr id="24" name="Oval 23"/>
+          <p:cNvSpPr/>
+          <p:nvPr/>
+        </p:nvSpPr>
+        <p:spPr>
+          <a:xfrm>
+            <a:off x="3200400" y="1417320"/>
+            <a:ext cx="3566160" cy="777240"/>
+          </a:xfrm>
+          <a:prstGeom prst="ellipse">
+            <a:avLst/>
+          </a:prstGeom>
+          <a:solidFill>
+            <a:srgbClr val="FFFFFF"/>
+          </a:solidFill>
+          <a:ln w="15875">
+            <a:solidFill>
+              <a:srgbClr val="1F3C63"/>
+            </a:solidFill>
+          </a:ln>
+          <a:effectLst/>
+        </p:spPr>
+        <p:style>
+          <a:lnRef idx="1">
+            <a:schemeClr val="accent1"/>
+          </a:lnRef>
+          <a:fillRef idx="3">
+            <a:schemeClr val="accent1"/>
+          </a:fillRef>
+          <a:effectRef idx="2">
+            <a:schemeClr val="accent1"/>
+          </a:effectRef>
+          <a:fontRef idx="minor">
+            <a:schemeClr val="lt1"/>
+          </a:fontRef>
+        </p:style>
+        <p:txBody>
+          <a:bodyPr rtlCol="0" anchor="ctr" wrap="square"/>
+          <a:lstStyle/>
+          <a:p>
+            <a:pPr algn="ctr"/>
+            <a:r>
+              <a:rPr sz="1300" b="1">
+                <a:solidFill>
+                  <a:srgbClr val="000000"/>
+                </a:solidFill>
+                <a:latin typeface="Times New Roman"/>
+              </a:rPr>
+              <a:t>Authentification</a:t>
+            </a:r>
+          </a:p>
+        </p:txBody>
+      </p:sp>
+      <p:sp>
+        <p:nvSpPr>
+          <p:cNvPr id="25" name="Oval 24"/>
+          <p:cNvSpPr/>
+          <p:nvPr/>
+        </p:nvSpPr>
+        <p:spPr>
+          <a:xfrm>
+            <a:off x="7315200" y="1417320"/>
+            <a:ext cx="3566160" cy="777240"/>
+          </a:xfrm>
+          <a:prstGeom prst="ellipse">
+            <a:avLst/>
+          </a:prstGeom>
+          <a:solidFill>
+            <a:srgbClr val="FFFFFF"/>
+          </a:solidFill>
+          <a:ln w="15875">
+            <a:solidFill>
+              <a:srgbClr val="1F3C63"/>
+            </a:solidFill>
+          </a:ln>
+          <a:effectLst/>
+        </p:spPr>
+        <p:style>
+          <a:lnRef idx="1">
+            <a:schemeClr val="accent1"/>
+          </a:lnRef>
+          <a:fillRef idx="3">
+            <a:schemeClr val="accent1"/>
+          </a:fillRef>
+          <a:effectRef idx="2">
+            <a:schemeClr val="accent1"/>
+          </a:effectRef>
+          <a:fontRef idx="minor">
+            <a:schemeClr val="lt1"/>
+          </a:fontRef>
+        </p:style>
+        <p:txBody>
+          <a:bodyPr rtlCol="0" anchor="ctr" wrap="square"/>
+          <a:lstStyle/>
+          <a:p>
+            <a:pPr algn="ctr"/>
+            <a:r>
+              <a:rPr sz="1300" b="1">
+                <a:solidFill>
+                  <a:srgbClr val="000000"/>
+                </a:solidFill>
+                <a:latin typeface="Times New Roman"/>
+              </a:rPr>
+              <a:t>Gestion étudiants</a:t>
+            </a:r>
+          </a:p>
+        </p:txBody>
+      </p:sp>
+      <p:sp>
+        <p:nvSpPr>
+          <p:cNvPr id="26" name="Oval 25"/>
+          <p:cNvSpPr/>
+          <p:nvPr/>
+        </p:nvSpPr>
+        <p:spPr>
+          <a:xfrm>
+            <a:off x="3200400" y="2468880"/>
+            <a:ext cx="3566160" cy="777240"/>
+          </a:xfrm>
+          <a:prstGeom prst="ellipse">
+            <a:avLst/>
+          </a:prstGeom>
+          <a:solidFill>
+            <a:srgbClr val="FFFFFF"/>
+          </a:solidFill>
+          <a:ln w="15875">
+            <a:solidFill>
+              <a:srgbClr val="1F3C63"/>
+            </a:solidFill>
+          </a:ln>
+          <a:effectLst/>
+        </p:spPr>
+        <p:style>
+          <a:lnRef idx="1">
+            <a:schemeClr val="accent1"/>
+          </a:lnRef>
+          <a:fillRef idx="3">
+            <a:schemeClr val="accent1"/>
+          </a:fillRef>
+          <a:effectRef idx="2">
+            <a:schemeClr val="accent1"/>
+          </a:effectRef>
+          <a:fontRef idx="minor">
+            <a:schemeClr val="lt1"/>
+          </a:fontRef>
+        </p:style>
+        <p:txBody>
+          <a:bodyPr rtlCol="0" anchor="ctr" wrap="square"/>
+          <a:lstStyle/>
+          <a:p>
+            <a:pPr algn="ctr"/>
+            <a:r>
+              <a:rPr sz="1300" b="1">
+                <a:solidFill>
+                  <a:srgbClr val="000000"/>
+                </a:solidFill>
+                <a:latin typeface="Times New Roman"/>
+              </a:rPr>
+              <a:t>Gestion formateurs</a:t>
+            </a:r>
+          </a:p>
+        </p:txBody>
+      </p:sp>
+      <p:sp>
+        <p:nvSpPr>
+          <p:cNvPr id="27" name="Oval 26"/>
+          <p:cNvSpPr/>
+          <p:nvPr/>
+        </p:nvSpPr>
+        <p:spPr>
+          <a:xfrm>
+            <a:off x="7315200" y="2468880"/>
+            <a:ext cx="3566160" cy="777240"/>
+          </a:xfrm>
+          <a:prstGeom prst="ellipse">
+            <a:avLst/>
+          </a:prstGeom>
+          <a:solidFill>
+            <a:srgbClr val="FFFFFF"/>
+          </a:solidFill>
+          <a:ln w="15875">
+            <a:solidFill>
+              <a:srgbClr val="1F3C63"/>
+            </a:solidFill>
+          </a:ln>
+          <a:effectLst/>
+        </p:spPr>
+        <p:style>
+          <a:lnRef idx="1">
+            <a:schemeClr val="accent1"/>
+          </a:lnRef>
+          <a:fillRef idx="3">
+            <a:schemeClr val="accent1"/>
+          </a:fillRef>
+          <a:effectRef idx="2">
+            <a:schemeClr val="accent1"/>
+          </a:effectRef>
+          <a:fontRef idx="minor">
+            <a:schemeClr val="lt1"/>
+          </a:fontRef>
+        </p:style>
+        <p:txBody>
+          <a:bodyPr rtlCol="0" anchor="ctr" wrap="square"/>
+          <a:lstStyle/>
+          <a:p>
+            <a:pPr algn="ctr"/>
+            <a:r>
+              <a:rPr sz="1300" b="1">
+                <a:solidFill>
+                  <a:srgbClr val="000000"/>
+                </a:solidFill>
+                <a:latin typeface="Times New Roman"/>
+              </a:rPr>
+              <a:t>Gestion formations</a:t>
+            </a:r>
+          </a:p>
+        </p:txBody>
+      </p:sp>
+      <p:sp>
+        <p:nvSpPr>
+          <p:cNvPr id="28" name="Oval 27"/>
+          <p:cNvSpPr/>
+          <p:nvPr/>
+        </p:nvSpPr>
+        <p:spPr>
+          <a:xfrm>
+            <a:off x="3200400" y="3520440"/>
+            <a:ext cx="3566160" cy="777240"/>
+          </a:xfrm>
+          <a:prstGeom prst="ellipse">
+            <a:avLst/>
+          </a:prstGeom>
+          <a:solidFill>
+            <a:srgbClr val="FFFFFF"/>
+          </a:solidFill>
+          <a:ln w="15875">
+            <a:solidFill>
+              <a:srgbClr val="1F3C63"/>
+            </a:solidFill>
+          </a:ln>
+          <a:effectLst/>
+        </p:spPr>
+        <p:style>
+          <a:lnRef idx="1">
+            <a:schemeClr val="accent1"/>
+          </a:lnRef>
+          <a:fillRef idx="3">
+            <a:schemeClr val="accent1"/>
+          </a:fillRef>
+          <a:effectRef idx="2">
+            <a:schemeClr val="accent1"/>
+          </a:effectRef>
+          <a:fontRef idx="minor">
+            <a:schemeClr val="lt1"/>
+          </a:fontRef>
+        </p:style>
+        <p:txBody>
+          <a:bodyPr rtlCol="0" anchor="ctr" wrap="square"/>
+          <a:lstStyle/>
+          <a:p>
+            <a:pPr algn="ctr"/>
+            <a:r>
+              <a:rPr sz="1300" b="1">
+                <a:solidFill>
+                  <a:srgbClr val="000000"/>
+                </a:solidFill>
+                <a:latin typeface="Times New Roman"/>
+              </a:rPr>
+              <a:t>Inscriptions &amp; notation</a:t>
+            </a:r>
+          </a:p>
+        </p:txBody>
+      </p:sp>
+      <p:sp>
+        <p:nvSpPr>
+          <p:cNvPr id="29" name="Oval 28"/>
+          <p:cNvSpPr/>
+          <p:nvPr/>
+        </p:nvSpPr>
+        <p:spPr>
+          <a:xfrm>
+            <a:off x="7315200" y="3520440"/>
+            <a:ext cx="3566160" cy="777240"/>
+          </a:xfrm>
+          <a:prstGeom prst="ellipse">
+            <a:avLst/>
+          </a:prstGeom>
+          <a:solidFill>
+            <a:srgbClr val="FFFFFF"/>
+          </a:solidFill>
+          <a:ln w="15875">
+            <a:solidFill>
+              <a:srgbClr val="1F3C63"/>
+            </a:solidFill>
+          </a:ln>
+          <a:effectLst/>
+        </p:spPr>
+        <p:style>
+          <a:lnRef idx="1">
+            <a:schemeClr val="accent1"/>
+          </a:lnRef>
+          <a:fillRef idx="3">
+            <a:schemeClr val="accent1"/>
+          </a:fillRef>
+          <a:effectRef idx="2">
+            <a:schemeClr val="accent1"/>
+          </a:effectRef>
+          <a:fontRef idx="minor">
+            <a:schemeClr val="lt1"/>
+          </a:fontRef>
+        </p:style>
+        <p:txBody>
+          <a:bodyPr rtlCol="0" anchor="ctr" wrap="square"/>
+          <a:lstStyle/>
+          <a:p>
+            <a:pPr algn="ctr"/>
+            <a:r>
+              <a:rPr sz="1300" b="1">
+                <a:solidFill>
+                  <a:srgbClr val="000000"/>
+                </a:solidFill>
+                <a:latin typeface="Times New Roman"/>
+              </a:rPr>
+              <a:t>Tableau de bord</a:t>
+            </a:r>
+          </a:p>
+        </p:txBody>
+      </p:sp>
+      <p:cxnSp>
+        <p:nvCxnSpPr>
+          <p:cNvPr id="30" name="Connector 29"/>
+          <p:cNvCxnSpPr/>
+          <p:nvPr/>
+        </p:nvCxnSpPr>
+        <p:spPr>
+          <a:xfrm flipV="1">
+            <a:off x="896112" y="1805940"/>
+            <a:ext cx="2304288" cy="205740"/>
+          </a:xfrm>
+          <a:prstGeom prst="line">
+            <a:avLst/>
+          </a:prstGeom>
+          <a:ln w="12700">
+            <a:solidFill>
+              <a:srgbClr val="B0B0B0"/>
+            </a:solidFill>
+          </a:ln>
+        </p:spPr>
+        <p:style>
+          <a:lnRef idx="2">
+            <a:schemeClr val="accent1"/>
+          </a:lnRef>
+          <a:fillRef idx="0">
+            <a:schemeClr val="accent1"/>
+          </a:fillRef>
+          <a:effectRef idx="1">
+            <a:schemeClr val="accent1"/>
+          </a:effectRef>
+          <a:fontRef idx="minor">
+            <a:schemeClr val="tx1"/>
+          </a:fontRef>
+        </p:style>
+      </p:cxnSp>
+      <p:cxnSp>
+        <p:nvCxnSpPr>
+          <p:cNvPr id="31" name="Connector 30"/>
+          <p:cNvCxnSpPr/>
+          <p:nvPr/>
+        </p:nvCxnSpPr>
+        <p:spPr>
+          <a:xfrm flipV="1">
+            <a:off x="896112" y="1805940"/>
+            <a:ext cx="6419088" cy="205740"/>
+          </a:xfrm>
+          <a:prstGeom prst="line">
+            <a:avLst/>
+          </a:prstGeom>
+          <a:ln w="12700">
+            <a:solidFill>
+              <a:srgbClr val="B0B0B0"/>
+            </a:solidFill>
+          </a:ln>
+        </p:spPr>
+        <p:style>
+          <a:lnRef idx="2">
+            <a:schemeClr val="accent1"/>
+          </a:lnRef>
+          <a:fillRef idx="0">
+            <a:schemeClr val="accent1"/>
+          </a:fillRef>
+          <a:effectRef idx="1">
+            <a:schemeClr val="accent1"/>
+          </a:effectRef>
+          <a:fontRef idx="minor">
+            <a:schemeClr val="tx1"/>
+          </a:fontRef>
+        </p:style>
+      </p:cxnSp>
+      <p:cxnSp>
+        <p:nvCxnSpPr>
+          <p:cNvPr id="32" name="Connector 31"/>
+          <p:cNvCxnSpPr/>
+          <p:nvPr/>
+        </p:nvCxnSpPr>
+        <p:spPr>
+          <a:xfrm>
+            <a:off x="896112" y="2011680"/>
+            <a:ext cx="2304288" cy="845820"/>
+          </a:xfrm>
+          <a:prstGeom prst="line">
+            <a:avLst/>
+          </a:prstGeom>
+          <a:ln w="12700">
+            <a:solidFill>
+              <a:srgbClr val="B0B0B0"/>
+            </a:solidFill>
+          </a:ln>
+        </p:spPr>
+        <p:style>
+          <a:lnRef idx="2">
+            <a:schemeClr val="accent1"/>
+          </a:lnRef>
+          <a:fillRef idx="0">
+            <a:schemeClr val="accent1"/>
+          </a:fillRef>
+          <a:effectRef idx="1">
+            <a:schemeClr val="accent1"/>
+          </a:effectRef>
+          <a:fontRef idx="minor">
+            <a:schemeClr val="tx1"/>
+          </a:fontRef>
+        </p:style>
+      </p:cxnSp>
+      <p:cxnSp>
+        <p:nvCxnSpPr>
+          <p:cNvPr id="33" name="Connector 32"/>
+          <p:cNvCxnSpPr/>
+          <p:nvPr/>
+        </p:nvCxnSpPr>
+        <p:spPr>
+          <a:xfrm>
+            <a:off x="896112" y="2011680"/>
+            <a:ext cx="6419088" cy="845820"/>
+          </a:xfrm>
+          <a:prstGeom prst="line">
+            <a:avLst/>
+          </a:prstGeom>
+          <a:ln w="12700">
+            <a:solidFill>
+              <a:srgbClr val="B0B0B0"/>
+            </a:solidFill>
+          </a:ln>
+        </p:spPr>
+        <p:style>
+          <a:lnRef idx="2">
+            <a:schemeClr val="accent1"/>
+          </a:lnRef>
+          <a:fillRef idx="0">
+            <a:schemeClr val="accent1"/>
+          </a:fillRef>
+          <a:effectRef idx="1">
+            <a:schemeClr val="accent1"/>
+          </a:effectRef>
+          <a:fontRef idx="minor">
+            <a:schemeClr val="tx1"/>
+          </a:fontRef>
+        </p:style>
+      </p:cxnSp>
+      <p:cxnSp>
+        <p:nvCxnSpPr>
+          <p:cNvPr id="34" name="Connector 33"/>
+          <p:cNvCxnSpPr/>
+          <p:nvPr/>
+        </p:nvCxnSpPr>
+        <p:spPr>
+          <a:xfrm>
+            <a:off x="896112" y="2011680"/>
+            <a:ext cx="2304288" cy="1897380"/>
+          </a:xfrm>
+          <a:prstGeom prst="line">
+            <a:avLst/>
+          </a:prstGeom>
+          <a:ln w="12700">
+            <a:solidFill>
+              <a:srgbClr val="B0B0B0"/>
+            </a:solidFill>
+          </a:ln>
+        </p:spPr>
+        <p:style>
+          <a:lnRef idx="2">
+            <a:schemeClr val="accent1"/>
+          </a:lnRef>
+          <a:fillRef idx="0">
+            <a:schemeClr val="accent1"/>
+          </a:fillRef>
+          <a:effectRef idx="1">
+            <a:schemeClr val="accent1"/>
+          </a:effectRef>
+          <a:fontRef idx="minor">
+            <a:schemeClr val="tx1"/>
+          </a:fontRef>
+        </p:style>
+      </p:cxnSp>
+      <p:cxnSp>
+        <p:nvCxnSpPr>
+          <p:cNvPr id="35" name="Connector 34"/>
+          <p:cNvCxnSpPr/>
+          <p:nvPr/>
+        </p:nvCxnSpPr>
+        <p:spPr>
+          <a:xfrm>
+            <a:off x="896112" y="2011680"/>
+            <a:ext cx="6419088" cy="1897380"/>
+          </a:xfrm>
+          <a:prstGeom prst="line">
+            <a:avLst/>
+          </a:prstGeom>
+          <a:ln w="12700">
+            <a:solidFill>
+              <a:srgbClr val="B0B0B0"/>
+            </a:solidFill>
+          </a:ln>
+        </p:spPr>
+        <p:style>
+          <a:lnRef idx="2">
+            <a:schemeClr val="accent1"/>
+          </a:lnRef>
+          <a:fillRef idx="0">
+            <a:schemeClr val="accent1"/>
+          </a:fillRef>
+          <a:effectRef idx="1">
+            <a:schemeClr val="accent1"/>
+          </a:effectRef>
+          <a:fontRef idx="minor">
+            <a:schemeClr val="tx1"/>
+          </a:fontRef>
+        </p:style>
+      </p:cxnSp>
+      <p:cxnSp>
+        <p:nvCxnSpPr>
+          <p:cNvPr id="36" name="Connector 35"/>
+          <p:cNvCxnSpPr/>
+          <p:nvPr/>
+        </p:nvCxnSpPr>
+        <p:spPr>
+          <a:xfrm flipV="1">
+            <a:off x="896112" y="1805940"/>
+            <a:ext cx="2304288" cy="1531620"/>
+          </a:xfrm>
+          <a:prstGeom prst="line">
+            <a:avLst/>
+          </a:prstGeom>
+          <a:ln w="12700">
+            <a:solidFill>
+              <a:srgbClr val="B0B0B0"/>
+            </a:solidFill>
+          </a:ln>
+        </p:spPr>
+        <p:style>
+          <a:lnRef idx="2">
+            <a:schemeClr val="accent1"/>
+          </a:lnRef>
+          <a:fillRef idx="0">
+            <a:schemeClr val="accent1"/>
+          </a:fillRef>
+          <a:effectRef idx="1">
+            <a:schemeClr val="accent1"/>
+          </a:effectRef>
+          <a:fontRef idx="minor">
+            <a:schemeClr val="tx1"/>
+          </a:fontRef>
+        </p:style>
+      </p:cxnSp>
+      <p:cxnSp>
+        <p:nvCxnSpPr>
+          <p:cNvPr id="37" name="Connector 36"/>
+          <p:cNvCxnSpPr/>
+          <p:nvPr/>
+        </p:nvCxnSpPr>
+        <p:spPr>
+          <a:xfrm flipV="1">
+            <a:off x="896112" y="2857500"/>
+            <a:ext cx="6419088" cy="480060"/>
+          </a:xfrm>
+          <a:prstGeom prst="line">
+            <a:avLst/>
+          </a:prstGeom>
+          <a:ln w="12700">
+            <a:solidFill>
+              <a:srgbClr val="B0B0B0"/>
+            </a:solidFill>
+          </a:ln>
+        </p:spPr>
+        <p:style>
+          <a:lnRef idx="2">
+            <a:schemeClr val="accent1"/>
+          </a:lnRef>
+          <a:fillRef idx="0">
+            <a:schemeClr val="accent1"/>
+          </a:fillRef>
+          <a:effectRef idx="1">
+            <a:schemeClr val="accent1"/>
+          </a:effectRef>
+          <a:fontRef idx="minor">
+            <a:schemeClr val="tx1"/>
+          </a:fontRef>
+        </p:style>
+      </p:cxnSp>
+      <p:cxnSp>
+        <p:nvCxnSpPr>
+          <p:cNvPr id="38" name="Connector 37"/>
+          <p:cNvCxnSpPr/>
+          <p:nvPr/>
+        </p:nvCxnSpPr>
+        <p:spPr>
+          <a:xfrm>
+            <a:off x="896112" y="3337560"/>
+            <a:ext cx="2304288" cy="571500"/>
+          </a:xfrm>
+          <a:prstGeom prst="line">
+            <a:avLst/>
+          </a:prstGeom>
+          <a:ln w="12700">
+            <a:solidFill>
+              <a:srgbClr val="B0B0B0"/>
+            </a:solidFill>
+          </a:ln>
+        </p:spPr>
+        <p:style>
+          <a:lnRef idx="2">
+            <a:schemeClr val="accent1"/>
+          </a:lnRef>
+          <a:fillRef idx="0">
+            <a:schemeClr val="accent1"/>
+          </a:fillRef>
+          <a:effectRef idx="1">
+            <a:schemeClr val="accent1"/>
+          </a:effectRef>
+          <a:fontRef idx="minor">
+            <a:schemeClr val="tx1"/>
+          </a:fontRef>
+        </p:style>
+      </p:cxnSp>
+      <p:cxnSp>
+        <p:nvCxnSpPr>
+          <p:cNvPr id="39" name="Connector 38"/>
+          <p:cNvCxnSpPr/>
+          <p:nvPr/>
+        </p:nvCxnSpPr>
+        <p:spPr>
+          <a:xfrm>
+            <a:off x="896112" y="3337560"/>
+            <a:ext cx="6419088" cy="571500"/>
+          </a:xfrm>
+          <a:prstGeom prst="line">
+            <a:avLst/>
+          </a:prstGeom>
+          <a:ln w="12700">
+            <a:solidFill>
+              <a:srgbClr val="B0B0B0"/>
+            </a:solidFill>
+          </a:ln>
+        </p:spPr>
+        <p:style>
+          <a:lnRef idx="2">
+            <a:schemeClr val="accent1"/>
+          </a:lnRef>
+          <a:fillRef idx="0">
+            <a:schemeClr val="accent1"/>
+          </a:fillRef>
+          <a:effectRef idx="1">
+            <a:schemeClr val="accent1"/>
+          </a:effectRef>
+          <a:fontRef idx="minor">
+            <a:schemeClr val="tx1"/>
+          </a:fontRef>
+        </p:style>
+      </p:cxnSp>
+      <p:cxnSp>
+        <p:nvCxnSpPr>
+          <p:cNvPr id="40" name="Connector 39"/>
+          <p:cNvCxnSpPr/>
+          <p:nvPr/>
+        </p:nvCxnSpPr>
+        <p:spPr>
+          <a:xfrm flipV="1">
+            <a:off x="896112" y="1805940"/>
+            <a:ext cx="2304288" cy="2857500"/>
+          </a:xfrm>
+          <a:prstGeom prst="line">
+            <a:avLst/>
+          </a:prstGeom>
+          <a:ln w="12700">
+            <a:solidFill>
+              <a:srgbClr val="B0B0B0"/>
+            </a:solidFill>
+          </a:ln>
+        </p:spPr>
+        <p:style>
+          <a:lnRef idx="2">
+            <a:schemeClr val="accent1"/>
+          </a:lnRef>
+          <a:fillRef idx="0">
+            <a:schemeClr val="accent1"/>
+          </a:fillRef>
+          <a:effectRef idx="1">
+            <a:schemeClr val="accent1"/>
+          </a:effectRef>
+          <a:fontRef idx="minor">
+            <a:schemeClr val="tx1"/>
+          </a:fontRef>
+        </p:style>
+      </p:cxnSp>
+      <p:cxnSp>
+        <p:nvCxnSpPr>
+          <p:cNvPr id="41" name="Connector 40"/>
+          <p:cNvCxnSpPr/>
+          <p:nvPr/>
+        </p:nvCxnSpPr>
+        <p:spPr>
+          <a:xfrm flipV="1">
+            <a:off x="896112" y="2857500"/>
+            <a:ext cx="6419088" cy="1805940"/>
+          </a:xfrm>
+          <a:prstGeom prst="line">
+            <a:avLst/>
+          </a:prstGeom>
+          <a:ln w="12700">
+            <a:solidFill>
+              <a:srgbClr val="B0B0B0"/>
+            </a:solidFill>
+          </a:ln>
+        </p:spPr>
+        <p:style>
+          <a:lnRef idx="2">
+            <a:schemeClr val="accent1"/>
+          </a:lnRef>
+          <a:fillRef idx="0">
+            <a:schemeClr val="accent1"/>
+          </a:fillRef>
+          <a:effectRef idx="1">
+            <a:schemeClr val="accent1"/>
+          </a:effectRef>
+          <a:fontRef idx="minor">
+            <a:schemeClr val="tx1"/>
+          </a:fontRef>
+        </p:style>
+      </p:cxnSp>
+      <p:cxnSp>
+        <p:nvCxnSpPr>
+          <p:cNvPr id="42" name="Connector 41"/>
+          <p:cNvCxnSpPr/>
+          <p:nvPr/>
+        </p:nvCxnSpPr>
+        <p:spPr>
+          <a:xfrm flipV="1">
+            <a:off x="896112" y="3909060"/>
+            <a:ext cx="2304288" cy="754380"/>
+          </a:xfrm>
+          <a:prstGeom prst="line">
+            <a:avLst/>
+          </a:prstGeom>
+          <a:ln w="12700">
+            <a:solidFill>
+              <a:srgbClr val="B0B0B0"/>
+            </a:solidFill>
+          </a:ln>
+        </p:spPr>
+        <p:style>
+          <a:lnRef idx="2">
+            <a:schemeClr val="accent1"/>
+          </a:lnRef>
+          <a:fillRef idx="0">
+            <a:schemeClr val="accent1"/>
+          </a:fillRef>
+          <a:effectRef idx="1">
+            <a:schemeClr val="accent1"/>
+          </a:effectRef>
+          <a:fontRef idx="minor">
+            <a:schemeClr val="tx1"/>
+          </a:fontRef>
+        </p:style>
+      </p:cxnSp>
+      <p:cxnSp>
+        <p:nvCxnSpPr>
+          <p:cNvPr id="43" name="Connector 42"/>
+          <p:cNvCxnSpPr/>
+          <p:nvPr/>
+        </p:nvCxnSpPr>
+        <p:spPr>
+          <a:xfrm flipV="1">
+            <a:off x="896112" y="3909060"/>
+            <a:ext cx="6419088" cy="754380"/>
+          </a:xfrm>
+          <a:prstGeom prst="line">
+            <a:avLst/>
+          </a:prstGeom>
+          <a:ln w="12700">
+            <a:solidFill>
+              <a:srgbClr val="B0B0B0"/>
+            </a:solidFill>
+          </a:ln>
+        </p:spPr>
+        <p:style>
+          <a:lnRef idx="2">
+            <a:schemeClr val="accent1"/>
+          </a:lnRef>
+          <a:fillRef idx="0">
+            <a:schemeClr val="accent1"/>
+          </a:fillRef>
+          <a:effectRef idx="1">
+            <a:schemeClr val="accent1"/>
+          </a:effectRef>
+          <a:fontRef idx="minor">
+            <a:schemeClr val="tx1"/>
+          </a:fontRef>
+        </p:style>
+      </p:cxnSp>
+      <p:sp>
+        <p:nvSpPr>
+          <p:cNvPr id="44" name="TextBox 43"/>
+          <p:cNvSpPr txBox="1"/>
+          <p:nvPr/>
+        </p:nvSpPr>
+        <p:spPr>
+          <a:xfrm>
+            <a:off x="731520" y="5760720"/>
+            <a:ext cx="10332720" cy="365760"/>
+          </a:xfrm>
+          <a:prstGeom prst="rect">
+            <a:avLst/>
+          </a:prstGeom>
+          <a:noFill/>
+        </p:spPr>
+        <p:txBody>
+          <a:bodyPr wrap="square" anchor="t">
+            <a:spAutoFit/>
+          </a:bodyPr>
+          <a:lstStyle/>
+          <a:p>
+            <a:pPr algn="l"/>
+            <a:r>
+              <a:rPr sz="1250" b="0" i="1">
+                <a:solidFill>
+                  <a:srgbClr val="404040"/>
+                </a:solidFill>
+                <a:latin typeface="Times New Roman"/>
+              </a:rPr>
+              <a:t>22 cas d'utilisation détaillés : voir docs/cas_utilisation.md (diagramme Mermaid + tableau de synthèse)</a:t>
+            </a:r>
+          </a:p>
+        </p:txBody>
+      </p:sp>
+    </p:spTree>
+  </p:cSld>
+  <p:clrMapOvr>
+    <a:masterClrMapping/>
+  </p:clrMapOvr>
+</p:sld>
+</file>
+
+<file path=ppt/slides/slide7.xml><?xml version="1.0" encoding="utf-8"?>
+<p:sld xmlns:a="http://schemas.openxmlformats.org/drawingml/2006/main" xmlns:p="http://schemas.openxmlformats.org/presentationml/2006/main" xmlns:r="http://schemas.openxmlformats.org/officeDocument/2006/relationships">
+  <p:cSld>
+    <p:bg>
+      <p:bgPr>
+        <a:solidFill>
+          <a:srgbClr val="FFFFFF"/>
+        </a:solidFill>
+        <a:effectLst/>
+      </p:bgPr>
+    </p:bg>
+    <p:spTree>
+      <p:nvGrpSpPr>
+        <p:cNvPr id="1" name=""/>
+        <p:cNvGrpSpPr/>
+        <p:nvPr/>
+      </p:nvGrpSpPr>
+      <p:grpSpPr/>
+      <p:sp>
+        <p:nvSpPr>
+          <p:cNvPr id="2" name="TextBox 1"/>
+          <p:cNvSpPr txBox="1"/>
+          <p:nvPr/>
+        </p:nvSpPr>
+        <p:spPr>
+          <a:xfrm>
+            <a:off x="731520" y="365760"/>
+            <a:ext cx="10515600" cy="320040"/>
+          </a:xfrm>
+          <a:prstGeom prst="rect">
+            <a:avLst/>
+          </a:prstGeom>
+          <a:noFill/>
+        </p:spPr>
+        <p:txBody>
+          <a:bodyPr wrap="square" anchor="t">
+            <a:spAutoFit/>
+          </a:bodyPr>
+          <a:lstStyle/>
+          <a:p>
+            <a:pPr algn="l"/>
+            <a:r>
+              <a:rPr sz="1300" b="1" i="0">
+                <a:solidFill>
+                  <a:srgbClr val="1F3C63"/>
+                </a:solidFill>
+                <a:latin typeface="Times New Roman"/>
+              </a:rPr>
+              <a:t>CHOIX TECHNOLOGIQUES</a:t>
+            </a:r>
+          </a:p>
+        </p:txBody>
+      </p:sp>
+      <p:sp>
+        <p:nvSpPr>
+          <p:cNvPr id="3" name="TextBox 2"/>
+          <p:cNvSpPr txBox="1"/>
+          <p:nvPr/>
+        </p:nvSpPr>
+        <p:spPr>
+          <a:xfrm>
+            <a:off x="731520" y="658368"/>
+            <a:ext cx="10698480" cy="731520"/>
+          </a:xfrm>
+          <a:prstGeom prst="rect">
+            <a:avLst/>
+          </a:prstGeom>
+          <a:noFill/>
+        </p:spPr>
+        <p:txBody>
+          <a:bodyPr wrap="square" anchor="t">
+            <a:spAutoFit/>
+          </a:bodyPr>
+          <a:lstStyle/>
+          <a:p>
+            <a:pPr algn="l"/>
+            <a:r>
+              <a:rPr sz="2800" b="1" i="0">
+                <a:solidFill>
+                  <a:srgbClr val="000000"/>
+                </a:solidFill>
+                <a:latin typeface="Times New Roman"/>
+              </a:rPr>
+              <a:t>Stack technique</a:t>
+            </a:r>
+          </a:p>
+        </p:txBody>
+      </p:sp>
+      <p:sp>
+        <p:nvSpPr>
+          <p:cNvPr id="4" name="Rectangle 3"/>
+          <p:cNvSpPr/>
+          <p:nvPr/>
+        </p:nvSpPr>
+        <p:spPr>
+          <a:xfrm>
+            <a:off x="731520" y="1344168"/>
+            <a:ext cx="10698480" cy="15875"/>
+          </a:xfrm>
+          <a:prstGeom prst="rect">
+            <a:avLst/>
+          </a:prstGeom>
+          <a:solidFill>
+            <a:srgbClr val="1F3C63"/>
+          </a:solidFill>
+          <a:ln>
+            <a:noFill/>
+          </a:ln>
+          <a:effectLst/>
+        </p:spPr>
+        <p:style>
+          <a:lnRef idx="1">
+            <a:schemeClr val="accent1"/>
+          </a:lnRef>
+          <a:fillRef idx="3">
+            <a:schemeClr val="accent1"/>
+          </a:fillRef>
+          <a:effectRef idx="2">
+            <a:schemeClr val="accent1"/>
+          </a:effectRef>
+          <a:fontRef idx="minor">
+            <a:schemeClr val="lt1"/>
+          </a:fontRef>
+        </p:style>
+        <p:txBody>
+          <a:bodyPr rtlCol="0" anchor="ctr"/>
+          <a:lstStyle/>
+          <a:p>
+            <a:pPr algn="ctr"/>
+          </a:p>
+        </p:txBody>
+      </p:sp>
+      <p:sp>
+        <p:nvSpPr>
+          <p:cNvPr id="5" name="TextBox 4"/>
+          <p:cNvSpPr txBox="1"/>
+          <p:nvPr/>
+        </p:nvSpPr>
+        <p:spPr>
+          <a:xfrm>
+            <a:off x="11185855" y="6400800"/>
+            <a:ext cx="640080" cy="320040"/>
+          </a:xfrm>
+          <a:prstGeom prst="rect">
+            <a:avLst/>
+          </a:prstGeom>
+          <a:noFill/>
+        </p:spPr>
+        <p:txBody>
+          <a:bodyPr wrap="square" anchor="t">
+            <a:spAutoFit/>
+          </a:bodyPr>
+          <a:lstStyle/>
+          <a:p>
+            <a:pPr algn="r"/>
+            <a:r>
+              <a:rPr sz="1100" b="0" i="0">
+                <a:solidFill>
+                  <a:srgbClr val="404040"/>
+                </a:solidFill>
+                <a:latin typeface="Times New Roman"/>
+              </a:rPr>
+              <a:t>6</a:t>
             </a:r>
           </a:p>
         </p:txBody>
@@ -9044,7 +10034,7 @@
 </p:sld>
 </file>
 
-<file path=ppt/slides/slide7.xml><?xml version="1.0" encoding="utf-8"?>
+<file path=ppt/slides/slide8.xml><?xml version="1.0" encoding="utf-8"?>
 <p:sld xmlns:a="http://schemas.openxmlformats.org/drawingml/2006/main" xmlns:p="http://schemas.openxmlformats.org/presentationml/2006/main" xmlns:r="http://schemas.openxmlformats.org/officeDocument/2006/relationships">
   <p:cSld>
     <p:bg>
@@ -9206,7 +10196,7 @@
                 </a:solidFill>
                 <a:latin typeface="Times New Roman"/>
               </a:rPr>
-              <a:t>6</a:t>
+              <a:t>7</a:t>
             </a:r>
           </a:p>
         </p:txBody>
@@ -9689,303 +10679,6 @@
 </p:sld>
 </file>
 
-<file path=ppt/slides/slide8.xml><?xml version="1.0" encoding="utf-8"?>
-<p:sld xmlns:a="http://schemas.openxmlformats.org/drawingml/2006/main" xmlns:p="http://schemas.openxmlformats.org/presentationml/2006/main" xmlns:r="http://schemas.openxmlformats.org/officeDocument/2006/relationships">
-  <p:cSld>
-    <p:bg>
-      <p:bgPr>
-        <a:solidFill>
-          <a:srgbClr val="FFFFFF"/>
-        </a:solidFill>
-        <a:effectLst/>
-      </p:bgPr>
-    </p:bg>
-    <p:spTree>
-      <p:nvGrpSpPr>
-        <p:cNvPr id="1" name=""/>
-        <p:cNvGrpSpPr/>
-        <p:nvPr/>
-      </p:nvGrpSpPr>
-      <p:grpSpPr/>
-      <p:sp>
-        <p:nvSpPr>
-          <p:cNvPr id="2" name="TextBox 1"/>
-          <p:cNvSpPr txBox="1"/>
-          <p:nvPr/>
-        </p:nvSpPr>
-        <p:spPr>
-          <a:xfrm>
-            <a:off x="731520" y="365760"/>
-            <a:ext cx="10515600" cy="320040"/>
-          </a:xfrm>
-          <a:prstGeom prst="rect">
-            <a:avLst/>
-          </a:prstGeom>
-          <a:noFill/>
-        </p:spPr>
-        <p:txBody>
-          <a:bodyPr wrap="square" anchor="t">
-            <a:spAutoFit/>
-          </a:bodyPr>
-          <a:lstStyle/>
-          <a:p>
-            <a:pPr algn="l"/>
-            <a:r>
-              <a:rPr sz="1300" b="1" i="0">
-                <a:solidFill>
-                  <a:srgbClr val="1F3C63"/>
-                </a:solidFill>
-                <a:latin typeface="Times New Roman"/>
-              </a:rPr>
-              <a:t>BASE DE DONNÉES</a:t>
-            </a:r>
-          </a:p>
-        </p:txBody>
-      </p:sp>
-      <p:sp>
-        <p:nvSpPr>
-          <p:cNvPr id="3" name="TextBox 2"/>
-          <p:cNvSpPr txBox="1"/>
-          <p:nvPr/>
-        </p:nvSpPr>
-        <p:spPr>
-          <a:xfrm>
-            <a:off x="731520" y="658368"/>
-            <a:ext cx="10698480" cy="731520"/>
-          </a:xfrm>
-          <a:prstGeom prst="rect">
-            <a:avLst/>
-          </a:prstGeom>
-          <a:noFill/>
-        </p:spPr>
-        <p:txBody>
-          <a:bodyPr wrap="square" anchor="t">
-            <a:spAutoFit/>
-          </a:bodyPr>
-          <a:lstStyle/>
-          <a:p>
-            <a:pPr algn="l"/>
-            <a:r>
-              <a:rPr sz="2800" b="1" i="0">
-                <a:solidFill>
-                  <a:srgbClr val="000000"/>
-                </a:solidFill>
-                <a:latin typeface="Times New Roman"/>
-              </a:rPr>
-              <a:t>Références plutôt que documents imbriqués</a:t>
-            </a:r>
-          </a:p>
-        </p:txBody>
-      </p:sp>
-      <p:sp>
-        <p:nvSpPr>
-          <p:cNvPr id="4" name="Rectangle 3"/>
-          <p:cNvSpPr/>
-          <p:nvPr/>
-        </p:nvSpPr>
-        <p:spPr>
-          <a:xfrm>
-            <a:off x="731520" y="1344168"/>
-            <a:ext cx="10698480" cy="15875"/>
-          </a:xfrm>
-          <a:prstGeom prst="rect">
-            <a:avLst/>
-          </a:prstGeom>
-          <a:solidFill>
-            <a:srgbClr val="1F3C63"/>
-          </a:solidFill>
-          <a:ln>
-            <a:noFill/>
-          </a:ln>
-          <a:effectLst/>
-        </p:spPr>
-        <p:style>
-          <a:lnRef idx="1">
-            <a:schemeClr val="accent1"/>
-          </a:lnRef>
-          <a:fillRef idx="3">
-            <a:schemeClr val="accent1"/>
-          </a:fillRef>
-          <a:effectRef idx="2">
-            <a:schemeClr val="accent1"/>
-          </a:effectRef>
-          <a:fontRef idx="minor">
-            <a:schemeClr val="lt1"/>
-          </a:fontRef>
-        </p:style>
-        <p:txBody>
-          <a:bodyPr rtlCol="0" anchor="ctr"/>
-          <a:lstStyle/>
-          <a:p>
-            <a:pPr algn="ctr"/>
-          </a:p>
-        </p:txBody>
-      </p:sp>
-      <p:sp>
-        <p:nvSpPr>
-          <p:cNvPr id="5" name="TextBox 4"/>
-          <p:cNvSpPr txBox="1"/>
-          <p:nvPr/>
-        </p:nvSpPr>
-        <p:spPr>
-          <a:xfrm>
-            <a:off x="11185855" y="6400800"/>
-            <a:ext cx="640080" cy="320040"/>
-          </a:xfrm>
-          <a:prstGeom prst="rect">
-            <a:avLst/>
-          </a:prstGeom>
-          <a:noFill/>
-        </p:spPr>
-        <p:txBody>
-          <a:bodyPr wrap="square" anchor="t">
-            <a:spAutoFit/>
-          </a:bodyPr>
-          <a:lstStyle/>
-          <a:p>
-            <a:pPr algn="r"/>
-            <a:r>
-              <a:rPr sz="1100" b="0" i="0">
-                <a:solidFill>
-                  <a:srgbClr val="404040"/>
-                </a:solidFill>
-                <a:latin typeface="Times New Roman"/>
-              </a:rPr>
-              <a:t>7</a:t>
-            </a:r>
-          </a:p>
-        </p:txBody>
-      </p:sp>
-      <p:sp>
-        <p:nvSpPr>
-          <p:cNvPr id="6" name="TextBox 5"/>
-          <p:cNvSpPr txBox="1"/>
-          <p:nvPr/>
-        </p:nvSpPr>
-        <p:spPr>
-          <a:xfrm>
-            <a:off x="731520" y="1691640"/>
-            <a:ext cx="10332720" cy="3291840"/>
-          </a:xfrm>
-          <a:prstGeom prst="rect">
-            <a:avLst/>
-          </a:prstGeom>
-          <a:noFill/>
-        </p:spPr>
-        <p:txBody>
-          <a:bodyPr wrap="square">
-            <a:spAutoFit/>
-          </a:bodyPr>
-          <a:lstStyle/>
-          <a:p>
-            <a:pPr>
-              <a:spcAft>
-                <a:spcPts val="1400"/>
-              </a:spcAft>
-            </a:pPr>
-            <a:r>
-              <a:rPr sz="1650">
-                <a:solidFill>
-                  <a:srgbClr val="000000"/>
-                </a:solidFill>
-                <a:latin typeface="Times New Roman"/>
-              </a:rPr>
-              <a:t>•  Relation many-to-many : un étudiant suit plusieurs formations, une formation a plusieurs étudiants</a:t>
-            </a:r>
-          </a:p>
-          <a:p>
-            <a:pPr>
-              <a:spcAft>
-                <a:spcPts val="1400"/>
-              </a:spcAft>
-            </a:pPr>
-            <a:r>
-              <a:rPr sz="1650">
-                <a:solidFill>
-                  <a:srgbClr val="000000"/>
-                </a:solidFill>
-                <a:latin typeface="Times New Roman"/>
-              </a:rPr>
-              <a:t>•  Écritures fréquentes et indépendantes : inscription, annulation, notation</a:t>
-            </a:r>
-          </a:p>
-          <a:p>
-            <a:pPr>
-              <a:spcAft>
-                <a:spcPts val="1400"/>
-              </a:spcAft>
-            </a:pPr>
-            <a:r>
-              <a:rPr sz="1650">
-                <a:solidFill>
-                  <a:srgbClr val="000000"/>
-                </a:solidFill>
-                <a:latin typeface="Times New Roman"/>
-              </a:rPr>
-              <a:t>•  Requêtes transversales pour les statistiques (top formations, top étudiants) sur toute la collection</a:t>
-            </a:r>
-          </a:p>
-          <a:p>
-            <a:pPr>
-              <a:spcAft>
-                <a:spcPts val="1400"/>
-              </a:spcAft>
-            </a:pPr>
-            <a:r>
-              <a:rPr sz="1650">
-                <a:solidFill>
-                  <a:srgbClr val="000000"/>
-                </a:solidFill>
-                <a:latin typeface="Times New Roman"/>
-              </a:rPr>
-              <a:t>•  Unicité et capacité maximale garanties par des index dédiés sur une collection séparée</a:t>
-            </a:r>
-          </a:p>
-        </p:txBody>
-      </p:sp>
-      <p:sp>
-        <p:nvSpPr>
-          <p:cNvPr id="7" name="TextBox 6"/>
-          <p:cNvSpPr txBox="1"/>
-          <p:nvPr/>
-        </p:nvSpPr>
-        <p:spPr>
-          <a:xfrm>
-            <a:off x="731520" y="4846320"/>
-            <a:ext cx="10332720" cy="1280160"/>
-          </a:xfrm>
-          <a:prstGeom prst="rect">
-            <a:avLst/>
-          </a:prstGeom>
-          <a:noFill/>
-        </p:spPr>
-        <p:txBody>
-          <a:bodyPr wrap="square" anchor="t">
-            <a:spAutoFit/>
-          </a:bodyPr>
-          <a:lstStyle/>
-          <a:p>
-            <a:pPr algn="l"/>
-            <a:r>
-              <a:rPr sz="1450" b="0" i="1">
-                <a:solidFill>
-                  <a:srgbClr val="404040"/>
-                </a:solidFill>
-                <a:latin typeface="Times New Roman"/>
-              </a:rPr>
-              <a:t>Nuance : les vues composites (formation + formateur, inscription + étudiant) sont reconstituées à la lecture via des pipelines $lookup / $unwind, sans dupliquer les données en base.</a:t>
-            </a:r>
-          </a:p>
-        </p:txBody>
-      </p:sp>
-    </p:spTree>
-  </p:cSld>
-  <p:clrMapOvr>
-    <a:masterClrMapping/>
-  </p:clrMapOvr>
-</p:sld>
-</file>
-
 <file path=ppt/slides/slide9.xml><?xml version="1.0" encoding="utf-8"?>
 <p:sld xmlns:a="http://schemas.openxmlformats.org/drawingml/2006/main" xmlns:p="http://schemas.openxmlformats.org/presentationml/2006/main" xmlns:r="http://schemas.openxmlformats.org/officeDocument/2006/relationships">
   <p:cSld>
@@ -10069,7 +10762,7 @@
                 </a:solidFill>
                 <a:latin typeface="Times New Roman"/>
               </a:rPr>
-              <a:t>Fonctions et méthodes principales (couche modèle)</a:t>
+              <a:t>Références plutôt que documents imbriqués</a:t>
             </a:r>
           </a:p>
         </p:txBody>
@@ -10161,8 +10854,95 @@
         </p:nvSpPr>
         <p:spPr>
           <a:xfrm>
-            <a:off x="731520" y="1554480"/>
-            <a:ext cx="10332720" cy="365760"/>
+            <a:off x="731520" y="1691640"/>
+            <a:ext cx="10332720" cy="3291840"/>
+          </a:xfrm>
+          <a:prstGeom prst="rect">
+            <a:avLst/>
+          </a:prstGeom>
+          <a:noFill/>
+        </p:spPr>
+        <p:txBody>
+          <a:bodyPr wrap="square">
+            <a:spAutoFit/>
+          </a:bodyPr>
+          <a:lstStyle/>
+          <a:p>
+            <a:pPr>
+              <a:spcAft>
+                <a:spcPts val="1400"/>
+              </a:spcAft>
+            </a:pPr>
+            <a:r>
+              <a:rPr sz="1650">
+                <a:solidFill>
+                  <a:srgbClr val="000000"/>
+                </a:solidFill>
+                <a:latin typeface="Times New Roman"/>
+              </a:rPr>
+              <a:t>•  Relation many-to-many : un étudiant suit plusieurs formations, une formation a plusieurs étudiants</a:t>
+            </a:r>
+          </a:p>
+          <a:p>
+            <a:pPr>
+              <a:spcAft>
+                <a:spcPts val="1400"/>
+              </a:spcAft>
+            </a:pPr>
+            <a:r>
+              <a:rPr sz="1650">
+                <a:solidFill>
+                  <a:srgbClr val="000000"/>
+                </a:solidFill>
+                <a:latin typeface="Times New Roman"/>
+              </a:rPr>
+              <a:t>•  Écritures fréquentes et indépendantes : inscription, annulation, notation</a:t>
+            </a:r>
+          </a:p>
+          <a:p>
+            <a:pPr>
+              <a:spcAft>
+                <a:spcPts val="1400"/>
+              </a:spcAft>
+            </a:pPr>
+            <a:r>
+              <a:rPr sz="1650">
+                <a:solidFill>
+                  <a:srgbClr val="000000"/>
+                </a:solidFill>
+                <a:latin typeface="Times New Roman"/>
+              </a:rPr>
+              <a:t>•  Requêtes transversales pour les statistiques (top formations, top étudiants) sur toute la collection</a:t>
+            </a:r>
+          </a:p>
+          <a:p>
+            <a:pPr>
+              <a:spcAft>
+                <a:spcPts val="1400"/>
+              </a:spcAft>
+            </a:pPr>
+            <a:r>
+              <a:rPr sz="1650">
+                <a:solidFill>
+                  <a:srgbClr val="000000"/>
+                </a:solidFill>
+                <a:latin typeface="Times New Roman"/>
+              </a:rPr>
+              <a:t>•  Unicité et capacité maximale garanties par des index dédiés sur une collection séparée</a:t>
+            </a:r>
+          </a:p>
+        </p:txBody>
+      </p:sp>
+      <p:sp>
+        <p:nvSpPr>
+          <p:cNvPr id="7" name="TextBox 6"/>
+          <p:cNvSpPr txBox="1"/>
+          <p:nvPr/>
+        </p:nvSpPr>
+        <p:spPr>
+          <a:xfrm>
+            <a:off x="731520" y="4846320"/>
+            <a:ext cx="10332720" cy="1280160"/>
           </a:xfrm>
           <a:prstGeom prst="rect">
             <a:avLst/>
@@ -10177,347 +10957,13 @@
           <a:p>
             <a:pPr algn="l"/>
             <a:r>
-              <a:rPr sz="1500" b="0" i="0">
+              <a:rPr sz="1450" b="0" i="1">
                 <a:solidFill>
                   <a:srgbClr val="404040"/>
                 </a:solidFill>
                 <a:latin typeface="Times New Roman"/>
               </a:rPr>
-              <a:t>Une classe par collection dans app/models/, avec son propre CRUD</a:t>
-            </a:r>
-          </a:p>
-        </p:txBody>
-      </p:sp>
-      <p:graphicFrame>
-        <p:nvGraphicFramePr>
-          <p:cNvPr id="7" name="Table 6"/>
-          <p:cNvGraphicFramePr>
-            <a:graphicFrameLocks noGrp="1"/>
-          </p:cNvGraphicFramePr>
-          <p:nvPr/>
-        </p:nvGraphicFramePr>
-        <p:xfrm>
-          <a:off x="731520" y="2057400"/>
-          <a:ext cx="10332720" cy="3108960"/>
-        </p:xfrm>
-        <a:graphic>
-          <a:graphicData uri="http://schemas.openxmlformats.org/drawingml/2006/table">
-            <a:tbl>
-              <a:tblPr firstRow="1" bandRow="1">
-                <a:tableStyleId>{5C22544A-7EE6-4342-B048-85BDC9FD1C3A}</a:tableStyleId>
-              </a:tblPr>
-              <a:tblGrid>
-                <a:gridCol w="2103120"/>
-                <a:gridCol w="4114800"/>
-                <a:gridCol w="4114800"/>
-              </a:tblGrid>
-              <a:tr h="777240">
-                <a:tc>
-                  <a:txBody>
-                    <a:bodyPr wrap="square"/>
-                    <a:lstStyle/>
-                    <a:p>
-                      <a:r>
-                        <a:rPr sz="1550" b="1">
-                          <a:solidFill>
-                            <a:srgbClr val="FFFFFF"/>
-                          </a:solidFill>
-                          <a:latin typeface="Times New Roman"/>
-                        </a:rPr>
-                        <a:t>Classe</a:t>
-                      </a:r>
-                    </a:p>
-                  </a:txBody>
-                  <a:tcPr marL="101600" marR="101600" marT="50800" marB="50800" anchor="ctr">
-                    <a:solidFill>
-                      <a:srgbClr val="1F3C63"/>
-                    </a:solidFill>
-                  </a:tcPr>
-                </a:tc>
-                <a:tc>
-                  <a:txBody>
-                    <a:bodyPr wrap="square"/>
-                    <a:lstStyle/>
-                    <a:p>
-                      <a:r>
-                        <a:rPr sz="1550" b="1">
-                          <a:solidFill>
-                            <a:srgbClr val="FFFFFF"/>
-                          </a:solidFill>
-                          <a:latin typeface="Times New Roman"/>
-                        </a:rPr>
-                        <a:t>Méthodes clés</a:t>
-                      </a:r>
-                    </a:p>
-                  </a:txBody>
-                  <a:tcPr marL="101600" marR="101600" marT="50800" marB="50800" anchor="ctr">
-                    <a:solidFill>
-                      <a:srgbClr val="1F3C63"/>
-                    </a:solidFill>
-                  </a:tcPr>
-                </a:tc>
-                <a:tc>
-                  <a:txBody>
-                    <a:bodyPr wrap="square"/>
-                    <a:lstStyle/>
-                    <a:p>
-                      <a:r>
-                        <a:rPr sz="1550" b="1">
-                          <a:solidFill>
-                            <a:srgbClr val="FFFFFF"/>
-                          </a:solidFill>
-                          <a:latin typeface="Times New Roman"/>
-                        </a:rPr>
-                        <a:t>Rôle</a:t>
-                      </a:r>
-                    </a:p>
-                  </a:txBody>
-                  <a:tcPr marL="101600" marR="101600" marT="50800" marB="50800" anchor="ctr">
-                    <a:solidFill>
-                      <a:srgbClr val="1F3C63"/>
-                    </a:solidFill>
-                  </a:tcPr>
-                </a:tc>
-              </a:tr>
-              <a:tr h="777240">
-                <a:tc>
-                  <a:txBody>
-                    <a:bodyPr wrap="square"/>
-                    <a:lstStyle/>
-                    <a:p>
-                      <a:r>
-                        <a:rPr sz="1450" b="0">
-                          <a:solidFill>
-                            <a:srgbClr val="000000"/>
-                          </a:solidFill>
-                          <a:latin typeface="Times New Roman"/>
-                        </a:rPr>
-                        <a:t>Student</a:t>
-                      </a:r>
-                    </a:p>
-                  </a:txBody>
-                  <a:tcPr marL="101600" marR="101600" marT="50800" marB="50800" anchor="ctr">
-                    <a:solidFill>
-                      <a:srgbClr val="FFFFFF"/>
-                    </a:solidFill>
-                  </a:tcPr>
-                </a:tc>
-                <a:tc>
-                  <a:txBody>
-                    <a:bodyPr wrap="square"/>
-                    <a:lstStyle/>
-                    <a:p>
-                      <a:r>
-                        <a:rPr sz="1450" b="0">
-                          <a:solidFill>
-                            <a:srgbClr val="000000"/>
-                          </a:solidFill>
-                          <a:latin typeface="Times New Roman"/>
-                        </a:rPr>
-                        <a:t>create, find_all, update, delete</a:t>
-                      </a:r>
-                    </a:p>
-                  </a:txBody>
-                  <a:tcPr marL="101600" marR="101600" marT="50800" marB="50800" anchor="ctr">
-                    <a:solidFill>
-                      <a:srgbClr val="FFFFFF"/>
-                    </a:solidFill>
-                  </a:tcPr>
-                </a:tc>
-                <a:tc>
-                  <a:txBody>
-                    <a:bodyPr wrap="square"/>
-                    <a:lstStyle/>
-                    <a:p>
-                      <a:r>
-                        <a:rPr sz="1450" b="0">
-                          <a:solidFill>
-                            <a:srgbClr val="000000"/>
-                          </a:solidFill>
-                          <a:latin typeface="Times New Roman"/>
-                        </a:rPr>
-                        <a:t>CRUD simple (email unique)</a:t>
-                      </a:r>
-                    </a:p>
-                  </a:txBody>
-                  <a:tcPr marL="101600" marR="101600" marT="50800" marB="50800" anchor="ctr">
-                    <a:solidFill>
-                      <a:srgbClr val="FFFFFF"/>
-                    </a:solidFill>
-                  </a:tcPr>
-                </a:tc>
-              </a:tr>
-              <a:tr h="777240">
-                <a:tc>
-                  <a:txBody>
-                    <a:bodyPr wrap="square"/>
-                    <a:lstStyle/>
-                    <a:p>
-                      <a:r>
-                        <a:rPr sz="1450" b="0">
-                          <a:solidFill>
-                            <a:srgbClr val="000000"/>
-                          </a:solidFill>
-                          <a:latin typeface="Times New Roman"/>
-                        </a:rPr>
-                        <a:t>Course</a:t>
-                      </a:r>
-                    </a:p>
-                  </a:txBody>
-                  <a:tcPr marL="101600" marR="101600" marT="50800" marB="50800" anchor="ctr">
-                    <a:solidFill>
-                      <a:srgbClr val="EAEAEA"/>
-                    </a:solidFill>
-                  </a:tcPr>
-                </a:tc>
-                <a:tc>
-                  <a:txBody>
-                    <a:bodyPr wrap="square"/>
-                    <a:lstStyle/>
-                    <a:p>
-                      <a:r>
-                        <a:rPr sz="1450" b="0">
-                          <a:solidFill>
-                            <a:srgbClr val="000000"/>
-                          </a:solidFill>
-                          <a:latin typeface="Times New Roman"/>
-                        </a:rPr>
-                        <a:t>create, find_all, prix_moyen</a:t>
-                      </a:r>
-                    </a:p>
-                  </a:txBody>
-                  <a:tcPr marL="101600" marR="101600" marT="50800" marB="50800" anchor="ctr">
-                    <a:solidFill>
-                      <a:srgbClr val="EAEAEA"/>
-                    </a:solidFill>
-                  </a:tcPr>
-                </a:tc>
-                <a:tc>
-                  <a:txBody>
-                    <a:bodyPr wrap="square"/>
-                    <a:lstStyle/>
-                    <a:p>
-                      <a:r>
-                        <a:rPr sz="1450" b="0">
-                          <a:solidFill>
-                            <a:srgbClr val="000000"/>
-                          </a:solidFill>
-                          <a:latin typeface="Times New Roman"/>
-                        </a:rPr>
-                        <a:t>CRUD + statistique</a:t>
-                      </a:r>
-                    </a:p>
-                  </a:txBody>
-                  <a:tcPr marL="101600" marR="101600" marT="50800" marB="50800" anchor="ctr">
-                    <a:solidFill>
-                      <a:srgbClr val="EAEAEA"/>
-                    </a:solidFill>
-                  </a:tcPr>
-                </a:tc>
-              </a:tr>
-              <a:tr h="777240">
-                <a:tc>
-                  <a:txBody>
-                    <a:bodyPr wrap="square"/>
-                    <a:lstStyle/>
-                    <a:p>
-                      <a:r>
-                        <a:rPr sz="1450" b="0">
-                          <a:solidFill>
-                            <a:srgbClr val="000000"/>
-                          </a:solidFill>
-                          <a:latin typeface="Times New Roman"/>
-                        </a:rPr>
-                        <a:t>Enrollment</a:t>
-                      </a:r>
-                    </a:p>
-                  </a:txBody>
-                  <a:tcPr marL="101600" marR="101600" marT="50800" marB="50800" anchor="ctr">
-                    <a:solidFill>
-                      <a:srgbClr val="FFFFFF"/>
-                    </a:solidFill>
-                  </a:tcPr>
-                </a:tc>
-                <a:tc>
-                  <a:txBody>
-                    <a:bodyPr wrap="square"/>
-                    <a:lstStyle/>
-                    <a:p>
-                      <a:r>
-                        <a:rPr sz="1450" b="0">
-                          <a:solidFill>
-                            <a:srgbClr val="000000"/>
-                          </a:solidFill>
-                          <a:latin typeface="Times New Roman"/>
-                        </a:rPr>
-                        <a:t>create, set_note, top_formations</a:t>
-                      </a:r>
-                    </a:p>
-                  </a:txBody>
-                  <a:tcPr marL="101600" marR="101600" marT="50800" marB="50800" anchor="ctr">
-                    <a:solidFill>
-                      <a:srgbClr val="FFFFFF"/>
-                    </a:solidFill>
-                  </a:tcPr>
-                </a:tc>
-                <a:tc>
-                  <a:txBody>
-                    <a:bodyPr wrap="square"/>
-                    <a:lstStyle/>
-                    <a:p>
-                      <a:r>
-                        <a:rPr sz="1450" b="0">
-                          <a:solidFill>
-                            <a:srgbClr val="000000"/>
-                          </a:solidFill>
-                          <a:latin typeface="Times New Roman"/>
-                        </a:rPr>
-                        <a:t>Règles de gestion + agrégations</a:t>
-                      </a:r>
-                    </a:p>
-                  </a:txBody>
-                  <a:tcPr marL="101600" marR="101600" marT="50800" marB="50800" anchor="ctr">
-                    <a:solidFill>
-                      <a:srgbClr val="FFFFFF"/>
-                    </a:solidFill>
-                  </a:tcPr>
-                </a:tc>
-              </a:tr>
-            </a:tbl>
-          </a:graphicData>
-        </a:graphic>
-      </p:graphicFrame>
-      <p:sp>
-        <p:nvSpPr>
-          <p:cNvPr id="8" name="TextBox 7"/>
-          <p:cNvSpPr txBox="1"/>
-          <p:nvPr/>
-        </p:nvSpPr>
-        <p:spPr>
-          <a:xfrm>
-            <a:off x="731520" y="5212080"/>
-            <a:ext cx="10332720" cy="548640"/>
-          </a:xfrm>
-          <a:prstGeom prst="rect">
-            <a:avLst/>
-          </a:prstGeom>
-          <a:noFill/>
-        </p:spPr>
-        <p:txBody>
-          <a:bodyPr wrap="square" anchor="t">
-            <a:spAutoFit/>
-          </a:bodyPr>
-          <a:lstStyle/>
-          <a:p>
-            <a:pPr algn="l"/>
-            <a:r>
-              <a:rPr sz="1350" b="0" i="1">
-                <a:solidFill>
-                  <a:srgbClr val="404040"/>
-                </a:solidFill>
-                <a:latin typeface="Times New Roman"/>
-              </a:rPr>
-              <a:t>Les règles de gestion (unicité, capacité, plage de note) sont centralisées ici, pas dans les routes : même appelée depuis un script, la règle s'applique.</a:t>
+              <a:t>Nuance : les vues composites (formation + formateur, inscription + étudiant) sont reconstituées à la lecture via des pipelines $lookup / $unwind, sans dupliquer les données en base.</a:t>
             </a:r>
           </a:p>
         </p:txBody>
